--- a/ゲーム科2年/00_前期/ゲーム開発Ⅰ/ゲーム物理学/座学/12_二次元、三次元の運動.pptx
+++ b/ゲーム科2年/00_前期/ゲーム開発Ⅰ/ゲーム物理学/座学/12_二次元、三次元の運動.pptx
@@ -25,6 +25,17 @@
     <p:sldId id="275" r:id="rId19"/>
     <p:sldId id="276" r:id="rId20"/>
     <p:sldId id="277" r:id="rId21"/>
+    <p:sldId id="278" r:id="rId22"/>
+    <p:sldId id="279" r:id="rId23"/>
+    <p:sldId id="280" r:id="rId24"/>
+    <p:sldId id="281" r:id="rId25"/>
+    <p:sldId id="282" r:id="rId26"/>
+    <p:sldId id="283" r:id="rId27"/>
+    <p:sldId id="284" r:id="rId28"/>
+    <p:sldId id="285" r:id="rId29"/>
+    <p:sldId id="286" r:id="rId30"/>
+    <p:sldId id="287" r:id="rId31"/>
+    <p:sldId id="288" r:id="rId32"/>
   </p:sldIdLst>
   <p:sldSz cx="12192000" cy="6858000"/>
   <p:notesSz cx="6858000" cy="9144000"/>
@@ -278,7 +289,7 @@
           <a:p>
             <a:fld id="{E9CC885B-4903-4D54-9A93-00025F12DED9}" type="datetimeFigureOut">
               <a:rPr kumimoji="1" lang="ja-JP" altLang="en-US" smtClean="0"/>
-              <a:t>2025/6/2</a:t>
+              <a:t>2025/7/29</a:t>
             </a:fld>
             <a:endParaRPr kumimoji="1" lang="ja-JP" altLang="en-US"/>
           </a:p>
@@ -508,7 +519,7 @@
           <a:p>
             <a:fld id="{E9CC885B-4903-4D54-9A93-00025F12DED9}" type="datetimeFigureOut">
               <a:rPr kumimoji="1" lang="ja-JP" altLang="en-US" smtClean="0"/>
-              <a:t>2025/6/2</a:t>
+              <a:t>2025/7/29</a:t>
             </a:fld>
             <a:endParaRPr kumimoji="1" lang="ja-JP" altLang="en-US"/>
           </a:p>
@@ -748,7 +759,7 @@
           <a:p>
             <a:fld id="{E9CC885B-4903-4D54-9A93-00025F12DED9}" type="datetimeFigureOut">
               <a:rPr kumimoji="1" lang="ja-JP" altLang="en-US" smtClean="0"/>
-              <a:t>2025/6/2</a:t>
+              <a:t>2025/7/29</a:t>
             </a:fld>
             <a:endParaRPr kumimoji="1" lang="ja-JP" altLang="en-US"/>
           </a:p>
@@ -978,7 +989,7 @@
           <a:p>
             <a:fld id="{E9CC885B-4903-4D54-9A93-00025F12DED9}" type="datetimeFigureOut">
               <a:rPr kumimoji="1" lang="ja-JP" altLang="en-US" smtClean="0"/>
-              <a:t>2025/6/2</a:t>
+              <a:t>2025/7/29</a:t>
             </a:fld>
             <a:endParaRPr kumimoji="1" lang="ja-JP" altLang="en-US"/>
           </a:p>
@@ -1253,7 +1264,7 @@
           <a:p>
             <a:fld id="{E9CC885B-4903-4D54-9A93-00025F12DED9}" type="datetimeFigureOut">
               <a:rPr kumimoji="1" lang="ja-JP" altLang="en-US" smtClean="0"/>
-              <a:t>2025/6/2</a:t>
+              <a:t>2025/7/29</a:t>
             </a:fld>
             <a:endParaRPr kumimoji="1" lang="ja-JP" altLang="en-US"/>
           </a:p>
@@ -1582,7 +1593,7 @@
           <a:p>
             <a:fld id="{E9CC885B-4903-4D54-9A93-00025F12DED9}" type="datetimeFigureOut">
               <a:rPr kumimoji="1" lang="ja-JP" altLang="en-US" smtClean="0"/>
-              <a:t>2025/6/2</a:t>
+              <a:t>2025/7/29</a:t>
             </a:fld>
             <a:endParaRPr kumimoji="1" lang="ja-JP" altLang="en-US"/>
           </a:p>
@@ -2058,7 +2069,7 @@
           <a:p>
             <a:fld id="{E9CC885B-4903-4D54-9A93-00025F12DED9}" type="datetimeFigureOut">
               <a:rPr kumimoji="1" lang="ja-JP" altLang="en-US" smtClean="0"/>
-              <a:t>2025/6/2</a:t>
+              <a:t>2025/7/29</a:t>
             </a:fld>
             <a:endParaRPr kumimoji="1" lang="ja-JP" altLang="en-US"/>
           </a:p>
@@ -2199,7 +2210,7 @@
           <a:p>
             <a:fld id="{E9CC885B-4903-4D54-9A93-00025F12DED9}" type="datetimeFigureOut">
               <a:rPr kumimoji="1" lang="ja-JP" altLang="en-US" smtClean="0"/>
-              <a:t>2025/6/2</a:t>
+              <a:t>2025/7/29</a:t>
             </a:fld>
             <a:endParaRPr kumimoji="1" lang="ja-JP" altLang="en-US"/>
           </a:p>
@@ -2312,7 +2323,7 @@
           <a:p>
             <a:fld id="{E9CC885B-4903-4D54-9A93-00025F12DED9}" type="datetimeFigureOut">
               <a:rPr kumimoji="1" lang="ja-JP" altLang="en-US" smtClean="0"/>
-              <a:t>2025/6/2</a:t>
+              <a:t>2025/7/29</a:t>
             </a:fld>
             <a:endParaRPr kumimoji="1" lang="ja-JP" altLang="en-US"/>
           </a:p>
@@ -2655,7 +2666,7 @@
           <a:p>
             <a:fld id="{E9CC885B-4903-4D54-9A93-00025F12DED9}" type="datetimeFigureOut">
               <a:rPr kumimoji="1" lang="ja-JP" altLang="en-US" smtClean="0"/>
-              <a:t>2025/6/2</a:t>
+              <a:t>2025/7/29</a:t>
             </a:fld>
             <a:endParaRPr kumimoji="1" lang="ja-JP" altLang="en-US"/>
           </a:p>
@@ -2943,7 +2954,7 @@
           <a:p>
             <a:fld id="{E9CC885B-4903-4D54-9A93-00025F12DED9}" type="datetimeFigureOut">
               <a:rPr kumimoji="1" lang="ja-JP" altLang="en-US" smtClean="0"/>
-              <a:t>2025/6/2</a:t>
+              <a:t>2025/7/29</a:t>
             </a:fld>
             <a:endParaRPr kumimoji="1" lang="ja-JP" altLang="en-US"/>
           </a:p>
@@ -3216,7 +3227,7 @@
           <a:p>
             <a:fld id="{E9CC885B-4903-4D54-9A93-00025F12DED9}" type="datetimeFigureOut">
               <a:rPr kumimoji="1" lang="ja-JP" altLang="en-US" smtClean="0"/>
-              <a:t>2025/6/2</a:t>
+              <a:t>2025/7/29</a:t>
             </a:fld>
             <a:endParaRPr kumimoji="1" lang="ja-JP" altLang="en-US"/>
           </a:p>
@@ -3803,7 +3814,7 @@
         <p:spPr>
           <a:xfrm>
             <a:off x="567542" y="491954"/>
-            <a:ext cx="5051383" cy="584775"/>
+            <a:ext cx="5461752" cy="584775"/>
           </a:xfrm>
           <a:prstGeom prst="rect">
             <a:avLst/>
@@ -3822,14 +3833,14 @@
             </a:r>
             <a:r>
               <a:rPr kumimoji="1" lang="ja-JP" altLang="en-US" sz="3200" b="1" u="sng" dirty="0"/>
-              <a:t>次元、３次元の運動 例題</a:t>
+              <a:t>次元、３次元の運動 例題１</a:t>
             </a:r>
             <a:endParaRPr kumimoji="1" lang="en-US" altLang="ja-JP" sz="3200" b="1" u="sng" dirty="0"/>
           </a:p>
         </p:txBody>
       </p:sp>
-      <mc:AlternateContent xmlns:mc="http://schemas.openxmlformats.org/markup-compatibility/2006">
-        <mc:Choice xmlns:a14="http://schemas.microsoft.com/office/drawing/2010/main" Requires="a14">
+      <mc:AlternateContent xmlns:mc="http://schemas.openxmlformats.org/markup-compatibility/2006" xmlns:a14="http://schemas.microsoft.com/office/drawing/2010/main">
+        <mc:Choice Requires="a14">
           <p:sp>
             <p:nvSpPr>
               <p:cNvPr id="6" name="テキスト ボックス 5">
@@ -3868,13 +3879,7 @@
                       <a:rPr lang="en-US" altLang="ja-JP" sz="2400" i="1" dirty="0">
                         <a:latin typeface="Cambria Math" panose="02040503050406030204" pitchFamily="18" charset="0"/>
                       </a:rPr>
-                      <m:t>30</m:t>
-                    </m:r>
-                    <m:r>
-                      <a:rPr lang="en-US" altLang="ja-JP" sz="2400" i="1" dirty="0">
-                        <a:latin typeface="Cambria Math" panose="02040503050406030204" pitchFamily="18" charset="0"/>
-                      </a:rPr>
-                      <m:t>°</m:t>
+                      <m:t>30°</m:t>
                     </m:r>
                   </m:oMath>
                 </a14:m>
@@ -3973,7 +3978,7 @@
             </p:txBody>
           </p:sp>
         </mc:Choice>
-        <mc:Fallback>
+        <mc:Fallback xmlns="">
           <p:sp>
             <p:nvSpPr>
               <p:cNvPr id="6" name="テキスト ボックス 5">
@@ -4018,8 +4023,8 @@
           </p:sp>
         </mc:Fallback>
       </mc:AlternateContent>
-      <mc:AlternateContent xmlns:mc="http://schemas.openxmlformats.org/markup-compatibility/2006">
-        <mc:Choice xmlns:a14="http://schemas.microsoft.com/office/drawing/2010/main" Requires="a14">
+      <mc:AlternateContent xmlns:mc="http://schemas.openxmlformats.org/markup-compatibility/2006" xmlns:a14="http://schemas.microsoft.com/office/drawing/2010/main">
+        <mc:Choice Requires="a14">
           <p:graphicFrame>
             <p:nvGraphicFramePr>
               <p:cNvPr id="2" name="表 2">
@@ -4303,7 +4308,7 @@
             </a:graphic>
           </p:graphicFrame>
         </mc:Choice>
-        <mc:Fallback>
+        <mc:Fallback xmlns="">
           <p:graphicFrame>
             <p:nvGraphicFramePr>
               <p:cNvPr id="2" name="表 2">
@@ -4571,7 +4576,7 @@
         <p:spPr>
           <a:xfrm>
             <a:off x="567542" y="491954"/>
-            <a:ext cx="5168403" cy="584775"/>
+            <a:ext cx="5578771" cy="584775"/>
           </a:xfrm>
           <a:prstGeom prst="rect">
             <a:avLst/>
@@ -4590,14 +4595,14 @@
             </a:r>
             <a:r>
               <a:rPr kumimoji="1" lang="ja-JP" altLang="en-US" sz="3200" b="1" u="sng" dirty="0"/>
-              <a:t>次元、３次元の運動  例題</a:t>
+              <a:t>次元、３次元の運動  例題１</a:t>
             </a:r>
             <a:endParaRPr kumimoji="1" lang="en-US" altLang="ja-JP" sz="3200" b="1" u="sng" dirty="0"/>
           </a:p>
         </p:txBody>
       </p:sp>
-      <mc:AlternateContent xmlns:mc="http://schemas.openxmlformats.org/markup-compatibility/2006">
-        <mc:Choice xmlns:a14="http://schemas.microsoft.com/office/drawing/2010/main" Requires="a14">
+      <mc:AlternateContent xmlns:mc="http://schemas.openxmlformats.org/markup-compatibility/2006" xmlns:a14="http://schemas.microsoft.com/office/drawing/2010/main">
+        <mc:Choice Requires="a14">
           <p:sp>
             <p:nvSpPr>
               <p:cNvPr id="6" name="テキスト ボックス 5">
@@ -4636,13 +4641,7 @@
                       <a:rPr lang="en-US" altLang="ja-JP" sz="2400" i="1" dirty="0">
                         <a:latin typeface="Cambria Math" panose="02040503050406030204" pitchFamily="18" charset="0"/>
                       </a:rPr>
-                      <m:t>30</m:t>
-                    </m:r>
-                    <m:r>
-                      <a:rPr lang="en-US" altLang="ja-JP" sz="2400" i="1" dirty="0">
-                        <a:latin typeface="Cambria Math" panose="02040503050406030204" pitchFamily="18" charset="0"/>
-                      </a:rPr>
-                      <m:t>°</m:t>
+                      <m:t>30°</m:t>
                     </m:r>
                   </m:oMath>
                 </a14:m>
@@ -4786,7 +4785,7 @@
             </p:txBody>
           </p:sp>
         </mc:Choice>
-        <mc:Fallback>
+        <mc:Fallback xmlns="">
           <p:sp>
             <p:nvSpPr>
               <p:cNvPr id="6" name="テキスト ボックス 5">
@@ -4831,8 +4830,8 @@
           </p:sp>
         </mc:Fallback>
       </mc:AlternateContent>
-      <mc:AlternateContent xmlns:mc="http://schemas.openxmlformats.org/markup-compatibility/2006">
-        <mc:Choice xmlns:a14="http://schemas.microsoft.com/office/drawing/2010/main" Requires="a14">
+      <mc:AlternateContent xmlns:mc="http://schemas.openxmlformats.org/markup-compatibility/2006" xmlns:a14="http://schemas.microsoft.com/office/drawing/2010/main">
+        <mc:Choice Requires="a14">
           <p:graphicFrame>
             <p:nvGraphicFramePr>
               <p:cNvPr id="2" name="表 2">
@@ -5080,7 +5079,7 @@
             </a:graphic>
           </p:graphicFrame>
         </mc:Choice>
-        <mc:Fallback>
+        <mc:Fallback xmlns="">
           <p:graphicFrame>
             <p:nvGraphicFramePr>
               <p:cNvPr id="2" name="表 2">
@@ -5312,7 +5311,7 @@
         <p:spPr>
           <a:xfrm>
             <a:off x="567542" y="491954"/>
-            <a:ext cx="5168403" cy="584775"/>
+            <a:ext cx="5578771" cy="584775"/>
           </a:xfrm>
           <a:prstGeom prst="rect">
             <a:avLst/>
@@ -5331,14 +5330,14 @@
             </a:r>
             <a:r>
               <a:rPr kumimoji="1" lang="ja-JP" altLang="en-US" sz="3200" b="1" u="sng" dirty="0"/>
-              <a:t>次元、３次元の運動  例題</a:t>
+              <a:t>次元、３次元の運動  例題１</a:t>
             </a:r>
             <a:endParaRPr kumimoji="1" lang="en-US" altLang="ja-JP" sz="3200" b="1" u="sng" dirty="0"/>
           </a:p>
         </p:txBody>
       </p:sp>
-      <mc:AlternateContent xmlns:mc="http://schemas.openxmlformats.org/markup-compatibility/2006">
-        <mc:Choice xmlns:a14="http://schemas.microsoft.com/office/drawing/2010/main" Requires="a14">
+      <mc:AlternateContent xmlns:mc="http://schemas.openxmlformats.org/markup-compatibility/2006" xmlns:a14="http://schemas.microsoft.com/office/drawing/2010/main">
+        <mc:Choice Requires="a14">
           <p:sp>
             <p:nvSpPr>
               <p:cNvPr id="6" name="テキスト ボックス 5">
@@ -5377,13 +5376,7 @@
                       <a:rPr lang="en-US" altLang="ja-JP" sz="2400" i="1" dirty="0">
                         <a:latin typeface="Cambria Math" panose="02040503050406030204" pitchFamily="18" charset="0"/>
                       </a:rPr>
-                      <m:t>30</m:t>
-                    </m:r>
-                    <m:r>
-                      <a:rPr lang="en-US" altLang="ja-JP" sz="2400" i="1" dirty="0">
-                        <a:latin typeface="Cambria Math" panose="02040503050406030204" pitchFamily="18" charset="0"/>
-                      </a:rPr>
-                      <m:t>°</m:t>
+                      <m:t>30°</m:t>
                     </m:r>
                   </m:oMath>
                 </a14:m>
@@ -5490,7 +5483,7 @@
             </p:txBody>
           </p:sp>
         </mc:Choice>
-        <mc:Fallback>
+        <mc:Fallback xmlns="">
           <p:sp>
             <p:nvSpPr>
               <p:cNvPr id="6" name="テキスト ボックス 5">
@@ -5535,8 +5528,8 @@
           </p:sp>
         </mc:Fallback>
       </mc:AlternateContent>
-      <mc:AlternateContent xmlns:mc="http://schemas.openxmlformats.org/markup-compatibility/2006">
-        <mc:Choice xmlns:a14="http://schemas.microsoft.com/office/drawing/2010/main" Requires="a14">
+      <mc:AlternateContent xmlns:mc="http://schemas.openxmlformats.org/markup-compatibility/2006" xmlns:a14="http://schemas.microsoft.com/office/drawing/2010/main">
+        <mc:Choice Requires="a14">
           <p:graphicFrame>
             <p:nvGraphicFramePr>
               <p:cNvPr id="2" name="表 2">
@@ -5765,13 +5758,7 @@
                                 <a:rPr kumimoji="1" lang="en-US" altLang="ja-JP" b="0" i="1" dirty="0" smtClean="0">
                                   <a:latin typeface="Cambria Math" panose="02040503050406030204" pitchFamily="18" charset="0"/>
                                 </a:rPr>
-                                <m:t>𝑎</m:t>
-                              </m:r>
-                              <m:r>
-                                <a:rPr kumimoji="1" lang="en-US" altLang="ja-JP" b="0" i="1" dirty="0" smtClean="0">
-                                  <a:latin typeface="Cambria Math" panose="02040503050406030204" pitchFamily="18" charset="0"/>
-                                </a:rPr>
-                                <m:t>𝑥</m:t>
+                                <m:t>𝑎𝑥</m:t>
                               </m:r>
                               <m:r>
                                 <a:rPr kumimoji="1" lang="en-US" altLang="ja-JP" b="0" i="1" dirty="0" smtClean="0">
@@ -5807,7 +5794,7 @@
             </a:graphic>
           </p:graphicFrame>
         </mc:Choice>
-        <mc:Fallback>
+        <mc:Fallback xmlns="">
           <p:graphicFrame>
             <p:nvGraphicFramePr>
               <p:cNvPr id="2" name="表 2">
@@ -5998,8 +5985,8 @@
           </p:graphicFrame>
         </mc:Fallback>
       </mc:AlternateContent>
-      <mc:AlternateContent xmlns:mc="http://schemas.openxmlformats.org/markup-compatibility/2006">
-        <mc:Choice xmlns:a14="http://schemas.microsoft.com/office/drawing/2010/main" Requires="a14">
+      <mc:AlternateContent xmlns:mc="http://schemas.openxmlformats.org/markup-compatibility/2006" xmlns:a14="http://schemas.microsoft.com/office/drawing/2010/main">
+        <mc:Choice Requires="a14">
           <p:sp>
             <p:nvSpPr>
               <p:cNvPr id="5" name="テキスト ボックス 4">
@@ -6067,7 +6054,7 @@
             </p:txBody>
           </p:sp>
         </mc:Choice>
-        <mc:Fallback>
+        <mc:Fallback xmlns="">
           <p:sp>
             <p:nvSpPr>
               <p:cNvPr id="5" name="テキスト ボックス 4">
@@ -6157,7 +6144,7 @@
         <p:spPr>
           <a:xfrm>
             <a:off x="567542" y="491954"/>
-            <a:ext cx="5168403" cy="584775"/>
+            <a:ext cx="5578771" cy="584775"/>
           </a:xfrm>
           <a:prstGeom prst="rect">
             <a:avLst/>
@@ -6176,14 +6163,14 @@
             </a:r>
             <a:r>
               <a:rPr kumimoji="1" lang="ja-JP" altLang="en-US" sz="3200" b="1" u="sng" dirty="0"/>
-              <a:t>次元、３次元の運動  例題</a:t>
+              <a:t>次元、３次元の運動  例題１</a:t>
             </a:r>
             <a:endParaRPr kumimoji="1" lang="en-US" altLang="ja-JP" sz="3200" b="1" u="sng" dirty="0"/>
           </a:p>
         </p:txBody>
       </p:sp>
-      <mc:AlternateContent xmlns:mc="http://schemas.openxmlformats.org/markup-compatibility/2006">
-        <mc:Choice xmlns:a14="http://schemas.microsoft.com/office/drawing/2010/main" Requires="a14">
+      <mc:AlternateContent xmlns:mc="http://schemas.openxmlformats.org/markup-compatibility/2006" xmlns:a14="http://schemas.microsoft.com/office/drawing/2010/main">
+        <mc:Choice Requires="a14">
           <p:sp>
             <p:nvSpPr>
               <p:cNvPr id="6" name="テキスト ボックス 5">
@@ -6222,13 +6209,7 @@
                       <a:rPr lang="en-US" altLang="ja-JP" sz="2400" i="1" dirty="0">
                         <a:latin typeface="Cambria Math" panose="02040503050406030204" pitchFamily="18" charset="0"/>
                       </a:rPr>
-                      <m:t>30</m:t>
-                    </m:r>
-                    <m:r>
-                      <a:rPr lang="en-US" altLang="ja-JP" sz="2400" i="1" dirty="0">
-                        <a:latin typeface="Cambria Math" panose="02040503050406030204" pitchFamily="18" charset="0"/>
-                      </a:rPr>
-                      <m:t>°</m:t>
+                      <m:t>30°</m:t>
                     </m:r>
                   </m:oMath>
                 </a14:m>
@@ -6470,7 +6451,7 @@
             </p:txBody>
           </p:sp>
         </mc:Choice>
-        <mc:Fallback>
+        <mc:Fallback xmlns="">
           <p:sp>
             <p:nvSpPr>
               <p:cNvPr id="6" name="テキスト ボックス 5">
@@ -6560,7 +6541,7 @@
         <p:spPr>
           <a:xfrm>
             <a:off x="567542" y="491954"/>
-            <a:ext cx="5051383" cy="584775"/>
+            <a:ext cx="5461752" cy="584775"/>
           </a:xfrm>
           <a:prstGeom prst="rect">
             <a:avLst/>
@@ -6579,14 +6560,14 @@
             </a:r>
             <a:r>
               <a:rPr kumimoji="1" lang="ja-JP" altLang="en-US" sz="3200" b="1" u="sng" dirty="0"/>
-              <a:t>次元、３次元の運動 例題</a:t>
+              <a:t>次元、３次元の運動 例題２</a:t>
             </a:r>
             <a:endParaRPr kumimoji="1" lang="en-US" altLang="ja-JP" sz="3200" b="1" u="sng" dirty="0"/>
           </a:p>
         </p:txBody>
       </p:sp>
-      <mc:AlternateContent xmlns:mc="http://schemas.openxmlformats.org/markup-compatibility/2006">
-        <mc:Choice xmlns:a14="http://schemas.microsoft.com/office/drawing/2010/main" Requires="a14">
+      <mc:AlternateContent xmlns:mc="http://schemas.openxmlformats.org/markup-compatibility/2006" xmlns:a14="http://schemas.microsoft.com/office/drawing/2010/main">
+        <mc:Choice Requires="a14">
           <p:sp>
             <p:nvSpPr>
               <p:cNvPr id="6" name="テキスト ボックス 5">
@@ -6684,7 +6665,7 @@
             </p:txBody>
           </p:sp>
         </mc:Choice>
-        <mc:Fallback>
+        <mc:Fallback xmlns="">
           <p:sp>
             <p:nvSpPr>
               <p:cNvPr id="6" name="テキスト ボックス 5">
@@ -7622,7 +7603,7 @@
         <p:spPr>
           <a:xfrm>
             <a:off x="567542" y="491954"/>
-            <a:ext cx="5051383" cy="584775"/>
+            <a:ext cx="5461752" cy="584775"/>
           </a:xfrm>
           <a:prstGeom prst="rect">
             <a:avLst/>
@@ -7641,14 +7622,14 @@
             </a:r>
             <a:r>
               <a:rPr kumimoji="1" lang="ja-JP" altLang="en-US" sz="3200" b="1" u="sng" dirty="0"/>
-              <a:t>次元、３次元の運動 例題</a:t>
+              <a:t>次元、３次元の運動 例題２</a:t>
             </a:r>
             <a:endParaRPr kumimoji="1" lang="en-US" altLang="ja-JP" sz="3200" b="1" u="sng" dirty="0"/>
           </a:p>
         </p:txBody>
       </p:sp>
-      <mc:AlternateContent xmlns:mc="http://schemas.openxmlformats.org/markup-compatibility/2006">
-        <mc:Choice xmlns:a14="http://schemas.microsoft.com/office/drawing/2010/main" Requires="a14">
+      <mc:AlternateContent xmlns:mc="http://schemas.openxmlformats.org/markup-compatibility/2006" xmlns:a14="http://schemas.microsoft.com/office/drawing/2010/main">
+        <mc:Choice Requires="a14">
           <p:sp>
             <p:nvSpPr>
               <p:cNvPr id="6" name="テキスト ボックス 5">
@@ -7762,7 +7743,7 @@
             </p:txBody>
           </p:sp>
         </mc:Choice>
-        <mc:Fallback>
+        <mc:Fallback xmlns="">
           <p:sp>
             <p:nvSpPr>
               <p:cNvPr id="6" name="テキスト ボックス 5">
@@ -7807,8 +7788,8 @@
           </p:sp>
         </mc:Fallback>
       </mc:AlternateContent>
-      <mc:AlternateContent xmlns:mc="http://schemas.openxmlformats.org/markup-compatibility/2006">
-        <mc:Choice xmlns:a14="http://schemas.microsoft.com/office/drawing/2010/main" Requires="a14">
+      <mc:AlternateContent xmlns:mc="http://schemas.openxmlformats.org/markup-compatibility/2006" xmlns:a14="http://schemas.microsoft.com/office/drawing/2010/main">
+        <mc:Choice Requires="a14">
           <p:graphicFrame>
             <p:nvGraphicFramePr>
               <p:cNvPr id="2" name="表 2">
@@ -8063,7 +8044,7 @@
             </a:graphic>
           </p:graphicFrame>
         </mc:Choice>
-        <mc:Fallback>
+        <mc:Fallback xmlns="">
           <p:graphicFrame>
             <p:nvGraphicFramePr>
               <p:cNvPr id="2" name="表 2">
@@ -8327,7 +8308,7 @@
         <p:spPr>
           <a:xfrm>
             <a:off x="567542" y="491954"/>
-            <a:ext cx="5051383" cy="584775"/>
+            <a:ext cx="5461752" cy="584775"/>
           </a:xfrm>
           <a:prstGeom prst="rect">
             <a:avLst/>
@@ -8346,14 +8327,14 @@
             </a:r>
             <a:r>
               <a:rPr kumimoji="1" lang="ja-JP" altLang="en-US" sz="3200" b="1" u="sng" dirty="0"/>
-              <a:t>次元、３次元の運動 例題</a:t>
+              <a:t>次元、３次元の運動 例題２</a:t>
             </a:r>
             <a:endParaRPr kumimoji="1" lang="en-US" altLang="ja-JP" sz="3200" b="1" u="sng" dirty="0"/>
           </a:p>
         </p:txBody>
       </p:sp>
-      <mc:AlternateContent xmlns:mc="http://schemas.openxmlformats.org/markup-compatibility/2006">
-        <mc:Choice xmlns:a14="http://schemas.microsoft.com/office/drawing/2010/main" Requires="a14">
+      <mc:AlternateContent xmlns:mc="http://schemas.openxmlformats.org/markup-compatibility/2006" xmlns:a14="http://schemas.microsoft.com/office/drawing/2010/main">
+        <mc:Choice Requires="a14">
           <p:sp>
             <p:nvSpPr>
               <p:cNvPr id="6" name="テキスト ボックス 5">
@@ -8518,7 +8499,7 @@
             </p:txBody>
           </p:sp>
         </mc:Choice>
-        <mc:Fallback>
+        <mc:Fallback xmlns="">
           <p:sp>
             <p:nvSpPr>
               <p:cNvPr id="6" name="テキスト ボックス 5">
@@ -8563,8 +8544,8 @@
           </p:sp>
         </mc:Fallback>
       </mc:AlternateContent>
-      <mc:AlternateContent xmlns:mc="http://schemas.openxmlformats.org/markup-compatibility/2006">
-        <mc:Choice xmlns:a14="http://schemas.microsoft.com/office/drawing/2010/main" Requires="a14">
+      <mc:AlternateContent xmlns:mc="http://schemas.openxmlformats.org/markup-compatibility/2006" xmlns:a14="http://schemas.microsoft.com/office/drawing/2010/main">
+        <mc:Choice Requires="a14">
           <p:graphicFrame>
             <p:nvGraphicFramePr>
               <p:cNvPr id="2" name="表 2">
@@ -8783,7 +8764,7 @@
             </a:graphic>
           </p:graphicFrame>
         </mc:Choice>
-        <mc:Fallback>
+        <mc:Fallback xmlns="">
           <p:graphicFrame>
             <p:nvGraphicFramePr>
               <p:cNvPr id="2" name="表 2">
@@ -9011,7 +8992,7 @@
         <p:spPr>
           <a:xfrm>
             <a:off x="567542" y="491954"/>
-            <a:ext cx="5051383" cy="584775"/>
+            <a:ext cx="5461752" cy="584775"/>
           </a:xfrm>
           <a:prstGeom prst="rect">
             <a:avLst/>
@@ -9030,14 +9011,14 @@
             </a:r>
             <a:r>
               <a:rPr kumimoji="1" lang="ja-JP" altLang="en-US" sz="3200" b="1" u="sng" dirty="0"/>
-              <a:t>次元、３次元の運動 例題</a:t>
+              <a:t>次元、３次元の運動 例題２</a:t>
             </a:r>
             <a:endParaRPr kumimoji="1" lang="en-US" altLang="ja-JP" sz="3200" b="1" u="sng" dirty="0"/>
           </a:p>
         </p:txBody>
       </p:sp>
-      <mc:AlternateContent xmlns:mc="http://schemas.openxmlformats.org/markup-compatibility/2006">
-        <mc:Choice xmlns:a14="http://schemas.microsoft.com/office/drawing/2010/main" Requires="a14">
+      <mc:AlternateContent xmlns:mc="http://schemas.openxmlformats.org/markup-compatibility/2006" xmlns:a14="http://schemas.microsoft.com/office/drawing/2010/main">
+        <mc:Choice Requires="a14">
           <p:sp>
             <p:nvSpPr>
               <p:cNvPr id="6" name="テキスト ボックス 5">
@@ -9159,7 +9140,7 @@
             </p:txBody>
           </p:sp>
         </mc:Choice>
-        <mc:Fallback>
+        <mc:Fallback xmlns="">
           <p:sp>
             <p:nvSpPr>
               <p:cNvPr id="6" name="テキスト ボックス 5">
@@ -9204,8 +9185,8 @@
           </p:sp>
         </mc:Fallback>
       </mc:AlternateContent>
-      <mc:AlternateContent xmlns:mc="http://schemas.openxmlformats.org/markup-compatibility/2006">
-        <mc:Choice xmlns:a14="http://schemas.microsoft.com/office/drawing/2010/main" Requires="a14">
+      <mc:AlternateContent xmlns:mc="http://schemas.openxmlformats.org/markup-compatibility/2006" xmlns:a14="http://schemas.microsoft.com/office/drawing/2010/main">
+        <mc:Choice Requires="a14">
           <p:graphicFrame>
             <p:nvGraphicFramePr>
               <p:cNvPr id="2" name="表 2">
@@ -9447,7 +9428,7 @@
             </a:graphic>
           </p:graphicFrame>
         </mc:Choice>
-        <mc:Fallback>
+        <mc:Fallback xmlns="">
           <p:graphicFrame>
             <p:nvGraphicFramePr>
               <p:cNvPr id="2" name="表 2">
@@ -9679,7 +9660,7 @@
         <p:spPr>
           <a:xfrm>
             <a:off x="567542" y="491954"/>
-            <a:ext cx="5051383" cy="584775"/>
+            <a:ext cx="5461752" cy="584775"/>
           </a:xfrm>
           <a:prstGeom prst="rect">
             <a:avLst/>
@@ -9698,14 +9679,14 @@
             </a:r>
             <a:r>
               <a:rPr kumimoji="1" lang="ja-JP" altLang="en-US" sz="3200" b="1" u="sng" dirty="0"/>
-              <a:t>次元、３次元の運動 例題</a:t>
+              <a:t>次元、３次元の運動 例題２</a:t>
             </a:r>
             <a:endParaRPr kumimoji="1" lang="en-US" altLang="ja-JP" sz="3200" b="1" u="sng" dirty="0"/>
           </a:p>
         </p:txBody>
       </p:sp>
-      <mc:AlternateContent xmlns:mc="http://schemas.openxmlformats.org/markup-compatibility/2006">
-        <mc:Choice xmlns:a14="http://schemas.microsoft.com/office/drawing/2010/main" Requires="a14">
+      <mc:AlternateContent xmlns:mc="http://schemas.openxmlformats.org/markup-compatibility/2006" xmlns:a14="http://schemas.microsoft.com/office/drawing/2010/main">
+        <mc:Choice Requires="a14">
           <p:sp>
             <p:nvSpPr>
               <p:cNvPr id="6" name="テキスト ボックス 5">
@@ -9819,7 +9800,7 @@
             </p:txBody>
           </p:sp>
         </mc:Choice>
-        <mc:Fallback>
+        <mc:Fallback xmlns="">
           <p:sp>
             <p:nvSpPr>
               <p:cNvPr id="6" name="テキスト ボックス 5">
@@ -9864,8 +9845,8 @@
           </p:sp>
         </mc:Fallback>
       </mc:AlternateContent>
-      <mc:AlternateContent xmlns:mc="http://schemas.openxmlformats.org/markup-compatibility/2006">
-        <mc:Choice xmlns:a14="http://schemas.microsoft.com/office/drawing/2010/main" Requires="a14">
+      <mc:AlternateContent xmlns:mc="http://schemas.openxmlformats.org/markup-compatibility/2006" xmlns:a14="http://schemas.microsoft.com/office/drawing/2010/main">
+        <mc:Choice Requires="a14">
           <p:graphicFrame>
             <p:nvGraphicFramePr>
               <p:cNvPr id="2" name="表 2">
@@ -10170,7 +10151,7 @@
             </a:graphic>
           </p:graphicFrame>
         </mc:Choice>
-        <mc:Fallback>
+        <mc:Fallback xmlns="">
           <p:graphicFrame>
             <p:nvGraphicFramePr>
               <p:cNvPr id="2" name="表 2">
@@ -10361,8 +10342,8 @@
           </p:graphicFrame>
         </mc:Fallback>
       </mc:AlternateContent>
-      <mc:AlternateContent xmlns:mc="http://schemas.openxmlformats.org/markup-compatibility/2006">
-        <mc:Choice xmlns:a14="http://schemas.microsoft.com/office/drawing/2010/main" Requires="a14">
+      <mc:AlternateContent xmlns:mc="http://schemas.openxmlformats.org/markup-compatibility/2006" xmlns:a14="http://schemas.microsoft.com/office/drawing/2010/main">
+        <mc:Choice Requires="a14">
           <p:sp>
             <p:nvSpPr>
               <p:cNvPr id="5" name="テキスト ボックス 4">
@@ -10405,13 +10386,7 @@
                       <a:rPr lang="en-US" altLang="ja-JP" sz="2400" i="1" dirty="0" smtClean="0">
                         <a:latin typeface="Cambria Math" panose="02040503050406030204" pitchFamily="18" charset="0"/>
                       </a:rPr>
-                      <m:t>−9.</m:t>
-                    </m:r>
-                    <m:r>
-                      <a:rPr lang="en-US" altLang="ja-JP" sz="2400" i="1" dirty="0" smtClean="0">
-                        <a:latin typeface="Cambria Math" panose="02040503050406030204" pitchFamily="18" charset="0"/>
-                      </a:rPr>
-                      <m:t>8</m:t>
+                      <m:t>−9.8</m:t>
                     </m:r>
                     <m:r>
                       <a:rPr lang="en-US" altLang="ja-JP" sz="2400" b="0" i="1" dirty="0" smtClean="0">
@@ -10461,7 +10436,7 @@
             </p:txBody>
           </p:sp>
         </mc:Choice>
-        <mc:Fallback>
+        <mc:Fallback xmlns="">
           <p:sp>
             <p:nvSpPr>
               <p:cNvPr id="5" name="テキスト ボックス 4">
@@ -10551,7 +10526,7 @@
         <p:spPr>
           <a:xfrm>
             <a:off x="567542" y="491954"/>
-            <a:ext cx="5051383" cy="584775"/>
+            <a:ext cx="5461752" cy="584775"/>
           </a:xfrm>
           <a:prstGeom prst="rect">
             <a:avLst/>
@@ -10570,14 +10545,14 @@
             </a:r>
             <a:r>
               <a:rPr kumimoji="1" lang="ja-JP" altLang="en-US" sz="3200" b="1" u="sng" dirty="0"/>
-              <a:t>次元、３次元の運動 例題</a:t>
+              <a:t>次元、３次元の運動 例題２</a:t>
             </a:r>
             <a:endParaRPr kumimoji="1" lang="en-US" altLang="ja-JP" sz="3200" b="1" u="sng" dirty="0"/>
           </a:p>
         </p:txBody>
       </p:sp>
-      <mc:AlternateContent xmlns:mc="http://schemas.openxmlformats.org/markup-compatibility/2006">
-        <mc:Choice xmlns:a14="http://schemas.microsoft.com/office/drawing/2010/main" Requires="a14">
+      <mc:AlternateContent xmlns:mc="http://schemas.openxmlformats.org/markup-compatibility/2006" xmlns:a14="http://schemas.microsoft.com/office/drawing/2010/main">
+        <mc:Choice Requires="a14">
           <p:sp>
             <p:nvSpPr>
               <p:cNvPr id="6" name="テキスト ボックス 5">
@@ -10975,13 +10950,7 @@
                       <a:rPr lang="en-US" altLang="ja-JP" sz="2400" i="1">
                         <a:latin typeface="Cambria Math" panose="02040503050406030204" pitchFamily="18" charset="0"/>
                       </a:rPr>
-                      <m:t>÷</m:t>
-                    </m:r>
-                    <m:r>
-                      <a:rPr lang="en-US" altLang="ja-JP" sz="2400" i="1">
-                        <a:latin typeface="Cambria Math" panose="02040503050406030204" pitchFamily="18" charset="0"/>
-                      </a:rPr>
-                      <m:t>−9.8</m:t>
+                      <m:t>÷−9.8</m:t>
                     </m:r>
                     <m:r>
                       <a:rPr lang="en-US" altLang="ja-JP" sz="2400" i="1">
@@ -11085,7 +11054,7 @@
             </p:txBody>
           </p:sp>
         </mc:Choice>
-        <mc:Fallback>
+        <mc:Fallback xmlns="">
           <p:sp>
             <p:nvSpPr>
               <p:cNvPr id="6" name="テキスト ボックス 5">
@@ -11637,7 +11606,7 @@
         <p:spPr>
           <a:xfrm>
             <a:off x="567542" y="491954"/>
-            <a:ext cx="5051383" cy="584775"/>
+            <a:ext cx="5461752" cy="584775"/>
           </a:xfrm>
           <a:prstGeom prst="rect">
             <a:avLst/>
@@ -11656,14 +11625,14 @@
             </a:r>
             <a:r>
               <a:rPr kumimoji="1" lang="ja-JP" altLang="en-US" sz="3200" b="1" u="sng" dirty="0"/>
-              <a:t>次元、３次元の運動 例題</a:t>
+              <a:t>次元、３次元の運動 例題２</a:t>
             </a:r>
             <a:endParaRPr kumimoji="1" lang="en-US" altLang="ja-JP" sz="3200" b="1" u="sng" dirty="0"/>
           </a:p>
         </p:txBody>
       </p:sp>
-      <mc:AlternateContent xmlns:mc="http://schemas.openxmlformats.org/markup-compatibility/2006">
-        <mc:Choice xmlns:a14="http://schemas.microsoft.com/office/drawing/2010/main" Requires="a14">
+      <mc:AlternateContent xmlns:mc="http://schemas.openxmlformats.org/markup-compatibility/2006" xmlns:a14="http://schemas.microsoft.com/office/drawing/2010/main">
+        <mc:Choice Requires="a14">
           <p:sp>
             <p:nvSpPr>
               <p:cNvPr id="6" name="テキスト ボックス 5">
@@ -11823,7 +11792,7 @@
             </p:txBody>
           </p:sp>
         </mc:Choice>
-        <mc:Fallback>
+        <mc:Fallback xmlns="">
           <p:sp>
             <p:nvSpPr>
               <p:cNvPr id="6" name="テキスト ボックス 5">
@@ -12307,6 +12276,7441 @@
 </p:sld>
 </file>
 
+<file path=ppt/slides/slide21.xml><?xml version="1.0" encoding="utf-8"?>
+<p:sld xmlns:a="http://schemas.openxmlformats.org/drawingml/2006/main" xmlns:r="http://schemas.openxmlformats.org/officeDocument/2006/relationships" xmlns:p="http://schemas.openxmlformats.org/presentationml/2006/main">
+  <p:cSld>
+    <p:spTree>
+      <p:nvGrpSpPr>
+        <p:cNvPr id="1" name=""/>
+        <p:cNvGrpSpPr/>
+        <p:nvPr/>
+      </p:nvGrpSpPr>
+      <p:grpSpPr>
+        <a:xfrm>
+          <a:off x="0" y="0"/>
+          <a:ext cx="0" cy="0"/>
+          <a:chOff x="0" y="0"/>
+          <a:chExt cx="0" cy="0"/>
+        </a:xfrm>
+      </p:grpSpPr>
+      <p:sp>
+        <p:nvSpPr>
+          <p:cNvPr id="4" name="テキスト ボックス 3">
+            <a:extLst>
+              <a:ext uri="{FF2B5EF4-FFF2-40B4-BE49-F238E27FC236}">
+                <a16:creationId xmlns:a16="http://schemas.microsoft.com/office/drawing/2014/main" id="{5A13BF46-B8C5-48AA-8308-C9ECFF431A18}"/>
+              </a:ext>
+            </a:extLst>
+          </p:cNvPr>
+          <p:cNvSpPr txBox="1"/>
+          <p:nvPr/>
+        </p:nvSpPr>
+        <p:spPr>
+          <a:xfrm>
+            <a:off x="567542" y="491954"/>
+            <a:ext cx="5461752" cy="584775"/>
+          </a:xfrm>
+          <a:prstGeom prst="rect">
+            <a:avLst/>
+          </a:prstGeom>
+          <a:noFill/>
+        </p:spPr>
+        <p:txBody>
+          <a:bodyPr wrap="none" rtlCol="0">
+            <a:spAutoFit/>
+          </a:bodyPr>
+          <a:lstStyle/>
+          <a:p>
+            <a:r>
+              <a:rPr kumimoji="1" lang="en-US" altLang="ja-JP" sz="3200" b="1" u="sng" dirty="0"/>
+              <a:t>2</a:t>
+            </a:r>
+            <a:r>
+              <a:rPr kumimoji="1" lang="ja-JP" altLang="en-US" sz="3200" b="1" u="sng" dirty="0"/>
+              <a:t>次元、３次元の運動 例題３</a:t>
+            </a:r>
+            <a:endParaRPr kumimoji="1" lang="en-US" altLang="ja-JP" sz="3200" b="1" u="sng" dirty="0"/>
+          </a:p>
+        </p:txBody>
+      </p:sp>
+      <p:sp>
+        <p:nvSpPr>
+          <p:cNvPr id="6" name="テキスト ボックス 5">
+            <a:extLst>
+              <a:ext uri="{FF2B5EF4-FFF2-40B4-BE49-F238E27FC236}">
+                <a16:creationId xmlns:a16="http://schemas.microsoft.com/office/drawing/2014/main" id="{55830AD6-028B-4C4E-80BF-B70DFC1C3A46}"/>
+              </a:ext>
+            </a:extLst>
+          </p:cNvPr>
+          <p:cNvSpPr txBox="1"/>
+          <p:nvPr/>
+        </p:nvSpPr>
+        <p:spPr>
+          <a:xfrm>
+            <a:off x="567542" y="1216429"/>
+            <a:ext cx="7699544" cy="1200329"/>
+          </a:xfrm>
+          <a:prstGeom prst="rect">
+            <a:avLst/>
+          </a:prstGeom>
+          <a:noFill/>
+        </p:spPr>
+        <p:txBody>
+          <a:bodyPr wrap="none" rtlCol="0">
+            <a:spAutoFit/>
+          </a:bodyPr>
+          <a:lstStyle/>
+          <a:p>
+            <a:r>
+              <a:rPr lang="ja-JP" altLang="en-US" sz="2400" dirty="0"/>
+              <a:t>ゲーム中のキャラクターが</a:t>
+            </a:r>
+            <a:r>
+              <a:rPr lang="en-US" altLang="ja-JP" sz="2400" dirty="0"/>
+              <a:t>10m/</a:t>
+            </a:r>
+            <a:r>
+              <a:rPr lang="ja-JP" altLang="en-US" sz="2400" dirty="0"/>
+              <a:t>秒で移動しており、</a:t>
+            </a:r>
+            <a:endParaRPr lang="en-US" altLang="ja-JP" sz="2400" dirty="0"/>
+          </a:p>
+          <a:p>
+            <a:r>
+              <a:rPr lang="ja-JP" altLang="en-US" sz="2400" dirty="0"/>
+              <a:t>高さ</a:t>
+            </a:r>
+            <a:r>
+              <a:rPr lang="en-US" altLang="ja-JP" sz="2400" dirty="0"/>
+              <a:t>8m</a:t>
+            </a:r>
+            <a:r>
+              <a:rPr lang="ja-JP" altLang="en-US" sz="2400" dirty="0"/>
+              <a:t>の崖から落下しました。</a:t>
+            </a:r>
+            <a:endParaRPr lang="en-US" altLang="ja-JP" sz="2400" dirty="0"/>
+          </a:p>
+          <a:p>
+            <a:r>
+              <a:rPr lang="ja-JP" altLang="en-US" sz="2400" dirty="0"/>
+              <a:t>崖から着地地点までの水平距離は何</a:t>
+            </a:r>
+            <a:r>
+              <a:rPr lang="en-US" altLang="ja-JP" sz="2400" dirty="0"/>
+              <a:t>m</a:t>
+            </a:r>
+            <a:r>
+              <a:rPr lang="ja-JP" altLang="en-US" sz="2400" dirty="0"/>
+              <a:t>か求めなさい。</a:t>
+            </a:r>
+            <a:endParaRPr lang="en-US" altLang="ja-JP" sz="2400" dirty="0"/>
+          </a:p>
+        </p:txBody>
+      </p:sp>
+      <p:cxnSp>
+        <p:nvCxnSpPr>
+          <p:cNvPr id="14" name="直線コネクタ 13">
+            <a:extLst>
+              <a:ext uri="{FF2B5EF4-FFF2-40B4-BE49-F238E27FC236}">
+                <a16:creationId xmlns:a16="http://schemas.microsoft.com/office/drawing/2014/main" id="{A7912C19-55BE-4B97-ACEA-80391584E33D}"/>
+              </a:ext>
+            </a:extLst>
+          </p:cNvPr>
+          <p:cNvCxnSpPr/>
+          <p:nvPr/>
+        </p:nvCxnSpPr>
+        <p:spPr>
+          <a:xfrm>
+            <a:off x="736599" y="3742266"/>
+            <a:ext cx="2937934" cy="0"/>
+          </a:xfrm>
+          <a:prstGeom prst="line">
+            <a:avLst/>
+          </a:prstGeom>
+          <a:ln w="76200">
+            <a:solidFill>
+              <a:schemeClr val="accent2">
+                <a:lumMod val="75000"/>
+              </a:schemeClr>
+            </a:solidFill>
+          </a:ln>
+        </p:spPr>
+        <p:style>
+          <a:lnRef idx="1">
+            <a:schemeClr val="accent1"/>
+          </a:lnRef>
+          <a:fillRef idx="0">
+            <a:schemeClr val="accent1"/>
+          </a:fillRef>
+          <a:effectRef idx="0">
+            <a:schemeClr val="accent1"/>
+          </a:effectRef>
+          <a:fontRef idx="minor">
+            <a:schemeClr val="tx1"/>
+          </a:fontRef>
+        </p:style>
+      </p:cxnSp>
+      <p:cxnSp>
+        <p:nvCxnSpPr>
+          <p:cNvPr id="15" name="直線コネクタ 14">
+            <a:extLst>
+              <a:ext uri="{FF2B5EF4-FFF2-40B4-BE49-F238E27FC236}">
+                <a16:creationId xmlns:a16="http://schemas.microsoft.com/office/drawing/2014/main" id="{9AB3491F-A4F5-49BC-861E-9AE878E40713}"/>
+              </a:ext>
+            </a:extLst>
+          </p:cNvPr>
+          <p:cNvCxnSpPr>
+            <a:cxnSpLocks/>
+          </p:cNvCxnSpPr>
+          <p:nvPr/>
+        </p:nvCxnSpPr>
+        <p:spPr>
+          <a:xfrm>
+            <a:off x="736599" y="5892801"/>
+            <a:ext cx="8602134" cy="0"/>
+          </a:xfrm>
+          <a:prstGeom prst="line">
+            <a:avLst/>
+          </a:prstGeom>
+          <a:ln w="76200">
+            <a:solidFill>
+              <a:schemeClr val="accent4">
+                <a:lumMod val="75000"/>
+              </a:schemeClr>
+            </a:solidFill>
+          </a:ln>
+        </p:spPr>
+        <p:style>
+          <a:lnRef idx="1">
+            <a:schemeClr val="accent1"/>
+          </a:lnRef>
+          <a:fillRef idx="0">
+            <a:schemeClr val="accent1"/>
+          </a:fillRef>
+          <a:effectRef idx="0">
+            <a:schemeClr val="accent1"/>
+          </a:effectRef>
+          <a:fontRef idx="minor">
+            <a:schemeClr val="tx1"/>
+          </a:fontRef>
+        </p:style>
+      </p:cxnSp>
+      <p:cxnSp>
+        <p:nvCxnSpPr>
+          <p:cNvPr id="20" name="直線矢印コネクタ 19">
+            <a:extLst>
+              <a:ext uri="{FF2B5EF4-FFF2-40B4-BE49-F238E27FC236}">
+                <a16:creationId xmlns:a16="http://schemas.microsoft.com/office/drawing/2014/main" id="{BA1CF461-6BB3-4DA0-A1AA-1A27A3BC09F1}"/>
+              </a:ext>
+            </a:extLst>
+          </p:cNvPr>
+          <p:cNvCxnSpPr>
+            <a:cxnSpLocks/>
+          </p:cNvCxnSpPr>
+          <p:nvPr/>
+        </p:nvCxnSpPr>
+        <p:spPr>
+          <a:xfrm>
+            <a:off x="1778000" y="3742266"/>
+            <a:ext cx="0" cy="2091267"/>
+          </a:xfrm>
+          <a:prstGeom prst="straightConnector1">
+            <a:avLst/>
+          </a:prstGeom>
+          <a:ln w="38100">
+            <a:solidFill>
+              <a:srgbClr val="00B050"/>
+            </a:solidFill>
+            <a:headEnd type="triangle"/>
+            <a:tailEnd type="triangle"/>
+          </a:ln>
+        </p:spPr>
+        <p:style>
+          <a:lnRef idx="1">
+            <a:schemeClr val="accent1"/>
+          </a:lnRef>
+          <a:fillRef idx="0">
+            <a:schemeClr val="accent1"/>
+          </a:fillRef>
+          <a:effectRef idx="0">
+            <a:schemeClr val="accent1"/>
+          </a:effectRef>
+          <a:fontRef idx="minor">
+            <a:schemeClr val="tx1"/>
+          </a:fontRef>
+        </p:style>
+      </p:cxnSp>
+      <p:sp>
+        <p:nvSpPr>
+          <p:cNvPr id="27" name="テキスト ボックス 26">
+            <a:extLst>
+              <a:ext uri="{FF2B5EF4-FFF2-40B4-BE49-F238E27FC236}">
+                <a16:creationId xmlns:a16="http://schemas.microsoft.com/office/drawing/2014/main" id="{03418316-B1EC-4233-BD2E-B2A858C3B630}"/>
+              </a:ext>
+            </a:extLst>
+          </p:cNvPr>
+          <p:cNvSpPr txBox="1"/>
+          <p:nvPr/>
+        </p:nvSpPr>
+        <p:spPr>
+          <a:xfrm>
+            <a:off x="1795242" y="4570011"/>
+            <a:ext cx="620683" cy="461665"/>
+          </a:xfrm>
+          <a:prstGeom prst="rect">
+            <a:avLst/>
+          </a:prstGeom>
+          <a:noFill/>
+        </p:spPr>
+        <p:txBody>
+          <a:bodyPr wrap="none" rtlCol="0">
+            <a:spAutoFit/>
+          </a:bodyPr>
+          <a:lstStyle/>
+          <a:p>
+            <a:r>
+              <a:rPr lang="en-US" altLang="ja-JP" sz="2400" dirty="0"/>
+              <a:t>8m</a:t>
+            </a:r>
+          </a:p>
+        </p:txBody>
+      </p:sp>
+      <p:sp>
+        <p:nvSpPr>
+          <p:cNvPr id="28" name="スマイル 27">
+            <a:extLst>
+              <a:ext uri="{FF2B5EF4-FFF2-40B4-BE49-F238E27FC236}">
+                <a16:creationId xmlns:a16="http://schemas.microsoft.com/office/drawing/2014/main" id="{BC692953-2C75-4E5C-B983-DC5F906401F2}"/>
+              </a:ext>
+            </a:extLst>
+          </p:cNvPr>
+          <p:cNvSpPr/>
+          <p:nvPr/>
+        </p:nvSpPr>
+        <p:spPr>
+          <a:xfrm>
+            <a:off x="3141133" y="3158067"/>
+            <a:ext cx="550333" cy="541865"/>
+          </a:xfrm>
+          <a:prstGeom prst="smileyFace">
+            <a:avLst/>
+          </a:prstGeom>
+        </p:spPr>
+        <p:style>
+          <a:lnRef idx="2">
+            <a:schemeClr val="accent4">
+              <a:shade val="50000"/>
+            </a:schemeClr>
+          </a:lnRef>
+          <a:fillRef idx="1">
+            <a:schemeClr val="accent4"/>
+          </a:fillRef>
+          <a:effectRef idx="0">
+            <a:schemeClr val="accent4"/>
+          </a:effectRef>
+          <a:fontRef idx="minor">
+            <a:schemeClr val="lt1"/>
+          </a:fontRef>
+        </p:style>
+        <p:txBody>
+          <a:bodyPr rtlCol="0" anchor="ctr"/>
+          <a:lstStyle/>
+          <a:p>
+            <a:pPr algn="ctr"/>
+            <a:endParaRPr kumimoji="1" lang="ja-JP" altLang="en-US"/>
+          </a:p>
+        </p:txBody>
+      </p:sp>
+      <p:cxnSp>
+        <p:nvCxnSpPr>
+          <p:cNvPr id="30" name="直線矢印コネクタ 29">
+            <a:extLst>
+              <a:ext uri="{FF2B5EF4-FFF2-40B4-BE49-F238E27FC236}">
+                <a16:creationId xmlns:a16="http://schemas.microsoft.com/office/drawing/2014/main" id="{C68C638A-B35A-4513-9B84-3A1EFBBA47B5}"/>
+              </a:ext>
+            </a:extLst>
+          </p:cNvPr>
+          <p:cNvCxnSpPr>
+            <a:cxnSpLocks/>
+          </p:cNvCxnSpPr>
+          <p:nvPr/>
+        </p:nvCxnSpPr>
+        <p:spPr>
+          <a:xfrm>
+            <a:off x="3116464" y="3051364"/>
+            <a:ext cx="642736" cy="0"/>
+          </a:xfrm>
+          <a:prstGeom prst="straightConnector1">
+            <a:avLst/>
+          </a:prstGeom>
+          <a:ln w="38100">
+            <a:solidFill>
+              <a:srgbClr val="FF0000"/>
+            </a:solidFill>
+            <a:tailEnd type="triangle"/>
+          </a:ln>
+        </p:spPr>
+        <p:style>
+          <a:lnRef idx="1">
+            <a:schemeClr val="accent1"/>
+          </a:lnRef>
+          <a:fillRef idx="0">
+            <a:schemeClr val="accent1"/>
+          </a:fillRef>
+          <a:effectRef idx="0">
+            <a:schemeClr val="accent1"/>
+          </a:effectRef>
+          <a:fontRef idx="minor">
+            <a:schemeClr val="tx1"/>
+          </a:fontRef>
+        </p:style>
+      </p:cxnSp>
+      <p:sp>
+        <p:nvSpPr>
+          <p:cNvPr id="35" name="テキスト ボックス 34">
+            <a:extLst>
+              <a:ext uri="{FF2B5EF4-FFF2-40B4-BE49-F238E27FC236}">
+                <a16:creationId xmlns:a16="http://schemas.microsoft.com/office/drawing/2014/main" id="{446C9021-92A2-49AD-B555-996328ADAAAC}"/>
+              </a:ext>
+            </a:extLst>
+          </p:cNvPr>
+          <p:cNvSpPr txBox="1"/>
+          <p:nvPr/>
+        </p:nvSpPr>
+        <p:spPr>
+          <a:xfrm>
+            <a:off x="2912898" y="2627951"/>
+            <a:ext cx="1049867" cy="369332"/>
+          </a:xfrm>
+          <a:prstGeom prst="rect">
+            <a:avLst/>
+          </a:prstGeom>
+          <a:noFill/>
+        </p:spPr>
+        <p:txBody>
+          <a:bodyPr wrap="square">
+            <a:spAutoFit/>
+          </a:bodyPr>
+          <a:lstStyle/>
+          <a:p>
+            <a:r>
+              <a:rPr lang="en-US" altLang="ja-JP" sz="1800" dirty="0"/>
+              <a:t>10m/</a:t>
+            </a:r>
+            <a:r>
+              <a:rPr lang="ja-JP" altLang="en-US" sz="1800" dirty="0"/>
+              <a:t>秒</a:t>
+            </a:r>
+            <a:endParaRPr lang="ja-JP" altLang="en-US" dirty="0"/>
+          </a:p>
+        </p:txBody>
+      </p:sp>
+      <p:sp>
+        <p:nvSpPr>
+          <p:cNvPr id="37" name="楕円 36">
+            <a:extLst>
+              <a:ext uri="{FF2B5EF4-FFF2-40B4-BE49-F238E27FC236}">
+                <a16:creationId xmlns:a16="http://schemas.microsoft.com/office/drawing/2014/main" id="{26536FAC-5662-4C20-AAC2-CE5CAB6666D9}"/>
+              </a:ext>
+            </a:extLst>
+          </p:cNvPr>
+          <p:cNvSpPr/>
+          <p:nvPr/>
+        </p:nvSpPr>
+        <p:spPr>
+          <a:xfrm>
+            <a:off x="3962765" y="3386139"/>
+            <a:ext cx="180000" cy="180000"/>
+          </a:xfrm>
+          <a:prstGeom prst="ellipse">
+            <a:avLst/>
+          </a:prstGeom>
+        </p:spPr>
+        <p:style>
+          <a:lnRef idx="2">
+            <a:schemeClr val="accent4">
+              <a:shade val="50000"/>
+            </a:schemeClr>
+          </a:lnRef>
+          <a:fillRef idx="1">
+            <a:schemeClr val="accent4"/>
+          </a:fillRef>
+          <a:effectRef idx="0">
+            <a:schemeClr val="accent4"/>
+          </a:effectRef>
+          <a:fontRef idx="minor">
+            <a:schemeClr val="lt1"/>
+          </a:fontRef>
+        </p:style>
+        <p:txBody>
+          <a:bodyPr rtlCol="0" anchor="ctr"/>
+          <a:lstStyle/>
+          <a:p>
+            <a:pPr algn="ctr"/>
+            <a:endParaRPr kumimoji="1" lang="ja-JP" altLang="en-US"/>
+          </a:p>
+        </p:txBody>
+      </p:sp>
+      <p:sp>
+        <p:nvSpPr>
+          <p:cNvPr id="39" name="楕円 38">
+            <a:extLst>
+              <a:ext uri="{FF2B5EF4-FFF2-40B4-BE49-F238E27FC236}">
+                <a16:creationId xmlns:a16="http://schemas.microsoft.com/office/drawing/2014/main" id="{DB9FE105-5062-4AEC-883F-8F379ED0EE08}"/>
+              </a:ext>
+            </a:extLst>
+          </p:cNvPr>
+          <p:cNvSpPr/>
+          <p:nvPr/>
+        </p:nvSpPr>
+        <p:spPr>
+          <a:xfrm>
+            <a:off x="4625934" y="3750495"/>
+            <a:ext cx="180000" cy="180000"/>
+          </a:xfrm>
+          <a:prstGeom prst="ellipse">
+            <a:avLst/>
+          </a:prstGeom>
+        </p:spPr>
+        <p:style>
+          <a:lnRef idx="2">
+            <a:schemeClr val="accent4">
+              <a:shade val="50000"/>
+            </a:schemeClr>
+          </a:lnRef>
+          <a:fillRef idx="1">
+            <a:schemeClr val="accent4"/>
+          </a:fillRef>
+          <a:effectRef idx="0">
+            <a:schemeClr val="accent4"/>
+          </a:effectRef>
+          <a:fontRef idx="minor">
+            <a:schemeClr val="lt1"/>
+          </a:fontRef>
+        </p:style>
+        <p:txBody>
+          <a:bodyPr rtlCol="0" anchor="ctr"/>
+          <a:lstStyle/>
+          <a:p>
+            <a:pPr algn="ctr"/>
+            <a:endParaRPr kumimoji="1" lang="ja-JP" altLang="en-US"/>
+          </a:p>
+        </p:txBody>
+      </p:sp>
+      <p:sp>
+        <p:nvSpPr>
+          <p:cNvPr id="40" name="楕円 39">
+            <a:extLst>
+              <a:ext uri="{FF2B5EF4-FFF2-40B4-BE49-F238E27FC236}">
+                <a16:creationId xmlns:a16="http://schemas.microsoft.com/office/drawing/2014/main" id="{CEEF9974-74F6-49A8-AB0D-5AAB484AD77A}"/>
+              </a:ext>
+            </a:extLst>
+          </p:cNvPr>
+          <p:cNvSpPr/>
+          <p:nvPr/>
+        </p:nvSpPr>
+        <p:spPr>
+          <a:xfrm>
+            <a:off x="5179197" y="4249627"/>
+            <a:ext cx="180000" cy="180000"/>
+          </a:xfrm>
+          <a:prstGeom prst="ellipse">
+            <a:avLst/>
+          </a:prstGeom>
+        </p:spPr>
+        <p:style>
+          <a:lnRef idx="2">
+            <a:schemeClr val="accent4">
+              <a:shade val="50000"/>
+            </a:schemeClr>
+          </a:lnRef>
+          <a:fillRef idx="1">
+            <a:schemeClr val="accent4"/>
+          </a:fillRef>
+          <a:effectRef idx="0">
+            <a:schemeClr val="accent4"/>
+          </a:effectRef>
+          <a:fontRef idx="minor">
+            <a:schemeClr val="lt1"/>
+          </a:fontRef>
+        </p:style>
+        <p:txBody>
+          <a:bodyPr rtlCol="0" anchor="ctr"/>
+          <a:lstStyle/>
+          <a:p>
+            <a:pPr algn="ctr"/>
+            <a:endParaRPr kumimoji="1" lang="ja-JP" altLang="en-US"/>
+          </a:p>
+        </p:txBody>
+      </p:sp>
+      <p:sp>
+        <p:nvSpPr>
+          <p:cNvPr id="41" name="楕円 40">
+            <a:extLst>
+              <a:ext uri="{FF2B5EF4-FFF2-40B4-BE49-F238E27FC236}">
+                <a16:creationId xmlns:a16="http://schemas.microsoft.com/office/drawing/2014/main" id="{BEEE514F-2DE1-47A9-94BD-C874ABAFACF1}"/>
+              </a:ext>
+            </a:extLst>
+          </p:cNvPr>
+          <p:cNvSpPr/>
+          <p:nvPr/>
+        </p:nvSpPr>
+        <p:spPr>
+          <a:xfrm>
+            <a:off x="5661798" y="4942013"/>
+            <a:ext cx="180000" cy="180000"/>
+          </a:xfrm>
+          <a:prstGeom prst="ellipse">
+            <a:avLst/>
+          </a:prstGeom>
+        </p:spPr>
+        <p:style>
+          <a:lnRef idx="2">
+            <a:schemeClr val="accent4">
+              <a:shade val="50000"/>
+            </a:schemeClr>
+          </a:lnRef>
+          <a:fillRef idx="1">
+            <a:schemeClr val="accent4"/>
+          </a:fillRef>
+          <a:effectRef idx="0">
+            <a:schemeClr val="accent4"/>
+          </a:effectRef>
+          <a:fontRef idx="minor">
+            <a:schemeClr val="lt1"/>
+          </a:fontRef>
+        </p:style>
+        <p:txBody>
+          <a:bodyPr rtlCol="0" anchor="ctr"/>
+          <a:lstStyle/>
+          <a:p>
+            <a:pPr algn="ctr"/>
+            <a:endParaRPr kumimoji="1" lang="ja-JP" altLang="en-US"/>
+          </a:p>
+        </p:txBody>
+      </p:sp>
+      <p:sp>
+        <p:nvSpPr>
+          <p:cNvPr id="42" name="スマイル 41">
+            <a:extLst>
+              <a:ext uri="{FF2B5EF4-FFF2-40B4-BE49-F238E27FC236}">
+                <a16:creationId xmlns:a16="http://schemas.microsoft.com/office/drawing/2014/main" id="{0E529262-55DA-4041-AF1B-F63BABB6B700}"/>
+              </a:ext>
+            </a:extLst>
+          </p:cNvPr>
+          <p:cNvSpPr/>
+          <p:nvPr/>
+        </p:nvSpPr>
+        <p:spPr>
+          <a:xfrm>
+            <a:off x="5867198" y="5321302"/>
+            <a:ext cx="550333" cy="541865"/>
+          </a:xfrm>
+          <a:prstGeom prst="smileyFace">
+            <a:avLst/>
+          </a:prstGeom>
+        </p:spPr>
+        <p:style>
+          <a:lnRef idx="2">
+            <a:schemeClr val="accent4">
+              <a:shade val="50000"/>
+            </a:schemeClr>
+          </a:lnRef>
+          <a:fillRef idx="1">
+            <a:schemeClr val="accent4"/>
+          </a:fillRef>
+          <a:effectRef idx="0">
+            <a:schemeClr val="accent4"/>
+          </a:effectRef>
+          <a:fontRef idx="minor">
+            <a:schemeClr val="lt1"/>
+          </a:fontRef>
+        </p:style>
+        <p:txBody>
+          <a:bodyPr rtlCol="0" anchor="ctr"/>
+          <a:lstStyle/>
+          <a:p>
+            <a:pPr algn="ctr"/>
+            <a:endParaRPr kumimoji="1" lang="ja-JP" altLang="en-US"/>
+          </a:p>
+        </p:txBody>
+      </p:sp>
+      <p:cxnSp>
+        <p:nvCxnSpPr>
+          <p:cNvPr id="43" name="直線矢印コネクタ 42">
+            <a:extLst>
+              <a:ext uri="{FF2B5EF4-FFF2-40B4-BE49-F238E27FC236}">
+                <a16:creationId xmlns:a16="http://schemas.microsoft.com/office/drawing/2014/main" id="{FABD2D5E-7C31-4B38-9B5B-02E67FACF8A5}"/>
+              </a:ext>
+            </a:extLst>
+          </p:cNvPr>
+          <p:cNvCxnSpPr>
+            <a:cxnSpLocks/>
+          </p:cNvCxnSpPr>
+          <p:nvPr/>
+        </p:nvCxnSpPr>
+        <p:spPr>
+          <a:xfrm flipH="1">
+            <a:off x="3691466" y="6062133"/>
+            <a:ext cx="2523067" cy="0"/>
+          </a:xfrm>
+          <a:prstGeom prst="straightConnector1">
+            <a:avLst/>
+          </a:prstGeom>
+          <a:ln w="38100">
+            <a:solidFill>
+              <a:srgbClr val="FF0000"/>
+            </a:solidFill>
+            <a:headEnd type="triangle"/>
+            <a:tailEnd type="triangle"/>
+          </a:ln>
+        </p:spPr>
+        <p:style>
+          <a:lnRef idx="1">
+            <a:schemeClr val="accent1"/>
+          </a:lnRef>
+          <a:fillRef idx="0">
+            <a:schemeClr val="accent1"/>
+          </a:fillRef>
+          <a:effectRef idx="0">
+            <a:schemeClr val="accent1"/>
+          </a:effectRef>
+          <a:fontRef idx="minor">
+            <a:schemeClr val="tx1"/>
+          </a:fontRef>
+        </p:style>
+      </p:cxnSp>
+      <p:sp>
+        <p:nvSpPr>
+          <p:cNvPr id="47" name="テキスト ボックス 46">
+            <a:extLst>
+              <a:ext uri="{FF2B5EF4-FFF2-40B4-BE49-F238E27FC236}">
+                <a16:creationId xmlns:a16="http://schemas.microsoft.com/office/drawing/2014/main" id="{5FEF7A07-8C74-4F59-8048-88A0DD146EE4}"/>
+              </a:ext>
+            </a:extLst>
+          </p:cNvPr>
+          <p:cNvSpPr txBox="1"/>
+          <p:nvPr/>
+        </p:nvSpPr>
+        <p:spPr>
+          <a:xfrm>
+            <a:off x="4625934" y="6181380"/>
+            <a:ext cx="885866" cy="369332"/>
+          </a:xfrm>
+          <a:prstGeom prst="rect">
+            <a:avLst/>
+          </a:prstGeom>
+          <a:noFill/>
+        </p:spPr>
+        <p:txBody>
+          <a:bodyPr wrap="square">
+            <a:spAutoFit/>
+          </a:bodyPr>
+          <a:lstStyle/>
+          <a:p>
+            <a:r>
+              <a:rPr lang="ja-JP" altLang="en-US" sz="1800" dirty="0"/>
+              <a:t>何</a:t>
+            </a:r>
+            <a:r>
+              <a:rPr lang="en-US" altLang="ja-JP" sz="1800" dirty="0"/>
+              <a:t>m</a:t>
+            </a:r>
+            <a:r>
+              <a:rPr lang="ja-JP" altLang="en-US" sz="1800" dirty="0"/>
+              <a:t>？</a:t>
+            </a:r>
+            <a:endParaRPr lang="ja-JP" altLang="en-US" dirty="0"/>
+          </a:p>
+        </p:txBody>
+      </p:sp>
+    </p:spTree>
+    <p:extLst>
+      <p:ext uri="{BB962C8B-B14F-4D97-AF65-F5344CB8AC3E}">
+        <p14:creationId xmlns:p14="http://schemas.microsoft.com/office/powerpoint/2010/main" val="700915699"/>
+      </p:ext>
+    </p:extLst>
+  </p:cSld>
+  <p:clrMapOvr>
+    <a:masterClrMapping/>
+  </p:clrMapOvr>
+</p:sld>
+</file>
+
+<file path=ppt/slides/slide22.xml><?xml version="1.0" encoding="utf-8"?>
+<p:sld xmlns:a="http://schemas.openxmlformats.org/drawingml/2006/main" xmlns:r="http://schemas.openxmlformats.org/officeDocument/2006/relationships" xmlns:p="http://schemas.openxmlformats.org/presentationml/2006/main">
+  <p:cSld>
+    <p:spTree>
+      <p:nvGrpSpPr>
+        <p:cNvPr id="1" name=""/>
+        <p:cNvGrpSpPr/>
+        <p:nvPr/>
+      </p:nvGrpSpPr>
+      <p:grpSpPr>
+        <a:xfrm>
+          <a:off x="0" y="0"/>
+          <a:ext cx="0" cy="0"/>
+          <a:chOff x="0" y="0"/>
+          <a:chExt cx="0" cy="0"/>
+        </a:xfrm>
+      </p:grpSpPr>
+      <p:sp>
+        <p:nvSpPr>
+          <p:cNvPr id="4" name="テキスト ボックス 3">
+            <a:extLst>
+              <a:ext uri="{FF2B5EF4-FFF2-40B4-BE49-F238E27FC236}">
+                <a16:creationId xmlns:a16="http://schemas.microsoft.com/office/drawing/2014/main" id="{5A13BF46-B8C5-48AA-8308-C9ECFF431A18}"/>
+              </a:ext>
+            </a:extLst>
+          </p:cNvPr>
+          <p:cNvSpPr txBox="1"/>
+          <p:nvPr/>
+        </p:nvSpPr>
+        <p:spPr>
+          <a:xfrm>
+            <a:off x="567542" y="491954"/>
+            <a:ext cx="5461752" cy="584775"/>
+          </a:xfrm>
+          <a:prstGeom prst="rect">
+            <a:avLst/>
+          </a:prstGeom>
+          <a:noFill/>
+        </p:spPr>
+        <p:txBody>
+          <a:bodyPr wrap="none" rtlCol="0">
+            <a:spAutoFit/>
+          </a:bodyPr>
+          <a:lstStyle/>
+          <a:p>
+            <a:r>
+              <a:rPr kumimoji="1" lang="en-US" altLang="ja-JP" sz="3200" b="1" u="sng" dirty="0"/>
+              <a:t>2</a:t>
+            </a:r>
+            <a:r>
+              <a:rPr kumimoji="1" lang="ja-JP" altLang="en-US" sz="3200" b="1" u="sng" dirty="0"/>
+              <a:t>次元、３次元の運動 例題３</a:t>
+            </a:r>
+            <a:endParaRPr kumimoji="1" lang="en-US" altLang="ja-JP" sz="3200" b="1" u="sng" dirty="0"/>
+          </a:p>
+        </p:txBody>
+      </p:sp>
+      <mc:AlternateContent xmlns:mc="http://schemas.openxmlformats.org/markup-compatibility/2006">
+        <mc:Choice xmlns:a14="http://schemas.microsoft.com/office/drawing/2010/main" Requires="a14">
+          <p:graphicFrame>
+            <p:nvGraphicFramePr>
+              <p:cNvPr id="2" name="表 2">
+                <a:extLst>
+                  <a:ext uri="{FF2B5EF4-FFF2-40B4-BE49-F238E27FC236}">
+                    <a16:creationId xmlns:a16="http://schemas.microsoft.com/office/drawing/2014/main" id="{428ED951-9E8E-4491-A663-CAD2A0560B47}"/>
+                  </a:ext>
+                </a:extLst>
+              </p:cNvPr>
+              <p:cNvGraphicFramePr>
+                <a:graphicFrameLocks noGrp="1"/>
+              </p:cNvGraphicFramePr>
+              <p:nvPr>
+                <p:extLst>
+                  <p:ext uri="{D42A27DB-BD31-4B8C-83A1-F6EECF244321}">
+                    <p14:modId xmlns:p14="http://schemas.microsoft.com/office/powerpoint/2010/main" val="1148218362"/>
+                  </p:ext>
+                </p:extLst>
+              </p:nvPr>
+            </p:nvGraphicFramePr>
+            <p:xfrm>
+              <a:off x="617169" y="3530599"/>
+              <a:ext cx="8128000" cy="1529779"/>
+            </p:xfrm>
+            <a:graphic>
+              <a:graphicData uri="http://schemas.openxmlformats.org/drawingml/2006/table">
+                <a:tbl>
+                  <a:tblPr firstRow="1" bandRow="1">
+                    <a:tableStyleId>{5C22544A-7EE6-4342-B048-85BDC9FD1C3A}</a:tableStyleId>
+                  </a:tblPr>
+                  <a:tblGrid>
+                    <a:gridCol w="4488231">
+                      <a:extLst>
+                        <a:ext uri="{9D8B030D-6E8A-4147-A177-3AD203B41FA5}">
+                          <a16:colId xmlns:a16="http://schemas.microsoft.com/office/drawing/2014/main" val="3600349107"/>
+                        </a:ext>
+                      </a:extLst>
+                    </a:gridCol>
+                    <a:gridCol w="3639769">
+                      <a:extLst>
+                        <a:ext uri="{9D8B030D-6E8A-4147-A177-3AD203B41FA5}">
+                          <a16:colId xmlns:a16="http://schemas.microsoft.com/office/drawing/2014/main" val="3086272440"/>
+                        </a:ext>
+                      </a:extLst>
+                    </a:gridCol>
+                  </a:tblGrid>
+                  <a:tr h="370840">
+                    <a:tc>
+                      <a:txBody>
+                        <a:bodyPr/>
+                        <a:lstStyle/>
+                        <a:p>
+                          <a:r>
+                            <a:rPr kumimoji="1" lang="ja-JP" altLang="en-US" dirty="0"/>
+                            <a:t>わかっている量</a:t>
+                          </a:r>
+                        </a:p>
+                      </a:txBody>
+                      <a:tcPr/>
+                    </a:tc>
+                    <a:tc>
+                      <a:txBody>
+                        <a:bodyPr/>
+                        <a:lstStyle/>
+                        <a:p>
+                          <a:r>
+                            <a:rPr kumimoji="1" lang="ja-JP" altLang="en-US" dirty="0"/>
+                            <a:t>求める量</a:t>
+                          </a:r>
+                        </a:p>
+                      </a:txBody>
+                      <a:tcPr/>
+                    </a:tc>
+                    <a:extLst>
+                      <a:ext uri="{0D108BD9-81ED-4DB2-BD59-A6C34878D82A}">
+                        <a16:rowId xmlns:a16="http://schemas.microsoft.com/office/drawing/2014/main" val="4246383701"/>
+                      </a:ext>
+                    </a:extLst>
+                  </a:tr>
+                  <a:tr h="370840">
+                    <a:tc>
+                      <a:txBody>
+                        <a:bodyPr/>
+                        <a:lstStyle/>
+                        <a:p>
+                          <a:r>
+                            <a:rPr kumimoji="1" lang="ja-JP" altLang="en-US" b="0" dirty="0"/>
+                            <a:t>初速度</a:t>
+                          </a:r>
+                          <a14:m>
+                            <m:oMath xmlns:m="http://schemas.openxmlformats.org/officeDocument/2006/math">
+                              <m:r>
+                                <a:rPr kumimoji="1" lang="ja-JP" altLang="en-US" b="0" i="1" smtClean="0">
+                                  <a:latin typeface="Cambria Math" panose="02040503050406030204" pitchFamily="18" charset="0"/>
+                                </a:rPr>
+                                <m:t>：</m:t>
+                              </m:r>
+                              <m:r>
+                                <a:rPr kumimoji="1" lang="en-US" altLang="ja-JP" b="0" i="1" smtClean="0">
+                                  <a:latin typeface="Cambria Math" panose="02040503050406030204" pitchFamily="18" charset="0"/>
+                                </a:rPr>
+                                <m:t>𝑣𝑖𝑥</m:t>
+                              </m:r>
+                              <m:r>
+                                <a:rPr kumimoji="1" lang="en-US" altLang="ja-JP" b="0" i="1" smtClean="0">
+                                  <a:latin typeface="Cambria Math" panose="02040503050406030204" pitchFamily="18" charset="0"/>
+                                </a:rPr>
+                                <m:t>=10.0</m:t>
+                              </m:r>
+                              <m:r>
+                                <a:rPr kumimoji="1" lang="en-US" altLang="ja-JP" b="0" i="1" smtClean="0">
+                                  <a:latin typeface="Cambria Math" panose="02040503050406030204" pitchFamily="18" charset="0"/>
+                                </a:rPr>
+                                <m:t>𝑚</m:t>
+                              </m:r>
+                              <m:r>
+                                <a:rPr kumimoji="1" lang="en-US" altLang="ja-JP" b="0" i="1" smtClean="0">
+                                  <a:latin typeface="Cambria Math" panose="02040503050406030204" pitchFamily="18" charset="0"/>
+                                </a:rPr>
+                                <m:t>/</m:t>
+                              </m:r>
+                              <m:r>
+                                <a:rPr kumimoji="1" lang="ja-JP" altLang="en-US" b="0" i="1" smtClean="0">
+                                  <a:latin typeface="Cambria Math" panose="02040503050406030204" pitchFamily="18" charset="0"/>
+                                </a:rPr>
+                                <m:t>秒</m:t>
+                              </m:r>
+                              <m:r>
+                                <a:rPr kumimoji="1" lang="en-US" altLang="ja-JP" b="0" i="1" smtClean="0">
+                                  <a:latin typeface="Cambria Math" panose="02040503050406030204" pitchFamily="18" charset="0"/>
+                                </a:rPr>
+                                <m:t>,</m:t>
+                              </m:r>
+                              <m:r>
+                                <a:rPr kumimoji="1" lang="en-US" altLang="ja-JP" b="0" i="1" smtClean="0">
+                                  <a:latin typeface="Cambria Math" panose="02040503050406030204" pitchFamily="18" charset="0"/>
+                                </a:rPr>
+                                <m:t>𝑣𝑖𝑦</m:t>
+                              </m:r>
+                              <m:r>
+                                <a:rPr kumimoji="1" lang="en-US" altLang="ja-JP" b="0" i="1" smtClean="0">
+                                  <a:latin typeface="Cambria Math" panose="02040503050406030204" pitchFamily="18" charset="0"/>
+                                </a:rPr>
+                                <m:t>=0</m:t>
+                              </m:r>
+                            </m:oMath>
+                          </a14:m>
+                          <a:endParaRPr kumimoji="1" lang="ja-JP" altLang="en-US" dirty="0"/>
+                        </a:p>
+                      </a:txBody>
+                      <a:tcPr/>
+                    </a:tc>
+                    <a:tc>
+                      <a:txBody>
+                        <a:bodyPr/>
+                        <a:lstStyle/>
+                        <a:p>
+                          <a:r>
+                            <a:rPr kumimoji="1" lang="ja-JP" altLang="en-US" dirty="0"/>
+                            <a:t>変異：</a:t>
+                          </a:r>
+                          <a14:m>
+                            <m:oMath xmlns:m="http://schemas.openxmlformats.org/officeDocument/2006/math">
+                              <m:r>
+                                <a:rPr kumimoji="1" lang="ja-JP" altLang="en-US" b="0" i="1" dirty="0" smtClean="0">
+                                  <a:latin typeface="Cambria Math" panose="02040503050406030204" pitchFamily="18" charset="0"/>
+                                </a:rPr>
+                                <m:t>⊿</m:t>
+                              </m:r>
+                              <m:r>
+                                <a:rPr kumimoji="1" lang="en-US" altLang="ja-JP" b="0" i="1" smtClean="0">
+                                  <a:latin typeface="Cambria Math" panose="02040503050406030204" pitchFamily="18" charset="0"/>
+                                </a:rPr>
+                                <m:t>𝑥</m:t>
+                              </m:r>
+                              <m:r>
+                                <a:rPr kumimoji="1" lang="en-US" altLang="ja-JP" b="0" i="1" smtClean="0">
+                                  <a:latin typeface="Cambria Math" panose="02040503050406030204" pitchFamily="18" charset="0"/>
+                                </a:rPr>
+                                <m:t>=</m:t>
+                              </m:r>
+                              <m:r>
+                                <a:rPr kumimoji="1" lang="ja-JP" altLang="en-US" b="0" i="1" smtClean="0">
+                                  <a:latin typeface="Cambria Math" panose="02040503050406030204" pitchFamily="18" charset="0"/>
+                                </a:rPr>
+                                <m:t>？</m:t>
+                              </m:r>
+                              <m:r>
+                                <a:rPr kumimoji="1" lang="en-US" altLang="ja-JP" b="0" i="1" smtClean="0">
+                                  <a:latin typeface="Cambria Math" panose="02040503050406030204" pitchFamily="18" charset="0"/>
+                                </a:rPr>
+                                <m:t>𝑚</m:t>
+                              </m:r>
+                            </m:oMath>
+                          </a14:m>
+                          <a:endParaRPr kumimoji="1" lang="ja-JP" altLang="en-US" dirty="0"/>
+                        </a:p>
+                      </a:txBody>
+                      <a:tcPr/>
+                    </a:tc>
+                    <a:extLst>
+                      <a:ext uri="{0D108BD9-81ED-4DB2-BD59-A6C34878D82A}">
+                        <a16:rowId xmlns:a16="http://schemas.microsoft.com/office/drawing/2014/main" val="3036573417"/>
+                      </a:ext>
+                    </a:extLst>
+                  </a:tr>
+                  <a:tr h="370840">
+                    <a:tc>
+                      <a:txBody>
+                        <a:bodyPr/>
+                        <a:lstStyle/>
+                        <a:p>
+                          <a:r>
+                            <a:rPr kumimoji="1" lang="ja-JP" altLang="en-US" dirty="0"/>
+                            <a:t>加速度：</a:t>
+                          </a:r>
+                          <a14:m>
+                            <m:oMath xmlns:m="http://schemas.openxmlformats.org/officeDocument/2006/math">
+                              <m:r>
+                                <a:rPr kumimoji="1" lang="en-US" altLang="ja-JP" b="0" i="1" smtClean="0">
+                                  <a:latin typeface="Cambria Math" panose="02040503050406030204" pitchFamily="18" charset="0"/>
+                                </a:rPr>
+                                <m:t>𝑎𝑥</m:t>
+                              </m:r>
+                              <m:r>
+                                <a:rPr kumimoji="1" lang="en-US" altLang="ja-JP" b="0" i="1" smtClean="0">
+                                  <a:latin typeface="Cambria Math" panose="02040503050406030204" pitchFamily="18" charset="0"/>
+                                </a:rPr>
+                                <m:t>=0</m:t>
+                              </m:r>
+                            </m:oMath>
+                          </a14:m>
+                          <a:r>
+                            <a:rPr kumimoji="1" lang="en-US" altLang="ja-JP" dirty="0"/>
+                            <a:t>, </a:t>
+                          </a:r>
+                          <a14:m>
+                            <m:oMath xmlns:m="http://schemas.openxmlformats.org/officeDocument/2006/math">
+                              <m:r>
+                                <a:rPr kumimoji="1" lang="en-US" altLang="ja-JP" b="0" i="1" smtClean="0">
+                                  <a:latin typeface="Cambria Math" panose="02040503050406030204" pitchFamily="18" charset="0"/>
+                                </a:rPr>
+                                <m:t>𝑎𝑦</m:t>
+                              </m:r>
+                              <m:r>
+                                <a:rPr kumimoji="1" lang="en-US" altLang="ja-JP" b="0" i="1" smtClean="0">
+                                  <a:latin typeface="Cambria Math" panose="02040503050406030204" pitchFamily="18" charset="0"/>
+                                </a:rPr>
+                                <m:t>=−9.8</m:t>
+                              </m:r>
+                              <m:r>
+                                <a:rPr kumimoji="1" lang="en-US" altLang="ja-JP" b="0" i="1" smtClean="0">
+                                  <a:latin typeface="Cambria Math" panose="02040503050406030204" pitchFamily="18" charset="0"/>
+                                </a:rPr>
+                                <m:t>𝑚</m:t>
+                              </m:r>
+                              <m:r>
+                                <a:rPr kumimoji="1" lang="en-US" altLang="ja-JP" b="0" i="1" smtClean="0">
+                                  <a:latin typeface="Cambria Math" panose="02040503050406030204" pitchFamily="18" charset="0"/>
+                                </a:rPr>
+                                <m:t>/</m:t>
+                              </m:r>
+                              <m:sSup>
+                                <m:sSupPr>
+                                  <m:ctrlPr>
+                                    <a:rPr kumimoji="1" lang="en-US" altLang="ja-JP" b="0" i="1" smtClean="0">
+                                      <a:latin typeface="Cambria Math" panose="02040503050406030204" pitchFamily="18" charset="0"/>
+                                    </a:rPr>
+                                  </m:ctrlPr>
+                                </m:sSupPr>
+                                <m:e>
+                                  <m:r>
+                                    <a:rPr kumimoji="1" lang="ja-JP" altLang="en-US" b="0" i="1" smtClean="0">
+                                      <a:latin typeface="Cambria Math" panose="02040503050406030204" pitchFamily="18" charset="0"/>
+                                    </a:rPr>
+                                    <m:t>秒</m:t>
+                                  </m:r>
+                                </m:e>
+                                <m:sup>
+                                  <m:r>
+                                    <a:rPr kumimoji="1" lang="en-US" altLang="ja-JP" b="0" i="1" smtClean="0">
+                                      <a:latin typeface="Cambria Math" panose="02040503050406030204" pitchFamily="18" charset="0"/>
+                                    </a:rPr>
+                                    <m:t>2</m:t>
+                                  </m:r>
+                                </m:sup>
+                              </m:sSup>
+                            </m:oMath>
+                          </a14:m>
+                          <a:endParaRPr kumimoji="1" lang="en-US" altLang="ja-JP" b="0" dirty="0"/>
+                        </a:p>
+                      </a:txBody>
+                      <a:tcPr/>
+                    </a:tc>
+                    <a:tc>
+                      <a:txBody>
+                        <a:bodyPr/>
+                        <a:lstStyle/>
+                        <a:p>
+                          <a:endParaRPr kumimoji="1" lang="ja-JP" altLang="en-US" dirty="0"/>
+                        </a:p>
+                      </a:txBody>
+                      <a:tcPr/>
+                    </a:tc>
+                    <a:extLst>
+                      <a:ext uri="{0D108BD9-81ED-4DB2-BD59-A6C34878D82A}">
+                        <a16:rowId xmlns:a16="http://schemas.microsoft.com/office/drawing/2014/main" val="1636434579"/>
+                      </a:ext>
+                    </a:extLst>
+                  </a:tr>
+                  <a:tr h="370840">
+                    <a:tc>
+                      <a:txBody>
+                        <a:bodyPr/>
+                        <a:lstStyle/>
+                        <a:p>
+                          <a:r>
+                            <a:rPr kumimoji="1" lang="ja-JP" altLang="en-US" dirty="0"/>
+                            <a:t>変異：</a:t>
+                          </a:r>
+                          <a14:m>
+                            <m:oMath xmlns:m="http://schemas.openxmlformats.org/officeDocument/2006/math">
+                              <m:r>
+                                <a:rPr kumimoji="1" lang="ja-JP" altLang="en-US" b="0" i="1" dirty="0" smtClean="0">
+                                  <a:latin typeface="Cambria Math" panose="02040503050406030204" pitchFamily="18" charset="0"/>
+                                </a:rPr>
+                                <m:t>⊿</m:t>
+                              </m:r>
+                              <m:r>
+                                <a:rPr kumimoji="1" lang="en-US" altLang="ja-JP" b="0" i="1" smtClean="0">
+                                  <a:latin typeface="Cambria Math" panose="02040503050406030204" pitchFamily="18" charset="0"/>
+                                </a:rPr>
+                                <m:t>𝑦</m:t>
+                              </m:r>
+                              <m:r>
+                                <a:rPr kumimoji="1" lang="en-US" altLang="ja-JP" b="0" i="1" smtClean="0">
+                                  <a:latin typeface="Cambria Math" panose="02040503050406030204" pitchFamily="18" charset="0"/>
+                                </a:rPr>
+                                <m:t>=−8</m:t>
+                              </m:r>
+                              <m:r>
+                                <a:rPr kumimoji="1" lang="en-US" altLang="ja-JP" b="0" i="1" smtClean="0">
+                                  <a:latin typeface="Cambria Math" panose="02040503050406030204" pitchFamily="18" charset="0"/>
+                                </a:rPr>
+                                <m:t>𝑚</m:t>
+                              </m:r>
+                            </m:oMath>
+                          </a14:m>
+                          <a:endParaRPr kumimoji="1" lang="ja-JP" altLang="en-US" dirty="0"/>
+                        </a:p>
+                      </a:txBody>
+                      <a:tcPr/>
+                    </a:tc>
+                    <a:tc>
+                      <a:txBody>
+                        <a:bodyPr/>
+                        <a:lstStyle/>
+                        <a:p>
+                          <a:endParaRPr kumimoji="1" lang="ja-JP" altLang="en-US" dirty="0"/>
+                        </a:p>
+                      </a:txBody>
+                      <a:tcPr/>
+                    </a:tc>
+                    <a:extLst>
+                      <a:ext uri="{0D108BD9-81ED-4DB2-BD59-A6C34878D82A}">
+                        <a16:rowId xmlns:a16="http://schemas.microsoft.com/office/drawing/2014/main" val="1851958693"/>
+                      </a:ext>
+                    </a:extLst>
+                  </a:tr>
+                </a:tbl>
+              </a:graphicData>
+            </a:graphic>
+          </p:graphicFrame>
+        </mc:Choice>
+        <mc:Fallback>
+          <p:graphicFrame>
+            <p:nvGraphicFramePr>
+              <p:cNvPr id="2" name="表 2">
+                <a:extLst>
+                  <a:ext uri="{FF2B5EF4-FFF2-40B4-BE49-F238E27FC236}">
+                    <a16:creationId xmlns:a16="http://schemas.microsoft.com/office/drawing/2014/main" id="{428ED951-9E8E-4491-A663-CAD2A0560B47}"/>
+                  </a:ext>
+                </a:extLst>
+              </p:cNvPr>
+              <p:cNvGraphicFramePr>
+                <a:graphicFrameLocks noGrp="1"/>
+              </p:cNvGraphicFramePr>
+              <p:nvPr>
+                <p:extLst>
+                  <p:ext uri="{D42A27DB-BD31-4B8C-83A1-F6EECF244321}">
+                    <p14:modId xmlns:p14="http://schemas.microsoft.com/office/powerpoint/2010/main" val="1148218362"/>
+                  </p:ext>
+                </p:extLst>
+              </p:nvPr>
+            </p:nvGraphicFramePr>
+            <p:xfrm>
+              <a:off x="617169" y="3530599"/>
+              <a:ext cx="8128000" cy="1529779"/>
+            </p:xfrm>
+            <a:graphic>
+              <a:graphicData uri="http://schemas.openxmlformats.org/drawingml/2006/table">
+                <a:tbl>
+                  <a:tblPr firstRow="1" bandRow="1">
+                    <a:tableStyleId>{5C22544A-7EE6-4342-B048-85BDC9FD1C3A}</a:tableStyleId>
+                  </a:tblPr>
+                  <a:tblGrid>
+                    <a:gridCol w="4488231">
+                      <a:extLst>
+                        <a:ext uri="{9D8B030D-6E8A-4147-A177-3AD203B41FA5}">
+                          <a16:colId xmlns:a16="http://schemas.microsoft.com/office/drawing/2014/main" val="3600349107"/>
+                        </a:ext>
+                      </a:extLst>
+                    </a:gridCol>
+                    <a:gridCol w="3639769">
+                      <a:extLst>
+                        <a:ext uri="{9D8B030D-6E8A-4147-A177-3AD203B41FA5}">
+                          <a16:colId xmlns:a16="http://schemas.microsoft.com/office/drawing/2014/main" val="3086272440"/>
+                        </a:ext>
+                      </a:extLst>
+                    </a:gridCol>
+                  </a:tblGrid>
+                  <a:tr h="370840">
+                    <a:tc>
+                      <a:txBody>
+                        <a:bodyPr/>
+                        <a:lstStyle/>
+                        <a:p>
+                          <a:r>
+                            <a:rPr kumimoji="1" lang="ja-JP" altLang="en-US" dirty="0"/>
+                            <a:t>わかっている量</a:t>
+                          </a:r>
+                        </a:p>
+                      </a:txBody>
+                      <a:tcPr/>
+                    </a:tc>
+                    <a:tc>
+                      <a:txBody>
+                        <a:bodyPr/>
+                        <a:lstStyle/>
+                        <a:p>
+                          <a:r>
+                            <a:rPr kumimoji="1" lang="ja-JP" altLang="en-US" dirty="0"/>
+                            <a:t>求める量</a:t>
+                          </a:r>
+                        </a:p>
+                      </a:txBody>
+                      <a:tcPr/>
+                    </a:tc>
+                    <a:extLst>
+                      <a:ext uri="{0D108BD9-81ED-4DB2-BD59-A6C34878D82A}">
+                        <a16:rowId xmlns:a16="http://schemas.microsoft.com/office/drawing/2014/main" val="4246383701"/>
+                      </a:ext>
+                    </a:extLst>
+                  </a:tr>
+                  <a:tr h="370840">
+                    <a:tc>
+                      <a:txBody>
+                        <a:bodyPr/>
+                        <a:lstStyle/>
+                        <a:p>
+                          <a:endParaRPr lang="ja-JP"/>
+                        </a:p>
+                      </a:txBody>
+                      <a:tcPr>
+                        <a:blipFill>
+                          <a:blip r:embed="rId2"/>
+                          <a:stretch>
+                            <a:fillRect l="-136" t="-108197" r="-81547" b="-237705"/>
+                          </a:stretch>
+                        </a:blipFill>
+                      </a:tcPr>
+                    </a:tc>
+                    <a:tc>
+                      <a:txBody>
+                        <a:bodyPr/>
+                        <a:lstStyle/>
+                        <a:p>
+                          <a:endParaRPr lang="ja-JP"/>
+                        </a:p>
+                      </a:txBody>
+                      <a:tcPr>
+                        <a:blipFill>
+                          <a:blip r:embed="rId2"/>
+                          <a:stretch>
+                            <a:fillRect l="-123618" t="-108197" r="-670" b="-237705"/>
+                          </a:stretch>
+                        </a:blipFill>
+                      </a:tcPr>
+                    </a:tc>
+                    <a:extLst>
+                      <a:ext uri="{0D108BD9-81ED-4DB2-BD59-A6C34878D82A}">
+                        <a16:rowId xmlns:a16="http://schemas.microsoft.com/office/drawing/2014/main" val="3036573417"/>
+                      </a:ext>
+                    </a:extLst>
+                  </a:tr>
+                  <a:tr h="417259">
+                    <a:tc>
+                      <a:txBody>
+                        <a:bodyPr/>
+                        <a:lstStyle/>
+                        <a:p>
+                          <a:endParaRPr lang="ja-JP"/>
+                        </a:p>
+                      </a:txBody>
+                      <a:tcPr>
+                        <a:blipFill>
+                          <a:blip r:embed="rId2"/>
+                          <a:stretch>
+                            <a:fillRect l="-136" t="-184058" r="-81547" b="-110145"/>
+                          </a:stretch>
+                        </a:blipFill>
+                      </a:tcPr>
+                    </a:tc>
+                    <a:tc>
+                      <a:txBody>
+                        <a:bodyPr/>
+                        <a:lstStyle/>
+                        <a:p>
+                          <a:endParaRPr kumimoji="1" lang="ja-JP" altLang="en-US" dirty="0"/>
+                        </a:p>
+                      </a:txBody>
+                      <a:tcPr/>
+                    </a:tc>
+                    <a:extLst>
+                      <a:ext uri="{0D108BD9-81ED-4DB2-BD59-A6C34878D82A}">
+                        <a16:rowId xmlns:a16="http://schemas.microsoft.com/office/drawing/2014/main" val="1636434579"/>
+                      </a:ext>
+                    </a:extLst>
+                  </a:tr>
+                  <a:tr h="370840">
+                    <a:tc>
+                      <a:txBody>
+                        <a:bodyPr/>
+                        <a:lstStyle/>
+                        <a:p>
+                          <a:endParaRPr lang="ja-JP"/>
+                        </a:p>
+                      </a:txBody>
+                      <a:tcPr>
+                        <a:blipFill>
+                          <a:blip r:embed="rId2"/>
+                          <a:stretch>
+                            <a:fillRect l="-136" t="-321311" r="-81547" b="-24590"/>
+                          </a:stretch>
+                        </a:blipFill>
+                      </a:tcPr>
+                    </a:tc>
+                    <a:tc>
+                      <a:txBody>
+                        <a:bodyPr/>
+                        <a:lstStyle/>
+                        <a:p>
+                          <a:endParaRPr kumimoji="1" lang="ja-JP" altLang="en-US" dirty="0"/>
+                        </a:p>
+                      </a:txBody>
+                      <a:tcPr/>
+                    </a:tc>
+                    <a:extLst>
+                      <a:ext uri="{0D108BD9-81ED-4DB2-BD59-A6C34878D82A}">
+                        <a16:rowId xmlns:a16="http://schemas.microsoft.com/office/drawing/2014/main" val="1851958693"/>
+                      </a:ext>
+                    </a:extLst>
+                  </a:tr>
+                </a:tbl>
+              </a:graphicData>
+            </a:graphic>
+          </p:graphicFrame>
+        </mc:Fallback>
+      </mc:AlternateContent>
+      <mc:AlternateContent xmlns:mc="http://schemas.openxmlformats.org/markup-compatibility/2006">
+        <mc:Choice xmlns:a14="http://schemas.microsoft.com/office/drawing/2010/main" Requires="a14">
+          <p:sp>
+            <p:nvSpPr>
+              <p:cNvPr id="5" name="テキスト ボックス 4">
+                <a:extLst>
+                  <a:ext uri="{FF2B5EF4-FFF2-40B4-BE49-F238E27FC236}">
+                    <a16:creationId xmlns:a16="http://schemas.microsoft.com/office/drawing/2014/main" id="{BDDC72C4-5202-4095-A3FE-99F2F31BE88B}"/>
+                  </a:ext>
+                </a:extLst>
+              </p:cNvPr>
+              <p:cNvSpPr txBox="1"/>
+              <p:nvPr/>
+            </p:nvSpPr>
+            <p:spPr>
+              <a:xfrm>
+                <a:off x="567542" y="5179906"/>
+                <a:ext cx="7830862" cy="1200329"/>
+              </a:xfrm>
+              <a:prstGeom prst="rect">
+                <a:avLst/>
+              </a:prstGeom>
+              <a:noFill/>
+            </p:spPr>
+            <p:txBody>
+              <a:bodyPr wrap="none" rtlCol="0">
+                <a:spAutoFit/>
+              </a:bodyPr>
+              <a:lstStyle/>
+              <a:p>
+                <a:r>
+                  <a:rPr lang="ja-JP" altLang="en-US" sz="2400" dirty="0"/>
+                  <a:t>水平には加速していないので</a:t>
+                </a:r>
+                <a14:m>
+                  <m:oMath xmlns:m="http://schemas.openxmlformats.org/officeDocument/2006/math">
+                    <m:r>
+                      <a:rPr kumimoji="1" lang="en-US" altLang="ja-JP" sz="2400" b="0" i="1" smtClean="0">
+                        <a:latin typeface="Cambria Math" panose="02040503050406030204" pitchFamily="18" charset="0"/>
+                      </a:rPr>
+                      <m:t>𝑎𝑥</m:t>
+                    </m:r>
+                    <m:r>
+                      <a:rPr kumimoji="1" lang="en-US" altLang="ja-JP" sz="2400" b="0" i="1" smtClean="0">
+                        <a:latin typeface="Cambria Math" panose="02040503050406030204" pitchFamily="18" charset="0"/>
+                      </a:rPr>
+                      <m:t>=0</m:t>
+                    </m:r>
+                  </m:oMath>
+                </a14:m>
+                <a:r>
+                  <a:rPr lang="ja-JP" altLang="en-US" sz="2400" dirty="0"/>
+                  <a:t>となります。</a:t>
+                </a:r>
+                <a:endParaRPr lang="en-US" altLang="ja-JP" sz="2400" dirty="0"/>
+              </a:p>
+              <a:p>
+                <a:r>
+                  <a:rPr lang="ja-JP" altLang="en-US" sz="2400" dirty="0"/>
+                  <a:t>また落下開始の瞬間速度は</a:t>
+                </a:r>
+                <a:r>
+                  <a:rPr lang="en-US" altLang="ja-JP" sz="2400" dirty="0"/>
+                  <a:t>0</a:t>
+                </a:r>
+                <a:r>
+                  <a:rPr lang="ja-JP" altLang="en-US" sz="2400" dirty="0"/>
+                  <a:t>なので</a:t>
+                </a:r>
+                <a14:m>
+                  <m:oMath xmlns:m="http://schemas.openxmlformats.org/officeDocument/2006/math">
+                    <m:r>
+                      <a:rPr kumimoji="1" lang="en-US" altLang="ja-JP" sz="2400" b="0" i="1" smtClean="0">
+                        <a:latin typeface="Cambria Math" panose="02040503050406030204" pitchFamily="18" charset="0"/>
+                      </a:rPr>
+                      <m:t>𝑣𝑖𝑦</m:t>
+                    </m:r>
+                    <m:r>
+                      <a:rPr kumimoji="1" lang="en-US" altLang="ja-JP" sz="2400" b="0" i="1" smtClean="0">
+                        <a:latin typeface="Cambria Math" panose="02040503050406030204" pitchFamily="18" charset="0"/>
+                      </a:rPr>
+                      <m:t>=0</m:t>
+                    </m:r>
+                  </m:oMath>
+                </a14:m>
+                <a:r>
+                  <a:rPr lang="ja-JP" altLang="en-US" sz="2400" dirty="0"/>
+                  <a:t>となります。</a:t>
+                </a:r>
+                <a:endParaRPr lang="en-US" altLang="ja-JP" sz="2400" dirty="0"/>
+              </a:p>
+              <a:p>
+                <a:r>
+                  <a:rPr lang="ja-JP" altLang="en-US" sz="2400" dirty="0"/>
+                  <a:t>また下に落下しているので</a:t>
+                </a:r>
+                <a14:m>
+                  <m:oMath xmlns:m="http://schemas.openxmlformats.org/officeDocument/2006/math">
+                    <m:r>
+                      <a:rPr kumimoji="1" lang="ja-JP" altLang="en-US" sz="2400" b="0" i="1" dirty="0" smtClean="0">
+                        <a:latin typeface="Cambria Math" panose="02040503050406030204" pitchFamily="18" charset="0"/>
+                      </a:rPr>
+                      <m:t>⊿</m:t>
+                    </m:r>
+                    <m:r>
+                      <a:rPr kumimoji="1" lang="en-US" altLang="ja-JP" sz="2400" b="0" i="1" smtClean="0">
+                        <a:latin typeface="Cambria Math" panose="02040503050406030204" pitchFamily="18" charset="0"/>
+                      </a:rPr>
+                      <m:t>𝑦</m:t>
+                    </m:r>
+                    <m:r>
+                      <a:rPr kumimoji="1" lang="en-US" altLang="ja-JP" sz="2400" b="0" i="1" smtClean="0">
+                        <a:latin typeface="Cambria Math" panose="02040503050406030204" pitchFamily="18" charset="0"/>
+                      </a:rPr>
+                      <m:t>=−8</m:t>
+                    </m:r>
+                    <m:r>
+                      <a:rPr kumimoji="1" lang="en-US" altLang="ja-JP" sz="2400" b="0" i="1" smtClean="0">
+                        <a:latin typeface="Cambria Math" panose="02040503050406030204" pitchFamily="18" charset="0"/>
+                      </a:rPr>
+                      <m:t>𝑚</m:t>
+                    </m:r>
+                  </m:oMath>
+                </a14:m>
+                <a:r>
+                  <a:rPr lang="ja-JP" altLang="en-US" sz="2400" dirty="0"/>
+                  <a:t>となります。</a:t>
+                </a:r>
+                <a:endParaRPr lang="en-US" altLang="ja-JP" sz="2400" dirty="0"/>
+              </a:p>
+            </p:txBody>
+          </p:sp>
+        </mc:Choice>
+        <mc:Fallback>
+          <p:sp>
+            <p:nvSpPr>
+              <p:cNvPr id="5" name="テキスト ボックス 4">
+                <a:extLst>
+                  <a:ext uri="{FF2B5EF4-FFF2-40B4-BE49-F238E27FC236}">
+                    <a16:creationId xmlns:a16="http://schemas.microsoft.com/office/drawing/2014/main" id="{BDDC72C4-5202-4095-A3FE-99F2F31BE88B}"/>
+                  </a:ext>
+                </a:extLst>
+              </p:cNvPr>
+              <p:cNvSpPr txBox="1">
+                <a:spLocks noRot="1" noChangeAspect="1" noMove="1" noResize="1" noEditPoints="1" noAdjustHandles="1" noChangeArrowheads="1" noChangeShapeType="1" noTextEdit="1"/>
+              </p:cNvSpPr>
+              <p:nvPr/>
+            </p:nvSpPr>
+            <p:spPr>
+              <a:xfrm>
+                <a:off x="567542" y="5179906"/>
+                <a:ext cx="7830862" cy="1200329"/>
+              </a:xfrm>
+              <a:prstGeom prst="rect">
+                <a:avLst/>
+              </a:prstGeom>
+              <a:blipFill>
+                <a:blip r:embed="rId3"/>
+                <a:stretch>
+                  <a:fillRect l="-1167" t="-4061" r="-233" b="-10660"/>
+                </a:stretch>
+              </a:blipFill>
+            </p:spPr>
+            <p:txBody>
+              <a:bodyPr/>
+              <a:lstStyle/>
+              <a:p>
+                <a:r>
+                  <a:rPr lang="ja-JP" altLang="en-US">
+                    <a:noFill/>
+                  </a:rPr>
+                  <a:t> </a:t>
+                </a:r>
+              </a:p>
+            </p:txBody>
+          </p:sp>
+        </mc:Fallback>
+      </mc:AlternateContent>
+      <p:sp>
+        <p:nvSpPr>
+          <p:cNvPr id="7" name="テキスト ボックス 6">
+            <a:extLst>
+              <a:ext uri="{FF2B5EF4-FFF2-40B4-BE49-F238E27FC236}">
+                <a16:creationId xmlns:a16="http://schemas.microsoft.com/office/drawing/2014/main" id="{E8AA9D1A-D420-4A0F-9DEE-FFB7145EE62A}"/>
+              </a:ext>
+            </a:extLst>
+          </p:cNvPr>
+          <p:cNvSpPr txBox="1"/>
+          <p:nvPr/>
+        </p:nvSpPr>
+        <p:spPr>
+          <a:xfrm>
+            <a:off x="567542" y="1216429"/>
+            <a:ext cx="7528023" cy="2308324"/>
+          </a:xfrm>
+          <a:prstGeom prst="rect">
+            <a:avLst/>
+          </a:prstGeom>
+          <a:noFill/>
+        </p:spPr>
+        <p:txBody>
+          <a:bodyPr wrap="none" rtlCol="0">
+            <a:spAutoFit/>
+          </a:bodyPr>
+          <a:lstStyle/>
+          <a:p>
+            <a:r>
+              <a:rPr lang="ja-JP" altLang="en-US" sz="2400" dirty="0"/>
+              <a:t>ゲーム中のキャラクターが</a:t>
+            </a:r>
+            <a:r>
+              <a:rPr lang="en-US" altLang="ja-JP" sz="2400" dirty="0"/>
+              <a:t>10m/</a:t>
+            </a:r>
+            <a:r>
+              <a:rPr lang="ja-JP" altLang="en-US" sz="2400" dirty="0"/>
+              <a:t>秒で移動しており、</a:t>
+            </a:r>
+            <a:endParaRPr lang="en-US" altLang="ja-JP" sz="2400" dirty="0"/>
+          </a:p>
+          <a:p>
+            <a:r>
+              <a:rPr lang="ja-JP" altLang="en-US" sz="2400" dirty="0"/>
+              <a:t>高さ</a:t>
+            </a:r>
+            <a:r>
+              <a:rPr lang="en-US" altLang="ja-JP" sz="2400" dirty="0"/>
+              <a:t>8m</a:t>
+            </a:r>
+            <a:r>
+              <a:rPr lang="ja-JP" altLang="en-US" sz="2400" dirty="0"/>
+              <a:t>の崖から落下しました。</a:t>
+            </a:r>
+            <a:endParaRPr lang="en-US" altLang="ja-JP" sz="2400" dirty="0"/>
+          </a:p>
+          <a:p>
+            <a:r>
+              <a:rPr lang="ja-JP" altLang="en-US" sz="2400" dirty="0"/>
+              <a:t>崖から着地地点までの水平距離は何</a:t>
+            </a:r>
+            <a:r>
+              <a:rPr lang="en-US" altLang="ja-JP" sz="2400" dirty="0"/>
+              <a:t>m</a:t>
+            </a:r>
+            <a:r>
+              <a:rPr lang="ja-JP" altLang="en-US" sz="2400" dirty="0"/>
+              <a:t>か求めなさい。</a:t>
+            </a:r>
+            <a:endParaRPr lang="en-US" altLang="ja-JP" sz="2400" dirty="0"/>
+          </a:p>
+          <a:p>
+            <a:endParaRPr lang="en-US" altLang="ja-JP" sz="2400" dirty="0"/>
+          </a:p>
+          <a:p>
+            <a:r>
+              <a:rPr lang="ja-JP" altLang="en-US" sz="2400" b="1" dirty="0">
+                <a:solidFill>
+                  <a:srgbClr val="FF0000"/>
+                </a:solidFill>
+              </a:rPr>
+              <a:t>■解答</a:t>
+            </a:r>
+            <a:endParaRPr lang="en-US" altLang="ja-JP" sz="2400" b="1" dirty="0">
+              <a:solidFill>
+                <a:srgbClr val="FF0000"/>
+              </a:solidFill>
+            </a:endParaRPr>
+          </a:p>
+          <a:p>
+            <a:r>
+              <a:rPr lang="ja-JP" altLang="en-US" sz="2400" dirty="0"/>
+              <a:t>わかっている量を洗い出します</a:t>
+            </a:r>
+            <a:endParaRPr lang="en-US" altLang="ja-JP" sz="2400" dirty="0"/>
+          </a:p>
+        </p:txBody>
+      </p:sp>
+    </p:spTree>
+    <p:extLst>
+      <p:ext uri="{BB962C8B-B14F-4D97-AF65-F5344CB8AC3E}">
+        <p14:creationId xmlns:p14="http://schemas.microsoft.com/office/powerpoint/2010/main" val="3424470602"/>
+      </p:ext>
+    </p:extLst>
+  </p:cSld>
+  <p:clrMapOvr>
+    <a:masterClrMapping/>
+  </p:clrMapOvr>
+</p:sld>
+</file>
+
+<file path=ppt/slides/slide23.xml><?xml version="1.0" encoding="utf-8"?>
+<p:sld xmlns:a="http://schemas.openxmlformats.org/drawingml/2006/main" xmlns:r="http://schemas.openxmlformats.org/officeDocument/2006/relationships" xmlns:p="http://schemas.openxmlformats.org/presentationml/2006/main">
+  <p:cSld>
+    <p:spTree>
+      <p:nvGrpSpPr>
+        <p:cNvPr id="1" name=""/>
+        <p:cNvGrpSpPr/>
+        <p:nvPr/>
+      </p:nvGrpSpPr>
+      <p:grpSpPr>
+        <a:xfrm>
+          <a:off x="0" y="0"/>
+          <a:ext cx="0" cy="0"/>
+          <a:chOff x="0" y="0"/>
+          <a:chExt cx="0" cy="0"/>
+        </a:xfrm>
+      </p:grpSpPr>
+      <p:sp>
+        <p:nvSpPr>
+          <p:cNvPr id="4" name="テキスト ボックス 3">
+            <a:extLst>
+              <a:ext uri="{FF2B5EF4-FFF2-40B4-BE49-F238E27FC236}">
+                <a16:creationId xmlns:a16="http://schemas.microsoft.com/office/drawing/2014/main" id="{5A13BF46-B8C5-48AA-8308-C9ECFF431A18}"/>
+              </a:ext>
+            </a:extLst>
+          </p:cNvPr>
+          <p:cNvSpPr txBox="1"/>
+          <p:nvPr/>
+        </p:nvSpPr>
+        <p:spPr>
+          <a:xfrm>
+            <a:off x="567542" y="491954"/>
+            <a:ext cx="5461752" cy="584775"/>
+          </a:xfrm>
+          <a:prstGeom prst="rect">
+            <a:avLst/>
+          </a:prstGeom>
+          <a:noFill/>
+        </p:spPr>
+        <p:txBody>
+          <a:bodyPr wrap="none" rtlCol="0">
+            <a:spAutoFit/>
+          </a:bodyPr>
+          <a:lstStyle/>
+          <a:p>
+            <a:r>
+              <a:rPr kumimoji="1" lang="en-US" altLang="ja-JP" sz="3200" b="1" u="sng" dirty="0"/>
+              <a:t>2</a:t>
+            </a:r>
+            <a:r>
+              <a:rPr kumimoji="1" lang="ja-JP" altLang="en-US" sz="3200" b="1" u="sng" dirty="0"/>
+              <a:t>次元、３次元の運動 例題３</a:t>
+            </a:r>
+            <a:endParaRPr kumimoji="1" lang="en-US" altLang="ja-JP" sz="3200" b="1" u="sng" dirty="0"/>
+          </a:p>
+        </p:txBody>
+      </p:sp>
+      <mc:AlternateContent xmlns:mc="http://schemas.openxmlformats.org/markup-compatibility/2006">
+        <mc:Choice xmlns:a14="http://schemas.microsoft.com/office/drawing/2010/main" Requires="a14">
+          <p:sp>
+            <p:nvSpPr>
+              <p:cNvPr id="7" name="テキスト ボックス 6">
+                <a:extLst>
+                  <a:ext uri="{FF2B5EF4-FFF2-40B4-BE49-F238E27FC236}">
+                    <a16:creationId xmlns:a16="http://schemas.microsoft.com/office/drawing/2014/main" id="{E8AA9D1A-D420-4A0F-9DEE-FFB7145EE62A}"/>
+                  </a:ext>
+                </a:extLst>
+              </p:cNvPr>
+              <p:cNvSpPr txBox="1"/>
+              <p:nvPr/>
+            </p:nvSpPr>
+            <p:spPr>
+              <a:xfrm>
+                <a:off x="567542" y="1216429"/>
+                <a:ext cx="10304872" cy="6461641"/>
+              </a:xfrm>
+              <a:prstGeom prst="rect">
+                <a:avLst/>
+              </a:prstGeom>
+              <a:noFill/>
+            </p:spPr>
+            <p:txBody>
+              <a:bodyPr wrap="none" rtlCol="0">
+                <a:spAutoFit/>
+              </a:bodyPr>
+              <a:lstStyle/>
+              <a:p>
+                <a:r>
+                  <a:rPr lang="ja-JP" altLang="en-US" sz="2400" dirty="0"/>
+                  <a:t>ゲーム中のキャラクターが</a:t>
+                </a:r>
+                <a:r>
+                  <a:rPr lang="en-US" altLang="ja-JP" sz="2400" dirty="0"/>
+                  <a:t>10m/</a:t>
+                </a:r>
+                <a:r>
+                  <a:rPr lang="ja-JP" altLang="en-US" sz="2400" dirty="0"/>
+                  <a:t>秒で移動しており、</a:t>
+                </a:r>
+                <a:endParaRPr lang="en-US" altLang="ja-JP" sz="2400" dirty="0"/>
+              </a:p>
+              <a:p>
+                <a:r>
+                  <a:rPr lang="ja-JP" altLang="en-US" sz="2400" dirty="0"/>
+                  <a:t>高さ</a:t>
+                </a:r>
+                <a:r>
+                  <a:rPr lang="en-US" altLang="ja-JP" sz="2400" dirty="0"/>
+                  <a:t>8m</a:t>
+                </a:r>
+                <a:r>
+                  <a:rPr lang="ja-JP" altLang="en-US" sz="2400" dirty="0"/>
+                  <a:t>の崖から落下しました。</a:t>
+                </a:r>
+                <a:endParaRPr lang="en-US" altLang="ja-JP" sz="2400" dirty="0"/>
+              </a:p>
+              <a:p>
+                <a:r>
+                  <a:rPr lang="ja-JP" altLang="en-US" sz="2400" dirty="0"/>
+                  <a:t>崖から着地地点までの水平距離は何</a:t>
+                </a:r>
+                <a:r>
+                  <a:rPr lang="en-US" altLang="ja-JP" sz="2400" dirty="0"/>
+                  <a:t>m</a:t>
+                </a:r>
+                <a:r>
+                  <a:rPr lang="ja-JP" altLang="en-US" sz="2400" dirty="0"/>
+                  <a:t>か求めなさい。</a:t>
+                </a:r>
+                <a:endParaRPr lang="en-US" altLang="ja-JP" sz="2400" dirty="0"/>
+              </a:p>
+              <a:p>
+                <a:endParaRPr lang="en-US" altLang="ja-JP" sz="2400" dirty="0"/>
+              </a:p>
+              <a:p>
+                <a:r>
+                  <a:rPr lang="ja-JP" altLang="en-US" sz="2400" b="1" dirty="0">
+                    <a:solidFill>
+                      <a:srgbClr val="FF0000"/>
+                    </a:solidFill>
+                  </a:rPr>
+                  <a:t>■解答</a:t>
+                </a:r>
+                <a:endParaRPr lang="en-US" altLang="ja-JP" sz="2400" b="1" dirty="0">
+                  <a:solidFill>
+                    <a:srgbClr val="FF0000"/>
+                  </a:solidFill>
+                </a:endParaRPr>
+              </a:p>
+              <a:p>
+                <a:r>
+                  <a:rPr lang="ja-JP" altLang="en-US" sz="2400" dirty="0"/>
+                  <a:t>変異を求めるには</a:t>
+                </a:r>
+                <a14:m>
+                  <m:oMath xmlns:m="http://schemas.openxmlformats.org/officeDocument/2006/math">
+                    <m:r>
+                      <a:rPr lang="ja-JP" altLang="en-US" sz="2400" i="1" dirty="0">
+                        <a:latin typeface="Cambria Math" panose="02040503050406030204" pitchFamily="18" charset="0"/>
+                      </a:rPr>
+                      <m:t>⊿</m:t>
+                    </m:r>
+                    <m:r>
+                      <a:rPr lang="en-US" altLang="ja-JP" sz="2400" b="0" i="1" dirty="0" smtClean="0">
+                        <a:latin typeface="Cambria Math" panose="02040503050406030204" pitchFamily="18" charset="0"/>
+                      </a:rPr>
+                      <m:t>𝑥</m:t>
+                    </m:r>
+                    <m:r>
+                      <a:rPr lang="en-US" altLang="ja-JP" sz="2400" b="0" i="1" dirty="0" smtClean="0">
+                        <a:latin typeface="Cambria Math" panose="02040503050406030204" pitchFamily="18" charset="0"/>
+                      </a:rPr>
+                      <m:t>=</m:t>
+                    </m:r>
+                    <m:sSub>
+                      <m:sSubPr>
+                        <m:ctrlPr>
+                          <a:rPr lang="en-US" altLang="ja-JP" sz="2400" b="0" i="1" dirty="0" smtClean="0">
+                            <a:latin typeface="Cambria Math" panose="02040503050406030204" pitchFamily="18" charset="0"/>
+                          </a:rPr>
+                        </m:ctrlPr>
+                      </m:sSubPr>
+                      <m:e>
+                        <m:r>
+                          <a:rPr lang="en-US" altLang="ja-JP" sz="2400" b="0" i="1" dirty="0" smtClean="0">
+                            <a:latin typeface="Cambria Math" panose="02040503050406030204" pitchFamily="18" charset="0"/>
+                          </a:rPr>
+                          <m:t>𝑣</m:t>
+                        </m:r>
+                      </m:e>
+                      <m:sub>
+                        <m:r>
+                          <a:rPr lang="en-US" altLang="ja-JP" sz="2400" b="0" i="1" dirty="0" smtClean="0">
+                            <a:latin typeface="Cambria Math" panose="02040503050406030204" pitchFamily="18" charset="0"/>
+                          </a:rPr>
+                          <m:t>𝑥</m:t>
+                        </m:r>
+                      </m:sub>
+                    </m:sSub>
+                    <m:r>
+                      <a:rPr lang="en-US" altLang="ja-JP" sz="2400" b="0" i="1" dirty="0" smtClean="0">
+                        <a:latin typeface="Cambria Math" panose="02040503050406030204" pitchFamily="18" charset="0"/>
+                      </a:rPr>
+                      <m:t>𝑡</m:t>
+                    </m:r>
+                  </m:oMath>
+                </a14:m>
+                <a:r>
+                  <a:rPr lang="ja-JP" altLang="en-US" sz="2400" b="0" dirty="0"/>
+                  <a:t>で良いのですが、時間（</a:t>
+                </a:r>
+                <a:r>
+                  <a:rPr lang="en-US" altLang="ja-JP" sz="2400" dirty="0"/>
+                  <a:t> </a:t>
+                </a:r>
+                <a14:m>
+                  <m:oMath xmlns:m="http://schemas.openxmlformats.org/officeDocument/2006/math">
+                    <m:r>
+                      <a:rPr lang="en-US" altLang="ja-JP" sz="2400" i="1" dirty="0">
+                        <a:latin typeface="Cambria Math" panose="02040503050406030204" pitchFamily="18" charset="0"/>
+                      </a:rPr>
+                      <m:t>𝑡</m:t>
+                    </m:r>
+                    <m:r>
+                      <a:rPr lang="en-US" altLang="ja-JP" sz="2400" i="1" dirty="0">
+                        <a:latin typeface="Cambria Math" panose="02040503050406030204" pitchFamily="18" charset="0"/>
+                      </a:rPr>
+                      <m:t> </m:t>
+                    </m:r>
+                  </m:oMath>
+                </a14:m>
+                <a:r>
+                  <a:rPr lang="ja-JP" altLang="en-US" sz="2400" b="0" dirty="0"/>
+                  <a:t>）</a:t>
+                </a:r>
+                <a:r>
+                  <a:rPr lang="ja-JP" altLang="en-US" sz="2400" dirty="0"/>
+                  <a:t>がわかりません。</a:t>
+                </a:r>
+                <a:endParaRPr lang="en-US" altLang="ja-JP" sz="2400" dirty="0"/>
+              </a:p>
+              <a:p>
+                <a:r>
+                  <a:rPr lang="ja-JP" altLang="en-US" sz="2400" b="0" dirty="0"/>
+                  <a:t>この場合、まずは時間を求めるところから計算をします。</a:t>
+                </a:r>
+                <a:endParaRPr lang="en-US" altLang="ja-JP" sz="2400" b="0" dirty="0"/>
+              </a:p>
+              <a:p>
+                <a:endParaRPr lang="en-US" altLang="ja-JP" sz="2400" dirty="0"/>
+              </a:p>
+              <a:p>
+                <a:r>
+                  <a:rPr lang="ja-JP" altLang="en-US" sz="2400" b="0" dirty="0"/>
+                  <a:t>式４</a:t>
+                </a:r>
+                <a14:m>
+                  <m:oMath xmlns:m="http://schemas.openxmlformats.org/officeDocument/2006/math">
+                    <m:r>
+                      <a:rPr lang="ja-JP" altLang="en-US" sz="2400" i="1" dirty="0">
+                        <a:latin typeface="Cambria Math" panose="02040503050406030204" pitchFamily="18" charset="0"/>
+                      </a:rPr>
+                      <m:t>⊿</m:t>
+                    </m:r>
+                    <m:r>
+                      <a:rPr lang="en-US" altLang="ja-JP" sz="2400" b="0" i="1" dirty="0" smtClean="0">
+                        <a:latin typeface="Cambria Math" panose="02040503050406030204" pitchFamily="18" charset="0"/>
+                      </a:rPr>
+                      <m:t>𝑦</m:t>
+                    </m:r>
+                    <m:r>
+                      <a:rPr lang="en-US" altLang="ja-JP" sz="2400" b="0" i="1" dirty="0" smtClean="0">
+                        <a:latin typeface="Cambria Math" panose="02040503050406030204" pitchFamily="18" charset="0"/>
+                      </a:rPr>
+                      <m:t>=</m:t>
+                    </m:r>
+                    <m:sSub>
+                      <m:sSubPr>
+                        <m:ctrlPr>
+                          <a:rPr lang="en-US" altLang="ja-JP" sz="2400" b="0" i="1" dirty="0" smtClean="0">
+                            <a:latin typeface="Cambria Math" panose="02040503050406030204" pitchFamily="18" charset="0"/>
+                          </a:rPr>
+                        </m:ctrlPr>
+                      </m:sSubPr>
+                      <m:e>
+                        <m:r>
+                          <a:rPr lang="en-US" altLang="ja-JP" sz="2400" b="0" i="1" dirty="0" smtClean="0">
+                            <a:latin typeface="Cambria Math" panose="02040503050406030204" pitchFamily="18" charset="0"/>
+                          </a:rPr>
+                          <m:t>𝑣</m:t>
+                        </m:r>
+                      </m:e>
+                      <m:sub>
+                        <m:r>
+                          <a:rPr lang="en-US" altLang="ja-JP" sz="2400" b="0" i="1" dirty="0" smtClean="0">
+                            <a:latin typeface="Cambria Math" panose="02040503050406030204" pitchFamily="18" charset="0"/>
+                          </a:rPr>
+                          <m:t>𝑖𝑦</m:t>
+                        </m:r>
+                      </m:sub>
+                    </m:sSub>
+                    <m:r>
+                      <a:rPr lang="en-US" altLang="ja-JP" sz="2400" b="0" i="1" dirty="0" smtClean="0">
+                        <a:latin typeface="Cambria Math" panose="02040503050406030204" pitchFamily="18" charset="0"/>
+                      </a:rPr>
+                      <m:t>𝑡</m:t>
+                    </m:r>
+                    <m:r>
+                      <a:rPr lang="en-US" altLang="ja-JP" sz="2400" b="0" i="1" dirty="0" smtClean="0">
+                        <a:latin typeface="Cambria Math" panose="02040503050406030204" pitchFamily="18" charset="0"/>
+                      </a:rPr>
+                      <m:t>+1/2</m:t>
+                    </m:r>
+                    <m:sSub>
+                      <m:sSubPr>
+                        <m:ctrlPr>
+                          <a:rPr lang="en-US" altLang="ja-JP" sz="2400" b="0" i="1" dirty="0" smtClean="0">
+                            <a:latin typeface="Cambria Math" panose="02040503050406030204" pitchFamily="18" charset="0"/>
+                          </a:rPr>
+                        </m:ctrlPr>
+                      </m:sSubPr>
+                      <m:e>
+                        <m:r>
+                          <a:rPr lang="en-US" altLang="ja-JP" sz="2400" b="0" i="1" dirty="0" smtClean="0">
+                            <a:latin typeface="Cambria Math" panose="02040503050406030204" pitchFamily="18" charset="0"/>
+                          </a:rPr>
+                          <m:t>𝑎</m:t>
+                        </m:r>
+                      </m:e>
+                      <m:sub>
+                        <m:r>
+                          <a:rPr lang="en-US" altLang="ja-JP" sz="2400" b="0" i="1" dirty="0" smtClean="0">
+                            <a:latin typeface="Cambria Math" panose="02040503050406030204" pitchFamily="18" charset="0"/>
+                          </a:rPr>
+                          <m:t>𝑦</m:t>
+                        </m:r>
+                      </m:sub>
+                    </m:sSub>
+                    <m:sSup>
+                      <m:sSupPr>
+                        <m:ctrlPr>
+                          <a:rPr lang="en-US" altLang="ja-JP" sz="2400" b="0" i="1" dirty="0" smtClean="0">
+                            <a:latin typeface="Cambria Math" panose="02040503050406030204" pitchFamily="18" charset="0"/>
+                          </a:rPr>
+                        </m:ctrlPr>
+                      </m:sSupPr>
+                      <m:e>
+                        <m:r>
+                          <a:rPr lang="en-US" altLang="ja-JP" sz="2400" b="0" i="1" dirty="0" smtClean="0">
+                            <a:latin typeface="Cambria Math" panose="02040503050406030204" pitchFamily="18" charset="0"/>
+                          </a:rPr>
+                          <m:t>𝑡</m:t>
+                        </m:r>
+                      </m:e>
+                      <m:sup>
+                        <m:r>
+                          <a:rPr lang="en-US" altLang="ja-JP" sz="2400" b="0" i="1" dirty="0" smtClean="0">
+                            <a:latin typeface="Cambria Math" panose="02040503050406030204" pitchFamily="18" charset="0"/>
+                          </a:rPr>
+                          <m:t>2</m:t>
+                        </m:r>
+                      </m:sup>
+                    </m:sSup>
+                  </m:oMath>
+                </a14:m>
+                <a:r>
+                  <a:rPr lang="ja-JP" altLang="en-US" sz="2400" b="0" dirty="0"/>
+                  <a:t>より</a:t>
+                </a:r>
+                <a:endParaRPr lang="en-US" altLang="ja-JP" sz="2400" b="0" dirty="0"/>
+              </a:p>
+              <a:p>
+                <a14:m>
+                  <m:oMath xmlns:m="http://schemas.openxmlformats.org/officeDocument/2006/math">
+                    <m:r>
+                      <a:rPr lang="en-US" altLang="ja-JP" sz="2400" b="0" i="1" dirty="0" smtClean="0">
+                        <a:latin typeface="Cambria Math" panose="02040503050406030204" pitchFamily="18" charset="0"/>
+                      </a:rPr>
+                      <m:t>−</m:t>
+                    </m:r>
+                    <m:r>
+                      <a:rPr lang="en-US" altLang="ja-JP" sz="2400" i="1" dirty="0" smtClean="0">
+                        <a:latin typeface="Cambria Math" panose="02040503050406030204" pitchFamily="18" charset="0"/>
+                      </a:rPr>
+                      <m:t>8</m:t>
+                    </m:r>
+                    <m:r>
+                      <a:rPr lang="en-US" altLang="ja-JP" sz="2400" b="0" i="1" dirty="0" smtClean="0">
+                        <a:latin typeface="Cambria Math" panose="02040503050406030204" pitchFamily="18" charset="0"/>
+                      </a:rPr>
+                      <m:t>𝑚</m:t>
+                    </m:r>
+                    <m:r>
+                      <a:rPr lang="en-US" altLang="ja-JP" sz="2400" b="0" i="1" dirty="0" smtClean="0">
+                        <a:latin typeface="Cambria Math" panose="02040503050406030204" pitchFamily="18" charset="0"/>
+                      </a:rPr>
+                      <m:t>=</m:t>
+                    </m:r>
+                    <m:r>
+                      <a:rPr lang="en-US" altLang="ja-JP" sz="2400" b="0" i="1" dirty="0" smtClean="0">
+                        <a:latin typeface="Cambria Math" panose="02040503050406030204" pitchFamily="18" charset="0"/>
+                      </a:rPr>
+                      <m:t>0</m:t>
+                    </m:r>
+                    <m:r>
+                      <a:rPr lang="en-US" altLang="ja-JP" sz="2400" b="0" i="1" dirty="0" smtClean="0">
+                        <a:latin typeface="Cambria Math" panose="02040503050406030204" pitchFamily="18" charset="0"/>
+                      </a:rPr>
+                      <m:t>𝑡</m:t>
+                    </m:r>
+                    <m:r>
+                      <a:rPr lang="en-US" altLang="ja-JP" sz="2400" b="0" i="1" dirty="0" smtClean="0">
+                        <a:latin typeface="Cambria Math" panose="02040503050406030204" pitchFamily="18" charset="0"/>
+                      </a:rPr>
+                      <m:t>+</m:t>
+                    </m:r>
+                    <m:f>
+                      <m:fPr>
+                        <m:ctrlPr>
+                          <a:rPr lang="en-US" altLang="ja-JP" sz="2400" b="0" i="1" dirty="0" smtClean="0">
+                            <a:latin typeface="Cambria Math" panose="02040503050406030204" pitchFamily="18" charset="0"/>
+                          </a:rPr>
+                        </m:ctrlPr>
+                      </m:fPr>
+                      <m:num>
+                        <m:r>
+                          <a:rPr lang="en-US" altLang="ja-JP" sz="2400" b="0" i="1" dirty="0" smtClean="0">
+                            <a:latin typeface="Cambria Math" panose="02040503050406030204" pitchFamily="18" charset="0"/>
+                          </a:rPr>
+                          <m:t>1</m:t>
+                        </m:r>
+                      </m:num>
+                      <m:den>
+                        <m:r>
+                          <a:rPr lang="en-US" altLang="ja-JP" sz="2400" b="0" i="1" dirty="0" smtClean="0">
+                            <a:latin typeface="Cambria Math" panose="02040503050406030204" pitchFamily="18" charset="0"/>
+                          </a:rPr>
+                          <m:t>2</m:t>
+                        </m:r>
+                      </m:den>
+                    </m:f>
+                    <m:r>
+                      <a:rPr lang="en-US" altLang="ja-JP" sz="2400" i="1" dirty="0">
+                        <a:latin typeface="Cambria Math" panose="02040503050406030204" pitchFamily="18" charset="0"/>
+                      </a:rPr>
+                      <m:t>×</m:t>
+                    </m:r>
+                    <m:d>
+                      <m:dPr>
+                        <m:ctrlPr>
+                          <a:rPr lang="en-US" altLang="ja-JP" sz="2400" b="0" i="1" dirty="0" smtClean="0">
+                            <a:latin typeface="Cambria Math" panose="02040503050406030204" pitchFamily="18" charset="0"/>
+                          </a:rPr>
+                        </m:ctrlPr>
+                      </m:dPr>
+                      <m:e>
+                        <m:r>
+                          <a:rPr lang="en-US" altLang="ja-JP" sz="2400" b="0" i="1" dirty="0" smtClean="0">
+                            <a:latin typeface="Cambria Math" panose="02040503050406030204" pitchFamily="18" charset="0"/>
+                          </a:rPr>
+                          <m:t>−9.8</m:t>
+                        </m:r>
+                        <m:r>
+                          <a:rPr lang="en-US" altLang="ja-JP" sz="2400" b="0" i="1" dirty="0" smtClean="0">
+                            <a:latin typeface="Cambria Math" panose="02040503050406030204" pitchFamily="18" charset="0"/>
+                          </a:rPr>
+                          <m:t>𝑚</m:t>
+                        </m:r>
+                        <m:sSup>
+                          <m:sSupPr>
+                            <m:ctrlPr>
+                              <a:rPr lang="en-US" altLang="ja-JP" sz="2400" b="0" i="1" dirty="0" smtClean="0">
+                                <a:latin typeface="Cambria Math" panose="02040503050406030204" pitchFamily="18" charset="0"/>
+                              </a:rPr>
+                            </m:ctrlPr>
+                          </m:sSupPr>
+                          <m:e>
+                            <m:r>
+                              <a:rPr lang="en-US" altLang="ja-JP" sz="2400" b="0" i="1" dirty="0" smtClean="0">
+                                <a:latin typeface="Cambria Math" panose="02040503050406030204" pitchFamily="18" charset="0"/>
+                              </a:rPr>
+                              <m:t>/</m:t>
+                            </m:r>
+                            <m:r>
+                              <a:rPr lang="ja-JP" altLang="en-US" sz="2400" i="1" dirty="0">
+                                <a:latin typeface="Cambria Math" panose="02040503050406030204" pitchFamily="18" charset="0"/>
+                              </a:rPr>
+                              <m:t>秒</m:t>
+                            </m:r>
+                          </m:e>
+                          <m:sup>
+                            <m:r>
+                              <a:rPr lang="en-US" altLang="ja-JP" sz="2400" b="0" i="1" dirty="0" smtClean="0">
+                                <a:latin typeface="Cambria Math" panose="02040503050406030204" pitchFamily="18" charset="0"/>
+                              </a:rPr>
+                              <m:t>2</m:t>
+                            </m:r>
+                          </m:sup>
+                        </m:sSup>
+                      </m:e>
+                    </m:d>
+                    <m:sSup>
+                      <m:sSupPr>
+                        <m:ctrlPr>
+                          <a:rPr lang="en-US" altLang="ja-JP" sz="2400" b="0" i="1" dirty="0" smtClean="0">
+                            <a:latin typeface="Cambria Math" panose="02040503050406030204" pitchFamily="18" charset="0"/>
+                          </a:rPr>
+                        </m:ctrlPr>
+                      </m:sSupPr>
+                      <m:e>
+                        <m:r>
+                          <a:rPr lang="en-US" altLang="ja-JP" sz="2400" b="0" i="1" dirty="0" smtClean="0">
+                            <a:latin typeface="Cambria Math" panose="02040503050406030204" pitchFamily="18" charset="0"/>
+                          </a:rPr>
+                          <m:t>𝑡</m:t>
+                        </m:r>
+                      </m:e>
+                      <m:sup>
+                        <m:r>
+                          <a:rPr lang="en-US" altLang="ja-JP" sz="2400" b="0" i="1" dirty="0" smtClean="0">
+                            <a:latin typeface="Cambria Math" panose="02040503050406030204" pitchFamily="18" charset="0"/>
+                          </a:rPr>
+                          <m:t>2</m:t>
+                        </m:r>
+                      </m:sup>
+                    </m:sSup>
+                  </m:oMath>
+                </a14:m>
+                <a:r>
+                  <a:rPr lang="en-US" altLang="ja-JP" sz="2400" b="0" dirty="0"/>
+                  <a:t> </a:t>
+                </a:r>
+              </a:p>
+              <a:p>
+                <a14:m>
+                  <m:oMath xmlns:m="http://schemas.openxmlformats.org/officeDocument/2006/math">
+                    <m:r>
+                      <a:rPr lang="en-US" altLang="ja-JP" sz="2400" b="0" i="1" dirty="0" smtClean="0">
+                        <a:latin typeface="Cambria Math" panose="02040503050406030204" pitchFamily="18" charset="0"/>
+                      </a:rPr>
+                      <m:t>−</m:t>
+                    </m:r>
+                    <m:r>
+                      <a:rPr lang="en-US" altLang="ja-JP" sz="2400" i="1" dirty="0" smtClean="0">
+                        <a:latin typeface="Cambria Math" panose="02040503050406030204" pitchFamily="18" charset="0"/>
+                      </a:rPr>
+                      <m:t>8</m:t>
+                    </m:r>
+                    <m:r>
+                      <a:rPr lang="en-US" altLang="ja-JP" sz="2400" b="0" i="1" dirty="0" smtClean="0">
+                        <a:latin typeface="Cambria Math" panose="02040503050406030204" pitchFamily="18" charset="0"/>
+                      </a:rPr>
+                      <m:t>𝑚</m:t>
+                    </m:r>
+                    <m:r>
+                      <a:rPr lang="en-US" altLang="ja-JP" sz="2400" b="0" i="1" dirty="0" smtClean="0">
+                        <a:latin typeface="Cambria Math" panose="02040503050406030204" pitchFamily="18" charset="0"/>
+                      </a:rPr>
+                      <m:t>=</m:t>
+                    </m:r>
+                    <m:r>
+                      <a:rPr lang="en-US" altLang="ja-JP" sz="2400" b="0" i="1" dirty="0" smtClean="0">
+                        <a:latin typeface="Cambria Math" panose="02040503050406030204" pitchFamily="18" charset="0"/>
+                      </a:rPr>
+                      <m:t>−4.9</m:t>
+                    </m:r>
+                    <m:r>
+                      <a:rPr lang="en-US" altLang="ja-JP" sz="2400" b="0" i="1" dirty="0" smtClean="0">
+                        <a:latin typeface="Cambria Math" panose="02040503050406030204" pitchFamily="18" charset="0"/>
+                      </a:rPr>
+                      <m:t>𝑚</m:t>
+                    </m:r>
+                    <m:r>
+                      <a:rPr lang="en-US" altLang="ja-JP" sz="2400" b="0" i="1" dirty="0" smtClean="0">
+                        <a:latin typeface="Cambria Math" panose="02040503050406030204" pitchFamily="18" charset="0"/>
+                      </a:rPr>
+                      <m:t>/</m:t>
+                    </m:r>
+                    <m:sSup>
+                      <m:sSupPr>
+                        <m:ctrlPr>
+                          <a:rPr lang="en-US" altLang="ja-JP" sz="2400" b="0" i="1" dirty="0" smtClean="0">
+                            <a:latin typeface="Cambria Math" panose="02040503050406030204" pitchFamily="18" charset="0"/>
+                          </a:rPr>
+                        </m:ctrlPr>
+                      </m:sSupPr>
+                      <m:e>
+                        <m:r>
+                          <a:rPr lang="ja-JP" altLang="en-US" sz="2400" i="1" dirty="0">
+                            <a:latin typeface="Cambria Math" panose="02040503050406030204" pitchFamily="18" charset="0"/>
+                          </a:rPr>
+                          <m:t>秒</m:t>
+                        </m:r>
+                      </m:e>
+                      <m:sup>
+                        <m:r>
+                          <a:rPr lang="en-US" altLang="ja-JP" sz="2400" b="0" i="1" dirty="0" smtClean="0">
+                            <a:latin typeface="Cambria Math" panose="02040503050406030204" pitchFamily="18" charset="0"/>
+                          </a:rPr>
+                          <m:t>2</m:t>
+                        </m:r>
+                      </m:sup>
+                    </m:sSup>
+                    <m:sSup>
+                      <m:sSupPr>
+                        <m:ctrlPr>
+                          <a:rPr lang="en-US" altLang="ja-JP" sz="2400" i="1" dirty="0">
+                            <a:latin typeface="Cambria Math" panose="02040503050406030204" pitchFamily="18" charset="0"/>
+                          </a:rPr>
+                        </m:ctrlPr>
+                      </m:sSupPr>
+                      <m:e>
+                        <m:r>
+                          <a:rPr lang="en-US" altLang="ja-JP" sz="2400" i="1" dirty="0">
+                            <a:latin typeface="Cambria Math" panose="02040503050406030204" pitchFamily="18" charset="0"/>
+                          </a:rPr>
+                          <m:t>𝑡</m:t>
+                        </m:r>
+                      </m:e>
+                      <m:sup>
+                        <m:r>
+                          <a:rPr lang="en-US" altLang="ja-JP" sz="2400" i="1" dirty="0">
+                            <a:latin typeface="Cambria Math" panose="02040503050406030204" pitchFamily="18" charset="0"/>
+                          </a:rPr>
+                          <m:t>2</m:t>
+                        </m:r>
+                      </m:sup>
+                    </m:sSup>
+                  </m:oMath>
+                </a14:m>
+                <a:r>
+                  <a:rPr lang="en-US" altLang="ja-JP" sz="2400" b="0" dirty="0"/>
+                  <a:t> </a:t>
+                </a:r>
+              </a:p>
+              <a:p>
+                <a14:m>
+                  <m:oMath xmlns:m="http://schemas.openxmlformats.org/officeDocument/2006/math">
+                    <m:sSup>
+                      <m:sSupPr>
+                        <m:ctrlPr>
+                          <a:rPr lang="en-US" altLang="ja-JP" sz="2400" b="0" i="1" dirty="0" smtClean="0">
+                            <a:latin typeface="Cambria Math" panose="02040503050406030204" pitchFamily="18" charset="0"/>
+                          </a:rPr>
+                        </m:ctrlPr>
+                      </m:sSupPr>
+                      <m:e>
+                        <m:r>
+                          <a:rPr lang="en-US" altLang="ja-JP" sz="2400" b="0" i="1" dirty="0" smtClean="0">
+                            <a:latin typeface="Cambria Math" panose="02040503050406030204" pitchFamily="18" charset="0"/>
+                          </a:rPr>
+                          <m:t>𝑡</m:t>
+                        </m:r>
+                      </m:e>
+                      <m:sup>
+                        <m:r>
+                          <a:rPr lang="en-US" altLang="ja-JP" sz="2400" b="0" i="1" dirty="0" smtClean="0">
+                            <a:latin typeface="Cambria Math" panose="02040503050406030204" pitchFamily="18" charset="0"/>
+                          </a:rPr>
+                          <m:t>2</m:t>
+                        </m:r>
+                      </m:sup>
+                    </m:sSup>
+                    <m:r>
+                      <a:rPr lang="en-US" altLang="ja-JP" sz="2400" b="0" i="1" dirty="0" smtClean="0">
+                        <a:latin typeface="Cambria Math" panose="02040503050406030204" pitchFamily="18" charset="0"/>
+                      </a:rPr>
+                      <m:t>=</m:t>
+                    </m:r>
+                    <m:f>
+                      <m:fPr>
+                        <m:ctrlPr>
+                          <a:rPr lang="en-US" altLang="ja-JP" sz="2400" b="0" i="1" dirty="0" smtClean="0">
+                            <a:latin typeface="Cambria Math" panose="02040503050406030204" pitchFamily="18" charset="0"/>
+                          </a:rPr>
+                        </m:ctrlPr>
+                      </m:fPr>
+                      <m:num>
+                        <m:r>
+                          <a:rPr lang="en-US" altLang="ja-JP" sz="2400" b="0" i="1" dirty="0" smtClean="0">
+                            <a:latin typeface="Cambria Math" panose="02040503050406030204" pitchFamily="18" charset="0"/>
+                          </a:rPr>
+                          <m:t>8</m:t>
+                        </m:r>
+                      </m:num>
+                      <m:den>
+                        <m:r>
+                          <a:rPr lang="en-US" altLang="ja-JP" sz="2400" b="0" i="1" dirty="0" smtClean="0">
+                            <a:latin typeface="Cambria Math" panose="02040503050406030204" pitchFamily="18" charset="0"/>
+                          </a:rPr>
+                          <m:t>4.9</m:t>
+                        </m:r>
+                      </m:den>
+                    </m:f>
+                    <m:sSup>
+                      <m:sSupPr>
+                        <m:ctrlPr>
+                          <a:rPr lang="en-US" altLang="ja-JP" sz="2400" b="0" i="1" dirty="0" smtClean="0">
+                            <a:latin typeface="Cambria Math" panose="02040503050406030204" pitchFamily="18" charset="0"/>
+                          </a:rPr>
+                        </m:ctrlPr>
+                      </m:sSupPr>
+                      <m:e>
+                        <m:r>
+                          <a:rPr lang="ja-JP" altLang="en-US" sz="2400" i="1" dirty="0">
+                            <a:latin typeface="Cambria Math" panose="02040503050406030204" pitchFamily="18" charset="0"/>
+                          </a:rPr>
+                          <m:t>秒</m:t>
+                        </m:r>
+                      </m:e>
+                      <m:sup>
+                        <m:r>
+                          <a:rPr lang="en-US" altLang="ja-JP" sz="2400" b="0" i="1" dirty="0" smtClean="0">
+                            <a:latin typeface="Cambria Math" panose="02040503050406030204" pitchFamily="18" charset="0"/>
+                          </a:rPr>
+                          <m:t>2</m:t>
+                        </m:r>
+                      </m:sup>
+                    </m:sSup>
+                  </m:oMath>
+                </a14:m>
+                <a:r>
+                  <a:rPr lang="en-US" altLang="ja-JP" sz="2400" b="0" dirty="0"/>
+                  <a:t> </a:t>
+                </a:r>
+              </a:p>
+              <a:p>
+                <a14:m>
+                  <m:oMath xmlns:m="http://schemas.openxmlformats.org/officeDocument/2006/math">
+                    <m:r>
+                      <a:rPr lang="en-US" altLang="ja-JP" sz="2400" b="0" i="1" dirty="0" smtClean="0">
+                        <a:latin typeface="Cambria Math" panose="02040503050406030204" pitchFamily="18" charset="0"/>
+                      </a:rPr>
+                      <m:t>𝑡</m:t>
+                    </m:r>
+                    <m:r>
+                      <a:rPr lang="en-US" altLang="ja-JP" sz="2400" b="0" i="1" dirty="0" smtClean="0">
+                        <a:latin typeface="Cambria Math" panose="02040503050406030204" pitchFamily="18" charset="0"/>
+                      </a:rPr>
+                      <m:t>=</m:t>
+                    </m:r>
+                    <m:rad>
+                      <m:radPr>
+                        <m:degHide m:val="on"/>
+                        <m:ctrlPr>
+                          <a:rPr lang="en-US" altLang="ja-JP" sz="2400" b="0" i="1" dirty="0" smtClean="0">
+                            <a:latin typeface="Cambria Math" panose="02040503050406030204" pitchFamily="18" charset="0"/>
+                          </a:rPr>
+                        </m:ctrlPr>
+                      </m:radPr>
+                      <m:deg/>
+                      <m:e>
+                        <m:f>
+                          <m:fPr>
+                            <m:ctrlPr>
+                              <a:rPr lang="en-US" altLang="ja-JP" sz="2400" i="1" dirty="0">
+                                <a:latin typeface="Cambria Math" panose="02040503050406030204" pitchFamily="18" charset="0"/>
+                              </a:rPr>
+                            </m:ctrlPr>
+                          </m:fPr>
+                          <m:num>
+                            <m:r>
+                              <a:rPr lang="en-US" altLang="ja-JP" sz="2400" i="1" dirty="0">
+                                <a:latin typeface="Cambria Math" panose="02040503050406030204" pitchFamily="18" charset="0"/>
+                              </a:rPr>
+                              <m:t>8</m:t>
+                            </m:r>
+                          </m:num>
+                          <m:den>
+                            <m:r>
+                              <a:rPr lang="en-US" altLang="ja-JP" sz="2400" i="1" dirty="0">
+                                <a:latin typeface="Cambria Math" panose="02040503050406030204" pitchFamily="18" charset="0"/>
+                              </a:rPr>
+                              <m:t>4.9</m:t>
+                            </m:r>
+                          </m:den>
+                        </m:f>
+                      </m:e>
+                    </m:rad>
+                    <m:r>
+                      <a:rPr lang="ja-JP" altLang="en-US" sz="2400" i="1" dirty="0">
+                        <a:latin typeface="Cambria Math" panose="02040503050406030204" pitchFamily="18" charset="0"/>
+                      </a:rPr>
+                      <m:t>秒</m:t>
+                    </m:r>
+                  </m:oMath>
+                </a14:m>
+                <a:r>
+                  <a:rPr lang="en-US" altLang="ja-JP" sz="2400" b="0" dirty="0"/>
+                  <a:t> </a:t>
+                </a:r>
+              </a:p>
+              <a:p>
+                <a:endParaRPr lang="en-US" altLang="ja-JP" sz="2400" b="0" dirty="0"/>
+              </a:p>
+              <a:p>
+                <a:endParaRPr lang="en-US" altLang="ja-JP" sz="2400" b="0" dirty="0"/>
+              </a:p>
+            </p:txBody>
+          </p:sp>
+        </mc:Choice>
+        <mc:Fallback>
+          <p:sp>
+            <p:nvSpPr>
+              <p:cNvPr id="7" name="テキスト ボックス 6">
+                <a:extLst>
+                  <a:ext uri="{FF2B5EF4-FFF2-40B4-BE49-F238E27FC236}">
+                    <a16:creationId xmlns:a16="http://schemas.microsoft.com/office/drawing/2014/main" id="{E8AA9D1A-D420-4A0F-9DEE-FFB7145EE62A}"/>
+                  </a:ext>
+                </a:extLst>
+              </p:cNvPr>
+              <p:cNvSpPr txBox="1">
+                <a:spLocks noRot="1" noChangeAspect="1" noMove="1" noResize="1" noEditPoints="1" noAdjustHandles="1" noChangeArrowheads="1" noChangeShapeType="1" noTextEdit="1"/>
+              </p:cNvSpPr>
+              <p:nvPr/>
+            </p:nvSpPr>
+            <p:spPr>
+              <a:xfrm>
+                <a:off x="567542" y="1216429"/>
+                <a:ext cx="10304872" cy="6461641"/>
+              </a:xfrm>
+              <a:prstGeom prst="rect">
+                <a:avLst/>
+              </a:prstGeom>
+              <a:blipFill>
+                <a:blip r:embed="rId2"/>
+                <a:stretch>
+                  <a:fillRect l="-887" t="-755"/>
+                </a:stretch>
+              </a:blipFill>
+            </p:spPr>
+            <p:txBody>
+              <a:bodyPr/>
+              <a:lstStyle/>
+              <a:p>
+                <a:r>
+                  <a:rPr lang="ja-JP" altLang="en-US">
+                    <a:noFill/>
+                  </a:rPr>
+                  <a:t> </a:t>
+                </a:r>
+              </a:p>
+            </p:txBody>
+          </p:sp>
+        </mc:Fallback>
+      </mc:AlternateContent>
+    </p:spTree>
+    <p:extLst>
+      <p:ext uri="{BB962C8B-B14F-4D97-AF65-F5344CB8AC3E}">
+        <p14:creationId xmlns:p14="http://schemas.microsoft.com/office/powerpoint/2010/main" val="647023048"/>
+      </p:ext>
+    </p:extLst>
+  </p:cSld>
+  <p:clrMapOvr>
+    <a:masterClrMapping/>
+  </p:clrMapOvr>
+</p:sld>
+</file>
+
+<file path=ppt/slides/slide24.xml><?xml version="1.0" encoding="utf-8"?>
+<p:sld xmlns:a="http://schemas.openxmlformats.org/drawingml/2006/main" xmlns:r="http://schemas.openxmlformats.org/officeDocument/2006/relationships" xmlns:p="http://schemas.openxmlformats.org/presentationml/2006/main">
+  <p:cSld>
+    <p:spTree>
+      <p:nvGrpSpPr>
+        <p:cNvPr id="1" name=""/>
+        <p:cNvGrpSpPr/>
+        <p:nvPr/>
+      </p:nvGrpSpPr>
+      <p:grpSpPr>
+        <a:xfrm>
+          <a:off x="0" y="0"/>
+          <a:ext cx="0" cy="0"/>
+          <a:chOff x="0" y="0"/>
+          <a:chExt cx="0" cy="0"/>
+        </a:xfrm>
+      </p:grpSpPr>
+      <p:sp>
+        <p:nvSpPr>
+          <p:cNvPr id="4" name="テキスト ボックス 3">
+            <a:extLst>
+              <a:ext uri="{FF2B5EF4-FFF2-40B4-BE49-F238E27FC236}">
+                <a16:creationId xmlns:a16="http://schemas.microsoft.com/office/drawing/2014/main" id="{5A13BF46-B8C5-48AA-8308-C9ECFF431A18}"/>
+              </a:ext>
+            </a:extLst>
+          </p:cNvPr>
+          <p:cNvSpPr txBox="1"/>
+          <p:nvPr/>
+        </p:nvSpPr>
+        <p:spPr>
+          <a:xfrm>
+            <a:off x="567542" y="491954"/>
+            <a:ext cx="5461752" cy="584775"/>
+          </a:xfrm>
+          <a:prstGeom prst="rect">
+            <a:avLst/>
+          </a:prstGeom>
+          <a:noFill/>
+        </p:spPr>
+        <p:txBody>
+          <a:bodyPr wrap="none" rtlCol="0">
+            <a:spAutoFit/>
+          </a:bodyPr>
+          <a:lstStyle/>
+          <a:p>
+            <a:r>
+              <a:rPr kumimoji="1" lang="en-US" altLang="ja-JP" sz="3200" b="1" u="sng" dirty="0"/>
+              <a:t>2</a:t>
+            </a:r>
+            <a:r>
+              <a:rPr kumimoji="1" lang="ja-JP" altLang="en-US" sz="3200" b="1" u="sng" dirty="0"/>
+              <a:t>次元、３次元の運動 例題３</a:t>
+            </a:r>
+            <a:endParaRPr kumimoji="1" lang="en-US" altLang="ja-JP" sz="3200" b="1" u="sng" dirty="0"/>
+          </a:p>
+        </p:txBody>
+      </p:sp>
+      <mc:AlternateContent xmlns:mc="http://schemas.openxmlformats.org/markup-compatibility/2006">
+        <mc:Choice xmlns:a14="http://schemas.microsoft.com/office/drawing/2010/main" Requires="a14">
+          <p:sp>
+            <p:nvSpPr>
+              <p:cNvPr id="7" name="テキスト ボックス 6">
+                <a:extLst>
+                  <a:ext uri="{FF2B5EF4-FFF2-40B4-BE49-F238E27FC236}">
+                    <a16:creationId xmlns:a16="http://schemas.microsoft.com/office/drawing/2014/main" id="{E8AA9D1A-D420-4A0F-9DEE-FFB7145EE62A}"/>
+                  </a:ext>
+                </a:extLst>
+              </p:cNvPr>
+              <p:cNvSpPr txBox="1"/>
+              <p:nvPr/>
+            </p:nvSpPr>
+            <p:spPr>
+              <a:xfrm>
+                <a:off x="567542" y="1216429"/>
+                <a:ext cx="9381543" cy="4180760"/>
+              </a:xfrm>
+              <a:prstGeom prst="rect">
+                <a:avLst/>
+              </a:prstGeom>
+              <a:noFill/>
+            </p:spPr>
+            <p:txBody>
+              <a:bodyPr wrap="none" rtlCol="0">
+                <a:spAutoFit/>
+              </a:bodyPr>
+              <a:lstStyle/>
+              <a:p>
+                <a:r>
+                  <a:rPr lang="ja-JP" altLang="en-US" sz="2400" dirty="0"/>
+                  <a:t>ゲーム中のキャラクターが</a:t>
+                </a:r>
+                <a:r>
+                  <a:rPr lang="en-US" altLang="ja-JP" sz="2400" dirty="0"/>
+                  <a:t>10m/</a:t>
+                </a:r>
+                <a:r>
+                  <a:rPr lang="ja-JP" altLang="en-US" sz="2400" dirty="0"/>
+                  <a:t>秒で移動しており、</a:t>
+                </a:r>
+                <a:endParaRPr lang="en-US" altLang="ja-JP" sz="2400" dirty="0"/>
+              </a:p>
+              <a:p>
+                <a:r>
+                  <a:rPr lang="ja-JP" altLang="en-US" sz="2400" dirty="0"/>
+                  <a:t>高さ</a:t>
+                </a:r>
+                <a:r>
+                  <a:rPr lang="en-US" altLang="ja-JP" sz="2400" dirty="0"/>
+                  <a:t>8m</a:t>
+                </a:r>
+                <a:r>
+                  <a:rPr lang="ja-JP" altLang="en-US" sz="2400" dirty="0"/>
+                  <a:t>の崖から落下しました。</a:t>
+                </a:r>
+                <a:endParaRPr lang="en-US" altLang="ja-JP" sz="2400" dirty="0"/>
+              </a:p>
+              <a:p>
+                <a:r>
+                  <a:rPr lang="ja-JP" altLang="en-US" sz="2400" dirty="0"/>
+                  <a:t>崖から着地地点までの水平距離は何</a:t>
+                </a:r>
+                <a:r>
+                  <a:rPr lang="en-US" altLang="ja-JP" sz="2400" dirty="0"/>
+                  <a:t>m</a:t>
+                </a:r>
+                <a:r>
+                  <a:rPr lang="ja-JP" altLang="en-US" sz="2400" dirty="0"/>
+                  <a:t>か求めなさい。</a:t>
+                </a:r>
+                <a:endParaRPr lang="en-US" altLang="ja-JP" sz="2400" dirty="0"/>
+              </a:p>
+              <a:p>
+                <a:endParaRPr lang="en-US" altLang="ja-JP" sz="2400" dirty="0"/>
+              </a:p>
+              <a:p>
+                <a:r>
+                  <a:rPr lang="ja-JP" altLang="en-US" sz="2400" b="1" dirty="0">
+                    <a:solidFill>
+                      <a:srgbClr val="FF0000"/>
+                    </a:solidFill>
+                  </a:rPr>
+                  <a:t>■解答</a:t>
+                </a:r>
+                <a:endParaRPr lang="en-US" altLang="ja-JP" sz="2400" b="1" dirty="0">
+                  <a:solidFill>
+                    <a:srgbClr val="FF0000"/>
+                  </a:solidFill>
+                </a:endParaRPr>
+              </a:p>
+              <a:p>
+                <a14:m>
+                  <m:oMath xmlns:m="http://schemas.openxmlformats.org/officeDocument/2006/math">
+                    <m:r>
+                      <a:rPr lang="en-US" altLang="ja-JP" sz="2400" i="1" dirty="0">
+                        <a:latin typeface="Cambria Math" panose="02040503050406030204" pitchFamily="18" charset="0"/>
+                      </a:rPr>
+                      <m:t>𝑡</m:t>
+                    </m:r>
+                    <m:r>
+                      <a:rPr lang="en-US" altLang="ja-JP" sz="2400" i="1" dirty="0">
+                        <a:latin typeface="Cambria Math" panose="02040503050406030204" pitchFamily="18" charset="0"/>
+                      </a:rPr>
+                      <m:t>=</m:t>
+                    </m:r>
+                    <m:rad>
+                      <m:radPr>
+                        <m:degHide m:val="on"/>
+                        <m:ctrlPr>
+                          <a:rPr lang="en-US" altLang="ja-JP" sz="2400" i="1" dirty="0">
+                            <a:latin typeface="Cambria Math" panose="02040503050406030204" pitchFamily="18" charset="0"/>
+                          </a:rPr>
+                        </m:ctrlPr>
+                      </m:radPr>
+                      <m:deg/>
+                      <m:e>
+                        <m:f>
+                          <m:fPr>
+                            <m:ctrlPr>
+                              <a:rPr lang="en-US" altLang="ja-JP" sz="2400" i="1" dirty="0">
+                                <a:latin typeface="Cambria Math" panose="02040503050406030204" pitchFamily="18" charset="0"/>
+                              </a:rPr>
+                            </m:ctrlPr>
+                          </m:fPr>
+                          <m:num>
+                            <m:r>
+                              <a:rPr lang="en-US" altLang="ja-JP" sz="2400" i="1" dirty="0">
+                                <a:latin typeface="Cambria Math" panose="02040503050406030204" pitchFamily="18" charset="0"/>
+                              </a:rPr>
+                              <m:t>8</m:t>
+                            </m:r>
+                          </m:num>
+                          <m:den>
+                            <m:r>
+                              <a:rPr lang="en-US" altLang="ja-JP" sz="2400" i="1" dirty="0">
+                                <a:latin typeface="Cambria Math" panose="02040503050406030204" pitchFamily="18" charset="0"/>
+                              </a:rPr>
+                              <m:t>4.9</m:t>
+                            </m:r>
+                          </m:den>
+                        </m:f>
+                      </m:e>
+                    </m:rad>
+                  </m:oMath>
+                </a14:m>
+                <a:r>
+                  <a:rPr lang="en-US" altLang="ja-JP" sz="2400" dirty="0"/>
+                  <a:t> </a:t>
+                </a:r>
+                <a:r>
+                  <a:rPr lang="ja-JP" altLang="en-US" sz="2400" dirty="0"/>
+                  <a:t>これは地面に落下するまでの時間となります。</a:t>
+                </a:r>
+                <a:endParaRPr lang="en-US" altLang="ja-JP" sz="2400" dirty="0"/>
+              </a:p>
+              <a:p>
+                <a:r>
+                  <a:rPr lang="ja-JP" altLang="en-US" sz="2400" dirty="0"/>
+                  <a:t>つまり</a:t>
+                </a:r>
+                <a14:m>
+                  <m:oMath xmlns:m="http://schemas.openxmlformats.org/officeDocument/2006/math">
+                    <m:r>
+                      <a:rPr lang="ja-JP" altLang="en-US" sz="2400" i="1" dirty="0" smtClean="0">
+                        <a:latin typeface="Cambria Math" panose="02040503050406030204" pitchFamily="18" charset="0"/>
+                      </a:rPr>
+                      <m:t>⊿</m:t>
+                    </m:r>
+                    <m:r>
+                      <a:rPr lang="en-US" altLang="ja-JP" sz="2400" b="0" i="1" dirty="0" smtClean="0">
+                        <a:latin typeface="Cambria Math" panose="02040503050406030204" pitchFamily="18" charset="0"/>
+                      </a:rPr>
+                      <m:t>𝑥</m:t>
+                    </m:r>
+                    <m:r>
+                      <a:rPr lang="en-US" altLang="ja-JP" sz="2400" b="0" i="1" dirty="0" smtClean="0">
+                        <a:latin typeface="Cambria Math" panose="02040503050406030204" pitchFamily="18" charset="0"/>
+                      </a:rPr>
+                      <m:t>=</m:t>
+                    </m:r>
+                    <m:sSub>
+                      <m:sSubPr>
+                        <m:ctrlPr>
+                          <a:rPr lang="en-US" altLang="ja-JP" sz="2400" b="0" i="1" dirty="0" smtClean="0">
+                            <a:latin typeface="Cambria Math" panose="02040503050406030204" pitchFamily="18" charset="0"/>
+                          </a:rPr>
+                        </m:ctrlPr>
+                      </m:sSubPr>
+                      <m:e>
+                        <m:r>
+                          <a:rPr lang="en-US" altLang="ja-JP" sz="2400" b="0" i="1" dirty="0" smtClean="0">
+                            <a:latin typeface="Cambria Math" panose="02040503050406030204" pitchFamily="18" charset="0"/>
+                          </a:rPr>
+                          <m:t>𝑣</m:t>
+                        </m:r>
+                      </m:e>
+                      <m:sub>
+                        <m:r>
+                          <a:rPr lang="en-US" altLang="ja-JP" sz="2400" b="0" i="1" dirty="0" smtClean="0">
+                            <a:latin typeface="Cambria Math" panose="02040503050406030204" pitchFamily="18" charset="0"/>
+                          </a:rPr>
+                          <m:t>𝑥</m:t>
+                        </m:r>
+                      </m:sub>
+                    </m:sSub>
+                    <m:r>
+                      <a:rPr lang="en-US" altLang="ja-JP" sz="2400" b="0" i="1" dirty="0" smtClean="0">
+                        <a:latin typeface="Cambria Math" panose="02040503050406030204" pitchFamily="18" charset="0"/>
+                      </a:rPr>
+                      <m:t>𝑡</m:t>
+                    </m:r>
+                  </m:oMath>
+                </a14:m>
+                <a:r>
+                  <a:rPr lang="ja-JP" altLang="en-US" sz="2400" dirty="0"/>
+                  <a:t>の時間（</a:t>
+                </a:r>
+                <a:r>
+                  <a:rPr lang="en-US" altLang="ja-JP" sz="2400" dirty="0"/>
+                  <a:t> </a:t>
+                </a:r>
+                <a14:m>
+                  <m:oMath xmlns:m="http://schemas.openxmlformats.org/officeDocument/2006/math">
+                    <m:r>
+                      <a:rPr lang="en-US" altLang="ja-JP" sz="2400" i="1" dirty="0">
+                        <a:latin typeface="Cambria Math" panose="02040503050406030204" pitchFamily="18" charset="0"/>
+                      </a:rPr>
+                      <m:t>𝑡</m:t>
+                    </m:r>
+                    <m:r>
+                      <a:rPr lang="en-US" altLang="ja-JP" sz="2400" i="1" dirty="0">
+                        <a:latin typeface="Cambria Math" panose="02040503050406030204" pitchFamily="18" charset="0"/>
+                      </a:rPr>
+                      <m:t> </m:t>
+                    </m:r>
+                  </m:oMath>
+                </a14:m>
+                <a:r>
+                  <a:rPr lang="ja-JP" altLang="en-US" sz="2400" dirty="0"/>
+                  <a:t>）に当てはめることができます。よって</a:t>
+                </a:r>
+                <a:endParaRPr lang="en-US" altLang="ja-JP" sz="2400" dirty="0"/>
+              </a:p>
+              <a:p>
+                <a:endParaRPr lang="en-US" altLang="ja-JP" sz="2400" b="0" dirty="0"/>
+              </a:p>
+              <a:p>
+                <a14:m>
+                  <m:oMath xmlns:m="http://schemas.openxmlformats.org/officeDocument/2006/math">
+                    <m:r>
+                      <a:rPr lang="ja-JP" altLang="en-US" sz="2400" i="1" dirty="0" smtClean="0">
+                        <a:latin typeface="Cambria Math" panose="02040503050406030204" pitchFamily="18" charset="0"/>
+                      </a:rPr>
+                      <m:t>⊿</m:t>
+                    </m:r>
+                    <m:r>
+                      <a:rPr lang="en-US" altLang="ja-JP" sz="2400" b="0" i="1" dirty="0" smtClean="0">
+                        <a:latin typeface="Cambria Math" panose="02040503050406030204" pitchFamily="18" charset="0"/>
+                      </a:rPr>
+                      <m:t>𝑥</m:t>
+                    </m:r>
+                    <m:r>
+                      <a:rPr lang="en-US" altLang="ja-JP" sz="2400" b="0" i="1" dirty="0" smtClean="0">
+                        <a:latin typeface="Cambria Math" panose="02040503050406030204" pitchFamily="18" charset="0"/>
+                      </a:rPr>
+                      <m:t>=</m:t>
+                    </m:r>
+                    <m:f>
+                      <m:fPr>
+                        <m:ctrlPr>
+                          <a:rPr lang="en-US" altLang="ja-JP" sz="2400" b="0" i="1" dirty="0" smtClean="0">
+                            <a:latin typeface="Cambria Math" panose="02040503050406030204" pitchFamily="18" charset="0"/>
+                          </a:rPr>
+                        </m:ctrlPr>
+                      </m:fPr>
+                      <m:num>
+                        <m:r>
+                          <a:rPr lang="en-US" altLang="ja-JP" sz="2400" b="0" i="1" dirty="0" smtClean="0">
+                            <a:latin typeface="Cambria Math" panose="02040503050406030204" pitchFamily="18" charset="0"/>
+                          </a:rPr>
+                          <m:t>10</m:t>
+                        </m:r>
+                        <m:r>
+                          <a:rPr lang="en-US" altLang="ja-JP" sz="2400" b="0" i="1" dirty="0" smtClean="0">
+                            <a:latin typeface="Cambria Math" panose="02040503050406030204" pitchFamily="18" charset="0"/>
+                          </a:rPr>
+                          <m:t>𝑚</m:t>
+                        </m:r>
+                      </m:num>
+                      <m:den>
+                        <m:r>
+                          <a:rPr lang="ja-JP" altLang="en-US" sz="2400" i="1" dirty="0">
+                            <a:latin typeface="Cambria Math" panose="02040503050406030204" pitchFamily="18" charset="0"/>
+                          </a:rPr>
+                          <m:t>秒</m:t>
+                        </m:r>
+                      </m:den>
+                    </m:f>
+                    <m:r>
+                      <a:rPr lang="en-US" altLang="ja-JP" sz="2400" b="0" i="1" dirty="0" smtClean="0">
+                        <a:latin typeface="Cambria Math" panose="02040503050406030204" pitchFamily="18" charset="0"/>
+                      </a:rPr>
+                      <m:t>×</m:t>
+                    </m:r>
+                    <m:rad>
+                      <m:radPr>
+                        <m:degHide m:val="on"/>
+                        <m:ctrlPr>
+                          <a:rPr lang="en-US" altLang="ja-JP" sz="2400" i="1" dirty="0">
+                            <a:latin typeface="Cambria Math" panose="02040503050406030204" pitchFamily="18" charset="0"/>
+                          </a:rPr>
+                        </m:ctrlPr>
+                      </m:radPr>
+                      <m:deg/>
+                      <m:e>
+                        <m:f>
+                          <m:fPr>
+                            <m:ctrlPr>
+                              <a:rPr lang="en-US" altLang="ja-JP" sz="2400" i="1" dirty="0">
+                                <a:latin typeface="Cambria Math" panose="02040503050406030204" pitchFamily="18" charset="0"/>
+                              </a:rPr>
+                            </m:ctrlPr>
+                          </m:fPr>
+                          <m:num>
+                            <m:r>
+                              <a:rPr lang="en-US" altLang="ja-JP" sz="2400" i="1" dirty="0">
+                                <a:latin typeface="Cambria Math" panose="02040503050406030204" pitchFamily="18" charset="0"/>
+                              </a:rPr>
+                              <m:t>8</m:t>
+                            </m:r>
+                          </m:num>
+                          <m:den>
+                            <m:r>
+                              <a:rPr lang="en-US" altLang="ja-JP" sz="2400" i="1" dirty="0">
+                                <a:latin typeface="Cambria Math" panose="02040503050406030204" pitchFamily="18" charset="0"/>
+                              </a:rPr>
+                              <m:t>4.9</m:t>
+                            </m:r>
+                          </m:den>
+                        </m:f>
+                      </m:e>
+                    </m:rad>
+                    <m:r>
+                      <a:rPr lang="ja-JP" altLang="en-US" sz="2400" i="1" dirty="0">
+                        <a:latin typeface="Cambria Math" panose="02040503050406030204" pitchFamily="18" charset="0"/>
+                      </a:rPr>
+                      <m:t>秒</m:t>
+                    </m:r>
+                    <m:r>
+                      <a:rPr lang="en-US" altLang="ja-JP" sz="2400" b="0" i="1" dirty="0" smtClean="0">
+                        <a:latin typeface="Cambria Math" panose="02040503050406030204" pitchFamily="18" charset="0"/>
+                      </a:rPr>
+                      <m:t>=</m:t>
+                    </m:r>
+                    <m:r>
+                      <a:rPr lang="en-US" altLang="ja-JP" sz="2400" b="0" i="1" dirty="0" smtClean="0">
+                        <a:solidFill>
+                          <a:srgbClr val="FF0000"/>
+                        </a:solidFill>
+                        <a:latin typeface="Cambria Math" panose="02040503050406030204" pitchFamily="18" charset="0"/>
+                      </a:rPr>
+                      <m:t>10</m:t>
+                    </m:r>
+                    <m:rad>
+                      <m:radPr>
+                        <m:degHide m:val="on"/>
+                        <m:ctrlPr>
+                          <a:rPr lang="en-US" altLang="ja-JP" sz="2400" i="1" dirty="0">
+                            <a:solidFill>
+                              <a:srgbClr val="FF0000"/>
+                            </a:solidFill>
+                            <a:latin typeface="Cambria Math" panose="02040503050406030204" pitchFamily="18" charset="0"/>
+                          </a:rPr>
+                        </m:ctrlPr>
+                      </m:radPr>
+                      <m:deg/>
+                      <m:e>
+                        <m:f>
+                          <m:fPr>
+                            <m:ctrlPr>
+                              <a:rPr lang="en-US" altLang="ja-JP" sz="2400" i="1" dirty="0">
+                                <a:solidFill>
+                                  <a:srgbClr val="FF0000"/>
+                                </a:solidFill>
+                                <a:latin typeface="Cambria Math" panose="02040503050406030204" pitchFamily="18" charset="0"/>
+                              </a:rPr>
+                            </m:ctrlPr>
+                          </m:fPr>
+                          <m:num>
+                            <m:r>
+                              <a:rPr lang="en-US" altLang="ja-JP" sz="2400" i="1" dirty="0">
+                                <a:solidFill>
+                                  <a:srgbClr val="FF0000"/>
+                                </a:solidFill>
+                                <a:latin typeface="Cambria Math" panose="02040503050406030204" pitchFamily="18" charset="0"/>
+                              </a:rPr>
+                              <m:t>8</m:t>
+                            </m:r>
+                          </m:num>
+                          <m:den>
+                            <m:r>
+                              <a:rPr lang="en-US" altLang="ja-JP" sz="2400" i="1" dirty="0">
+                                <a:solidFill>
+                                  <a:srgbClr val="FF0000"/>
+                                </a:solidFill>
+                                <a:latin typeface="Cambria Math" panose="02040503050406030204" pitchFamily="18" charset="0"/>
+                              </a:rPr>
+                              <m:t>4.9</m:t>
+                            </m:r>
+                          </m:den>
+                        </m:f>
+                      </m:e>
+                    </m:rad>
+                    <m:r>
+                      <a:rPr lang="en-US" altLang="ja-JP" sz="2400" b="0" i="1" dirty="0" smtClean="0">
+                        <a:solidFill>
+                          <a:srgbClr val="FF0000"/>
+                        </a:solidFill>
+                        <a:latin typeface="Cambria Math" panose="02040503050406030204" pitchFamily="18" charset="0"/>
+                      </a:rPr>
+                      <m:t>𝑚</m:t>
+                    </m:r>
+                  </m:oMath>
+                </a14:m>
+                <a:r>
+                  <a:rPr lang="en-US" altLang="ja-JP" sz="2400" b="0" dirty="0">
+                    <a:solidFill>
+                      <a:srgbClr val="FF0000"/>
+                    </a:solidFill>
+                  </a:rPr>
+                  <a:t> </a:t>
+                </a:r>
+                <a:endParaRPr lang="en-US" altLang="ja-JP" sz="2400" b="0" dirty="0"/>
+              </a:p>
+            </p:txBody>
+          </p:sp>
+        </mc:Choice>
+        <mc:Fallback>
+          <p:sp>
+            <p:nvSpPr>
+              <p:cNvPr id="7" name="テキスト ボックス 6">
+                <a:extLst>
+                  <a:ext uri="{FF2B5EF4-FFF2-40B4-BE49-F238E27FC236}">
+                    <a16:creationId xmlns:a16="http://schemas.microsoft.com/office/drawing/2014/main" id="{E8AA9D1A-D420-4A0F-9DEE-FFB7145EE62A}"/>
+                  </a:ext>
+                </a:extLst>
+              </p:cNvPr>
+              <p:cNvSpPr txBox="1">
+                <a:spLocks noRot="1" noChangeAspect="1" noMove="1" noResize="1" noEditPoints="1" noAdjustHandles="1" noChangeArrowheads="1" noChangeShapeType="1" noTextEdit="1"/>
+              </p:cNvSpPr>
+              <p:nvPr/>
+            </p:nvSpPr>
+            <p:spPr>
+              <a:xfrm>
+                <a:off x="567542" y="1216429"/>
+                <a:ext cx="9381543" cy="4180760"/>
+              </a:xfrm>
+              <a:prstGeom prst="rect">
+                <a:avLst/>
+              </a:prstGeom>
+              <a:blipFill>
+                <a:blip r:embed="rId2"/>
+                <a:stretch>
+                  <a:fillRect l="-975" t="-1168" r="-65"/>
+                </a:stretch>
+              </a:blipFill>
+            </p:spPr>
+            <p:txBody>
+              <a:bodyPr/>
+              <a:lstStyle/>
+              <a:p>
+                <a:r>
+                  <a:rPr lang="ja-JP" altLang="en-US">
+                    <a:noFill/>
+                  </a:rPr>
+                  <a:t> </a:t>
+                </a:r>
+              </a:p>
+            </p:txBody>
+          </p:sp>
+        </mc:Fallback>
+      </mc:AlternateContent>
+    </p:spTree>
+    <p:extLst>
+      <p:ext uri="{BB962C8B-B14F-4D97-AF65-F5344CB8AC3E}">
+        <p14:creationId xmlns:p14="http://schemas.microsoft.com/office/powerpoint/2010/main" val="3861941102"/>
+      </p:ext>
+    </p:extLst>
+  </p:cSld>
+  <p:clrMapOvr>
+    <a:masterClrMapping/>
+  </p:clrMapOvr>
+</p:sld>
+</file>
+
+<file path=ppt/slides/slide25.xml><?xml version="1.0" encoding="utf-8"?>
+<p:sld xmlns:a="http://schemas.openxmlformats.org/drawingml/2006/main" xmlns:r="http://schemas.openxmlformats.org/officeDocument/2006/relationships" xmlns:p="http://schemas.openxmlformats.org/presentationml/2006/main">
+  <p:cSld>
+    <p:spTree>
+      <p:nvGrpSpPr>
+        <p:cNvPr id="1" name=""/>
+        <p:cNvGrpSpPr/>
+        <p:nvPr/>
+      </p:nvGrpSpPr>
+      <p:grpSpPr>
+        <a:xfrm>
+          <a:off x="0" y="0"/>
+          <a:ext cx="0" cy="0"/>
+          <a:chOff x="0" y="0"/>
+          <a:chExt cx="0" cy="0"/>
+        </a:xfrm>
+      </p:grpSpPr>
+      <p:sp>
+        <p:nvSpPr>
+          <p:cNvPr id="4" name="テキスト ボックス 3">
+            <a:extLst>
+              <a:ext uri="{FF2B5EF4-FFF2-40B4-BE49-F238E27FC236}">
+                <a16:creationId xmlns:a16="http://schemas.microsoft.com/office/drawing/2014/main" id="{5A13BF46-B8C5-48AA-8308-C9ECFF431A18}"/>
+              </a:ext>
+            </a:extLst>
+          </p:cNvPr>
+          <p:cNvSpPr txBox="1"/>
+          <p:nvPr/>
+        </p:nvSpPr>
+        <p:spPr>
+          <a:xfrm>
+            <a:off x="567542" y="491954"/>
+            <a:ext cx="5461752" cy="584775"/>
+          </a:xfrm>
+          <a:prstGeom prst="rect">
+            <a:avLst/>
+          </a:prstGeom>
+          <a:noFill/>
+        </p:spPr>
+        <p:txBody>
+          <a:bodyPr wrap="none" rtlCol="0">
+            <a:spAutoFit/>
+          </a:bodyPr>
+          <a:lstStyle/>
+          <a:p>
+            <a:r>
+              <a:rPr kumimoji="1" lang="en-US" altLang="ja-JP" sz="3200" b="1" u="sng" dirty="0"/>
+              <a:t>2</a:t>
+            </a:r>
+            <a:r>
+              <a:rPr kumimoji="1" lang="ja-JP" altLang="en-US" sz="3200" b="1" u="sng" dirty="0"/>
+              <a:t>次元、３次元の運動 例題４</a:t>
+            </a:r>
+            <a:endParaRPr kumimoji="1" lang="en-US" altLang="ja-JP" sz="3200" b="1" u="sng" dirty="0"/>
+          </a:p>
+        </p:txBody>
+      </p:sp>
+      <mc:AlternateContent xmlns:mc="http://schemas.openxmlformats.org/markup-compatibility/2006">
+        <mc:Choice xmlns:a14="http://schemas.microsoft.com/office/drawing/2010/main" Requires="a14">
+          <p:sp>
+            <p:nvSpPr>
+              <p:cNvPr id="6" name="テキスト ボックス 5">
+                <a:extLst>
+                  <a:ext uri="{FF2B5EF4-FFF2-40B4-BE49-F238E27FC236}">
+                    <a16:creationId xmlns:a16="http://schemas.microsoft.com/office/drawing/2014/main" id="{55830AD6-028B-4C4E-80BF-B70DFC1C3A46}"/>
+                  </a:ext>
+                </a:extLst>
+              </p:cNvPr>
+              <p:cNvSpPr txBox="1"/>
+              <p:nvPr/>
+            </p:nvSpPr>
+            <p:spPr>
+              <a:xfrm>
+                <a:off x="567542" y="1216429"/>
+                <a:ext cx="8770350" cy="1200329"/>
+              </a:xfrm>
+              <a:prstGeom prst="rect">
+                <a:avLst/>
+              </a:prstGeom>
+              <a:noFill/>
+            </p:spPr>
+            <p:txBody>
+              <a:bodyPr wrap="none" rtlCol="0">
+                <a:spAutoFit/>
+              </a:bodyPr>
+              <a:lstStyle/>
+              <a:p>
+                <a:r>
+                  <a:rPr lang="ja-JP" altLang="en-US" sz="2400" dirty="0"/>
+                  <a:t>ゲーム中のキャラクターが</a:t>
+                </a:r>
+                <a:r>
+                  <a:rPr lang="en-US" altLang="ja-JP" sz="2400" dirty="0"/>
+                  <a:t>10m/</a:t>
+                </a:r>
+                <a:r>
+                  <a:rPr lang="ja-JP" altLang="en-US" sz="2400" dirty="0"/>
+                  <a:t>秒で移動しており、</a:t>
+                </a:r>
+                <a:endParaRPr lang="en-US" altLang="ja-JP" sz="2400" dirty="0"/>
+              </a:p>
+              <a:p>
+                <a:r>
+                  <a:rPr lang="ja-JP" altLang="en-US" sz="2400" dirty="0"/>
+                  <a:t>高さ</a:t>
+                </a:r>
+                <a:r>
+                  <a:rPr lang="en-US" altLang="ja-JP" sz="2400" dirty="0"/>
+                  <a:t>8m</a:t>
+                </a:r>
+                <a:r>
+                  <a:rPr lang="ja-JP" altLang="en-US" sz="2400" dirty="0"/>
+                  <a:t>の崖から</a:t>
+                </a:r>
+                <a14:m>
+                  <m:oMath xmlns:m="http://schemas.openxmlformats.org/officeDocument/2006/math">
+                    <m:r>
+                      <a:rPr lang="en-US" altLang="ja-JP" sz="2400" i="1" dirty="0" smtClean="0">
+                        <a:latin typeface="Cambria Math" panose="02040503050406030204" pitchFamily="18" charset="0"/>
+                      </a:rPr>
+                      <m:t>30°</m:t>
+                    </m:r>
+                  </m:oMath>
+                </a14:m>
+                <a:r>
+                  <a:rPr lang="ja-JP" altLang="en-US" sz="2400" dirty="0"/>
+                  <a:t>の角度でジャンプして飛び降りました。</a:t>
+                </a:r>
+                <a:endParaRPr lang="en-US" altLang="ja-JP" sz="2400" dirty="0"/>
+              </a:p>
+              <a:p>
+                <a:r>
+                  <a:rPr lang="ja-JP" altLang="en-US" sz="2400" dirty="0"/>
+                  <a:t>崖から着地地点までの水平距離は何</a:t>
+                </a:r>
+                <a:r>
+                  <a:rPr lang="en-US" altLang="ja-JP" sz="2400" dirty="0"/>
+                  <a:t>m</a:t>
+                </a:r>
+                <a:r>
+                  <a:rPr lang="ja-JP" altLang="en-US" sz="2400" dirty="0"/>
+                  <a:t>か求めなさい。</a:t>
+                </a:r>
+                <a:endParaRPr lang="en-US" altLang="ja-JP" sz="2400" dirty="0"/>
+              </a:p>
+            </p:txBody>
+          </p:sp>
+        </mc:Choice>
+        <mc:Fallback>
+          <p:sp>
+            <p:nvSpPr>
+              <p:cNvPr id="6" name="テキスト ボックス 5">
+                <a:extLst>
+                  <a:ext uri="{FF2B5EF4-FFF2-40B4-BE49-F238E27FC236}">
+                    <a16:creationId xmlns:a16="http://schemas.microsoft.com/office/drawing/2014/main" id="{55830AD6-028B-4C4E-80BF-B70DFC1C3A46}"/>
+                  </a:ext>
+                </a:extLst>
+              </p:cNvPr>
+              <p:cNvSpPr txBox="1">
+                <a:spLocks noRot="1" noChangeAspect="1" noMove="1" noResize="1" noEditPoints="1" noAdjustHandles="1" noChangeArrowheads="1" noChangeShapeType="1" noTextEdit="1"/>
+              </p:cNvSpPr>
+              <p:nvPr/>
+            </p:nvSpPr>
+            <p:spPr>
+              <a:xfrm>
+                <a:off x="567542" y="1216429"/>
+                <a:ext cx="8770350" cy="1200329"/>
+              </a:xfrm>
+              <a:prstGeom prst="rect">
+                <a:avLst/>
+              </a:prstGeom>
+              <a:blipFill>
+                <a:blip r:embed="rId2"/>
+                <a:stretch>
+                  <a:fillRect l="-1042" t="-4082" b="-11224"/>
+                </a:stretch>
+              </a:blipFill>
+            </p:spPr>
+            <p:txBody>
+              <a:bodyPr/>
+              <a:lstStyle/>
+              <a:p>
+                <a:r>
+                  <a:rPr lang="ja-JP" altLang="en-US">
+                    <a:noFill/>
+                  </a:rPr>
+                  <a:t> </a:t>
+                </a:r>
+              </a:p>
+            </p:txBody>
+          </p:sp>
+        </mc:Fallback>
+      </mc:AlternateContent>
+      <p:cxnSp>
+        <p:nvCxnSpPr>
+          <p:cNvPr id="14" name="直線コネクタ 13">
+            <a:extLst>
+              <a:ext uri="{FF2B5EF4-FFF2-40B4-BE49-F238E27FC236}">
+                <a16:creationId xmlns:a16="http://schemas.microsoft.com/office/drawing/2014/main" id="{A7912C19-55BE-4B97-ACEA-80391584E33D}"/>
+              </a:ext>
+            </a:extLst>
+          </p:cNvPr>
+          <p:cNvCxnSpPr/>
+          <p:nvPr/>
+        </p:nvCxnSpPr>
+        <p:spPr>
+          <a:xfrm>
+            <a:off x="736599" y="3742266"/>
+            <a:ext cx="2937934" cy="0"/>
+          </a:xfrm>
+          <a:prstGeom prst="line">
+            <a:avLst/>
+          </a:prstGeom>
+          <a:ln w="76200">
+            <a:solidFill>
+              <a:schemeClr val="accent2">
+                <a:lumMod val="75000"/>
+              </a:schemeClr>
+            </a:solidFill>
+          </a:ln>
+        </p:spPr>
+        <p:style>
+          <a:lnRef idx="1">
+            <a:schemeClr val="accent1"/>
+          </a:lnRef>
+          <a:fillRef idx="0">
+            <a:schemeClr val="accent1"/>
+          </a:fillRef>
+          <a:effectRef idx="0">
+            <a:schemeClr val="accent1"/>
+          </a:effectRef>
+          <a:fontRef idx="minor">
+            <a:schemeClr val="tx1"/>
+          </a:fontRef>
+        </p:style>
+      </p:cxnSp>
+      <p:cxnSp>
+        <p:nvCxnSpPr>
+          <p:cNvPr id="15" name="直線コネクタ 14">
+            <a:extLst>
+              <a:ext uri="{FF2B5EF4-FFF2-40B4-BE49-F238E27FC236}">
+                <a16:creationId xmlns:a16="http://schemas.microsoft.com/office/drawing/2014/main" id="{9AB3491F-A4F5-49BC-861E-9AE878E40713}"/>
+              </a:ext>
+            </a:extLst>
+          </p:cNvPr>
+          <p:cNvCxnSpPr>
+            <a:cxnSpLocks/>
+          </p:cNvCxnSpPr>
+          <p:nvPr/>
+        </p:nvCxnSpPr>
+        <p:spPr>
+          <a:xfrm>
+            <a:off x="736599" y="5892801"/>
+            <a:ext cx="8602134" cy="0"/>
+          </a:xfrm>
+          <a:prstGeom prst="line">
+            <a:avLst/>
+          </a:prstGeom>
+          <a:ln w="76200">
+            <a:solidFill>
+              <a:schemeClr val="accent4">
+                <a:lumMod val="75000"/>
+              </a:schemeClr>
+            </a:solidFill>
+          </a:ln>
+        </p:spPr>
+        <p:style>
+          <a:lnRef idx="1">
+            <a:schemeClr val="accent1"/>
+          </a:lnRef>
+          <a:fillRef idx="0">
+            <a:schemeClr val="accent1"/>
+          </a:fillRef>
+          <a:effectRef idx="0">
+            <a:schemeClr val="accent1"/>
+          </a:effectRef>
+          <a:fontRef idx="minor">
+            <a:schemeClr val="tx1"/>
+          </a:fontRef>
+        </p:style>
+      </p:cxnSp>
+      <p:cxnSp>
+        <p:nvCxnSpPr>
+          <p:cNvPr id="20" name="直線矢印コネクタ 19">
+            <a:extLst>
+              <a:ext uri="{FF2B5EF4-FFF2-40B4-BE49-F238E27FC236}">
+                <a16:creationId xmlns:a16="http://schemas.microsoft.com/office/drawing/2014/main" id="{BA1CF461-6BB3-4DA0-A1AA-1A27A3BC09F1}"/>
+              </a:ext>
+            </a:extLst>
+          </p:cNvPr>
+          <p:cNvCxnSpPr>
+            <a:cxnSpLocks/>
+          </p:cNvCxnSpPr>
+          <p:nvPr/>
+        </p:nvCxnSpPr>
+        <p:spPr>
+          <a:xfrm>
+            <a:off x="1778000" y="3742266"/>
+            <a:ext cx="0" cy="2091267"/>
+          </a:xfrm>
+          <a:prstGeom prst="straightConnector1">
+            <a:avLst/>
+          </a:prstGeom>
+          <a:ln w="38100">
+            <a:solidFill>
+              <a:srgbClr val="00B050"/>
+            </a:solidFill>
+            <a:headEnd type="triangle"/>
+            <a:tailEnd type="triangle"/>
+          </a:ln>
+        </p:spPr>
+        <p:style>
+          <a:lnRef idx="1">
+            <a:schemeClr val="accent1"/>
+          </a:lnRef>
+          <a:fillRef idx="0">
+            <a:schemeClr val="accent1"/>
+          </a:fillRef>
+          <a:effectRef idx="0">
+            <a:schemeClr val="accent1"/>
+          </a:effectRef>
+          <a:fontRef idx="minor">
+            <a:schemeClr val="tx1"/>
+          </a:fontRef>
+        </p:style>
+      </p:cxnSp>
+      <p:sp>
+        <p:nvSpPr>
+          <p:cNvPr id="27" name="テキスト ボックス 26">
+            <a:extLst>
+              <a:ext uri="{FF2B5EF4-FFF2-40B4-BE49-F238E27FC236}">
+                <a16:creationId xmlns:a16="http://schemas.microsoft.com/office/drawing/2014/main" id="{03418316-B1EC-4233-BD2E-B2A858C3B630}"/>
+              </a:ext>
+            </a:extLst>
+          </p:cNvPr>
+          <p:cNvSpPr txBox="1"/>
+          <p:nvPr/>
+        </p:nvSpPr>
+        <p:spPr>
+          <a:xfrm>
+            <a:off x="1795242" y="4570011"/>
+            <a:ext cx="620683" cy="461665"/>
+          </a:xfrm>
+          <a:prstGeom prst="rect">
+            <a:avLst/>
+          </a:prstGeom>
+          <a:noFill/>
+        </p:spPr>
+        <p:txBody>
+          <a:bodyPr wrap="none" rtlCol="0">
+            <a:spAutoFit/>
+          </a:bodyPr>
+          <a:lstStyle/>
+          <a:p>
+            <a:r>
+              <a:rPr lang="en-US" altLang="ja-JP" sz="2400" dirty="0"/>
+              <a:t>8m</a:t>
+            </a:r>
+          </a:p>
+        </p:txBody>
+      </p:sp>
+      <p:sp>
+        <p:nvSpPr>
+          <p:cNvPr id="28" name="スマイル 27">
+            <a:extLst>
+              <a:ext uri="{FF2B5EF4-FFF2-40B4-BE49-F238E27FC236}">
+                <a16:creationId xmlns:a16="http://schemas.microsoft.com/office/drawing/2014/main" id="{BC692953-2C75-4E5C-B983-DC5F906401F2}"/>
+              </a:ext>
+            </a:extLst>
+          </p:cNvPr>
+          <p:cNvSpPr/>
+          <p:nvPr/>
+        </p:nvSpPr>
+        <p:spPr>
+          <a:xfrm>
+            <a:off x="3162664" y="3140222"/>
+            <a:ext cx="550333" cy="541865"/>
+          </a:xfrm>
+          <a:prstGeom prst="smileyFace">
+            <a:avLst/>
+          </a:prstGeom>
+        </p:spPr>
+        <p:style>
+          <a:lnRef idx="2">
+            <a:schemeClr val="accent4">
+              <a:shade val="50000"/>
+            </a:schemeClr>
+          </a:lnRef>
+          <a:fillRef idx="1">
+            <a:schemeClr val="accent4"/>
+          </a:fillRef>
+          <a:effectRef idx="0">
+            <a:schemeClr val="accent4"/>
+          </a:effectRef>
+          <a:fontRef idx="minor">
+            <a:schemeClr val="lt1"/>
+          </a:fontRef>
+        </p:style>
+        <p:txBody>
+          <a:bodyPr rtlCol="0" anchor="ctr"/>
+          <a:lstStyle/>
+          <a:p>
+            <a:pPr algn="ctr"/>
+            <a:endParaRPr kumimoji="1" lang="ja-JP" altLang="en-US"/>
+          </a:p>
+        </p:txBody>
+      </p:sp>
+      <p:cxnSp>
+        <p:nvCxnSpPr>
+          <p:cNvPr id="30" name="直線矢印コネクタ 29">
+            <a:extLst>
+              <a:ext uri="{FF2B5EF4-FFF2-40B4-BE49-F238E27FC236}">
+                <a16:creationId xmlns:a16="http://schemas.microsoft.com/office/drawing/2014/main" id="{C68C638A-B35A-4513-9B84-3A1EFBBA47B5}"/>
+              </a:ext>
+            </a:extLst>
+          </p:cNvPr>
+          <p:cNvCxnSpPr>
+            <a:cxnSpLocks/>
+          </p:cNvCxnSpPr>
+          <p:nvPr/>
+        </p:nvCxnSpPr>
+        <p:spPr>
+          <a:xfrm>
+            <a:off x="3116464" y="3051364"/>
+            <a:ext cx="642736" cy="0"/>
+          </a:xfrm>
+          <a:prstGeom prst="straightConnector1">
+            <a:avLst/>
+          </a:prstGeom>
+          <a:ln w="38100">
+            <a:solidFill>
+              <a:srgbClr val="FF0000"/>
+            </a:solidFill>
+            <a:tailEnd type="triangle"/>
+          </a:ln>
+        </p:spPr>
+        <p:style>
+          <a:lnRef idx="1">
+            <a:schemeClr val="accent1"/>
+          </a:lnRef>
+          <a:fillRef idx="0">
+            <a:schemeClr val="accent1"/>
+          </a:fillRef>
+          <a:effectRef idx="0">
+            <a:schemeClr val="accent1"/>
+          </a:effectRef>
+          <a:fontRef idx="minor">
+            <a:schemeClr val="tx1"/>
+          </a:fontRef>
+        </p:style>
+      </p:cxnSp>
+      <p:sp>
+        <p:nvSpPr>
+          <p:cNvPr id="35" name="テキスト ボックス 34">
+            <a:extLst>
+              <a:ext uri="{FF2B5EF4-FFF2-40B4-BE49-F238E27FC236}">
+                <a16:creationId xmlns:a16="http://schemas.microsoft.com/office/drawing/2014/main" id="{446C9021-92A2-49AD-B555-996328ADAAAC}"/>
+              </a:ext>
+            </a:extLst>
+          </p:cNvPr>
+          <p:cNvSpPr txBox="1"/>
+          <p:nvPr/>
+        </p:nvSpPr>
+        <p:spPr>
+          <a:xfrm>
+            <a:off x="2912898" y="2627951"/>
+            <a:ext cx="1049867" cy="369332"/>
+          </a:xfrm>
+          <a:prstGeom prst="rect">
+            <a:avLst/>
+          </a:prstGeom>
+          <a:noFill/>
+        </p:spPr>
+        <p:txBody>
+          <a:bodyPr wrap="square">
+            <a:spAutoFit/>
+          </a:bodyPr>
+          <a:lstStyle/>
+          <a:p>
+            <a:r>
+              <a:rPr lang="en-US" altLang="ja-JP" sz="1800" dirty="0"/>
+              <a:t>10m/</a:t>
+            </a:r>
+            <a:r>
+              <a:rPr lang="ja-JP" altLang="en-US" sz="1800" dirty="0"/>
+              <a:t>秒</a:t>
+            </a:r>
+            <a:endParaRPr lang="ja-JP" altLang="en-US" dirty="0"/>
+          </a:p>
+        </p:txBody>
+      </p:sp>
+      <p:sp>
+        <p:nvSpPr>
+          <p:cNvPr id="37" name="楕円 36">
+            <a:extLst>
+              <a:ext uri="{FF2B5EF4-FFF2-40B4-BE49-F238E27FC236}">
+                <a16:creationId xmlns:a16="http://schemas.microsoft.com/office/drawing/2014/main" id="{26536FAC-5662-4C20-AAC2-CE5CAB6666D9}"/>
+              </a:ext>
+            </a:extLst>
+          </p:cNvPr>
+          <p:cNvSpPr/>
+          <p:nvPr/>
+        </p:nvSpPr>
+        <p:spPr>
+          <a:xfrm>
+            <a:off x="4301431" y="3060419"/>
+            <a:ext cx="180000" cy="180000"/>
+          </a:xfrm>
+          <a:prstGeom prst="ellipse">
+            <a:avLst/>
+          </a:prstGeom>
+        </p:spPr>
+        <p:style>
+          <a:lnRef idx="2">
+            <a:schemeClr val="accent4">
+              <a:shade val="50000"/>
+            </a:schemeClr>
+          </a:lnRef>
+          <a:fillRef idx="1">
+            <a:schemeClr val="accent4"/>
+          </a:fillRef>
+          <a:effectRef idx="0">
+            <a:schemeClr val="accent4"/>
+          </a:effectRef>
+          <a:fontRef idx="minor">
+            <a:schemeClr val="lt1"/>
+          </a:fontRef>
+        </p:style>
+        <p:txBody>
+          <a:bodyPr rtlCol="0" anchor="ctr"/>
+          <a:lstStyle/>
+          <a:p>
+            <a:pPr algn="ctr"/>
+            <a:endParaRPr kumimoji="1" lang="ja-JP" altLang="en-US"/>
+          </a:p>
+        </p:txBody>
+      </p:sp>
+      <p:sp>
+        <p:nvSpPr>
+          <p:cNvPr id="39" name="楕円 38">
+            <a:extLst>
+              <a:ext uri="{FF2B5EF4-FFF2-40B4-BE49-F238E27FC236}">
+                <a16:creationId xmlns:a16="http://schemas.microsoft.com/office/drawing/2014/main" id="{DB9FE105-5062-4AEC-883F-8F379ED0EE08}"/>
+              </a:ext>
+            </a:extLst>
+          </p:cNvPr>
+          <p:cNvSpPr/>
+          <p:nvPr/>
+        </p:nvSpPr>
+        <p:spPr>
+          <a:xfrm>
+            <a:off x="4772717" y="2771119"/>
+            <a:ext cx="180000" cy="180000"/>
+          </a:xfrm>
+          <a:prstGeom prst="ellipse">
+            <a:avLst/>
+          </a:prstGeom>
+        </p:spPr>
+        <p:style>
+          <a:lnRef idx="2">
+            <a:schemeClr val="accent4">
+              <a:shade val="50000"/>
+            </a:schemeClr>
+          </a:lnRef>
+          <a:fillRef idx="1">
+            <a:schemeClr val="accent4"/>
+          </a:fillRef>
+          <a:effectRef idx="0">
+            <a:schemeClr val="accent4"/>
+          </a:effectRef>
+          <a:fontRef idx="minor">
+            <a:schemeClr val="lt1"/>
+          </a:fontRef>
+        </p:style>
+        <p:txBody>
+          <a:bodyPr rtlCol="0" anchor="ctr"/>
+          <a:lstStyle/>
+          <a:p>
+            <a:pPr algn="ctr"/>
+            <a:endParaRPr kumimoji="1" lang="ja-JP" altLang="en-US"/>
+          </a:p>
+        </p:txBody>
+      </p:sp>
+      <p:sp>
+        <p:nvSpPr>
+          <p:cNvPr id="40" name="楕円 39">
+            <a:extLst>
+              <a:ext uri="{FF2B5EF4-FFF2-40B4-BE49-F238E27FC236}">
+                <a16:creationId xmlns:a16="http://schemas.microsoft.com/office/drawing/2014/main" id="{CEEF9974-74F6-49A8-AB0D-5AAB484AD77A}"/>
+              </a:ext>
+            </a:extLst>
+          </p:cNvPr>
+          <p:cNvSpPr/>
+          <p:nvPr/>
+        </p:nvSpPr>
+        <p:spPr>
+          <a:xfrm>
+            <a:off x="5334730" y="2667320"/>
+            <a:ext cx="180000" cy="180000"/>
+          </a:xfrm>
+          <a:prstGeom prst="ellipse">
+            <a:avLst/>
+          </a:prstGeom>
+        </p:spPr>
+        <p:style>
+          <a:lnRef idx="2">
+            <a:schemeClr val="accent4">
+              <a:shade val="50000"/>
+            </a:schemeClr>
+          </a:lnRef>
+          <a:fillRef idx="1">
+            <a:schemeClr val="accent4"/>
+          </a:fillRef>
+          <a:effectRef idx="0">
+            <a:schemeClr val="accent4"/>
+          </a:effectRef>
+          <a:fontRef idx="minor">
+            <a:schemeClr val="lt1"/>
+          </a:fontRef>
+        </p:style>
+        <p:txBody>
+          <a:bodyPr rtlCol="0" anchor="ctr"/>
+          <a:lstStyle/>
+          <a:p>
+            <a:pPr algn="ctr"/>
+            <a:endParaRPr kumimoji="1" lang="ja-JP" altLang="en-US"/>
+          </a:p>
+        </p:txBody>
+      </p:sp>
+      <p:sp>
+        <p:nvSpPr>
+          <p:cNvPr id="41" name="楕円 40">
+            <a:extLst>
+              <a:ext uri="{FF2B5EF4-FFF2-40B4-BE49-F238E27FC236}">
+                <a16:creationId xmlns:a16="http://schemas.microsoft.com/office/drawing/2014/main" id="{BEEE514F-2DE1-47A9-94BD-C874ABAFACF1}"/>
+              </a:ext>
+            </a:extLst>
+          </p:cNvPr>
+          <p:cNvSpPr/>
+          <p:nvPr/>
+        </p:nvSpPr>
+        <p:spPr>
+          <a:xfrm>
+            <a:off x="5867198" y="2793663"/>
+            <a:ext cx="180000" cy="180000"/>
+          </a:xfrm>
+          <a:prstGeom prst="ellipse">
+            <a:avLst/>
+          </a:prstGeom>
+        </p:spPr>
+        <p:style>
+          <a:lnRef idx="2">
+            <a:schemeClr val="accent4">
+              <a:shade val="50000"/>
+            </a:schemeClr>
+          </a:lnRef>
+          <a:fillRef idx="1">
+            <a:schemeClr val="accent4"/>
+          </a:fillRef>
+          <a:effectRef idx="0">
+            <a:schemeClr val="accent4"/>
+          </a:effectRef>
+          <a:fontRef idx="minor">
+            <a:schemeClr val="lt1"/>
+          </a:fontRef>
+        </p:style>
+        <p:txBody>
+          <a:bodyPr rtlCol="0" anchor="ctr"/>
+          <a:lstStyle/>
+          <a:p>
+            <a:pPr algn="ctr"/>
+            <a:endParaRPr kumimoji="1" lang="ja-JP" altLang="en-US"/>
+          </a:p>
+        </p:txBody>
+      </p:sp>
+      <p:sp>
+        <p:nvSpPr>
+          <p:cNvPr id="42" name="スマイル 41">
+            <a:extLst>
+              <a:ext uri="{FF2B5EF4-FFF2-40B4-BE49-F238E27FC236}">
+                <a16:creationId xmlns:a16="http://schemas.microsoft.com/office/drawing/2014/main" id="{0E529262-55DA-4041-AF1B-F63BABB6B700}"/>
+              </a:ext>
+            </a:extLst>
+          </p:cNvPr>
+          <p:cNvSpPr/>
+          <p:nvPr/>
+        </p:nvSpPr>
+        <p:spPr>
+          <a:xfrm>
+            <a:off x="7275066" y="5321302"/>
+            <a:ext cx="550333" cy="541865"/>
+          </a:xfrm>
+          <a:prstGeom prst="smileyFace">
+            <a:avLst/>
+          </a:prstGeom>
+        </p:spPr>
+        <p:style>
+          <a:lnRef idx="2">
+            <a:schemeClr val="accent4">
+              <a:shade val="50000"/>
+            </a:schemeClr>
+          </a:lnRef>
+          <a:fillRef idx="1">
+            <a:schemeClr val="accent4"/>
+          </a:fillRef>
+          <a:effectRef idx="0">
+            <a:schemeClr val="accent4"/>
+          </a:effectRef>
+          <a:fontRef idx="minor">
+            <a:schemeClr val="lt1"/>
+          </a:fontRef>
+        </p:style>
+        <p:txBody>
+          <a:bodyPr rtlCol="0" anchor="ctr"/>
+          <a:lstStyle/>
+          <a:p>
+            <a:pPr algn="ctr"/>
+            <a:endParaRPr kumimoji="1" lang="ja-JP" altLang="en-US"/>
+          </a:p>
+        </p:txBody>
+      </p:sp>
+      <p:cxnSp>
+        <p:nvCxnSpPr>
+          <p:cNvPr id="43" name="直線矢印コネクタ 42">
+            <a:extLst>
+              <a:ext uri="{FF2B5EF4-FFF2-40B4-BE49-F238E27FC236}">
+                <a16:creationId xmlns:a16="http://schemas.microsoft.com/office/drawing/2014/main" id="{FABD2D5E-7C31-4B38-9B5B-02E67FACF8A5}"/>
+              </a:ext>
+            </a:extLst>
+          </p:cNvPr>
+          <p:cNvCxnSpPr>
+            <a:cxnSpLocks/>
+          </p:cNvCxnSpPr>
+          <p:nvPr/>
+        </p:nvCxnSpPr>
+        <p:spPr>
+          <a:xfrm flipH="1">
+            <a:off x="3691467" y="6062133"/>
+            <a:ext cx="3905332" cy="0"/>
+          </a:xfrm>
+          <a:prstGeom prst="straightConnector1">
+            <a:avLst/>
+          </a:prstGeom>
+          <a:ln w="38100">
+            <a:solidFill>
+              <a:srgbClr val="FF0000"/>
+            </a:solidFill>
+            <a:headEnd type="triangle"/>
+            <a:tailEnd type="triangle"/>
+          </a:ln>
+        </p:spPr>
+        <p:style>
+          <a:lnRef idx="1">
+            <a:schemeClr val="accent1"/>
+          </a:lnRef>
+          <a:fillRef idx="0">
+            <a:schemeClr val="accent1"/>
+          </a:fillRef>
+          <a:effectRef idx="0">
+            <a:schemeClr val="accent1"/>
+          </a:effectRef>
+          <a:fontRef idx="minor">
+            <a:schemeClr val="tx1"/>
+          </a:fontRef>
+        </p:style>
+      </p:cxnSp>
+      <p:sp>
+        <p:nvSpPr>
+          <p:cNvPr id="47" name="テキスト ボックス 46">
+            <a:extLst>
+              <a:ext uri="{FF2B5EF4-FFF2-40B4-BE49-F238E27FC236}">
+                <a16:creationId xmlns:a16="http://schemas.microsoft.com/office/drawing/2014/main" id="{5FEF7A07-8C74-4F59-8048-88A0DD146EE4}"/>
+              </a:ext>
+            </a:extLst>
+          </p:cNvPr>
+          <p:cNvSpPr txBox="1"/>
+          <p:nvPr/>
+        </p:nvSpPr>
+        <p:spPr>
+          <a:xfrm>
+            <a:off x="5334730" y="6181380"/>
+            <a:ext cx="885866" cy="369332"/>
+          </a:xfrm>
+          <a:prstGeom prst="rect">
+            <a:avLst/>
+          </a:prstGeom>
+          <a:noFill/>
+        </p:spPr>
+        <p:txBody>
+          <a:bodyPr wrap="square">
+            <a:spAutoFit/>
+          </a:bodyPr>
+          <a:lstStyle/>
+          <a:p>
+            <a:r>
+              <a:rPr lang="ja-JP" altLang="en-US" sz="1800" dirty="0"/>
+              <a:t>何</a:t>
+            </a:r>
+            <a:r>
+              <a:rPr lang="en-US" altLang="ja-JP" sz="1800" dirty="0"/>
+              <a:t>m</a:t>
+            </a:r>
+            <a:r>
+              <a:rPr lang="ja-JP" altLang="en-US" sz="1800" dirty="0"/>
+              <a:t>？</a:t>
+            </a:r>
+            <a:endParaRPr lang="ja-JP" altLang="en-US" dirty="0"/>
+          </a:p>
+        </p:txBody>
+      </p:sp>
+      <p:cxnSp>
+        <p:nvCxnSpPr>
+          <p:cNvPr id="18" name="直線矢印コネクタ 17">
+            <a:extLst>
+              <a:ext uri="{FF2B5EF4-FFF2-40B4-BE49-F238E27FC236}">
+                <a16:creationId xmlns:a16="http://schemas.microsoft.com/office/drawing/2014/main" id="{CF92051C-44EB-41F9-B8D5-5FFEDE5C1363}"/>
+              </a:ext>
+            </a:extLst>
+          </p:cNvPr>
+          <p:cNvCxnSpPr>
+            <a:cxnSpLocks/>
+          </p:cNvCxnSpPr>
+          <p:nvPr/>
+        </p:nvCxnSpPr>
+        <p:spPr>
+          <a:xfrm flipV="1">
+            <a:off x="3674533" y="3277883"/>
+            <a:ext cx="524934" cy="434294"/>
+          </a:xfrm>
+          <a:prstGeom prst="straightConnector1">
+            <a:avLst/>
+          </a:prstGeom>
+          <a:ln w="38100">
+            <a:solidFill>
+              <a:schemeClr val="tx1"/>
+            </a:solidFill>
+            <a:tailEnd type="triangle"/>
+          </a:ln>
+        </p:spPr>
+        <p:style>
+          <a:lnRef idx="1">
+            <a:schemeClr val="accent1"/>
+          </a:lnRef>
+          <a:fillRef idx="0">
+            <a:schemeClr val="accent1"/>
+          </a:fillRef>
+          <a:effectRef idx="0">
+            <a:schemeClr val="accent1"/>
+          </a:effectRef>
+          <a:fontRef idx="minor">
+            <a:schemeClr val="tx1"/>
+          </a:fontRef>
+        </p:style>
+      </p:cxnSp>
+      <p:sp>
+        <p:nvSpPr>
+          <p:cNvPr id="21" name="楕円 20">
+            <a:extLst>
+              <a:ext uri="{FF2B5EF4-FFF2-40B4-BE49-F238E27FC236}">
+                <a16:creationId xmlns:a16="http://schemas.microsoft.com/office/drawing/2014/main" id="{7AA12A09-A805-403E-A53E-FE5DADC18255}"/>
+              </a:ext>
+            </a:extLst>
+          </p:cNvPr>
+          <p:cNvSpPr/>
+          <p:nvPr/>
+        </p:nvSpPr>
+        <p:spPr>
+          <a:xfrm>
+            <a:off x="6214533" y="3097883"/>
+            <a:ext cx="180000" cy="180000"/>
+          </a:xfrm>
+          <a:prstGeom prst="ellipse">
+            <a:avLst/>
+          </a:prstGeom>
+        </p:spPr>
+        <p:style>
+          <a:lnRef idx="2">
+            <a:schemeClr val="accent4">
+              <a:shade val="50000"/>
+            </a:schemeClr>
+          </a:lnRef>
+          <a:fillRef idx="1">
+            <a:schemeClr val="accent4"/>
+          </a:fillRef>
+          <a:effectRef idx="0">
+            <a:schemeClr val="accent4"/>
+          </a:effectRef>
+          <a:fontRef idx="minor">
+            <a:schemeClr val="lt1"/>
+          </a:fontRef>
+        </p:style>
+        <p:txBody>
+          <a:bodyPr rtlCol="0" anchor="ctr"/>
+          <a:lstStyle/>
+          <a:p>
+            <a:pPr algn="ctr"/>
+            <a:endParaRPr kumimoji="1" lang="ja-JP" altLang="en-US"/>
+          </a:p>
+        </p:txBody>
+      </p:sp>
+      <p:sp>
+        <p:nvSpPr>
+          <p:cNvPr id="22" name="楕円 21">
+            <a:extLst>
+              <a:ext uri="{FF2B5EF4-FFF2-40B4-BE49-F238E27FC236}">
+                <a16:creationId xmlns:a16="http://schemas.microsoft.com/office/drawing/2014/main" id="{A4287ED7-A83A-45A6-908E-370AA60D1CA7}"/>
+              </a:ext>
+            </a:extLst>
+          </p:cNvPr>
+          <p:cNvSpPr/>
+          <p:nvPr/>
+        </p:nvSpPr>
+        <p:spPr>
+          <a:xfrm>
+            <a:off x="6654800" y="3622177"/>
+            <a:ext cx="180000" cy="180000"/>
+          </a:xfrm>
+          <a:prstGeom prst="ellipse">
+            <a:avLst/>
+          </a:prstGeom>
+        </p:spPr>
+        <p:style>
+          <a:lnRef idx="2">
+            <a:schemeClr val="accent4">
+              <a:shade val="50000"/>
+            </a:schemeClr>
+          </a:lnRef>
+          <a:fillRef idx="1">
+            <a:schemeClr val="accent4"/>
+          </a:fillRef>
+          <a:effectRef idx="0">
+            <a:schemeClr val="accent4"/>
+          </a:effectRef>
+          <a:fontRef idx="minor">
+            <a:schemeClr val="lt1"/>
+          </a:fontRef>
+        </p:style>
+        <p:txBody>
+          <a:bodyPr rtlCol="0" anchor="ctr"/>
+          <a:lstStyle/>
+          <a:p>
+            <a:pPr algn="ctr"/>
+            <a:endParaRPr kumimoji="1" lang="ja-JP" altLang="en-US"/>
+          </a:p>
+        </p:txBody>
+      </p:sp>
+      <p:sp>
+        <p:nvSpPr>
+          <p:cNvPr id="23" name="楕円 22">
+            <a:extLst>
+              <a:ext uri="{FF2B5EF4-FFF2-40B4-BE49-F238E27FC236}">
+                <a16:creationId xmlns:a16="http://schemas.microsoft.com/office/drawing/2014/main" id="{FC234FCC-5F72-4787-9DB6-42D2366CC7EE}"/>
+              </a:ext>
+            </a:extLst>
+          </p:cNvPr>
+          <p:cNvSpPr/>
+          <p:nvPr/>
+        </p:nvSpPr>
+        <p:spPr>
+          <a:xfrm>
+            <a:off x="7095066" y="4540017"/>
+            <a:ext cx="180000" cy="180000"/>
+          </a:xfrm>
+          <a:prstGeom prst="ellipse">
+            <a:avLst/>
+          </a:prstGeom>
+        </p:spPr>
+        <p:style>
+          <a:lnRef idx="2">
+            <a:schemeClr val="accent4">
+              <a:shade val="50000"/>
+            </a:schemeClr>
+          </a:lnRef>
+          <a:fillRef idx="1">
+            <a:schemeClr val="accent4"/>
+          </a:fillRef>
+          <a:effectRef idx="0">
+            <a:schemeClr val="accent4"/>
+          </a:effectRef>
+          <a:fontRef idx="minor">
+            <a:schemeClr val="lt1"/>
+          </a:fontRef>
+        </p:style>
+        <p:txBody>
+          <a:bodyPr rtlCol="0" anchor="ctr"/>
+          <a:lstStyle/>
+          <a:p>
+            <a:pPr algn="ctr"/>
+            <a:endParaRPr kumimoji="1" lang="ja-JP" altLang="en-US"/>
+          </a:p>
+        </p:txBody>
+      </p:sp>
+      <mc:AlternateContent xmlns:mc="http://schemas.openxmlformats.org/markup-compatibility/2006">
+        <mc:Choice xmlns:a14="http://schemas.microsoft.com/office/drawing/2010/main" Requires="a14">
+          <p:sp>
+            <p:nvSpPr>
+              <p:cNvPr id="29" name="テキスト ボックス 28">
+                <a:extLst>
+                  <a:ext uri="{FF2B5EF4-FFF2-40B4-BE49-F238E27FC236}">
+                    <a16:creationId xmlns:a16="http://schemas.microsoft.com/office/drawing/2014/main" id="{3D596EC6-DB7A-48C7-AFEB-F579EFFCD440}"/>
+                  </a:ext>
+                </a:extLst>
+              </p:cNvPr>
+              <p:cNvSpPr txBox="1"/>
+              <p:nvPr/>
+            </p:nvSpPr>
+            <p:spPr>
+              <a:xfrm>
+                <a:off x="3759200" y="3512874"/>
+                <a:ext cx="711200" cy="369332"/>
+              </a:xfrm>
+              <a:prstGeom prst="rect">
+                <a:avLst/>
+              </a:prstGeom>
+              <a:noFill/>
+            </p:spPr>
+            <p:txBody>
+              <a:bodyPr wrap="square">
+                <a:spAutoFit/>
+              </a:bodyPr>
+              <a:lstStyle/>
+              <a:p>
+                <a:pPr/>
+                <a14:m>
+                  <m:oMathPara xmlns:m="http://schemas.openxmlformats.org/officeDocument/2006/math">
+                    <m:oMathParaPr>
+                      <m:jc m:val="centerGroup"/>
+                    </m:oMathParaPr>
+                    <m:oMath xmlns:m="http://schemas.openxmlformats.org/officeDocument/2006/math">
+                      <m:r>
+                        <a:rPr lang="en-US" altLang="ja-JP" sz="1800" i="1" dirty="0" smtClean="0">
+                          <a:latin typeface="Cambria Math" panose="02040503050406030204" pitchFamily="18" charset="0"/>
+                        </a:rPr>
+                        <m:t>30°</m:t>
+                      </m:r>
+                    </m:oMath>
+                  </m:oMathPara>
+                </a14:m>
+                <a:endParaRPr lang="ja-JP" altLang="en-US" dirty="0"/>
+              </a:p>
+            </p:txBody>
+          </p:sp>
+        </mc:Choice>
+        <mc:Fallback>
+          <p:sp>
+            <p:nvSpPr>
+              <p:cNvPr id="29" name="テキスト ボックス 28">
+                <a:extLst>
+                  <a:ext uri="{FF2B5EF4-FFF2-40B4-BE49-F238E27FC236}">
+                    <a16:creationId xmlns:a16="http://schemas.microsoft.com/office/drawing/2014/main" id="{3D596EC6-DB7A-48C7-AFEB-F579EFFCD440}"/>
+                  </a:ext>
+                </a:extLst>
+              </p:cNvPr>
+              <p:cNvSpPr txBox="1">
+                <a:spLocks noRot="1" noChangeAspect="1" noMove="1" noResize="1" noEditPoints="1" noAdjustHandles="1" noChangeArrowheads="1" noChangeShapeType="1" noTextEdit="1"/>
+              </p:cNvSpPr>
+              <p:nvPr/>
+            </p:nvSpPr>
+            <p:spPr>
+              <a:xfrm>
+                <a:off x="3759200" y="3512874"/>
+                <a:ext cx="711200" cy="369332"/>
+              </a:xfrm>
+              <a:prstGeom prst="rect">
+                <a:avLst/>
+              </a:prstGeom>
+              <a:blipFill>
+                <a:blip r:embed="rId3"/>
+                <a:stretch>
+                  <a:fillRect/>
+                </a:stretch>
+              </a:blipFill>
+            </p:spPr>
+            <p:txBody>
+              <a:bodyPr/>
+              <a:lstStyle/>
+              <a:p>
+                <a:r>
+                  <a:rPr lang="ja-JP" altLang="en-US">
+                    <a:noFill/>
+                  </a:rPr>
+                  <a:t> </a:t>
+                </a:r>
+              </a:p>
+            </p:txBody>
+          </p:sp>
+        </mc:Fallback>
+      </mc:AlternateContent>
+    </p:spTree>
+    <p:extLst>
+      <p:ext uri="{BB962C8B-B14F-4D97-AF65-F5344CB8AC3E}">
+        <p14:creationId xmlns:p14="http://schemas.microsoft.com/office/powerpoint/2010/main" val="1947487572"/>
+      </p:ext>
+    </p:extLst>
+  </p:cSld>
+  <p:clrMapOvr>
+    <a:masterClrMapping/>
+  </p:clrMapOvr>
+</p:sld>
+</file>
+
+<file path=ppt/slides/slide26.xml><?xml version="1.0" encoding="utf-8"?>
+<p:sld xmlns:a="http://schemas.openxmlformats.org/drawingml/2006/main" xmlns:r="http://schemas.openxmlformats.org/officeDocument/2006/relationships" xmlns:p="http://schemas.openxmlformats.org/presentationml/2006/main">
+  <p:cSld>
+    <p:spTree>
+      <p:nvGrpSpPr>
+        <p:cNvPr id="1" name=""/>
+        <p:cNvGrpSpPr/>
+        <p:nvPr/>
+      </p:nvGrpSpPr>
+      <p:grpSpPr>
+        <a:xfrm>
+          <a:off x="0" y="0"/>
+          <a:ext cx="0" cy="0"/>
+          <a:chOff x="0" y="0"/>
+          <a:chExt cx="0" cy="0"/>
+        </a:xfrm>
+      </p:grpSpPr>
+      <p:sp>
+        <p:nvSpPr>
+          <p:cNvPr id="4" name="テキスト ボックス 3">
+            <a:extLst>
+              <a:ext uri="{FF2B5EF4-FFF2-40B4-BE49-F238E27FC236}">
+                <a16:creationId xmlns:a16="http://schemas.microsoft.com/office/drawing/2014/main" id="{5A13BF46-B8C5-48AA-8308-C9ECFF431A18}"/>
+              </a:ext>
+            </a:extLst>
+          </p:cNvPr>
+          <p:cNvSpPr txBox="1"/>
+          <p:nvPr/>
+        </p:nvSpPr>
+        <p:spPr>
+          <a:xfrm>
+            <a:off x="567542" y="491954"/>
+            <a:ext cx="5461752" cy="584775"/>
+          </a:xfrm>
+          <a:prstGeom prst="rect">
+            <a:avLst/>
+          </a:prstGeom>
+          <a:noFill/>
+        </p:spPr>
+        <p:txBody>
+          <a:bodyPr wrap="none" rtlCol="0">
+            <a:spAutoFit/>
+          </a:bodyPr>
+          <a:lstStyle/>
+          <a:p>
+            <a:r>
+              <a:rPr kumimoji="1" lang="en-US" altLang="ja-JP" sz="3200" b="1" u="sng" dirty="0"/>
+              <a:t>2</a:t>
+            </a:r>
+            <a:r>
+              <a:rPr kumimoji="1" lang="ja-JP" altLang="en-US" sz="3200" b="1" u="sng" dirty="0"/>
+              <a:t>次元、３次元の運動 例題４</a:t>
+            </a:r>
+            <a:endParaRPr kumimoji="1" lang="en-US" altLang="ja-JP" sz="3200" b="1" u="sng" dirty="0"/>
+          </a:p>
+        </p:txBody>
+      </p:sp>
+      <mc:AlternateContent xmlns:mc="http://schemas.openxmlformats.org/markup-compatibility/2006">
+        <mc:Choice xmlns:a14="http://schemas.microsoft.com/office/drawing/2010/main" Requires="a14">
+          <p:sp>
+            <p:nvSpPr>
+              <p:cNvPr id="6" name="テキスト ボックス 5">
+                <a:extLst>
+                  <a:ext uri="{FF2B5EF4-FFF2-40B4-BE49-F238E27FC236}">
+                    <a16:creationId xmlns:a16="http://schemas.microsoft.com/office/drawing/2014/main" id="{55830AD6-028B-4C4E-80BF-B70DFC1C3A46}"/>
+                  </a:ext>
+                </a:extLst>
+              </p:cNvPr>
+              <p:cNvSpPr txBox="1"/>
+              <p:nvPr/>
+            </p:nvSpPr>
+            <p:spPr>
+              <a:xfrm>
+                <a:off x="567542" y="1216429"/>
+                <a:ext cx="8462573" cy="2308324"/>
+              </a:xfrm>
+              <a:prstGeom prst="rect">
+                <a:avLst/>
+              </a:prstGeom>
+              <a:noFill/>
+            </p:spPr>
+            <p:txBody>
+              <a:bodyPr wrap="none" rtlCol="0">
+                <a:spAutoFit/>
+              </a:bodyPr>
+              <a:lstStyle/>
+              <a:p>
+                <a:r>
+                  <a:rPr lang="ja-JP" altLang="en-US" sz="2400" dirty="0"/>
+                  <a:t>ゲーム中のキャラクターが</a:t>
+                </a:r>
+                <a:r>
+                  <a:rPr lang="en-US" altLang="ja-JP" sz="2400" dirty="0"/>
+                  <a:t>10m/</a:t>
+                </a:r>
+                <a:r>
+                  <a:rPr lang="ja-JP" altLang="en-US" sz="2400" dirty="0"/>
+                  <a:t>秒で移動しており、</a:t>
+                </a:r>
+                <a:endParaRPr lang="en-US" altLang="ja-JP" sz="2400" dirty="0"/>
+              </a:p>
+              <a:p>
+                <a:r>
+                  <a:rPr lang="ja-JP" altLang="en-US" sz="2400" dirty="0"/>
+                  <a:t>高さ</a:t>
+                </a:r>
+                <a:r>
+                  <a:rPr lang="en-US" altLang="ja-JP" sz="2400" dirty="0"/>
+                  <a:t>8m</a:t>
+                </a:r>
+                <a:r>
+                  <a:rPr lang="ja-JP" altLang="en-US" sz="2400" dirty="0"/>
+                  <a:t>の崖から</a:t>
+                </a:r>
+                <a14:m>
+                  <m:oMath xmlns:m="http://schemas.openxmlformats.org/officeDocument/2006/math">
+                    <m:r>
+                      <a:rPr lang="en-US" altLang="ja-JP" sz="2400" i="1" dirty="0" smtClean="0">
+                        <a:latin typeface="Cambria Math" panose="02040503050406030204" pitchFamily="18" charset="0"/>
+                      </a:rPr>
+                      <m:t>30°</m:t>
+                    </m:r>
+                  </m:oMath>
+                </a14:m>
+                <a:r>
+                  <a:rPr lang="ja-JP" altLang="en-US" sz="2400" dirty="0"/>
+                  <a:t>の角度でジャンプして飛び降りました。</a:t>
+                </a:r>
+                <a:endParaRPr lang="en-US" altLang="ja-JP" sz="2400" dirty="0"/>
+              </a:p>
+              <a:p>
+                <a:r>
+                  <a:rPr lang="ja-JP" altLang="en-US" sz="2400" dirty="0"/>
+                  <a:t>崖から着地地点までの水平距離は何</a:t>
+                </a:r>
+                <a:r>
+                  <a:rPr lang="en-US" altLang="ja-JP" sz="2400" dirty="0"/>
+                  <a:t>m</a:t>
+                </a:r>
+                <a:r>
+                  <a:rPr lang="ja-JP" altLang="en-US" sz="2400" dirty="0"/>
+                  <a:t>か求めなさい。</a:t>
+                </a:r>
+                <a:endParaRPr lang="en-US" altLang="ja-JP" sz="2400" dirty="0"/>
+              </a:p>
+              <a:p>
+                <a:endParaRPr lang="en-US" altLang="ja-JP" sz="2400" dirty="0"/>
+              </a:p>
+              <a:p>
+                <a:r>
+                  <a:rPr lang="ja-JP" altLang="en-US" sz="2400" b="1" dirty="0">
+                    <a:solidFill>
+                      <a:srgbClr val="FF0000"/>
+                    </a:solidFill>
+                  </a:rPr>
+                  <a:t>■解答</a:t>
+                </a:r>
+                <a:endParaRPr lang="en-US" altLang="ja-JP" sz="2400" b="1" dirty="0">
+                  <a:solidFill>
+                    <a:srgbClr val="FF0000"/>
+                  </a:solidFill>
+                </a:endParaRPr>
+              </a:p>
+              <a:p>
+                <a:r>
+                  <a:rPr lang="ja-JP" altLang="en-US" sz="2400" dirty="0"/>
+                  <a:t>わかっている量を洗い出します。</a:t>
+                </a:r>
+                <a:endParaRPr lang="en-US" altLang="ja-JP" sz="2400" dirty="0"/>
+              </a:p>
+            </p:txBody>
+          </p:sp>
+        </mc:Choice>
+        <mc:Fallback>
+          <p:sp>
+            <p:nvSpPr>
+              <p:cNvPr id="6" name="テキスト ボックス 5">
+                <a:extLst>
+                  <a:ext uri="{FF2B5EF4-FFF2-40B4-BE49-F238E27FC236}">
+                    <a16:creationId xmlns:a16="http://schemas.microsoft.com/office/drawing/2014/main" id="{55830AD6-028B-4C4E-80BF-B70DFC1C3A46}"/>
+                  </a:ext>
+                </a:extLst>
+              </p:cNvPr>
+              <p:cNvSpPr txBox="1">
+                <a:spLocks noRot="1" noChangeAspect="1" noMove="1" noResize="1" noEditPoints="1" noAdjustHandles="1" noChangeArrowheads="1" noChangeShapeType="1" noTextEdit="1"/>
+              </p:cNvSpPr>
+              <p:nvPr/>
+            </p:nvSpPr>
+            <p:spPr>
+              <a:xfrm>
+                <a:off x="567542" y="1216429"/>
+                <a:ext cx="8462573" cy="2308324"/>
+              </a:xfrm>
+              <a:prstGeom prst="rect">
+                <a:avLst/>
+              </a:prstGeom>
+              <a:blipFill>
+                <a:blip r:embed="rId2"/>
+                <a:stretch>
+                  <a:fillRect l="-1081" t="-2116" r="-216" b="-5291"/>
+                </a:stretch>
+              </a:blipFill>
+            </p:spPr>
+            <p:txBody>
+              <a:bodyPr/>
+              <a:lstStyle/>
+              <a:p>
+                <a:r>
+                  <a:rPr lang="ja-JP" altLang="en-US">
+                    <a:noFill/>
+                  </a:rPr>
+                  <a:t> </a:t>
+                </a:r>
+              </a:p>
+            </p:txBody>
+          </p:sp>
+        </mc:Fallback>
+      </mc:AlternateContent>
+      <mc:AlternateContent xmlns:mc="http://schemas.openxmlformats.org/markup-compatibility/2006">
+        <mc:Choice xmlns:a14="http://schemas.microsoft.com/office/drawing/2010/main" Requires="a14">
+          <p:graphicFrame>
+            <p:nvGraphicFramePr>
+              <p:cNvPr id="24" name="表 2">
+                <a:extLst>
+                  <a:ext uri="{FF2B5EF4-FFF2-40B4-BE49-F238E27FC236}">
+                    <a16:creationId xmlns:a16="http://schemas.microsoft.com/office/drawing/2014/main" id="{0D1FC322-A162-4E50-8D1A-8C10035D2973}"/>
+                  </a:ext>
+                </a:extLst>
+              </p:cNvPr>
+              <p:cNvGraphicFramePr>
+                <a:graphicFrameLocks noGrp="1"/>
+              </p:cNvGraphicFramePr>
+              <p:nvPr>
+                <p:extLst>
+                  <p:ext uri="{D42A27DB-BD31-4B8C-83A1-F6EECF244321}">
+                    <p14:modId xmlns:p14="http://schemas.microsoft.com/office/powerpoint/2010/main" val="3741243906"/>
+                  </p:ext>
+                </p:extLst>
+              </p:nvPr>
+            </p:nvGraphicFramePr>
+            <p:xfrm>
+              <a:off x="617169" y="3530599"/>
+              <a:ext cx="10753564" cy="1799019"/>
+            </p:xfrm>
+            <a:graphic>
+              <a:graphicData uri="http://schemas.openxmlformats.org/drawingml/2006/table">
+                <a:tbl>
+                  <a:tblPr firstRow="1" bandRow="1">
+                    <a:tableStyleId>{5C22544A-7EE6-4342-B048-85BDC9FD1C3A}</a:tableStyleId>
+                  </a:tblPr>
+                  <a:tblGrid>
+                    <a:gridCol w="6147698">
+                      <a:extLst>
+                        <a:ext uri="{9D8B030D-6E8A-4147-A177-3AD203B41FA5}">
+                          <a16:colId xmlns:a16="http://schemas.microsoft.com/office/drawing/2014/main" val="3600349107"/>
+                        </a:ext>
+                      </a:extLst>
+                    </a:gridCol>
+                    <a:gridCol w="4605866">
+                      <a:extLst>
+                        <a:ext uri="{9D8B030D-6E8A-4147-A177-3AD203B41FA5}">
+                          <a16:colId xmlns:a16="http://schemas.microsoft.com/office/drawing/2014/main" val="3086272440"/>
+                        </a:ext>
+                      </a:extLst>
+                    </a:gridCol>
+                  </a:tblGrid>
+                  <a:tr h="370840">
+                    <a:tc>
+                      <a:txBody>
+                        <a:bodyPr/>
+                        <a:lstStyle/>
+                        <a:p>
+                          <a:r>
+                            <a:rPr kumimoji="1" lang="ja-JP" altLang="en-US" dirty="0"/>
+                            <a:t>わかっている量</a:t>
+                          </a:r>
+                        </a:p>
+                      </a:txBody>
+                      <a:tcPr/>
+                    </a:tc>
+                    <a:tc>
+                      <a:txBody>
+                        <a:bodyPr/>
+                        <a:lstStyle/>
+                        <a:p>
+                          <a:r>
+                            <a:rPr kumimoji="1" lang="ja-JP" altLang="en-US" dirty="0"/>
+                            <a:t>求める量</a:t>
+                          </a:r>
+                        </a:p>
+                      </a:txBody>
+                      <a:tcPr/>
+                    </a:tc>
+                    <a:extLst>
+                      <a:ext uri="{0D108BD9-81ED-4DB2-BD59-A6C34878D82A}">
+                        <a16:rowId xmlns:a16="http://schemas.microsoft.com/office/drawing/2014/main" val="4246383701"/>
+                      </a:ext>
+                    </a:extLst>
+                  </a:tr>
+                  <a:tr h="636694">
+                    <a:tc>
+                      <a:txBody>
+                        <a:bodyPr/>
+                        <a:lstStyle/>
+                        <a:p>
+                          <a:r>
+                            <a:rPr kumimoji="1" lang="ja-JP" altLang="en-US" b="0" dirty="0"/>
+                            <a:t>初速度</a:t>
+                          </a:r>
+                          <a14:m>
+                            <m:oMath xmlns:m="http://schemas.openxmlformats.org/officeDocument/2006/math">
+                              <m:r>
+                                <a:rPr kumimoji="1" lang="ja-JP" altLang="en-US" b="0" i="1" smtClean="0">
+                                  <a:latin typeface="Cambria Math" panose="02040503050406030204" pitchFamily="18" charset="0"/>
+                                </a:rPr>
+                                <m:t>：</m:t>
+                              </m:r>
+                              <m:r>
+                                <a:rPr kumimoji="1" lang="en-US" altLang="ja-JP" b="0" i="1" smtClean="0">
+                                  <a:latin typeface="Cambria Math" panose="02040503050406030204" pitchFamily="18" charset="0"/>
+                                </a:rPr>
+                                <m:t>𝑣𝑖𝑥</m:t>
+                              </m:r>
+                              <m:r>
+                                <a:rPr kumimoji="1" lang="en-US" altLang="ja-JP" b="0" i="1" smtClean="0">
+                                  <a:latin typeface="Cambria Math" panose="02040503050406030204" pitchFamily="18" charset="0"/>
+                                </a:rPr>
+                                <m:t>=10</m:t>
+                              </m:r>
+                              <m:r>
+                                <a:rPr kumimoji="1" lang="en-US" altLang="ja-JP" b="0" i="1" smtClean="0">
+                                  <a:latin typeface="Cambria Math" panose="02040503050406030204" pitchFamily="18" charset="0"/>
+                                </a:rPr>
+                                <m:t>𝑚</m:t>
+                              </m:r>
+                              <m:r>
+                                <a:rPr kumimoji="1" lang="en-US" altLang="ja-JP" b="0" i="1" smtClean="0">
+                                  <a:latin typeface="Cambria Math" panose="02040503050406030204" pitchFamily="18" charset="0"/>
+                                </a:rPr>
+                                <m:t>/</m:t>
+                              </m:r>
+                              <m:r>
+                                <a:rPr kumimoji="1" lang="ja-JP" altLang="en-US" b="0" i="1" smtClean="0">
+                                  <a:latin typeface="Cambria Math" panose="02040503050406030204" pitchFamily="18" charset="0"/>
+                                </a:rPr>
+                                <m:t>秒</m:t>
+                              </m:r>
+                              <m:r>
+                                <a:rPr kumimoji="1" lang="en-US" altLang="ja-JP" b="0" i="1" smtClean="0">
+                                  <a:latin typeface="Cambria Math" panose="02040503050406030204" pitchFamily="18" charset="0"/>
+                                </a:rPr>
+                                <m:t>×</m:t>
+                              </m:r>
+                              <m:r>
+                                <a:rPr kumimoji="1" lang="en-US" altLang="ja-JP" b="0" i="1" smtClean="0">
+                                  <a:latin typeface="Cambria Math" panose="02040503050406030204" pitchFamily="18" charset="0"/>
+                                </a:rPr>
+                                <m:t>𝑐𝑜𝑠</m:t>
+                              </m:r>
+                              <m:r>
+                                <a:rPr kumimoji="1" lang="en-US" altLang="ja-JP" b="0" i="1" smtClean="0">
+                                  <a:latin typeface="Cambria Math" panose="02040503050406030204" pitchFamily="18" charset="0"/>
+                                </a:rPr>
+                                <m:t>30°,</m:t>
+                              </m:r>
+                              <m:r>
+                                <a:rPr kumimoji="1" lang="en-US" altLang="ja-JP" b="0" i="1" smtClean="0">
+                                  <a:latin typeface="Cambria Math" panose="02040503050406030204" pitchFamily="18" charset="0"/>
+                                </a:rPr>
+                                <m:t>𝑣𝑖𝑦</m:t>
+                              </m:r>
+                              <m:r>
+                                <a:rPr kumimoji="1" lang="en-US" altLang="ja-JP" b="0" i="1" smtClean="0">
+                                  <a:latin typeface="Cambria Math" panose="02040503050406030204" pitchFamily="18" charset="0"/>
+                                </a:rPr>
+                                <m:t>=10</m:t>
+                              </m:r>
+                              <m:r>
+                                <a:rPr kumimoji="1" lang="en-US" altLang="ja-JP" b="0" i="1" smtClean="0">
+                                  <a:latin typeface="Cambria Math" panose="02040503050406030204" pitchFamily="18" charset="0"/>
+                                </a:rPr>
+                                <m:t>𝑚</m:t>
+                              </m:r>
+                              <m:r>
+                                <a:rPr kumimoji="1" lang="en-US" altLang="ja-JP" b="0" i="1" smtClean="0">
+                                  <a:latin typeface="Cambria Math" panose="02040503050406030204" pitchFamily="18" charset="0"/>
+                                </a:rPr>
+                                <m:t>/</m:t>
+                              </m:r>
+                              <m:r>
+                                <a:rPr kumimoji="1" lang="ja-JP" altLang="en-US" b="0" i="1" smtClean="0">
+                                  <a:latin typeface="Cambria Math" panose="02040503050406030204" pitchFamily="18" charset="0"/>
+                                </a:rPr>
+                                <m:t>秒</m:t>
+                              </m:r>
+                              <m:r>
+                                <a:rPr kumimoji="1" lang="en-US" altLang="ja-JP" b="0" i="1" smtClean="0">
+                                  <a:latin typeface="Cambria Math" panose="02040503050406030204" pitchFamily="18" charset="0"/>
+                                </a:rPr>
+                                <m:t>×</m:t>
+                              </m:r>
+                              <m:r>
+                                <a:rPr kumimoji="1" lang="en-US" altLang="ja-JP" b="0" i="1" smtClean="0">
+                                  <a:latin typeface="Cambria Math" panose="02040503050406030204" pitchFamily="18" charset="0"/>
+                                </a:rPr>
+                                <m:t>𝑆𝑖𝑛</m:t>
+                              </m:r>
+                              <m:r>
+                                <a:rPr kumimoji="1" lang="en-US" altLang="ja-JP" b="0" i="1" smtClean="0">
+                                  <a:latin typeface="Cambria Math" panose="02040503050406030204" pitchFamily="18" charset="0"/>
+                                </a:rPr>
+                                <m:t>30°</m:t>
+                              </m:r>
+                            </m:oMath>
+                          </a14:m>
+                          <a:endParaRPr kumimoji="1" lang="en-US" altLang="ja-JP" dirty="0"/>
+                        </a:p>
+                        <a:p>
+                          <a:r>
+                            <a:rPr kumimoji="1" lang="en-US" altLang="ja-JP" dirty="0"/>
+                            <a:t>                    </a:t>
+                          </a:r>
+                          <a14:m>
+                            <m:oMath xmlns:m="http://schemas.openxmlformats.org/officeDocument/2006/math">
+                              <m:r>
+                                <a:rPr kumimoji="1" lang="en-US" altLang="ja-JP" b="0" i="1" smtClean="0">
+                                  <a:latin typeface="Cambria Math" panose="02040503050406030204" pitchFamily="18" charset="0"/>
+                                </a:rPr>
+                                <m:t>=8.6</m:t>
+                              </m:r>
+                              <m:r>
+                                <a:rPr kumimoji="1" lang="en-US" altLang="ja-JP" b="0" i="1" smtClean="0">
+                                  <a:latin typeface="Cambria Math" panose="02040503050406030204" pitchFamily="18" charset="0"/>
+                                </a:rPr>
+                                <m:t>𝑚</m:t>
+                              </m:r>
+                              <m:r>
+                                <a:rPr kumimoji="1" lang="en-US" altLang="ja-JP" b="0" i="1" smtClean="0">
+                                  <a:latin typeface="Cambria Math" panose="02040503050406030204" pitchFamily="18" charset="0"/>
+                                </a:rPr>
+                                <m:t>/</m:t>
+                              </m:r>
+                              <m:r>
+                                <a:rPr kumimoji="1" lang="ja-JP" altLang="en-US" b="0" i="1" smtClean="0">
+                                  <a:latin typeface="Cambria Math" panose="02040503050406030204" pitchFamily="18" charset="0"/>
+                                </a:rPr>
+                                <m:t>秒</m:t>
+                              </m:r>
+                            </m:oMath>
+                          </a14:m>
+                          <a:r>
+                            <a:rPr kumimoji="1" lang="en-US" altLang="ja-JP" dirty="0"/>
+                            <a:t>                       </a:t>
+                          </a:r>
+                          <a14:m>
+                            <m:oMath xmlns:m="http://schemas.openxmlformats.org/officeDocument/2006/math">
+                              <m:r>
+                                <a:rPr kumimoji="1" lang="en-US" altLang="ja-JP" b="0" i="1" smtClean="0">
+                                  <a:latin typeface="Cambria Math" panose="02040503050406030204" pitchFamily="18" charset="0"/>
+                                </a:rPr>
+                                <m:t>=5</m:t>
+                              </m:r>
+                              <m:r>
+                                <a:rPr kumimoji="1" lang="en-US" altLang="ja-JP" b="0" i="1" smtClean="0">
+                                  <a:latin typeface="Cambria Math" panose="02040503050406030204" pitchFamily="18" charset="0"/>
+                                </a:rPr>
+                                <m:t>𝑚</m:t>
+                              </m:r>
+                              <m:r>
+                                <a:rPr kumimoji="1" lang="en-US" altLang="ja-JP" b="0" i="1" smtClean="0">
+                                  <a:latin typeface="Cambria Math" panose="02040503050406030204" pitchFamily="18" charset="0"/>
+                                </a:rPr>
+                                <m:t>/</m:t>
+                              </m:r>
+                              <m:r>
+                                <a:rPr kumimoji="1" lang="ja-JP" altLang="en-US" b="0" i="1" smtClean="0">
+                                  <a:latin typeface="Cambria Math" panose="02040503050406030204" pitchFamily="18" charset="0"/>
+                                </a:rPr>
+                                <m:t>秒</m:t>
+                              </m:r>
+                            </m:oMath>
+                          </a14:m>
+                          <a:endParaRPr kumimoji="1" lang="en-US" altLang="ja-JP" dirty="0"/>
+                        </a:p>
+                      </a:txBody>
+                      <a:tcPr/>
+                    </a:tc>
+                    <a:tc>
+                      <a:txBody>
+                        <a:bodyPr/>
+                        <a:lstStyle/>
+                        <a:p>
+                          <a:r>
+                            <a:rPr kumimoji="1" lang="ja-JP" altLang="en-US" dirty="0"/>
+                            <a:t>変異：</a:t>
+                          </a:r>
+                          <a14:m>
+                            <m:oMath xmlns:m="http://schemas.openxmlformats.org/officeDocument/2006/math">
+                              <m:r>
+                                <a:rPr kumimoji="1" lang="ja-JP" altLang="en-US" b="0" i="1" dirty="0" smtClean="0">
+                                  <a:latin typeface="Cambria Math" panose="02040503050406030204" pitchFamily="18" charset="0"/>
+                                </a:rPr>
+                                <m:t>⊿</m:t>
+                              </m:r>
+                              <m:r>
+                                <a:rPr kumimoji="1" lang="en-US" altLang="ja-JP" b="0" i="1" smtClean="0">
+                                  <a:latin typeface="Cambria Math" panose="02040503050406030204" pitchFamily="18" charset="0"/>
+                                </a:rPr>
+                                <m:t>𝑥</m:t>
+                              </m:r>
+                              <m:r>
+                                <a:rPr kumimoji="1" lang="en-US" altLang="ja-JP" b="0" i="1" smtClean="0">
+                                  <a:latin typeface="Cambria Math" panose="02040503050406030204" pitchFamily="18" charset="0"/>
+                                </a:rPr>
+                                <m:t>=</m:t>
+                              </m:r>
+                              <m:r>
+                                <a:rPr kumimoji="1" lang="ja-JP" altLang="en-US" b="0" i="1" smtClean="0">
+                                  <a:latin typeface="Cambria Math" panose="02040503050406030204" pitchFamily="18" charset="0"/>
+                                </a:rPr>
+                                <m:t>？</m:t>
+                              </m:r>
+                              <m:r>
+                                <a:rPr kumimoji="1" lang="en-US" altLang="ja-JP" b="0" i="1" smtClean="0">
+                                  <a:latin typeface="Cambria Math" panose="02040503050406030204" pitchFamily="18" charset="0"/>
+                                </a:rPr>
+                                <m:t>𝑚</m:t>
+                              </m:r>
+                            </m:oMath>
+                          </a14:m>
+                          <a:endParaRPr kumimoji="1" lang="ja-JP" altLang="en-US" dirty="0"/>
+                        </a:p>
+                      </a:txBody>
+                      <a:tcPr/>
+                    </a:tc>
+                    <a:extLst>
+                      <a:ext uri="{0D108BD9-81ED-4DB2-BD59-A6C34878D82A}">
+                        <a16:rowId xmlns:a16="http://schemas.microsoft.com/office/drawing/2014/main" val="3036573417"/>
+                      </a:ext>
+                    </a:extLst>
+                  </a:tr>
+                  <a:tr h="370840">
+                    <a:tc>
+                      <a:txBody>
+                        <a:bodyPr/>
+                        <a:lstStyle/>
+                        <a:p>
+                          <a:r>
+                            <a:rPr kumimoji="1" lang="ja-JP" altLang="en-US" dirty="0"/>
+                            <a:t>加速度：</a:t>
+                          </a:r>
+                          <a14:m>
+                            <m:oMath xmlns:m="http://schemas.openxmlformats.org/officeDocument/2006/math">
+                              <m:r>
+                                <a:rPr kumimoji="1" lang="en-US" altLang="ja-JP" b="0" i="1" smtClean="0">
+                                  <a:latin typeface="Cambria Math" panose="02040503050406030204" pitchFamily="18" charset="0"/>
+                                </a:rPr>
+                                <m:t>𝑎𝑥</m:t>
+                              </m:r>
+                              <m:r>
+                                <a:rPr kumimoji="1" lang="en-US" altLang="ja-JP" b="0" i="1" smtClean="0">
+                                  <a:latin typeface="Cambria Math" panose="02040503050406030204" pitchFamily="18" charset="0"/>
+                                </a:rPr>
+                                <m:t>=0</m:t>
+                              </m:r>
+                            </m:oMath>
+                          </a14:m>
+                          <a:r>
+                            <a:rPr kumimoji="1" lang="en-US" altLang="ja-JP" dirty="0"/>
+                            <a:t>, </a:t>
+                          </a:r>
+                          <a14:m>
+                            <m:oMath xmlns:m="http://schemas.openxmlformats.org/officeDocument/2006/math">
+                              <m:r>
+                                <a:rPr kumimoji="1" lang="en-US" altLang="ja-JP" b="0" i="1" smtClean="0">
+                                  <a:latin typeface="Cambria Math" panose="02040503050406030204" pitchFamily="18" charset="0"/>
+                                </a:rPr>
+                                <m:t>𝑎𝑦</m:t>
+                              </m:r>
+                              <m:r>
+                                <a:rPr kumimoji="1" lang="en-US" altLang="ja-JP" b="0" i="1" smtClean="0">
+                                  <a:latin typeface="Cambria Math" panose="02040503050406030204" pitchFamily="18" charset="0"/>
+                                </a:rPr>
+                                <m:t>=−9.8</m:t>
+                              </m:r>
+                              <m:r>
+                                <a:rPr kumimoji="1" lang="en-US" altLang="ja-JP" b="0" i="1" smtClean="0">
+                                  <a:latin typeface="Cambria Math" panose="02040503050406030204" pitchFamily="18" charset="0"/>
+                                </a:rPr>
+                                <m:t>𝑚</m:t>
+                              </m:r>
+                              <m:r>
+                                <a:rPr kumimoji="1" lang="en-US" altLang="ja-JP" b="0" i="1" smtClean="0">
+                                  <a:latin typeface="Cambria Math" panose="02040503050406030204" pitchFamily="18" charset="0"/>
+                                </a:rPr>
+                                <m:t>/</m:t>
+                              </m:r>
+                              <m:sSup>
+                                <m:sSupPr>
+                                  <m:ctrlPr>
+                                    <a:rPr kumimoji="1" lang="en-US" altLang="ja-JP" b="0" i="1" smtClean="0">
+                                      <a:latin typeface="Cambria Math" panose="02040503050406030204" pitchFamily="18" charset="0"/>
+                                    </a:rPr>
+                                  </m:ctrlPr>
+                                </m:sSupPr>
+                                <m:e>
+                                  <m:r>
+                                    <a:rPr kumimoji="1" lang="ja-JP" altLang="en-US" b="0" i="1" smtClean="0">
+                                      <a:latin typeface="Cambria Math" panose="02040503050406030204" pitchFamily="18" charset="0"/>
+                                    </a:rPr>
+                                    <m:t>秒</m:t>
+                                  </m:r>
+                                </m:e>
+                                <m:sup>
+                                  <m:r>
+                                    <a:rPr kumimoji="1" lang="en-US" altLang="ja-JP" b="0" i="1" smtClean="0">
+                                      <a:latin typeface="Cambria Math" panose="02040503050406030204" pitchFamily="18" charset="0"/>
+                                    </a:rPr>
+                                    <m:t>2</m:t>
+                                  </m:r>
+                                </m:sup>
+                              </m:sSup>
+                            </m:oMath>
+                          </a14:m>
+                          <a:endParaRPr kumimoji="1" lang="en-US" altLang="ja-JP" b="0" dirty="0"/>
+                        </a:p>
+                      </a:txBody>
+                      <a:tcPr/>
+                    </a:tc>
+                    <a:tc>
+                      <a:txBody>
+                        <a:bodyPr/>
+                        <a:lstStyle/>
+                        <a:p>
+                          <a:endParaRPr kumimoji="1" lang="ja-JP" altLang="en-US" dirty="0"/>
+                        </a:p>
+                      </a:txBody>
+                      <a:tcPr/>
+                    </a:tc>
+                    <a:extLst>
+                      <a:ext uri="{0D108BD9-81ED-4DB2-BD59-A6C34878D82A}">
+                        <a16:rowId xmlns:a16="http://schemas.microsoft.com/office/drawing/2014/main" val="1636434579"/>
+                      </a:ext>
+                    </a:extLst>
+                  </a:tr>
+                  <a:tr h="370840">
+                    <a:tc>
+                      <a:txBody>
+                        <a:bodyPr/>
+                        <a:lstStyle/>
+                        <a:p>
+                          <a:r>
+                            <a:rPr kumimoji="1" lang="ja-JP" altLang="en-US" dirty="0"/>
+                            <a:t>変異：</a:t>
+                          </a:r>
+                          <a14:m>
+                            <m:oMath xmlns:m="http://schemas.openxmlformats.org/officeDocument/2006/math">
+                              <m:r>
+                                <a:rPr kumimoji="1" lang="ja-JP" altLang="en-US" b="0" i="1" dirty="0" smtClean="0">
+                                  <a:latin typeface="Cambria Math" panose="02040503050406030204" pitchFamily="18" charset="0"/>
+                                </a:rPr>
+                                <m:t>⊿</m:t>
+                              </m:r>
+                              <m:r>
+                                <a:rPr kumimoji="1" lang="en-US" altLang="ja-JP" b="0" i="1" smtClean="0">
+                                  <a:latin typeface="Cambria Math" panose="02040503050406030204" pitchFamily="18" charset="0"/>
+                                </a:rPr>
+                                <m:t>𝑦</m:t>
+                              </m:r>
+                              <m:r>
+                                <a:rPr kumimoji="1" lang="en-US" altLang="ja-JP" b="0" i="1" smtClean="0">
+                                  <a:latin typeface="Cambria Math" panose="02040503050406030204" pitchFamily="18" charset="0"/>
+                                </a:rPr>
+                                <m:t>=−8</m:t>
+                              </m:r>
+                              <m:r>
+                                <a:rPr kumimoji="1" lang="en-US" altLang="ja-JP" b="0" i="1" smtClean="0">
+                                  <a:latin typeface="Cambria Math" panose="02040503050406030204" pitchFamily="18" charset="0"/>
+                                </a:rPr>
+                                <m:t>𝑚</m:t>
+                              </m:r>
+                            </m:oMath>
+                          </a14:m>
+                          <a:endParaRPr kumimoji="1" lang="ja-JP" altLang="en-US" dirty="0"/>
+                        </a:p>
+                      </a:txBody>
+                      <a:tcPr/>
+                    </a:tc>
+                    <a:tc>
+                      <a:txBody>
+                        <a:bodyPr/>
+                        <a:lstStyle/>
+                        <a:p>
+                          <a:endParaRPr kumimoji="1" lang="ja-JP" altLang="en-US" dirty="0"/>
+                        </a:p>
+                      </a:txBody>
+                      <a:tcPr/>
+                    </a:tc>
+                    <a:extLst>
+                      <a:ext uri="{0D108BD9-81ED-4DB2-BD59-A6C34878D82A}">
+                        <a16:rowId xmlns:a16="http://schemas.microsoft.com/office/drawing/2014/main" val="1851958693"/>
+                      </a:ext>
+                    </a:extLst>
+                  </a:tr>
+                </a:tbl>
+              </a:graphicData>
+            </a:graphic>
+          </p:graphicFrame>
+        </mc:Choice>
+        <mc:Fallback>
+          <p:graphicFrame>
+            <p:nvGraphicFramePr>
+              <p:cNvPr id="24" name="表 2">
+                <a:extLst>
+                  <a:ext uri="{FF2B5EF4-FFF2-40B4-BE49-F238E27FC236}">
+                    <a16:creationId xmlns:a16="http://schemas.microsoft.com/office/drawing/2014/main" id="{0D1FC322-A162-4E50-8D1A-8C10035D2973}"/>
+                  </a:ext>
+                </a:extLst>
+              </p:cNvPr>
+              <p:cNvGraphicFramePr>
+                <a:graphicFrameLocks noGrp="1"/>
+              </p:cNvGraphicFramePr>
+              <p:nvPr>
+                <p:extLst>
+                  <p:ext uri="{D42A27DB-BD31-4B8C-83A1-F6EECF244321}">
+                    <p14:modId xmlns:p14="http://schemas.microsoft.com/office/powerpoint/2010/main" val="3741243906"/>
+                  </p:ext>
+                </p:extLst>
+              </p:nvPr>
+            </p:nvGraphicFramePr>
+            <p:xfrm>
+              <a:off x="617169" y="3530599"/>
+              <a:ext cx="10753564" cy="1799019"/>
+            </p:xfrm>
+            <a:graphic>
+              <a:graphicData uri="http://schemas.openxmlformats.org/drawingml/2006/table">
+                <a:tbl>
+                  <a:tblPr firstRow="1" bandRow="1">
+                    <a:tableStyleId>{5C22544A-7EE6-4342-B048-85BDC9FD1C3A}</a:tableStyleId>
+                  </a:tblPr>
+                  <a:tblGrid>
+                    <a:gridCol w="6147698">
+                      <a:extLst>
+                        <a:ext uri="{9D8B030D-6E8A-4147-A177-3AD203B41FA5}">
+                          <a16:colId xmlns:a16="http://schemas.microsoft.com/office/drawing/2014/main" val="3600349107"/>
+                        </a:ext>
+                      </a:extLst>
+                    </a:gridCol>
+                    <a:gridCol w="4605866">
+                      <a:extLst>
+                        <a:ext uri="{9D8B030D-6E8A-4147-A177-3AD203B41FA5}">
+                          <a16:colId xmlns:a16="http://schemas.microsoft.com/office/drawing/2014/main" val="3086272440"/>
+                        </a:ext>
+                      </a:extLst>
+                    </a:gridCol>
+                  </a:tblGrid>
+                  <a:tr h="370840">
+                    <a:tc>
+                      <a:txBody>
+                        <a:bodyPr/>
+                        <a:lstStyle/>
+                        <a:p>
+                          <a:r>
+                            <a:rPr kumimoji="1" lang="ja-JP" altLang="en-US" dirty="0"/>
+                            <a:t>わかっている量</a:t>
+                          </a:r>
+                        </a:p>
+                      </a:txBody>
+                      <a:tcPr/>
+                    </a:tc>
+                    <a:tc>
+                      <a:txBody>
+                        <a:bodyPr/>
+                        <a:lstStyle/>
+                        <a:p>
+                          <a:r>
+                            <a:rPr kumimoji="1" lang="ja-JP" altLang="en-US" dirty="0"/>
+                            <a:t>求める量</a:t>
+                          </a:r>
+                        </a:p>
+                      </a:txBody>
+                      <a:tcPr/>
+                    </a:tc>
+                    <a:extLst>
+                      <a:ext uri="{0D108BD9-81ED-4DB2-BD59-A6C34878D82A}">
+                        <a16:rowId xmlns:a16="http://schemas.microsoft.com/office/drawing/2014/main" val="4246383701"/>
+                      </a:ext>
+                    </a:extLst>
+                  </a:tr>
+                  <a:tr h="640080">
+                    <a:tc>
+                      <a:txBody>
+                        <a:bodyPr/>
+                        <a:lstStyle/>
+                        <a:p>
+                          <a:endParaRPr lang="ja-JP"/>
+                        </a:p>
+                      </a:txBody>
+                      <a:tcPr>
+                        <a:blipFill>
+                          <a:blip r:embed="rId3"/>
+                          <a:stretch>
+                            <a:fillRect l="-99" t="-62857" r="-75322" b="-138095"/>
+                          </a:stretch>
+                        </a:blipFill>
+                      </a:tcPr>
+                    </a:tc>
+                    <a:tc>
+                      <a:txBody>
+                        <a:bodyPr/>
+                        <a:lstStyle/>
+                        <a:p>
+                          <a:endParaRPr lang="ja-JP"/>
+                        </a:p>
+                      </a:txBody>
+                      <a:tcPr>
+                        <a:blipFill>
+                          <a:blip r:embed="rId3"/>
+                          <a:stretch>
+                            <a:fillRect l="-133598" t="-62857" r="-529" b="-138095"/>
+                          </a:stretch>
+                        </a:blipFill>
+                      </a:tcPr>
+                    </a:tc>
+                    <a:extLst>
+                      <a:ext uri="{0D108BD9-81ED-4DB2-BD59-A6C34878D82A}">
+                        <a16:rowId xmlns:a16="http://schemas.microsoft.com/office/drawing/2014/main" val="3036573417"/>
+                      </a:ext>
+                    </a:extLst>
+                  </a:tr>
+                  <a:tr h="417259">
+                    <a:tc>
+                      <a:txBody>
+                        <a:bodyPr/>
+                        <a:lstStyle/>
+                        <a:p>
+                          <a:endParaRPr lang="ja-JP"/>
+                        </a:p>
+                      </a:txBody>
+                      <a:tcPr>
+                        <a:blipFill>
+                          <a:blip r:embed="rId3"/>
+                          <a:stretch>
+                            <a:fillRect l="-99" t="-247826" r="-75322" b="-110145"/>
+                          </a:stretch>
+                        </a:blipFill>
+                      </a:tcPr>
+                    </a:tc>
+                    <a:tc>
+                      <a:txBody>
+                        <a:bodyPr/>
+                        <a:lstStyle/>
+                        <a:p>
+                          <a:endParaRPr kumimoji="1" lang="ja-JP" altLang="en-US" dirty="0"/>
+                        </a:p>
+                      </a:txBody>
+                      <a:tcPr/>
+                    </a:tc>
+                    <a:extLst>
+                      <a:ext uri="{0D108BD9-81ED-4DB2-BD59-A6C34878D82A}">
+                        <a16:rowId xmlns:a16="http://schemas.microsoft.com/office/drawing/2014/main" val="1636434579"/>
+                      </a:ext>
+                    </a:extLst>
+                  </a:tr>
+                  <a:tr h="370840">
+                    <a:tc>
+                      <a:txBody>
+                        <a:bodyPr/>
+                        <a:lstStyle/>
+                        <a:p>
+                          <a:endParaRPr lang="ja-JP"/>
+                        </a:p>
+                      </a:txBody>
+                      <a:tcPr>
+                        <a:blipFill>
+                          <a:blip r:embed="rId3"/>
+                          <a:stretch>
+                            <a:fillRect l="-99" t="-393443" r="-75322" b="-24590"/>
+                          </a:stretch>
+                        </a:blipFill>
+                      </a:tcPr>
+                    </a:tc>
+                    <a:tc>
+                      <a:txBody>
+                        <a:bodyPr/>
+                        <a:lstStyle/>
+                        <a:p>
+                          <a:endParaRPr kumimoji="1" lang="ja-JP" altLang="en-US" dirty="0"/>
+                        </a:p>
+                      </a:txBody>
+                      <a:tcPr/>
+                    </a:tc>
+                    <a:extLst>
+                      <a:ext uri="{0D108BD9-81ED-4DB2-BD59-A6C34878D82A}">
+                        <a16:rowId xmlns:a16="http://schemas.microsoft.com/office/drawing/2014/main" val="1851958693"/>
+                      </a:ext>
+                    </a:extLst>
+                  </a:tr>
+                </a:tbl>
+              </a:graphicData>
+            </a:graphic>
+          </p:graphicFrame>
+        </mc:Fallback>
+      </mc:AlternateContent>
+      <mc:AlternateContent xmlns:mc="http://schemas.openxmlformats.org/markup-compatibility/2006">
+        <mc:Choice xmlns:a14="http://schemas.microsoft.com/office/drawing/2010/main" Requires="a14">
+          <p:sp>
+            <p:nvSpPr>
+              <p:cNvPr id="25" name="テキスト ボックス 24">
+                <a:extLst>
+                  <a:ext uri="{FF2B5EF4-FFF2-40B4-BE49-F238E27FC236}">
+                    <a16:creationId xmlns:a16="http://schemas.microsoft.com/office/drawing/2014/main" id="{219BF07D-B20B-4F71-86DA-A6E1713215AD}"/>
+                  </a:ext>
+                </a:extLst>
+              </p:cNvPr>
+              <p:cNvSpPr txBox="1"/>
+              <p:nvPr/>
+            </p:nvSpPr>
+            <p:spPr>
+              <a:xfrm>
+                <a:off x="567542" y="5433906"/>
+                <a:ext cx="9110186" cy="830997"/>
+              </a:xfrm>
+              <a:prstGeom prst="rect">
+                <a:avLst/>
+              </a:prstGeom>
+              <a:noFill/>
+            </p:spPr>
+            <p:txBody>
+              <a:bodyPr wrap="none" rtlCol="0">
+                <a:spAutoFit/>
+              </a:bodyPr>
+              <a:lstStyle/>
+              <a:p>
+                <a:r>
+                  <a:rPr lang="ja-JP" altLang="en-US" sz="2400" dirty="0"/>
+                  <a:t>ジャンプしましたが、崖から地面に着地するまでの計算なので、</a:t>
+                </a:r>
+                <a:endParaRPr lang="en-US" altLang="ja-JP" sz="2400" dirty="0"/>
+              </a:p>
+              <a:p>
+                <a14:m>
+                  <m:oMath xmlns:m="http://schemas.openxmlformats.org/officeDocument/2006/math">
+                    <m:r>
+                      <a:rPr kumimoji="1" lang="ja-JP" altLang="en-US" sz="2400" b="0" i="1" dirty="0" smtClean="0">
+                        <a:latin typeface="Cambria Math" panose="02040503050406030204" pitchFamily="18" charset="0"/>
+                      </a:rPr>
+                      <m:t>⊿</m:t>
+                    </m:r>
+                    <m:r>
+                      <a:rPr kumimoji="1" lang="en-US" altLang="ja-JP" sz="2400" b="0" i="1" smtClean="0">
+                        <a:latin typeface="Cambria Math" panose="02040503050406030204" pitchFamily="18" charset="0"/>
+                      </a:rPr>
+                      <m:t>𝑦</m:t>
+                    </m:r>
+                    <m:r>
+                      <a:rPr kumimoji="1" lang="en-US" altLang="ja-JP" sz="2400" b="0" i="1" smtClean="0">
+                        <a:latin typeface="Cambria Math" panose="02040503050406030204" pitchFamily="18" charset="0"/>
+                      </a:rPr>
+                      <m:t>=−8</m:t>
+                    </m:r>
+                    <m:r>
+                      <a:rPr kumimoji="1" lang="en-US" altLang="ja-JP" sz="2400" b="0" i="1" smtClean="0">
+                        <a:latin typeface="Cambria Math" panose="02040503050406030204" pitchFamily="18" charset="0"/>
+                      </a:rPr>
+                      <m:t>𝑚</m:t>
+                    </m:r>
+                  </m:oMath>
+                </a14:m>
+                <a:r>
+                  <a:rPr lang="ja-JP" altLang="en-US" sz="2400" dirty="0"/>
+                  <a:t>となります。</a:t>
+                </a:r>
+                <a:endParaRPr lang="en-US" altLang="ja-JP" sz="2400" dirty="0"/>
+              </a:p>
+            </p:txBody>
+          </p:sp>
+        </mc:Choice>
+        <mc:Fallback>
+          <p:sp>
+            <p:nvSpPr>
+              <p:cNvPr id="25" name="テキスト ボックス 24">
+                <a:extLst>
+                  <a:ext uri="{FF2B5EF4-FFF2-40B4-BE49-F238E27FC236}">
+                    <a16:creationId xmlns:a16="http://schemas.microsoft.com/office/drawing/2014/main" id="{219BF07D-B20B-4F71-86DA-A6E1713215AD}"/>
+                  </a:ext>
+                </a:extLst>
+              </p:cNvPr>
+              <p:cNvSpPr txBox="1">
+                <a:spLocks noRot="1" noChangeAspect="1" noMove="1" noResize="1" noEditPoints="1" noAdjustHandles="1" noChangeArrowheads="1" noChangeShapeType="1" noTextEdit="1"/>
+              </p:cNvSpPr>
+              <p:nvPr/>
+            </p:nvSpPr>
+            <p:spPr>
+              <a:xfrm>
+                <a:off x="567542" y="5433906"/>
+                <a:ext cx="9110186" cy="830997"/>
+              </a:xfrm>
+              <a:prstGeom prst="rect">
+                <a:avLst/>
+              </a:prstGeom>
+              <a:blipFill>
+                <a:blip r:embed="rId4"/>
+                <a:stretch>
+                  <a:fillRect l="-1003" t="-5839" r="-67" b="-15328"/>
+                </a:stretch>
+              </a:blipFill>
+            </p:spPr>
+            <p:txBody>
+              <a:bodyPr/>
+              <a:lstStyle/>
+              <a:p>
+                <a:r>
+                  <a:rPr lang="ja-JP" altLang="en-US">
+                    <a:noFill/>
+                  </a:rPr>
+                  <a:t> </a:t>
+                </a:r>
+              </a:p>
+            </p:txBody>
+          </p:sp>
+        </mc:Fallback>
+      </mc:AlternateContent>
+    </p:spTree>
+    <p:extLst>
+      <p:ext uri="{BB962C8B-B14F-4D97-AF65-F5344CB8AC3E}">
+        <p14:creationId xmlns:p14="http://schemas.microsoft.com/office/powerpoint/2010/main" val="1787896162"/>
+      </p:ext>
+    </p:extLst>
+  </p:cSld>
+  <p:clrMapOvr>
+    <a:masterClrMapping/>
+  </p:clrMapOvr>
+</p:sld>
+</file>
+
+<file path=ppt/slides/slide27.xml><?xml version="1.0" encoding="utf-8"?>
+<p:sld xmlns:a="http://schemas.openxmlformats.org/drawingml/2006/main" xmlns:r="http://schemas.openxmlformats.org/officeDocument/2006/relationships" xmlns:p="http://schemas.openxmlformats.org/presentationml/2006/main">
+  <p:cSld>
+    <p:spTree>
+      <p:nvGrpSpPr>
+        <p:cNvPr id="1" name=""/>
+        <p:cNvGrpSpPr/>
+        <p:nvPr/>
+      </p:nvGrpSpPr>
+      <p:grpSpPr>
+        <a:xfrm>
+          <a:off x="0" y="0"/>
+          <a:ext cx="0" cy="0"/>
+          <a:chOff x="0" y="0"/>
+          <a:chExt cx="0" cy="0"/>
+        </a:xfrm>
+      </p:grpSpPr>
+      <p:sp>
+        <p:nvSpPr>
+          <p:cNvPr id="4" name="テキスト ボックス 3">
+            <a:extLst>
+              <a:ext uri="{FF2B5EF4-FFF2-40B4-BE49-F238E27FC236}">
+                <a16:creationId xmlns:a16="http://schemas.microsoft.com/office/drawing/2014/main" id="{5A13BF46-B8C5-48AA-8308-C9ECFF431A18}"/>
+              </a:ext>
+            </a:extLst>
+          </p:cNvPr>
+          <p:cNvSpPr txBox="1"/>
+          <p:nvPr/>
+        </p:nvSpPr>
+        <p:spPr>
+          <a:xfrm>
+            <a:off x="567542" y="491954"/>
+            <a:ext cx="5461752" cy="584775"/>
+          </a:xfrm>
+          <a:prstGeom prst="rect">
+            <a:avLst/>
+          </a:prstGeom>
+          <a:noFill/>
+        </p:spPr>
+        <p:txBody>
+          <a:bodyPr wrap="none" rtlCol="0">
+            <a:spAutoFit/>
+          </a:bodyPr>
+          <a:lstStyle/>
+          <a:p>
+            <a:r>
+              <a:rPr kumimoji="1" lang="en-US" altLang="ja-JP" sz="3200" b="1" u="sng" dirty="0"/>
+              <a:t>2</a:t>
+            </a:r>
+            <a:r>
+              <a:rPr kumimoji="1" lang="ja-JP" altLang="en-US" sz="3200" b="1" u="sng" dirty="0"/>
+              <a:t>次元、３次元の運動 例題４</a:t>
+            </a:r>
+            <a:endParaRPr kumimoji="1" lang="en-US" altLang="ja-JP" sz="3200" b="1" u="sng" dirty="0"/>
+          </a:p>
+        </p:txBody>
+      </p:sp>
+      <mc:AlternateContent xmlns:mc="http://schemas.openxmlformats.org/markup-compatibility/2006">
+        <mc:Choice xmlns:a14="http://schemas.microsoft.com/office/drawing/2010/main" Requires="a14">
+          <p:sp>
+            <p:nvSpPr>
+              <p:cNvPr id="6" name="テキスト ボックス 5">
+                <a:extLst>
+                  <a:ext uri="{FF2B5EF4-FFF2-40B4-BE49-F238E27FC236}">
+                    <a16:creationId xmlns:a16="http://schemas.microsoft.com/office/drawing/2014/main" id="{55830AD6-028B-4C4E-80BF-B70DFC1C3A46}"/>
+                  </a:ext>
+                </a:extLst>
+              </p:cNvPr>
+              <p:cNvSpPr txBox="1"/>
+              <p:nvPr/>
+            </p:nvSpPr>
+            <p:spPr>
+              <a:xfrm>
+                <a:off x="567542" y="1216429"/>
+                <a:ext cx="10649069" cy="5049459"/>
+              </a:xfrm>
+              <a:prstGeom prst="rect">
+                <a:avLst/>
+              </a:prstGeom>
+              <a:noFill/>
+            </p:spPr>
+            <p:txBody>
+              <a:bodyPr wrap="none" rtlCol="0">
+                <a:spAutoFit/>
+              </a:bodyPr>
+              <a:lstStyle/>
+              <a:p>
+                <a:r>
+                  <a:rPr lang="ja-JP" altLang="en-US" sz="2400" dirty="0"/>
+                  <a:t>ゲーム中のキャラクターが</a:t>
+                </a:r>
+                <a:r>
+                  <a:rPr lang="en-US" altLang="ja-JP" sz="2400" dirty="0"/>
+                  <a:t>10m/</a:t>
+                </a:r>
+                <a:r>
+                  <a:rPr lang="ja-JP" altLang="en-US" sz="2400" dirty="0"/>
+                  <a:t>秒で移動しており、</a:t>
+                </a:r>
+                <a:endParaRPr lang="en-US" altLang="ja-JP" sz="2400" dirty="0"/>
+              </a:p>
+              <a:p>
+                <a:r>
+                  <a:rPr lang="ja-JP" altLang="en-US" sz="2400" dirty="0"/>
+                  <a:t>高さ</a:t>
+                </a:r>
+                <a:r>
+                  <a:rPr lang="en-US" altLang="ja-JP" sz="2400" dirty="0"/>
+                  <a:t>8m</a:t>
+                </a:r>
+                <a:r>
+                  <a:rPr lang="ja-JP" altLang="en-US" sz="2400" dirty="0"/>
+                  <a:t>の崖から</a:t>
+                </a:r>
+                <a14:m>
+                  <m:oMath xmlns:m="http://schemas.openxmlformats.org/officeDocument/2006/math">
+                    <m:r>
+                      <a:rPr lang="en-US" altLang="ja-JP" sz="2400" i="1" dirty="0" smtClean="0">
+                        <a:latin typeface="Cambria Math" panose="02040503050406030204" pitchFamily="18" charset="0"/>
+                      </a:rPr>
+                      <m:t>30°</m:t>
+                    </m:r>
+                  </m:oMath>
+                </a14:m>
+                <a:r>
+                  <a:rPr lang="ja-JP" altLang="en-US" sz="2400" dirty="0"/>
+                  <a:t>の角度でジャンプして飛び降りました。</a:t>
+                </a:r>
+                <a:endParaRPr lang="en-US" altLang="ja-JP" sz="2400" dirty="0"/>
+              </a:p>
+              <a:p>
+                <a:r>
+                  <a:rPr lang="ja-JP" altLang="en-US" sz="2400" dirty="0"/>
+                  <a:t>崖から着地地点までの水平距離は何</a:t>
+                </a:r>
+                <a:r>
+                  <a:rPr lang="en-US" altLang="ja-JP" sz="2400" dirty="0"/>
+                  <a:t>m</a:t>
+                </a:r>
+                <a:r>
+                  <a:rPr lang="ja-JP" altLang="en-US" sz="2400" dirty="0"/>
+                  <a:t>か求めなさい。</a:t>
+                </a:r>
+                <a:endParaRPr lang="en-US" altLang="ja-JP" sz="2400" dirty="0"/>
+              </a:p>
+              <a:p>
+                <a:endParaRPr lang="en-US" altLang="ja-JP" sz="2400" dirty="0"/>
+              </a:p>
+              <a:p>
+                <a:r>
+                  <a:rPr lang="ja-JP" altLang="en-US" sz="2400" b="1" dirty="0">
+                    <a:solidFill>
+                      <a:srgbClr val="FF0000"/>
+                    </a:solidFill>
+                  </a:rPr>
+                  <a:t>■解答</a:t>
+                </a:r>
+                <a:endParaRPr lang="en-US" altLang="ja-JP" sz="2400" b="1" dirty="0">
+                  <a:solidFill>
+                    <a:srgbClr val="FF0000"/>
+                  </a:solidFill>
+                </a:endParaRPr>
+              </a:p>
+              <a:p>
+                <a:r>
+                  <a:rPr lang="ja-JP" altLang="en-US" sz="2400" dirty="0"/>
+                  <a:t>例題３と同様に時間から求めますが、式４を使うと、</a:t>
+                </a:r>
+                <a:endParaRPr lang="en-US" altLang="ja-JP" sz="2400" dirty="0"/>
+              </a:p>
+              <a:p>
+                <a14:m>
+                  <m:oMath xmlns:m="http://schemas.openxmlformats.org/officeDocument/2006/math">
+                    <m:r>
+                      <a:rPr lang="en-US" altLang="ja-JP" sz="2400" i="1" dirty="0" smtClean="0">
+                        <a:latin typeface="Cambria Math" panose="02040503050406030204" pitchFamily="18" charset="0"/>
+                      </a:rPr>
+                      <m:t>−</m:t>
+                    </m:r>
+                    <m:r>
+                      <a:rPr lang="en-US" altLang="ja-JP" sz="2400" b="0" i="1" dirty="0" smtClean="0">
+                        <a:latin typeface="Cambria Math" panose="02040503050406030204" pitchFamily="18" charset="0"/>
+                      </a:rPr>
+                      <m:t>8</m:t>
+                    </m:r>
+                    <m:r>
+                      <a:rPr lang="en-US" altLang="ja-JP" sz="2400" b="0" i="1" dirty="0" smtClean="0">
+                        <a:latin typeface="Cambria Math" panose="02040503050406030204" pitchFamily="18" charset="0"/>
+                      </a:rPr>
+                      <m:t>=</m:t>
+                    </m:r>
+                    <m:r>
+                      <a:rPr lang="en-US" altLang="ja-JP" sz="2400" b="0" i="1" dirty="0" smtClean="0">
+                        <a:latin typeface="Cambria Math" panose="02040503050406030204" pitchFamily="18" charset="0"/>
+                      </a:rPr>
+                      <m:t>5</m:t>
+                    </m:r>
+                    <m:r>
+                      <a:rPr lang="en-US" altLang="ja-JP" sz="2400" b="0" i="1" dirty="0" smtClean="0">
+                        <a:latin typeface="Cambria Math" panose="02040503050406030204" pitchFamily="18" charset="0"/>
+                      </a:rPr>
+                      <m:t>𝑚</m:t>
+                    </m:r>
+                    <m:r>
+                      <a:rPr lang="en-US" altLang="ja-JP" sz="2400" b="0" i="1" dirty="0" smtClean="0">
+                        <a:latin typeface="Cambria Math" panose="02040503050406030204" pitchFamily="18" charset="0"/>
+                      </a:rPr>
+                      <m:t>/</m:t>
+                    </m:r>
+                    <m:r>
+                      <a:rPr lang="ja-JP" altLang="en-US" sz="2400" i="1" dirty="0">
+                        <a:latin typeface="Cambria Math" panose="02040503050406030204" pitchFamily="18" charset="0"/>
+                      </a:rPr>
+                      <m:t>秒</m:t>
+                    </m:r>
+                    <m:r>
+                      <a:rPr lang="en-US" altLang="ja-JP" sz="2400" b="0" i="1" dirty="0" smtClean="0">
+                        <a:latin typeface="Cambria Math" panose="02040503050406030204" pitchFamily="18" charset="0"/>
+                      </a:rPr>
+                      <m:t>𝑡</m:t>
+                    </m:r>
+                    <m:r>
+                      <a:rPr lang="en-US" altLang="ja-JP" sz="2400" b="0" i="1" dirty="0" smtClean="0">
+                        <a:latin typeface="Cambria Math" panose="02040503050406030204" pitchFamily="18" charset="0"/>
+                      </a:rPr>
+                      <m:t>+</m:t>
+                    </m:r>
+                    <m:f>
+                      <m:fPr>
+                        <m:ctrlPr>
+                          <a:rPr lang="en-US" altLang="ja-JP" sz="2400" b="0" i="1" dirty="0" smtClean="0">
+                            <a:latin typeface="Cambria Math" panose="02040503050406030204" pitchFamily="18" charset="0"/>
+                          </a:rPr>
+                        </m:ctrlPr>
+                      </m:fPr>
+                      <m:num>
+                        <m:r>
+                          <a:rPr lang="en-US" altLang="ja-JP" sz="2400" b="0" i="1" dirty="0" smtClean="0">
+                            <a:latin typeface="Cambria Math" panose="02040503050406030204" pitchFamily="18" charset="0"/>
+                          </a:rPr>
+                          <m:t>1</m:t>
+                        </m:r>
+                      </m:num>
+                      <m:den>
+                        <m:r>
+                          <a:rPr lang="en-US" altLang="ja-JP" sz="2400" b="0" i="1" dirty="0" smtClean="0">
+                            <a:latin typeface="Cambria Math" panose="02040503050406030204" pitchFamily="18" charset="0"/>
+                          </a:rPr>
+                          <m:t>2</m:t>
+                        </m:r>
+                      </m:den>
+                    </m:f>
+                    <m:r>
+                      <a:rPr lang="en-US" altLang="ja-JP" sz="2400" i="1" dirty="0">
+                        <a:latin typeface="Cambria Math" panose="02040503050406030204" pitchFamily="18" charset="0"/>
+                      </a:rPr>
+                      <m:t>×</m:t>
+                    </m:r>
+                    <m:r>
+                      <a:rPr lang="en-US" altLang="ja-JP" sz="2400" b="0" i="1" dirty="0" smtClean="0">
+                        <a:latin typeface="Cambria Math" panose="02040503050406030204" pitchFamily="18" charset="0"/>
+                      </a:rPr>
+                      <m:t>−9.8</m:t>
+                    </m:r>
+                    <m:r>
+                      <a:rPr lang="en-US" altLang="ja-JP" sz="2400" b="0" i="1" dirty="0" smtClean="0">
+                        <a:latin typeface="Cambria Math" panose="02040503050406030204" pitchFamily="18" charset="0"/>
+                      </a:rPr>
+                      <m:t>𝑚</m:t>
+                    </m:r>
+                    <m:sSup>
+                      <m:sSupPr>
+                        <m:ctrlPr>
+                          <a:rPr lang="en-US" altLang="ja-JP" sz="2400" b="0" i="1" dirty="0" smtClean="0">
+                            <a:latin typeface="Cambria Math" panose="02040503050406030204" pitchFamily="18" charset="0"/>
+                          </a:rPr>
+                        </m:ctrlPr>
+                      </m:sSupPr>
+                      <m:e>
+                        <m:r>
+                          <a:rPr lang="ja-JP" altLang="en-US" sz="2400" i="1" dirty="0">
+                            <a:latin typeface="Cambria Math" panose="02040503050406030204" pitchFamily="18" charset="0"/>
+                          </a:rPr>
+                          <m:t>秒</m:t>
+                        </m:r>
+                      </m:e>
+                      <m:sup>
+                        <m:r>
+                          <a:rPr lang="en-US" altLang="ja-JP" sz="2400" b="0" i="1" dirty="0" smtClean="0">
+                            <a:latin typeface="Cambria Math" panose="02040503050406030204" pitchFamily="18" charset="0"/>
+                          </a:rPr>
+                          <m:t>2</m:t>
+                        </m:r>
+                      </m:sup>
+                    </m:sSup>
+                    <m:sSup>
+                      <m:sSupPr>
+                        <m:ctrlPr>
+                          <a:rPr lang="en-US" altLang="ja-JP" sz="2400" i="1" dirty="0">
+                            <a:latin typeface="Cambria Math" panose="02040503050406030204" pitchFamily="18" charset="0"/>
+                          </a:rPr>
+                        </m:ctrlPr>
+                      </m:sSupPr>
+                      <m:e>
+                        <m:r>
+                          <a:rPr lang="en-US" altLang="ja-JP" sz="2400" i="1" dirty="0">
+                            <a:latin typeface="Cambria Math" panose="02040503050406030204" pitchFamily="18" charset="0"/>
+                          </a:rPr>
+                          <m:t>𝑡</m:t>
+                        </m:r>
+                      </m:e>
+                      <m:sup>
+                        <m:r>
+                          <a:rPr lang="en-US" altLang="ja-JP" sz="2400" i="1" dirty="0">
+                            <a:latin typeface="Cambria Math" panose="02040503050406030204" pitchFamily="18" charset="0"/>
+                          </a:rPr>
+                          <m:t>2</m:t>
+                        </m:r>
+                      </m:sup>
+                    </m:sSup>
+                  </m:oMath>
+                </a14:m>
+                <a:r>
+                  <a:rPr lang="en-US" altLang="ja-JP" sz="2400" b="0" dirty="0"/>
+                  <a:t> </a:t>
+                </a:r>
+              </a:p>
+              <a:p>
+                <a:endParaRPr lang="en-US" altLang="ja-JP" sz="2400" dirty="0"/>
+              </a:p>
+              <a:p>
+                <a:r>
+                  <a:rPr lang="ja-JP" altLang="en-US" sz="2400" b="0" dirty="0"/>
+                  <a:t>この場合</a:t>
+                </a:r>
+                <a14:m>
+                  <m:oMath xmlns:m="http://schemas.openxmlformats.org/officeDocument/2006/math">
+                    <m:r>
+                      <a:rPr lang="en-US" altLang="ja-JP" sz="2400" b="0" i="1" dirty="0" smtClean="0">
+                        <a:latin typeface="Cambria Math" panose="02040503050406030204" pitchFamily="18" charset="0"/>
+                      </a:rPr>
+                      <m:t>𝑡</m:t>
+                    </m:r>
+                    <m:r>
+                      <a:rPr lang="ja-JP" altLang="en-US" sz="2400" i="1" dirty="0">
+                        <a:latin typeface="Cambria Math" panose="02040503050406030204" pitchFamily="18" charset="0"/>
+                      </a:rPr>
+                      <m:t>の</m:t>
+                    </m:r>
+                  </m:oMath>
+                </a14:m>
+                <a:r>
+                  <a:rPr lang="en-US" altLang="ja-JP" sz="2400" b="0" dirty="0"/>
+                  <a:t>2</a:t>
+                </a:r>
+                <a:r>
+                  <a:rPr lang="ja-JP" altLang="en-US" sz="2400" b="0" dirty="0"/>
+                  <a:t>次方程式を解かなければいけません。</a:t>
+                </a:r>
+                <a:endParaRPr lang="en-US" altLang="ja-JP" sz="2400" b="0" dirty="0"/>
+              </a:p>
+              <a:p>
+                <a:r>
+                  <a:rPr lang="ja-JP" altLang="en-US" sz="2400" b="0" dirty="0"/>
+                  <a:t>簡単な数値であれば良いのですが、物理学的にキリの良い数値になることは</a:t>
+                </a:r>
+                <a:endParaRPr lang="en-US" altLang="ja-JP" sz="2400" b="0" dirty="0"/>
+              </a:p>
+              <a:p>
+                <a:r>
+                  <a:rPr lang="ja-JP" altLang="en-US" sz="2400" dirty="0"/>
+                  <a:t>ほとんどありません。</a:t>
+                </a:r>
+                <a:endParaRPr lang="en-US" altLang="ja-JP" sz="2400" dirty="0"/>
+              </a:p>
+              <a:p>
+                <a:endParaRPr lang="en-US" altLang="ja-JP" sz="2400" b="0" dirty="0"/>
+              </a:p>
+              <a:p>
+                <a:r>
+                  <a:rPr lang="ja-JP" altLang="en-US" sz="2400" dirty="0"/>
+                  <a:t>なので、別の公式を使用してみます。</a:t>
+                </a:r>
+                <a:endParaRPr lang="en-US" altLang="ja-JP" sz="2400" b="0" dirty="0"/>
+              </a:p>
+            </p:txBody>
+          </p:sp>
+        </mc:Choice>
+        <mc:Fallback>
+          <p:sp>
+            <p:nvSpPr>
+              <p:cNvPr id="6" name="テキスト ボックス 5">
+                <a:extLst>
+                  <a:ext uri="{FF2B5EF4-FFF2-40B4-BE49-F238E27FC236}">
+                    <a16:creationId xmlns:a16="http://schemas.microsoft.com/office/drawing/2014/main" id="{55830AD6-028B-4C4E-80BF-B70DFC1C3A46}"/>
+                  </a:ext>
+                </a:extLst>
+              </p:cNvPr>
+              <p:cNvSpPr txBox="1">
+                <a:spLocks noRot="1" noChangeAspect="1" noMove="1" noResize="1" noEditPoints="1" noAdjustHandles="1" noChangeArrowheads="1" noChangeShapeType="1" noTextEdit="1"/>
+              </p:cNvSpPr>
+              <p:nvPr/>
+            </p:nvSpPr>
+            <p:spPr>
+              <a:xfrm>
+                <a:off x="567542" y="1216429"/>
+                <a:ext cx="10649069" cy="5049459"/>
+              </a:xfrm>
+              <a:prstGeom prst="rect">
+                <a:avLst/>
+              </a:prstGeom>
+              <a:blipFill>
+                <a:blip r:embed="rId2"/>
+                <a:stretch>
+                  <a:fillRect l="-859" t="-966" b="-1812"/>
+                </a:stretch>
+              </a:blipFill>
+            </p:spPr>
+            <p:txBody>
+              <a:bodyPr/>
+              <a:lstStyle/>
+              <a:p>
+                <a:r>
+                  <a:rPr lang="ja-JP" altLang="en-US">
+                    <a:noFill/>
+                  </a:rPr>
+                  <a:t> </a:t>
+                </a:r>
+              </a:p>
+            </p:txBody>
+          </p:sp>
+        </mc:Fallback>
+      </mc:AlternateContent>
+    </p:spTree>
+    <p:extLst>
+      <p:ext uri="{BB962C8B-B14F-4D97-AF65-F5344CB8AC3E}">
+        <p14:creationId xmlns:p14="http://schemas.microsoft.com/office/powerpoint/2010/main" val="3044118927"/>
+      </p:ext>
+    </p:extLst>
+  </p:cSld>
+  <p:clrMapOvr>
+    <a:masterClrMapping/>
+  </p:clrMapOvr>
+</p:sld>
+</file>
+
+<file path=ppt/slides/slide28.xml><?xml version="1.0" encoding="utf-8"?>
+<p:sld xmlns:a="http://schemas.openxmlformats.org/drawingml/2006/main" xmlns:r="http://schemas.openxmlformats.org/officeDocument/2006/relationships" xmlns:p="http://schemas.openxmlformats.org/presentationml/2006/main">
+  <p:cSld>
+    <p:spTree>
+      <p:nvGrpSpPr>
+        <p:cNvPr id="1" name=""/>
+        <p:cNvGrpSpPr/>
+        <p:nvPr/>
+      </p:nvGrpSpPr>
+      <p:grpSpPr>
+        <a:xfrm>
+          <a:off x="0" y="0"/>
+          <a:ext cx="0" cy="0"/>
+          <a:chOff x="0" y="0"/>
+          <a:chExt cx="0" cy="0"/>
+        </a:xfrm>
+      </p:grpSpPr>
+      <p:sp>
+        <p:nvSpPr>
+          <p:cNvPr id="4" name="テキスト ボックス 3">
+            <a:extLst>
+              <a:ext uri="{FF2B5EF4-FFF2-40B4-BE49-F238E27FC236}">
+                <a16:creationId xmlns:a16="http://schemas.microsoft.com/office/drawing/2014/main" id="{5A13BF46-B8C5-48AA-8308-C9ECFF431A18}"/>
+              </a:ext>
+            </a:extLst>
+          </p:cNvPr>
+          <p:cNvSpPr txBox="1"/>
+          <p:nvPr/>
+        </p:nvSpPr>
+        <p:spPr>
+          <a:xfrm>
+            <a:off x="567542" y="491954"/>
+            <a:ext cx="5461752" cy="584775"/>
+          </a:xfrm>
+          <a:prstGeom prst="rect">
+            <a:avLst/>
+          </a:prstGeom>
+          <a:noFill/>
+        </p:spPr>
+        <p:txBody>
+          <a:bodyPr wrap="none" rtlCol="0">
+            <a:spAutoFit/>
+          </a:bodyPr>
+          <a:lstStyle/>
+          <a:p>
+            <a:r>
+              <a:rPr kumimoji="1" lang="en-US" altLang="ja-JP" sz="3200" b="1" u="sng" dirty="0"/>
+              <a:t>2</a:t>
+            </a:r>
+            <a:r>
+              <a:rPr kumimoji="1" lang="ja-JP" altLang="en-US" sz="3200" b="1" u="sng" dirty="0"/>
+              <a:t>次元、３次元の運動 例題４</a:t>
+            </a:r>
+            <a:endParaRPr kumimoji="1" lang="en-US" altLang="ja-JP" sz="3200" b="1" u="sng" dirty="0"/>
+          </a:p>
+        </p:txBody>
+      </p:sp>
+      <mc:AlternateContent xmlns:mc="http://schemas.openxmlformats.org/markup-compatibility/2006">
+        <mc:Choice xmlns:a14="http://schemas.microsoft.com/office/drawing/2010/main" Requires="a14">
+          <p:sp>
+            <p:nvSpPr>
+              <p:cNvPr id="6" name="テキスト ボックス 5">
+                <a:extLst>
+                  <a:ext uri="{FF2B5EF4-FFF2-40B4-BE49-F238E27FC236}">
+                    <a16:creationId xmlns:a16="http://schemas.microsoft.com/office/drawing/2014/main" id="{55830AD6-028B-4C4E-80BF-B70DFC1C3A46}"/>
+                  </a:ext>
+                </a:extLst>
+              </p:cNvPr>
+              <p:cNvSpPr txBox="1"/>
+              <p:nvPr/>
+            </p:nvSpPr>
+            <p:spPr>
+              <a:xfrm>
+                <a:off x="567542" y="1216429"/>
+                <a:ext cx="8462573" cy="5040226"/>
+              </a:xfrm>
+              <a:prstGeom prst="rect">
+                <a:avLst/>
+              </a:prstGeom>
+              <a:noFill/>
+            </p:spPr>
+            <p:txBody>
+              <a:bodyPr wrap="none" rtlCol="0">
+                <a:spAutoFit/>
+              </a:bodyPr>
+              <a:lstStyle/>
+              <a:p>
+                <a:r>
+                  <a:rPr lang="ja-JP" altLang="en-US" sz="2400" dirty="0"/>
+                  <a:t>ゲーム中のキャラクターが</a:t>
+                </a:r>
+                <a:r>
+                  <a:rPr lang="en-US" altLang="ja-JP" sz="2400" dirty="0"/>
+                  <a:t>10m/</a:t>
+                </a:r>
+                <a:r>
+                  <a:rPr lang="ja-JP" altLang="en-US" sz="2400" dirty="0"/>
+                  <a:t>秒で移動しており、</a:t>
+                </a:r>
+                <a:endParaRPr lang="en-US" altLang="ja-JP" sz="2400" dirty="0"/>
+              </a:p>
+              <a:p>
+                <a:r>
+                  <a:rPr lang="ja-JP" altLang="en-US" sz="2400" dirty="0"/>
+                  <a:t>高さ</a:t>
+                </a:r>
+                <a:r>
+                  <a:rPr lang="en-US" altLang="ja-JP" sz="2400" dirty="0"/>
+                  <a:t>8m</a:t>
+                </a:r>
+                <a:r>
+                  <a:rPr lang="ja-JP" altLang="en-US" sz="2400" dirty="0"/>
+                  <a:t>の崖から</a:t>
+                </a:r>
+                <a14:m>
+                  <m:oMath xmlns:m="http://schemas.openxmlformats.org/officeDocument/2006/math">
+                    <m:r>
+                      <a:rPr lang="en-US" altLang="ja-JP" sz="2400" i="1" dirty="0" smtClean="0">
+                        <a:latin typeface="Cambria Math" panose="02040503050406030204" pitchFamily="18" charset="0"/>
+                      </a:rPr>
+                      <m:t>30°</m:t>
+                    </m:r>
+                  </m:oMath>
+                </a14:m>
+                <a:r>
+                  <a:rPr lang="ja-JP" altLang="en-US" sz="2400" dirty="0"/>
+                  <a:t>の角度でジャンプして飛び降りました。</a:t>
+                </a:r>
+                <a:endParaRPr lang="en-US" altLang="ja-JP" sz="2400" dirty="0"/>
+              </a:p>
+              <a:p>
+                <a:r>
+                  <a:rPr lang="ja-JP" altLang="en-US" sz="2400" dirty="0"/>
+                  <a:t>崖から着地地点までの水平距離は何</a:t>
+                </a:r>
+                <a:r>
+                  <a:rPr lang="en-US" altLang="ja-JP" sz="2400" dirty="0"/>
+                  <a:t>m</a:t>
+                </a:r>
+                <a:r>
+                  <a:rPr lang="ja-JP" altLang="en-US" sz="2400" dirty="0"/>
+                  <a:t>か求めなさい。</a:t>
+                </a:r>
+                <a:endParaRPr lang="en-US" altLang="ja-JP" sz="2400" dirty="0"/>
+              </a:p>
+              <a:p>
+                <a:endParaRPr lang="en-US" altLang="ja-JP" sz="2400" dirty="0"/>
+              </a:p>
+              <a:p>
+                <a:r>
+                  <a:rPr lang="ja-JP" altLang="en-US" sz="2400" b="1" dirty="0">
+                    <a:solidFill>
+                      <a:srgbClr val="FF0000"/>
+                    </a:solidFill>
+                  </a:rPr>
+                  <a:t>■解答</a:t>
+                </a:r>
+                <a:endParaRPr lang="en-US" altLang="ja-JP" sz="2400" b="1" dirty="0">
+                  <a:solidFill>
+                    <a:srgbClr val="FF0000"/>
+                  </a:solidFill>
+                </a:endParaRPr>
+              </a:p>
+              <a:p>
+                <a:r>
+                  <a:rPr lang="ja-JP" altLang="en-US" sz="2400" dirty="0"/>
+                  <a:t>式５を使って鉛直の最終速度（</a:t>
+                </a:r>
+                <a14:m>
+                  <m:oMath xmlns:m="http://schemas.openxmlformats.org/officeDocument/2006/math">
+                    <m:r>
+                      <a:rPr lang="en-US" altLang="ja-JP" sz="2400" b="0" i="1" smtClean="0">
+                        <a:latin typeface="Cambria Math" panose="02040503050406030204" pitchFamily="18" charset="0"/>
+                      </a:rPr>
+                      <m:t>𝑣</m:t>
+                    </m:r>
+                    <m:sSub>
+                      <m:sSubPr>
+                        <m:ctrlPr>
+                          <a:rPr lang="en-US" altLang="ja-JP" sz="2400" b="0" i="1" smtClean="0">
+                            <a:latin typeface="Cambria Math" panose="02040503050406030204" pitchFamily="18" charset="0"/>
+                          </a:rPr>
+                        </m:ctrlPr>
+                      </m:sSubPr>
+                      <m:e>
+                        <m:r>
+                          <a:rPr lang="en-US" altLang="ja-JP" sz="2400" b="0" i="1" smtClean="0">
+                            <a:latin typeface="Cambria Math" panose="02040503050406030204" pitchFamily="18" charset="0"/>
+                          </a:rPr>
+                          <m:t>𝑓</m:t>
+                        </m:r>
+                      </m:e>
+                      <m:sub>
+                        <m:r>
+                          <a:rPr lang="en-US" altLang="ja-JP" sz="2400" b="0" i="1" smtClean="0">
+                            <a:latin typeface="Cambria Math" panose="02040503050406030204" pitchFamily="18" charset="0"/>
+                          </a:rPr>
+                          <m:t>𝑦</m:t>
+                        </m:r>
+                      </m:sub>
+                    </m:sSub>
+                  </m:oMath>
+                </a14:m>
+                <a:r>
+                  <a:rPr lang="ja-JP" altLang="en-US" sz="2400" dirty="0"/>
+                  <a:t>）を求めます。</a:t>
+                </a:r>
+                <a:endParaRPr lang="en-US" altLang="ja-JP" sz="2400" dirty="0"/>
+              </a:p>
+              <a:p>
+                <a:endParaRPr lang="en-US" altLang="ja-JP" sz="2400" b="0" dirty="0"/>
+              </a:p>
+              <a:p>
+                <a14:m>
+                  <m:oMath xmlns:m="http://schemas.openxmlformats.org/officeDocument/2006/math">
+                    <m:r>
+                      <a:rPr lang="en-US" altLang="ja-JP" sz="2400" b="0" i="1" smtClean="0">
+                        <a:latin typeface="Cambria Math" panose="02040503050406030204" pitchFamily="18" charset="0"/>
+                      </a:rPr>
+                      <m:t>𝑣</m:t>
+                    </m:r>
+                    <m:sSubSup>
+                      <m:sSubSupPr>
+                        <m:ctrlPr>
+                          <a:rPr lang="en-US" altLang="ja-JP" sz="2400" b="0" i="1" smtClean="0">
+                            <a:latin typeface="Cambria Math" panose="02040503050406030204" pitchFamily="18" charset="0"/>
+                          </a:rPr>
+                        </m:ctrlPr>
+                      </m:sSubSupPr>
+                      <m:e>
+                        <m:r>
+                          <a:rPr lang="en-US" altLang="ja-JP" sz="2400" b="0" i="1" smtClean="0">
+                            <a:latin typeface="Cambria Math" panose="02040503050406030204" pitchFamily="18" charset="0"/>
+                          </a:rPr>
+                          <m:t>𝑓</m:t>
+                        </m:r>
+                      </m:e>
+                      <m:sub>
+                        <m:r>
+                          <a:rPr lang="en-US" altLang="ja-JP" sz="2400" b="0" i="1" smtClean="0">
+                            <a:latin typeface="Cambria Math" panose="02040503050406030204" pitchFamily="18" charset="0"/>
+                          </a:rPr>
+                          <m:t>𝑦</m:t>
+                        </m:r>
+                      </m:sub>
+                      <m:sup>
+                        <m:r>
+                          <a:rPr lang="en-US" altLang="ja-JP" sz="2400" b="0" i="1" smtClean="0">
+                            <a:latin typeface="Cambria Math" panose="02040503050406030204" pitchFamily="18" charset="0"/>
+                          </a:rPr>
+                          <m:t>2</m:t>
+                        </m:r>
+                      </m:sup>
+                    </m:sSubSup>
+                    <m:r>
+                      <a:rPr lang="en-US" altLang="ja-JP" sz="2400" b="0" i="1" smtClean="0">
+                        <a:latin typeface="Cambria Math" panose="02040503050406030204" pitchFamily="18" charset="0"/>
+                      </a:rPr>
+                      <m:t>=</m:t>
+                    </m:r>
+                    <m:r>
+                      <a:rPr lang="en-US" altLang="ja-JP" sz="2400" b="0" i="1" smtClean="0">
+                        <a:latin typeface="Cambria Math" panose="02040503050406030204" pitchFamily="18" charset="0"/>
+                      </a:rPr>
+                      <m:t>𝑣</m:t>
+                    </m:r>
+                    <m:sSubSup>
+                      <m:sSubSupPr>
+                        <m:ctrlPr>
+                          <a:rPr lang="en-US" altLang="ja-JP" sz="2400" b="0" i="1" smtClean="0">
+                            <a:latin typeface="Cambria Math" panose="02040503050406030204" pitchFamily="18" charset="0"/>
+                          </a:rPr>
+                        </m:ctrlPr>
+                      </m:sSubSupPr>
+                      <m:e>
+                        <m:r>
+                          <a:rPr lang="en-US" altLang="ja-JP" sz="2400" b="0" i="1" smtClean="0">
+                            <a:latin typeface="Cambria Math" panose="02040503050406030204" pitchFamily="18" charset="0"/>
+                          </a:rPr>
+                          <m:t>𝑖</m:t>
+                        </m:r>
+                      </m:e>
+                      <m:sub>
+                        <m:r>
+                          <a:rPr lang="en-US" altLang="ja-JP" sz="2400" b="0" i="1" smtClean="0">
+                            <a:latin typeface="Cambria Math" panose="02040503050406030204" pitchFamily="18" charset="0"/>
+                          </a:rPr>
+                          <m:t>𝑦</m:t>
+                        </m:r>
+                      </m:sub>
+                      <m:sup>
+                        <m:r>
+                          <a:rPr lang="en-US" altLang="ja-JP" sz="2400" b="0" i="1" smtClean="0">
+                            <a:latin typeface="Cambria Math" panose="02040503050406030204" pitchFamily="18" charset="0"/>
+                          </a:rPr>
+                          <m:t>2</m:t>
+                        </m:r>
+                      </m:sup>
+                    </m:sSubSup>
+                    <m:r>
+                      <a:rPr lang="en-US" altLang="ja-JP" sz="2400" b="0" i="1" smtClean="0">
+                        <a:latin typeface="Cambria Math" panose="02040503050406030204" pitchFamily="18" charset="0"/>
+                      </a:rPr>
+                      <m:t>+2</m:t>
+                    </m:r>
+                    <m:r>
+                      <a:rPr lang="en-US" altLang="ja-JP" sz="2400" b="0" i="1" smtClean="0">
+                        <a:latin typeface="Cambria Math" panose="02040503050406030204" pitchFamily="18" charset="0"/>
+                      </a:rPr>
+                      <m:t>𝑎</m:t>
+                    </m:r>
+                    <m:r>
+                      <a:rPr lang="ja-JP" altLang="en-US" sz="2400" i="1">
+                        <a:latin typeface="Cambria Math" panose="02040503050406030204" pitchFamily="18" charset="0"/>
+                      </a:rPr>
+                      <m:t>⊿</m:t>
+                    </m:r>
+                    <m:r>
+                      <a:rPr lang="en-US" altLang="ja-JP" sz="2400" b="0" i="1" smtClean="0">
+                        <a:latin typeface="Cambria Math" panose="02040503050406030204" pitchFamily="18" charset="0"/>
+                      </a:rPr>
+                      <m:t>𝑦</m:t>
+                    </m:r>
+                  </m:oMath>
+                </a14:m>
+                <a:r>
+                  <a:rPr lang="en-US" altLang="ja-JP" sz="2400" b="0" dirty="0"/>
+                  <a:t> </a:t>
+                </a:r>
+              </a:p>
+              <a:p>
+                <a14:m>
+                  <m:oMath xmlns:m="http://schemas.openxmlformats.org/officeDocument/2006/math">
+                    <m:r>
+                      <a:rPr lang="en-US" altLang="ja-JP" sz="2400" b="0" i="1" smtClean="0">
+                        <a:latin typeface="Cambria Math" panose="02040503050406030204" pitchFamily="18" charset="0"/>
+                      </a:rPr>
+                      <m:t>𝑣</m:t>
+                    </m:r>
+                    <m:sSubSup>
+                      <m:sSubSupPr>
+                        <m:ctrlPr>
+                          <a:rPr lang="en-US" altLang="ja-JP" sz="2400" b="0" i="1" smtClean="0">
+                            <a:latin typeface="Cambria Math" panose="02040503050406030204" pitchFamily="18" charset="0"/>
+                          </a:rPr>
+                        </m:ctrlPr>
+                      </m:sSubSupPr>
+                      <m:e>
+                        <m:r>
+                          <a:rPr lang="en-US" altLang="ja-JP" sz="2400" b="0" i="1" smtClean="0">
+                            <a:latin typeface="Cambria Math" panose="02040503050406030204" pitchFamily="18" charset="0"/>
+                          </a:rPr>
+                          <m:t>𝑓</m:t>
+                        </m:r>
+                      </m:e>
+                      <m:sub>
+                        <m:r>
+                          <a:rPr lang="en-US" altLang="ja-JP" sz="2400" b="0" i="1" smtClean="0">
+                            <a:latin typeface="Cambria Math" panose="02040503050406030204" pitchFamily="18" charset="0"/>
+                          </a:rPr>
+                          <m:t>𝑦</m:t>
+                        </m:r>
+                      </m:sub>
+                      <m:sup>
+                        <m:r>
+                          <a:rPr lang="en-US" altLang="ja-JP" sz="2400" b="0" i="1" smtClean="0">
+                            <a:latin typeface="Cambria Math" panose="02040503050406030204" pitchFamily="18" charset="0"/>
+                          </a:rPr>
+                          <m:t>2</m:t>
+                        </m:r>
+                      </m:sup>
+                    </m:sSubSup>
+                    <m:r>
+                      <a:rPr lang="en-US" altLang="ja-JP" sz="2400" b="0" i="1" smtClean="0">
+                        <a:latin typeface="Cambria Math" panose="02040503050406030204" pitchFamily="18" charset="0"/>
+                      </a:rPr>
+                      <m:t>=</m:t>
+                    </m:r>
+                    <m:sSup>
+                      <m:sSupPr>
+                        <m:ctrlPr>
+                          <a:rPr lang="en-US" altLang="ja-JP" sz="2400" b="0" i="1" smtClean="0">
+                            <a:latin typeface="Cambria Math" panose="02040503050406030204" pitchFamily="18" charset="0"/>
+                          </a:rPr>
+                        </m:ctrlPr>
+                      </m:sSupPr>
+                      <m:e>
+                        <m:r>
+                          <a:rPr lang="en-US" altLang="ja-JP" sz="2400" b="0" i="1" smtClean="0">
+                            <a:latin typeface="Cambria Math" panose="02040503050406030204" pitchFamily="18" charset="0"/>
+                          </a:rPr>
+                          <m:t>(</m:t>
+                        </m:r>
+                        <m:r>
+                          <a:rPr lang="en-US" altLang="ja-JP" sz="2400" b="0" i="1" smtClean="0">
+                            <a:latin typeface="Cambria Math" panose="02040503050406030204" pitchFamily="18" charset="0"/>
+                          </a:rPr>
+                          <m:t>5</m:t>
+                        </m:r>
+                        <m:r>
+                          <a:rPr lang="en-US" altLang="ja-JP" sz="2400" b="0" i="1" smtClean="0">
+                            <a:latin typeface="Cambria Math" panose="02040503050406030204" pitchFamily="18" charset="0"/>
+                          </a:rPr>
+                          <m:t>𝑚</m:t>
+                        </m:r>
+                        <m:r>
+                          <a:rPr lang="en-US" altLang="ja-JP" sz="2400" b="0" i="1" smtClean="0">
+                            <a:latin typeface="Cambria Math" panose="02040503050406030204" pitchFamily="18" charset="0"/>
+                          </a:rPr>
+                          <m:t>/</m:t>
+                        </m:r>
+                        <m:r>
+                          <a:rPr lang="ja-JP" altLang="en-US" sz="2400" i="1">
+                            <a:latin typeface="Cambria Math" panose="02040503050406030204" pitchFamily="18" charset="0"/>
+                          </a:rPr>
+                          <m:t>秒</m:t>
+                        </m:r>
+                        <m:r>
+                          <a:rPr lang="en-US" altLang="ja-JP" sz="2400" b="0" i="1" smtClean="0">
+                            <a:latin typeface="Cambria Math" panose="02040503050406030204" pitchFamily="18" charset="0"/>
+                          </a:rPr>
+                          <m:t>)</m:t>
+                        </m:r>
+                      </m:e>
+                      <m:sup>
+                        <m:r>
+                          <a:rPr lang="en-US" altLang="ja-JP" sz="2400" b="0" i="1" smtClean="0">
+                            <a:latin typeface="Cambria Math" panose="02040503050406030204" pitchFamily="18" charset="0"/>
+                          </a:rPr>
+                          <m:t>2</m:t>
+                        </m:r>
+                      </m:sup>
+                    </m:sSup>
+                    <m:r>
+                      <a:rPr lang="en-US" altLang="ja-JP" sz="2400" b="0" i="1" smtClean="0">
+                        <a:latin typeface="Cambria Math" panose="02040503050406030204" pitchFamily="18" charset="0"/>
+                      </a:rPr>
+                      <m:t>+2</m:t>
+                    </m:r>
+                    <m:r>
+                      <a:rPr lang="en-US" altLang="ja-JP" sz="2400" b="0" i="1" smtClean="0">
+                        <a:latin typeface="Cambria Math" panose="02040503050406030204" pitchFamily="18" charset="0"/>
+                      </a:rPr>
+                      <m:t>(−9.8</m:t>
+                    </m:r>
+                    <m:r>
+                      <a:rPr lang="en-US" altLang="ja-JP" sz="2400" b="0" i="1" smtClean="0">
+                        <a:latin typeface="Cambria Math" panose="02040503050406030204" pitchFamily="18" charset="0"/>
+                      </a:rPr>
+                      <m:t>𝑚</m:t>
+                    </m:r>
+                    <m:r>
+                      <a:rPr lang="en-US" altLang="ja-JP" sz="2400" b="0" i="1" smtClean="0">
+                        <a:latin typeface="Cambria Math" panose="02040503050406030204" pitchFamily="18" charset="0"/>
+                      </a:rPr>
+                      <m:t>/</m:t>
+                    </m:r>
+                    <m:sSup>
+                      <m:sSupPr>
+                        <m:ctrlPr>
+                          <a:rPr lang="en-US" altLang="ja-JP" sz="2400" b="0" i="1" smtClean="0">
+                            <a:latin typeface="Cambria Math" panose="02040503050406030204" pitchFamily="18" charset="0"/>
+                          </a:rPr>
+                        </m:ctrlPr>
+                      </m:sSupPr>
+                      <m:e>
+                        <m:r>
+                          <a:rPr lang="ja-JP" altLang="en-US" sz="2400" i="1">
+                            <a:latin typeface="Cambria Math" panose="02040503050406030204" pitchFamily="18" charset="0"/>
+                          </a:rPr>
+                          <m:t>秒</m:t>
+                        </m:r>
+                      </m:e>
+                      <m:sup>
+                        <m:r>
+                          <a:rPr lang="en-US" altLang="ja-JP" sz="2400" b="0" i="1" smtClean="0">
+                            <a:latin typeface="Cambria Math" panose="02040503050406030204" pitchFamily="18" charset="0"/>
+                          </a:rPr>
+                          <m:t>2</m:t>
+                        </m:r>
+                      </m:sup>
+                    </m:sSup>
+                    <m:r>
+                      <a:rPr lang="en-US" altLang="ja-JP" sz="2400" b="0" i="1" smtClean="0">
+                        <a:latin typeface="Cambria Math" panose="02040503050406030204" pitchFamily="18" charset="0"/>
+                      </a:rPr>
+                      <m:t>)</m:t>
+                    </m:r>
+                    <m:r>
+                      <a:rPr lang="en-US" altLang="ja-JP" sz="2400" i="1" smtClean="0">
+                        <a:latin typeface="Cambria Math" panose="02040503050406030204" pitchFamily="18" charset="0"/>
+                      </a:rPr>
+                      <m:t>(</m:t>
+                    </m:r>
+                    <m:r>
+                      <a:rPr lang="en-US" altLang="ja-JP" sz="2400" b="0" i="1" smtClean="0">
+                        <a:latin typeface="Cambria Math" panose="02040503050406030204" pitchFamily="18" charset="0"/>
+                      </a:rPr>
+                      <m:t>−8</m:t>
+                    </m:r>
+                    <m:r>
+                      <a:rPr lang="en-US" altLang="ja-JP" sz="2400" b="0" i="1" smtClean="0">
+                        <a:latin typeface="Cambria Math" panose="02040503050406030204" pitchFamily="18" charset="0"/>
+                      </a:rPr>
+                      <m:t>𝑚</m:t>
+                    </m:r>
+                    <m:r>
+                      <a:rPr lang="en-US" altLang="ja-JP" sz="2400" b="0" i="1" smtClean="0">
+                        <a:latin typeface="Cambria Math" panose="02040503050406030204" pitchFamily="18" charset="0"/>
+                      </a:rPr>
+                      <m:t>)</m:t>
+                    </m:r>
+                  </m:oMath>
+                </a14:m>
+                <a:r>
+                  <a:rPr lang="en-US" altLang="ja-JP" sz="2400" b="0" dirty="0"/>
+                  <a:t> </a:t>
+                </a:r>
+              </a:p>
+              <a:p>
+                <a14:m>
+                  <m:oMath xmlns:m="http://schemas.openxmlformats.org/officeDocument/2006/math">
+                    <m:r>
+                      <a:rPr lang="en-US" altLang="ja-JP" sz="2400" b="0" i="1" smtClean="0">
+                        <a:latin typeface="Cambria Math" panose="02040503050406030204" pitchFamily="18" charset="0"/>
+                      </a:rPr>
+                      <m:t>𝑣</m:t>
+                    </m:r>
+                    <m:sSubSup>
+                      <m:sSubSupPr>
+                        <m:ctrlPr>
+                          <a:rPr lang="en-US" altLang="ja-JP" sz="2400" b="0" i="1" smtClean="0">
+                            <a:latin typeface="Cambria Math" panose="02040503050406030204" pitchFamily="18" charset="0"/>
+                          </a:rPr>
+                        </m:ctrlPr>
+                      </m:sSubSupPr>
+                      <m:e>
+                        <m:r>
+                          <a:rPr lang="en-US" altLang="ja-JP" sz="2400" b="0" i="1" smtClean="0">
+                            <a:latin typeface="Cambria Math" panose="02040503050406030204" pitchFamily="18" charset="0"/>
+                          </a:rPr>
+                          <m:t>𝑓</m:t>
+                        </m:r>
+                      </m:e>
+                      <m:sub>
+                        <m:r>
+                          <a:rPr lang="en-US" altLang="ja-JP" sz="2400" b="0" i="1" smtClean="0">
+                            <a:latin typeface="Cambria Math" panose="02040503050406030204" pitchFamily="18" charset="0"/>
+                          </a:rPr>
+                          <m:t>𝑦</m:t>
+                        </m:r>
+                      </m:sub>
+                      <m:sup>
+                        <m:r>
+                          <a:rPr lang="en-US" altLang="ja-JP" sz="2400" b="0" i="1" smtClean="0">
+                            <a:latin typeface="Cambria Math" panose="02040503050406030204" pitchFamily="18" charset="0"/>
+                          </a:rPr>
+                          <m:t>2</m:t>
+                        </m:r>
+                      </m:sup>
+                    </m:sSubSup>
+                    <m:r>
+                      <a:rPr lang="en-US" altLang="ja-JP" sz="2400" b="0" i="1" smtClean="0">
+                        <a:latin typeface="Cambria Math" panose="02040503050406030204" pitchFamily="18" charset="0"/>
+                      </a:rPr>
+                      <m:t>=25</m:t>
+                    </m:r>
+                    <m:sSup>
+                      <m:sSupPr>
+                        <m:ctrlPr>
+                          <a:rPr lang="en-US" altLang="ja-JP" sz="2400" b="0" i="1" smtClean="0">
+                            <a:latin typeface="Cambria Math" panose="02040503050406030204" pitchFamily="18" charset="0"/>
+                          </a:rPr>
+                        </m:ctrlPr>
+                      </m:sSupPr>
+                      <m:e>
+                        <m:r>
+                          <a:rPr lang="en-US" altLang="ja-JP" sz="2400" b="0" i="1" smtClean="0">
+                            <a:latin typeface="Cambria Math" panose="02040503050406030204" pitchFamily="18" charset="0"/>
+                          </a:rPr>
+                          <m:t>𝑚</m:t>
+                        </m:r>
+                      </m:e>
+                      <m:sup>
+                        <m:r>
+                          <a:rPr lang="en-US" altLang="ja-JP" sz="2400" b="0" i="1" smtClean="0">
+                            <a:latin typeface="Cambria Math" panose="02040503050406030204" pitchFamily="18" charset="0"/>
+                          </a:rPr>
+                          <m:t>2</m:t>
+                        </m:r>
+                      </m:sup>
+                    </m:sSup>
+                    <m:r>
+                      <a:rPr lang="en-US" altLang="ja-JP" sz="2400" b="0" i="1" smtClean="0">
+                        <a:latin typeface="Cambria Math" panose="02040503050406030204" pitchFamily="18" charset="0"/>
+                      </a:rPr>
+                      <m:t>/</m:t>
+                    </m:r>
+                    <m:sSup>
+                      <m:sSupPr>
+                        <m:ctrlPr>
+                          <a:rPr lang="en-US" altLang="ja-JP" sz="2400" b="0" i="1" smtClean="0">
+                            <a:latin typeface="Cambria Math" panose="02040503050406030204" pitchFamily="18" charset="0"/>
+                          </a:rPr>
+                        </m:ctrlPr>
+                      </m:sSupPr>
+                      <m:e>
+                        <m:r>
+                          <a:rPr lang="ja-JP" altLang="en-US" sz="2400" i="1">
+                            <a:latin typeface="Cambria Math" panose="02040503050406030204" pitchFamily="18" charset="0"/>
+                          </a:rPr>
+                          <m:t>秒</m:t>
+                        </m:r>
+                      </m:e>
+                      <m:sup>
+                        <m:r>
+                          <a:rPr lang="en-US" altLang="ja-JP" sz="2400" b="0" i="1" smtClean="0">
+                            <a:latin typeface="Cambria Math" panose="02040503050406030204" pitchFamily="18" charset="0"/>
+                          </a:rPr>
+                          <m:t>2</m:t>
+                        </m:r>
+                      </m:sup>
+                    </m:sSup>
+                    <m:r>
+                      <a:rPr lang="en-US" altLang="ja-JP" sz="2400" b="0" i="0" smtClean="0">
+                        <a:latin typeface="Cambria Math" panose="02040503050406030204" pitchFamily="18" charset="0"/>
+                      </a:rPr>
+                      <m:t>+156.8</m:t>
+                    </m:r>
+                    <m:sSup>
+                      <m:sSupPr>
+                        <m:ctrlPr>
+                          <a:rPr lang="en-US" altLang="ja-JP" sz="2400" b="0" i="0" smtClean="0">
+                            <a:latin typeface="Cambria Math" panose="02040503050406030204" pitchFamily="18" charset="0"/>
+                          </a:rPr>
+                        </m:ctrlPr>
+                      </m:sSupPr>
+                      <m:e>
+                        <m:r>
+                          <m:rPr>
+                            <m:sty m:val="p"/>
+                          </m:rPr>
+                          <a:rPr lang="en-US" altLang="ja-JP" sz="2400" b="0" i="0" smtClean="0">
+                            <a:latin typeface="Cambria Math" panose="02040503050406030204" pitchFamily="18" charset="0"/>
+                          </a:rPr>
+                          <m:t>m</m:t>
+                        </m:r>
+                      </m:e>
+                      <m:sup>
+                        <m:r>
+                          <a:rPr lang="en-US" altLang="ja-JP" sz="2400" b="0" i="0" smtClean="0">
+                            <a:latin typeface="Cambria Math" panose="02040503050406030204" pitchFamily="18" charset="0"/>
+                          </a:rPr>
+                          <m:t>2</m:t>
+                        </m:r>
+                      </m:sup>
+                    </m:sSup>
+                    <m:r>
+                      <a:rPr lang="en-US" altLang="ja-JP" sz="2400" b="0" i="0" smtClean="0">
+                        <a:latin typeface="Cambria Math" panose="02040503050406030204" pitchFamily="18" charset="0"/>
+                      </a:rPr>
+                      <m:t>/</m:t>
+                    </m:r>
+                    <m:sSup>
+                      <m:sSupPr>
+                        <m:ctrlPr>
+                          <a:rPr lang="en-US" altLang="ja-JP" sz="2400" b="0" i="1" smtClean="0">
+                            <a:latin typeface="Cambria Math" panose="02040503050406030204" pitchFamily="18" charset="0"/>
+                          </a:rPr>
+                        </m:ctrlPr>
+                      </m:sSupPr>
+                      <m:e>
+                        <m:r>
+                          <a:rPr lang="ja-JP" altLang="en-US" sz="2400" i="1">
+                            <a:latin typeface="Cambria Math" panose="02040503050406030204" pitchFamily="18" charset="0"/>
+                          </a:rPr>
+                          <m:t>秒</m:t>
+                        </m:r>
+                      </m:e>
+                      <m:sup>
+                        <m:r>
+                          <a:rPr lang="en-US" altLang="ja-JP" sz="2400" b="0" i="1" smtClean="0">
+                            <a:latin typeface="Cambria Math" panose="02040503050406030204" pitchFamily="18" charset="0"/>
+                          </a:rPr>
+                          <m:t>2</m:t>
+                        </m:r>
+                      </m:sup>
+                    </m:sSup>
+                  </m:oMath>
+                </a14:m>
+                <a:r>
+                  <a:rPr lang="en-US" altLang="ja-JP" sz="2400" b="0" dirty="0"/>
+                  <a:t> </a:t>
+                </a:r>
+              </a:p>
+              <a:p>
+                <a14:m>
+                  <m:oMath xmlns:m="http://schemas.openxmlformats.org/officeDocument/2006/math">
+                    <m:r>
+                      <a:rPr lang="en-US" altLang="ja-JP" sz="2400" b="0" i="1" smtClean="0">
+                        <a:latin typeface="Cambria Math" panose="02040503050406030204" pitchFamily="18" charset="0"/>
+                      </a:rPr>
+                      <m:t>𝑣</m:t>
+                    </m:r>
+                    <m:sSubSup>
+                      <m:sSubSupPr>
+                        <m:ctrlPr>
+                          <a:rPr lang="en-US" altLang="ja-JP" sz="2400" b="0" i="1" smtClean="0">
+                            <a:latin typeface="Cambria Math" panose="02040503050406030204" pitchFamily="18" charset="0"/>
+                          </a:rPr>
+                        </m:ctrlPr>
+                      </m:sSubSupPr>
+                      <m:e>
+                        <m:r>
+                          <a:rPr lang="en-US" altLang="ja-JP" sz="2400" b="0" i="1" smtClean="0">
+                            <a:latin typeface="Cambria Math" panose="02040503050406030204" pitchFamily="18" charset="0"/>
+                          </a:rPr>
+                          <m:t>𝑓</m:t>
+                        </m:r>
+                      </m:e>
+                      <m:sub>
+                        <m:r>
+                          <a:rPr lang="en-US" altLang="ja-JP" sz="2400" b="0" i="1" smtClean="0">
+                            <a:latin typeface="Cambria Math" panose="02040503050406030204" pitchFamily="18" charset="0"/>
+                          </a:rPr>
+                          <m:t>𝑦</m:t>
+                        </m:r>
+                      </m:sub>
+                      <m:sup>
+                        <m:r>
+                          <a:rPr lang="en-US" altLang="ja-JP" sz="2400" b="0" i="1" smtClean="0">
+                            <a:latin typeface="Cambria Math" panose="02040503050406030204" pitchFamily="18" charset="0"/>
+                          </a:rPr>
+                          <m:t>2</m:t>
+                        </m:r>
+                      </m:sup>
+                    </m:sSubSup>
+                    <m:r>
+                      <a:rPr lang="en-US" altLang="ja-JP" sz="2400" b="0" i="1" smtClean="0">
+                        <a:latin typeface="Cambria Math" panose="02040503050406030204" pitchFamily="18" charset="0"/>
+                      </a:rPr>
+                      <m:t>=</m:t>
+                    </m:r>
+                    <m:r>
+                      <a:rPr lang="en-US" altLang="ja-JP" sz="2400" b="0" i="1" smtClean="0">
+                        <a:latin typeface="Cambria Math" panose="02040503050406030204" pitchFamily="18" charset="0"/>
+                      </a:rPr>
+                      <m:t>181.8</m:t>
+                    </m:r>
+                    <m:sSup>
+                      <m:sSupPr>
+                        <m:ctrlPr>
+                          <a:rPr lang="en-US" altLang="ja-JP" sz="2400" b="0" i="1" smtClean="0">
+                            <a:latin typeface="Cambria Math" panose="02040503050406030204" pitchFamily="18" charset="0"/>
+                          </a:rPr>
+                        </m:ctrlPr>
+                      </m:sSupPr>
+                      <m:e>
+                        <m:r>
+                          <a:rPr lang="en-US" altLang="ja-JP" sz="2400" b="0" i="1" smtClean="0">
+                            <a:latin typeface="Cambria Math" panose="02040503050406030204" pitchFamily="18" charset="0"/>
+                          </a:rPr>
+                          <m:t>𝑚</m:t>
+                        </m:r>
+                      </m:e>
+                      <m:sup>
+                        <m:r>
+                          <a:rPr lang="en-US" altLang="ja-JP" sz="2400" b="0" i="1" smtClean="0">
+                            <a:latin typeface="Cambria Math" panose="02040503050406030204" pitchFamily="18" charset="0"/>
+                          </a:rPr>
+                          <m:t>2</m:t>
+                        </m:r>
+                      </m:sup>
+                    </m:sSup>
+                    <m:r>
+                      <a:rPr lang="en-US" altLang="ja-JP" sz="2400" b="0" i="1" smtClean="0">
+                        <a:latin typeface="Cambria Math" panose="02040503050406030204" pitchFamily="18" charset="0"/>
+                      </a:rPr>
+                      <m:t>/</m:t>
+                    </m:r>
+                    <m:sSup>
+                      <m:sSupPr>
+                        <m:ctrlPr>
+                          <a:rPr lang="en-US" altLang="ja-JP" sz="2400" b="0" i="1" smtClean="0">
+                            <a:latin typeface="Cambria Math" panose="02040503050406030204" pitchFamily="18" charset="0"/>
+                          </a:rPr>
+                        </m:ctrlPr>
+                      </m:sSupPr>
+                      <m:e>
+                        <m:r>
+                          <a:rPr lang="ja-JP" altLang="en-US" sz="2400" i="1">
+                            <a:latin typeface="Cambria Math" panose="02040503050406030204" pitchFamily="18" charset="0"/>
+                          </a:rPr>
+                          <m:t>秒</m:t>
+                        </m:r>
+                      </m:e>
+                      <m:sup>
+                        <m:r>
+                          <a:rPr lang="en-US" altLang="ja-JP" sz="2400" b="0" i="1" smtClean="0">
+                            <a:latin typeface="Cambria Math" panose="02040503050406030204" pitchFamily="18" charset="0"/>
+                          </a:rPr>
+                          <m:t>2</m:t>
+                        </m:r>
+                      </m:sup>
+                    </m:sSup>
+                  </m:oMath>
+                </a14:m>
+                <a:r>
+                  <a:rPr lang="en-US" altLang="ja-JP" sz="2400" b="0" dirty="0"/>
+                  <a:t> </a:t>
+                </a:r>
+              </a:p>
+              <a:p>
+                <a14:m>
+                  <m:oMath xmlns:m="http://schemas.openxmlformats.org/officeDocument/2006/math">
+                    <m:r>
+                      <a:rPr lang="en-US" altLang="ja-JP" sz="2400" b="0" i="1" smtClean="0">
+                        <a:latin typeface="Cambria Math" panose="02040503050406030204" pitchFamily="18" charset="0"/>
+                      </a:rPr>
+                      <m:t>𝑣</m:t>
+                    </m:r>
+                    <m:sSub>
+                      <m:sSubPr>
+                        <m:ctrlPr>
+                          <a:rPr lang="en-US" altLang="ja-JP" sz="2400" b="0" i="1" smtClean="0">
+                            <a:latin typeface="Cambria Math" panose="02040503050406030204" pitchFamily="18" charset="0"/>
+                          </a:rPr>
+                        </m:ctrlPr>
+                      </m:sSubPr>
+                      <m:e>
+                        <m:r>
+                          <a:rPr lang="en-US" altLang="ja-JP" sz="2400" b="0" i="1" smtClean="0">
+                            <a:latin typeface="Cambria Math" panose="02040503050406030204" pitchFamily="18" charset="0"/>
+                          </a:rPr>
+                          <m:t>𝑓</m:t>
+                        </m:r>
+                      </m:e>
+                      <m:sub>
+                        <m:r>
+                          <a:rPr lang="en-US" altLang="ja-JP" sz="2400" b="0" i="1" smtClean="0">
+                            <a:latin typeface="Cambria Math" panose="02040503050406030204" pitchFamily="18" charset="0"/>
+                          </a:rPr>
+                          <m:t>𝑦</m:t>
+                        </m:r>
+                      </m:sub>
+                    </m:sSub>
+                    <m:r>
+                      <a:rPr lang="en-US" altLang="ja-JP" sz="2400" b="0" i="1" smtClean="0">
+                        <a:latin typeface="Cambria Math" panose="02040503050406030204" pitchFamily="18" charset="0"/>
+                      </a:rPr>
+                      <m:t>=</m:t>
+                    </m:r>
+                    <m:rad>
+                      <m:radPr>
+                        <m:degHide m:val="on"/>
+                        <m:ctrlPr>
+                          <a:rPr lang="en-US" altLang="ja-JP" sz="2400" b="0" i="1" smtClean="0">
+                            <a:latin typeface="Cambria Math" panose="02040503050406030204" pitchFamily="18" charset="0"/>
+                          </a:rPr>
+                        </m:ctrlPr>
+                      </m:radPr>
+                      <m:deg/>
+                      <m:e>
+                        <m:r>
+                          <a:rPr lang="en-US" altLang="ja-JP" sz="2400" i="1">
+                            <a:latin typeface="Cambria Math" panose="02040503050406030204" pitchFamily="18" charset="0"/>
+                          </a:rPr>
+                          <m:t>181.8</m:t>
+                        </m:r>
+                      </m:e>
+                    </m:rad>
+                    <m:r>
+                      <a:rPr lang="en-US" altLang="ja-JP" sz="2400" b="0" i="1" smtClean="0">
+                        <a:latin typeface="Cambria Math" panose="02040503050406030204" pitchFamily="18" charset="0"/>
+                      </a:rPr>
+                      <m:t>𝑚</m:t>
+                    </m:r>
+                    <m:r>
+                      <a:rPr lang="en-US" altLang="ja-JP" sz="2400" b="0" i="1" smtClean="0">
+                        <a:latin typeface="Cambria Math" panose="02040503050406030204" pitchFamily="18" charset="0"/>
+                      </a:rPr>
+                      <m:t>/</m:t>
+                    </m:r>
+                    <m:r>
+                      <a:rPr lang="ja-JP" altLang="en-US" sz="2400" i="1">
+                        <a:latin typeface="Cambria Math" panose="02040503050406030204" pitchFamily="18" charset="0"/>
+                      </a:rPr>
+                      <m:t>秒</m:t>
+                    </m:r>
+                  </m:oMath>
+                </a14:m>
+                <a:r>
+                  <a:rPr lang="en-US" altLang="ja-JP" sz="2400" b="0" dirty="0"/>
+                  <a:t> </a:t>
+                </a:r>
+              </a:p>
+            </p:txBody>
+          </p:sp>
+        </mc:Choice>
+        <mc:Fallback>
+          <p:sp>
+            <p:nvSpPr>
+              <p:cNvPr id="6" name="テキスト ボックス 5">
+                <a:extLst>
+                  <a:ext uri="{FF2B5EF4-FFF2-40B4-BE49-F238E27FC236}">
+                    <a16:creationId xmlns:a16="http://schemas.microsoft.com/office/drawing/2014/main" id="{55830AD6-028B-4C4E-80BF-B70DFC1C3A46}"/>
+                  </a:ext>
+                </a:extLst>
+              </p:cNvPr>
+              <p:cNvSpPr txBox="1">
+                <a:spLocks noRot="1" noChangeAspect="1" noMove="1" noResize="1" noEditPoints="1" noAdjustHandles="1" noChangeArrowheads="1" noChangeShapeType="1" noTextEdit="1"/>
+              </p:cNvSpPr>
+              <p:nvPr/>
+            </p:nvSpPr>
+            <p:spPr>
+              <a:xfrm>
+                <a:off x="567542" y="1216429"/>
+                <a:ext cx="8462573" cy="5040226"/>
+              </a:xfrm>
+              <a:prstGeom prst="rect">
+                <a:avLst/>
+              </a:prstGeom>
+              <a:blipFill>
+                <a:blip r:embed="rId2"/>
+                <a:stretch>
+                  <a:fillRect l="-1081" t="-969" r="-216"/>
+                </a:stretch>
+              </a:blipFill>
+            </p:spPr>
+            <p:txBody>
+              <a:bodyPr/>
+              <a:lstStyle/>
+              <a:p>
+                <a:r>
+                  <a:rPr lang="ja-JP" altLang="en-US">
+                    <a:noFill/>
+                  </a:rPr>
+                  <a:t> </a:t>
+                </a:r>
+              </a:p>
+            </p:txBody>
+          </p:sp>
+        </mc:Fallback>
+      </mc:AlternateContent>
+    </p:spTree>
+    <p:extLst>
+      <p:ext uri="{BB962C8B-B14F-4D97-AF65-F5344CB8AC3E}">
+        <p14:creationId xmlns:p14="http://schemas.microsoft.com/office/powerpoint/2010/main" val="4063714147"/>
+      </p:ext>
+    </p:extLst>
+  </p:cSld>
+  <p:clrMapOvr>
+    <a:masterClrMapping/>
+  </p:clrMapOvr>
+</p:sld>
+</file>
+
+<file path=ppt/slides/slide29.xml><?xml version="1.0" encoding="utf-8"?>
+<p:sld xmlns:a="http://schemas.openxmlformats.org/drawingml/2006/main" xmlns:r="http://schemas.openxmlformats.org/officeDocument/2006/relationships" xmlns:p="http://schemas.openxmlformats.org/presentationml/2006/main">
+  <p:cSld>
+    <p:spTree>
+      <p:nvGrpSpPr>
+        <p:cNvPr id="1" name=""/>
+        <p:cNvGrpSpPr/>
+        <p:nvPr/>
+      </p:nvGrpSpPr>
+      <p:grpSpPr>
+        <a:xfrm>
+          <a:off x="0" y="0"/>
+          <a:ext cx="0" cy="0"/>
+          <a:chOff x="0" y="0"/>
+          <a:chExt cx="0" cy="0"/>
+        </a:xfrm>
+      </p:grpSpPr>
+      <p:sp>
+        <p:nvSpPr>
+          <p:cNvPr id="4" name="テキスト ボックス 3">
+            <a:extLst>
+              <a:ext uri="{FF2B5EF4-FFF2-40B4-BE49-F238E27FC236}">
+                <a16:creationId xmlns:a16="http://schemas.microsoft.com/office/drawing/2014/main" id="{5A13BF46-B8C5-48AA-8308-C9ECFF431A18}"/>
+              </a:ext>
+            </a:extLst>
+          </p:cNvPr>
+          <p:cNvSpPr txBox="1"/>
+          <p:nvPr/>
+        </p:nvSpPr>
+        <p:spPr>
+          <a:xfrm>
+            <a:off x="567542" y="491954"/>
+            <a:ext cx="5461752" cy="584775"/>
+          </a:xfrm>
+          <a:prstGeom prst="rect">
+            <a:avLst/>
+          </a:prstGeom>
+          <a:noFill/>
+        </p:spPr>
+        <p:txBody>
+          <a:bodyPr wrap="none" rtlCol="0">
+            <a:spAutoFit/>
+          </a:bodyPr>
+          <a:lstStyle/>
+          <a:p>
+            <a:r>
+              <a:rPr kumimoji="1" lang="en-US" altLang="ja-JP" sz="3200" b="1" u="sng" dirty="0"/>
+              <a:t>2</a:t>
+            </a:r>
+            <a:r>
+              <a:rPr kumimoji="1" lang="ja-JP" altLang="en-US" sz="3200" b="1" u="sng" dirty="0"/>
+              <a:t>次元、３次元の運動 例題４</a:t>
+            </a:r>
+            <a:endParaRPr kumimoji="1" lang="en-US" altLang="ja-JP" sz="3200" b="1" u="sng" dirty="0"/>
+          </a:p>
+        </p:txBody>
+      </p:sp>
+      <mc:AlternateContent xmlns:mc="http://schemas.openxmlformats.org/markup-compatibility/2006">
+        <mc:Choice xmlns:a14="http://schemas.microsoft.com/office/drawing/2010/main" Requires="a14">
+          <p:sp>
+            <p:nvSpPr>
+              <p:cNvPr id="6" name="テキスト ボックス 5">
+                <a:extLst>
+                  <a:ext uri="{FF2B5EF4-FFF2-40B4-BE49-F238E27FC236}">
+                    <a16:creationId xmlns:a16="http://schemas.microsoft.com/office/drawing/2014/main" id="{55830AD6-028B-4C4E-80BF-B70DFC1C3A46}"/>
+                  </a:ext>
+                </a:extLst>
+              </p:cNvPr>
+              <p:cNvSpPr txBox="1"/>
+              <p:nvPr/>
+            </p:nvSpPr>
+            <p:spPr>
+              <a:xfrm>
+                <a:off x="567542" y="1216429"/>
+                <a:ext cx="8462573" cy="5538632"/>
+              </a:xfrm>
+              <a:prstGeom prst="rect">
+                <a:avLst/>
+              </a:prstGeom>
+              <a:noFill/>
+            </p:spPr>
+            <p:txBody>
+              <a:bodyPr wrap="none" rtlCol="0">
+                <a:spAutoFit/>
+              </a:bodyPr>
+              <a:lstStyle/>
+              <a:p>
+                <a:r>
+                  <a:rPr lang="ja-JP" altLang="en-US" sz="2400" dirty="0"/>
+                  <a:t>ゲーム中のキャラクターが</a:t>
+                </a:r>
+                <a:r>
+                  <a:rPr lang="en-US" altLang="ja-JP" sz="2400" dirty="0"/>
+                  <a:t>10m/</a:t>
+                </a:r>
+                <a:r>
+                  <a:rPr lang="ja-JP" altLang="en-US" sz="2400" dirty="0"/>
+                  <a:t>秒で移動しており、</a:t>
+                </a:r>
+                <a:endParaRPr lang="en-US" altLang="ja-JP" sz="2400" dirty="0"/>
+              </a:p>
+              <a:p>
+                <a:r>
+                  <a:rPr lang="ja-JP" altLang="en-US" sz="2400" dirty="0"/>
+                  <a:t>高さ</a:t>
+                </a:r>
+                <a:r>
+                  <a:rPr lang="en-US" altLang="ja-JP" sz="2400" dirty="0"/>
+                  <a:t>8m</a:t>
+                </a:r>
+                <a:r>
+                  <a:rPr lang="ja-JP" altLang="en-US" sz="2400" dirty="0"/>
+                  <a:t>の崖から</a:t>
+                </a:r>
+                <a14:m>
+                  <m:oMath xmlns:m="http://schemas.openxmlformats.org/officeDocument/2006/math">
+                    <m:r>
+                      <a:rPr lang="en-US" altLang="ja-JP" sz="2400" i="1" dirty="0" smtClean="0">
+                        <a:latin typeface="Cambria Math" panose="02040503050406030204" pitchFamily="18" charset="0"/>
+                      </a:rPr>
+                      <m:t>30°</m:t>
+                    </m:r>
+                  </m:oMath>
+                </a14:m>
+                <a:r>
+                  <a:rPr lang="ja-JP" altLang="en-US" sz="2400" dirty="0"/>
+                  <a:t>の角度でジャンプして飛び降りました。</a:t>
+                </a:r>
+                <a:endParaRPr lang="en-US" altLang="ja-JP" sz="2400" dirty="0"/>
+              </a:p>
+              <a:p>
+                <a:r>
+                  <a:rPr lang="ja-JP" altLang="en-US" sz="2400" dirty="0"/>
+                  <a:t>崖から着地地点までの水平距離は何</a:t>
+                </a:r>
+                <a:r>
+                  <a:rPr lang="en-US" altLang="ja-JP" sz="2400" dirty="0"/>
+                  <a:t>m</a:t>
+                </a:r>
+                <a:r>
+                  <a:rPr lang="ja-JP" altLang="en-US" sz="2400" dirty="0"/>
+                  <a:t>か求めなさい。</a:t>
+                </a:r>
+                <a:endParaRPr lang="en-US" altLang="ja-JP" sz="2400" dirty="0"/>
+              </a:p>
+              <a:p>
+                <a:endParaRPr lang="en-US" altLang="ja-JP" sz="2400" dirty="0"/>
+              </a:p>
+              <a:p>
+                <a:r>
+                  <a:rPr lang="ja-JP" altLang="en-US" sz="2400" b="1" dirty="0">
+                    <a:solidFill>
+                      <a:srgbClr val="FF0000"/>
+                    </a:solidFill>
+                  </a:rPr>
+                  <a:t>■解答</a:t>
+                </a:r>
+                <a:endParaRPr lang="en-US" altLang="ja-JP" sz="2400" b="1" dirty="0">
+                  <a:solidFill>
+                    <a:srgbClr val="FF0000"/>
+                  </a:solidFill>
+                </a:endParaRPr>
+              </a:p>
+              <a:p>
+                <a:r>
+                  <a:rPr lang="ja-JP" altLang="en-US" sz="2400" dirty="0"/>
+                  <a:t>これで式１を使えば時間（</a:t>
+                </a:r>
+                <a14:m>
+                  <m:oMath xmlns:m="http://schemas.openxmlformats.org/officeDocument/2006/math">
+                    <m:r>
+                      <a:rPr lang="en-US" altLang="ja-JP" sz="2400" b="0" i="1" smtClean="0">
+                        <a:latin typeface="Cambria Math" panose="02040503050406030204" pitchFamily="18" charset="0"/>
+                      </a:rPr>
+                      <m:t>𝑡</m:t>
+                    </m:r>
+                  </m:oMath>
+                </a14:m>
+                <a:r>
+                  <a:rPr lang="ja-JP" altLang="en-US" sz="2400" dirty="0"/>
+                  <a:t>）を求められます</a:t>
+                </a:r>
+                <a:endParaRPr lang="en-US" altLang="ja-JP" sz="2400" dirty="0"/>
+              </a:p>
+              <a:p>
+                <a:endParaRPr lang="en-US" altLang="ja-JP" sz="2400" b="0" dirty="0"/>
+              </a:p>
+              <a:p>
+                <a14:m>
+                  <m:oMath xmlns:m="http://schemas.openxmlformats.org/officeDocument/2006/math">
+                    <m:r>
+                      <a:rPr lang="en-US" altLang="ja-JP" sz="2400" b="0" i="1" smtClean="0">
+                        <a:latin typeface="Cambria Math" panose="02040503050406030204" pitchFamily="18" charset="0"/>
+                      </a:rPr>
+                      <m:t>𝑣</m:t>
+                    </m:r>
+                    <m:sSub>
+                      <m:sSubPr>
+                        <m:ctrlPr>
+                          <a:rPr lang="en-US" altLang="ja-JP" sz="2400" b="0" i="1" smtClean="0">
+                            <a:latin typeface="Cambria Math" panose="02040503050406030204" pitchFamily="18" charset="0"/>
+                          </a:rPr>
+                        </m:ctrlPr>
+                      </m:sSubPr>
+                      <m:e>
+                        <m:r>
+                          <a:rPr lang="en-US" altLang="ja-JP" sz="2400" b="0" i="1" smtClean="0">
+                            <a:latin typeface="Cambria Math" panose="02040503050406030204" pitchFamily="18" charset="0"/>
+                          </a:rPr>
+                          <m:t>𝑓</m:t>
+                        </m:r>
+                      </m:e>
+                      <m:sub>
+                        <m:r>
+                          <a:rPr lang="en-US" altLang="ja-JP" sz="2400" b="0" i="1" smtClean="0">
+                            <a:latin typeface="Cambria Math" panose="02040503050406030204" pitchFamily="18" charset="0"/>
+                          </a:rPr>
+                          <m:t>𝑦</m:t>
+                        </m:r>
+                      </m:sub>
+                    </m:sSub>
+                    <m:r>
+                      <a:rPr lang="en-US" altLang="ja-JP" sz="2400" b="0" i="1" smtClean="0">
+                        <a:latin typeface="Cambria Math" panose="02040503050406030204" pitchFamily="18" charset="0"/>
+                      </a:rPr>
+                      <m:t>=</m:t>
+                    </m:r>
+                    <m:r>
+                      <a:rPr lang="en-US" altLang="ja-JP" sz="2400" b="0" i="1" smtClean="0">
+                        <a:latin typeface="Cambria Math" panose="02040503050406030204" pitchFamily="18" charset="0"/>
+                      </a:rPr>
+                      <m:t>𝑣</m:t>
+                    </m:r>
+                    <m:sSub>
+                      <m:sSubPr>
+                        <m:ctrlPr>
+                          <a:rPr lang="en-US" altLang="ja-JP" sz="2400" b="0" i="1" smtClean="0">
+                            <a:latin typeface="Cambria Math" panose="02040503050406030204" pitchFamily="18" charset="0"/>
+                          </a:rPr>
+                        </m:ctrlPr>
+                      </m:sSubPr>
+                      <m:e>
+                        <m:r>
+                          <a:rPr lang="en-US" altLang="ja-JP" sz="2400" b="0" i="1" smtClean="0">
+                            <a:latin typeface="Cambria Math" panose="02040503050406030204" pitchFamily="18" charset="0"/>
+                          </a:rPr>
+                          <m:t>𝑖</m:t>
+                        </m:r>
+                      </m:e>
+                      <m:sub>
+                        <m:r>
+                          <a:rPr lang="en-US" altLang="ja-JP" sz="2400" b="0" i="1" smtClean="0">
+                            <a:latin typeface="Cambria Math" panose="02040503050406030204" pitchFamily="18" charset="0"/>
+                          </a:rPr>
+                          <m:t>𝑦</m:t>
+                        </m:r>
+                      </m:sub>
+                    </m:sSub>
+                    <m:r>
+                      <a:rPr lang="en-US" altLang="ja-JP" sz="2400" b="0" i="1" smtClean="0">
+                        <a:latin typeface="Cambria Math" panose="02040503050406030204" pitchFamily="18" charset="0"/>
+                      </a:rPr>
+                      <m:t>+</m:t>
+                    </m:r>
+                    <m:r>
+                      <a:rPr lang="en-US" altLang="ja-JP" sz="2400" b="0" i="1" smtClean="0">
+                        <a:latin typeface="Cambria Math" panose="02040503050406030204" pitchFamily="18" charset="0"/>
+                      </a:rPr>
+                      <m:t>𝑎𝑡</m:t>
+                    </m:r>
+                  </m:oMath>
+                </a14:m>
+                <a:r>
+                  <a:rPr lang="en-US" altLang="ja-JP" sz="2400" b="0" dirty="0"/>
+                  <a:t> </a:t>
+                </a:r>
+              </a:p>
+              <a:p>
+                <a14:m>
+                  <m:oMath xmlns:m="http://schemas.openxmlformats.org/officeDocument/2006/math">
+                    <m:rad>
+                      <m:radPr>
+                        <m:degHide m:val="on"/>
+                        <m:ctrlPr>
+                          <a:rPr lang="en-US" altLang="ja-JP" sz="2400" i="1">
+                            <a:latin typeface="Cambria Math" panose="02040503050406030204" pitchFamily="18" charset="0"/>
+                          </a:rPr>
+                        </m:ctrlPr>
+                      </m:radPr>
+                      <m:deg/>
+                      <m:e>
+                        <m:r>
+                          <a:rPr lang="en-US" altLang="ja-JP" sz="2400" i="1">
+                            <a:latin typeface="Cambria Math" panose="02040503050406030204" pitchFamily="18" charset="0"/>
+                          </a:rPr>
+                          <m:t>181.8</m:t>
+                        </m:r>
+                      </m:e>
+                    </m:rad>
+                    <m:r>
+                      <a:rPr lang="en-US" altLang="ja-JP" sz="2400" i="1">
+                        <a:latin typeface="Cambria Math" panose="02040503050406030204" pitchFamily="18" charset="0"/>
+                      </a:rPr>
+                      <m:t>𝑚</m:t>
+                    </m:r>
+                    <m:r>
+                      <a:rPr lang="en-US" altLang="ja-JP" sz="2400" b="0" i="1" smtClean="0">
+                        <a:latin typeface="Cambria Math" panose="02040503050406030204" pitchFamily="18" charset="0"/>
+                      </a:rPr>
+                      <m:t>/</m:t>
+                    </m:r>
+                    <m:r>
+                      <a:rPr lang="ja-JP" altLang="en-US" sz="2400" i="1">
+                        <a:latin typeface="Cambria Math" panose="02040503050406030204" pitchFamily="18" charset="0"/>
+                      </a:rPr>
+                      <m:t>秒</m:t>
+                    </m:r>
+                    <m:r>
+                      <a:rPr lang="en-US" altLang="ja-JP" sz="2400" b="0" i="1" smtClean="0">
+                        <a:latin typeface="Cambria Math" panose="02040503050406030204" pitchFamily="18" charset="0"/>
+                      </a:rPr>
+                      <m:t>=</m:t>
+                    </m:r>
+                    <m:r>
+                      <a:rPr lang="en-US" altLang="ja-JP" sz="2400" b="0" i="1" smtClean="0">
+                        <a:latin typeface="Cambria Math" panose="02040503050406030204" pitchFamily="18" charset="0"/>
+                      </a:rPr>
+                      <m:t>5</m:t>
+                    </m:r>
+                    <m:r>
+                      <a:rPr lang="en-US" altLang="ja-JP" sz="2400" b="0" i="1" smtClean="0">
+                        <a:latin typeface="Cambria Math" panose="02040503050406030204" pitchFamily="18" charset="0"/>
+                      </a:rPr>
+                      <m:t>𝑚</m:t>
+                    </m:r>
+                    <m:r>
+                      <a:rPr lang="en-US" altLang="ja-JP" sz="2400" b="0" i="1" smtClean="0">
+                        <a:latin typeface="Cambria Math" panose="02040503050406030204" pitchFamily="18" charset="0"/>
+                      </a:rPr>
+                      <m:t>/</m:t>
+                    </m:r>
+                    <m:r>
+                      <a:rPr lang="ja-JP" altLang="en-US" sz="2400" i="1">
+                        <a:latin typeface="Cambria Math" panose="02040503050406030204" pitchFamily="18" charset="0"/>
+                      </a:rPr>
+                      <m:t>秒</m:t>
+                    </m:r>
+                    <m:r>
+                      <a:rPr lang="en-US" altLang="ja-JP" sz="2400" b="0" i="1" smtClean="0">
+                        <a:latin typeface="Cambria Math" panose="02040503050406030204" pitchFamily="18" charset="0"/>
+                      </a:rPr>
+                      <m:t>+(−9.8</m:t>
+                    </m:r>
+                    <m:r>
+                      <a:rPr lang="en-US" altLang="ja-JP" sz="2400" b="0" i="1" smtClean="0">
+                        <a:latin typeface="Cambria Math" panose="02040503050406030204" pitchFamily="18" charset="0"/>
+                      </a:rPr>
+                      <m:t>𝑚</m:t>
+                    </m:r>
+                    <m:r>
+                      <a:rPr lang="en-US" altLang="ja-JP" sz="2400" b="0" i="1" smtClean="0">
+                        <a:latin typeface="Cambria Math" panose="02040503050406030204" pitchFamily="18" charset="0"/>
+                      </a:rPr>
+                      <m:t>/</m:t>
+                    </m:r>
+                    <m:sSup>
+                      <m:sSupPr>
+                        <m:ctrlPr>
+                          <a:rPr lang="en-US" altLang="ja-JP" sz="2400" b="0" i="1" smtClean="0">
+                            <a:latin typeface="Cambria Math" panose="02040503050406030204" pitchFamily="18" charset="0"/>
+                          </a:rPr>
+                        </m:ctrlPr>
+                      </m:sSupPr>
+                      <m:e>
+                        <m:r>
+                          <a:rPr lang="ja-JP" altLang="en-US" sz="2400" i="1">
+                            <a:latin typeface="Cambria Math" panose="02040503050406030204" pitchFamily="18" charset="0"/>
+                          </a:rPr>
+                          <m:t>秒</m:t>
+                        </m:r>
+                      </m:e>
+                      <m:sup>
+                        <m:r>
+                          <a:rPr lang="en-US" altLang="ja-JP" sz="2400" b="0" i="1" smtClean="0">
+                            <a:latin typeface="Cambria Math" panose="02040503050406030204" pitchFamily="18" charset="0"/>
+                          </a:rPr>
+                          <m:t>2</m:t>
+                        </m:r>
+                      </m:sup>
+                    </m:sSup>
+                    <m:r>
+                      <a:rPr lang="en-US" altLang="ja-JP" sz="2400" b="0" i="1" smtClean="0">
+                        <a:latin typeface="Cambria Math" panose="02040503050406030204" pitchFamily="18" charset="0"/>
+                      </a:rPr>
+                      <m:t>)</m:t>
+                    </m:r>
+                    <m:r>
+                      <a:rPr lang="en-US" altLang="ja-JP" sz="2400" b="0" i="1" smtClean="0">
+                        <a:latin typeface="Cambria Math" panose="02040503050406030204" pitchFamily="18" charset="0"/>
+                      </a:rPr>
+                      <m:t>𝑡</m:t>
+                    </m:r>
+                  </m:oMath>
+                </a14:m>
+                <a:r>
+                  <a:rPr lang="en-US" altLang="ja-JP" sz="2400" b="0" dirty="0"/>
+                  <a:t> </a:t>
+                </a:r>
+              </a:p>
+              <a:p>
+                <a14:m>
+                  <m:oMath xmlns:m="http://schemas.openxmlformats.org/officeDocument/2006/math">
+                    <m:rad>
+                      <m:radPr>
+                        <m:degHide m:val="on"/>
+                        <m:ctrlPr>
+                          <a:rPr lang="en-US" altLang="ja-JP" sz="2400" i="1" smtClean="0">
+                            <a:latin typeface="Cambria Math" panose="02040503050406030204" pitchFamily="18" charset="0"/>
+                          </a:rPr>
+                        </m:ctrlPr>
+                      </m:radPr>
+                      <m:deg/>
+                      <m:e>
+                        <m:r>
+                          <a:rPr lang="en-US" altLang="ja-JP" sz="2400" i="1">
+                            <a:latin typeface="Cambria Math" panose="02040503050406030204" pitchFamily="18" charset="0"/>
+                          </a:rPr>
+                          <m:t>181.8</m:t>
+                        </m:r>
+                      </m:e>
+                    </m:rad>
+                    <m:r>
+                      <a:rPr lang="en-US" altLang="ja-JP" sz="2400" i="1">
+                        <a:latin typeface="Cambria Math" panose="02040503050406030204" pitchFamily="18" charset="0"/>
+                      </a:rPr>
+                      <m:t>𝑚</m:t>
+                    </m:r>
+                    <m:r>
+                      <a:rPr lang="en-US" altLang="ja-JP" sz="2400" b="0" i="1" smtClean="0">
+                        <a:latin typeface="Cambria Math" panose="02040503050406030204" pitchFamily="18" charset="0"/>
+                      </a:rPr>
+                      <m:t>/</m:t>
+                    </m:r>
+                    <m:r>
+                      <a:rPr lang="ja-JP" altLang="en-US" sz="2400" i="1">
+                        <a:latin typeface="Cambria Math" panose="02040503050406030204" pitchFamily="18" charset="0"/>
+                      </a:rPr>
+                      <m:t>秒</m:t>
+                    </m:r>
+                    <m:r>
+                      <a:rPr lang="en-US" altLang="ja-JP" sz="2400" b="0" i="1" smtClean="0">
+                        <a:latin typeface="Cambria Math" panose="02040503050406030204" pitchFamily="18" charset="0"/>
+                      </a:rPr>
+                      <m:t>=5</m:t>
+                    </m:r>
+                    <m:r>
+                      <a:rPr lang="en-US" altLang="ja-JP" sz="2400" b="0" i="1" smtClean="0">
+                        <a:latin typeface="Cambria Math" panose="02040503050406030204" pitchFamily="18" charset="0"/>
+                      </a:rPr>
+                      <m:t>𝑚</m:t>
+                    </m:r>
+                    <m:r>
+                      <a:rPr lang="en-US" altLang="ja-JP" sz="2400" b="0" i="1" smtClean="0">
+                        <a:latin typeface="Cambria Math" panose="02040503050406030204" pitchFamily="18" charset="0"/>
+                      </a:rPr>
+                      <m:t>/</m:t>
+                    </m:r>
+                    <m:r>
+                      <a:rPr lang="ja-JP" altLang="en-US" sz="2400" i="1">
+                        <a:latin typeface="Cambria Math" panose="02040503050406030204" pitchFamily="18" charset="0"/>
+                      </a:rPr>
+                      <m:t>秒</m:t>
+                    </m:r>
+                    <m:r>
+                      <a:rPr lang="en-US" altLang="ja-JP" sz="2400" b="0" i="1" smtClean="0">
+                        <a:latin typeface="Cambria Math" panose="02040503050406030204" pitchFamily="18" charset="0"/>
+                      </a:rPr>
+                      <m:t>+(−9.8</m:t>
+                    </m:r>
+                    <m:r>
+                      <a:rPr lang="en-US" altLang="ja-JP" sz="2400" b="0" i="1" smtClean="0">
+                        <a:latin typeface="Cambria Math" panose="02040503050406030204" pitchFamily="18" charset="0"/>
+                      </a:rPr>
+                      <m:t>𝑚</m:t>
+                    </m:r>
+                    <m:r>
+                      <a:rPr lang="en-US" altLang="ja-JP" sz="2400" b="0" i="1" smtClean="0">
+                        <a:latin typeface="Cambria Math" panose="02040503050406030204" pitchFamily="18" charset="0"/>
+                      </a:rPr>
+                      <m:t>/</m:t>
+                    </m:r>
+                    <m:sSup>
+                      <m:sSupPr>
+                        <m:ctrlPr>
+                          <a:rPr lang="en-US" altLang="ja-JP" sz="2400" b="0" i="1" smtClean="0">
+                            <a:latin typeface="Cambria Math" panose="02040503050406030204" pitchFamily="18" charset="0"/>
+                          </a:rPr>
+                        </m:ctrlPr>
+                      </m:sSupPr>
+                      <m:e>
+                        <m:r>
+                          <a:rPr lang="ja-JP" altLang="en-US" sz="2400" i="1">
+                            <a:latin typeface="Cambria Math" panose="02040503050406030204" pitchFamily="18" charset="0"/>
+                          </a:rPr>
+                          <m:t>秒</m:t>
+                        </m:r>
+                      </m:e>
+                      <m:sup>
+                        <m:r>
+                          <a:rPr lang="en-US" altLang="ja-JP" sz="2400" b="0" i="1" smtClean="0">
+                            <a:latin typeface="Cambria Math" panose="02040503050406030204" pitchFamily="18" charset="0"/>
+                          </a:rPr>
+                          <m:t>2</m:t>
+                        </m:r>
+                      </m:sup>
+                    </m:sSup>
+                    <m:r>
+                      <a:rPr lang="en-US" altLang="ja-JP" sz="2400" b="0" i="1" smtClean="0">
+                        <a:latin typeface="Cambria Math" panose="02040503050406030204" pitchFamily="18" charset="0"/>
+                      </a:rPr>
+                      <m:t>)</m:t>
+                    </m:r>
+                    <m:r>
+                      <a:rPr lang="en-US" altLang="ja-JP" sz="2400" b="0" i="1" smtClean="0">
+                        <a:latin typeface="Cambria Math" panose="02040503050406030204" pitchFamily="18" charset="0"/>
+                      </a:rPr>
+                      <m:t>𝑡</m:t>
+                    </m:r>
+                  </m:oMath>
+                </a14:m>
+                <a:r>
+                  <a:rPr lang="en-US" altLang="ja-JP" sz="2400" b="0" dirty="0"/>
+                  <a:t> </a:t>
+                </a:r>
+              </a:p>
+              <a:p>
+                <a14:m>
+                  <m:oMath xmlns:m="http://schemas.openxmlformats.org/officeDocument/2006/math">
+                    <m:rad>
+                      <m:radPr>
+                        <m:degHide m:val="on"/>
+                        <m:ctrlPr>
+                          <a:rPr lang="en-US" altLang="ja-JP" sz="2400" i="1" smtClean="0">
+                            <a:latin typeface="Cambria Math" panose="02040503050406030204" pitchFamily="18" charset="0"/>
+                          </a:rPr>
+                        </m:ctrlPr>
+                      </m:radPr>
+                      <m:deg/>
+                      <m:e>
+                        <m:r>
+                          <a:rPr lang="en-US" altLang="ja-JP" sz="2400" i="1">
+                            <a:latin typeface="Cambria Math" panose="02040503050406030204" pitchFamily="18" charset="0"/>
+                          </a:rPr>
+                          <m:t>181.8</m:t>
+                        </m:r>
+                      </m:e>
+                    </m:rad>
+                    <m:r>
+                      <a:rPr lang="en-US" altLang="ja-JP" sz="2400" i="1">
+                        <a:latin typeface="Cambria Math" panose="02040503050406030204" pitchFamily="18" charset="0"/>
+                      </a:rPr>
+                      <m:t>𝑚</m:t>
+                    </m:r>
+                    <m:r>
+                      <a:rPr lang="en-US" altLang="ja-JP" sz="2400" i="1">
+                        <a:latin typeface="Cambria Math" panose="02040503050406030204" pitchFamily="18" charset="0"/>
+                      </a:rPr>
+                      <m:t>/</m:t>
+                    </m:r>
+                    <m:r>
+                      <a:rPr lang="ja-JP" altLang="en-US" sz="2400" i="1">
+                        <a:latin typeface="Cambria Math" panose="02040503050406030204" pitchFamily="18" charset="0"/>
+                      </a:rPr>
+                      <m:t>秒</m:t>
+                    </m:r>
+                    <m:r>
+                      <a:rPr lang="en-US" altLang="ja-JP" sz="2400" b="0" i="1" smtClean="0">
+                        <a:latin typeface="Cambria Math" panose="02040503050406030204" pitchFamily="18" charset="0"/>
+                      </a:rPr>
+                      <m:t>−5</m:t>
+                    </m:r>
+                    <m:r>
+                      <a:rPr lang="en-US" altLang="ja-JP" sz="2400" b="0" i="1" smtClean="0">
+                        <a:latin typeface="Cambria Math" panose="02040503050406030204" pitchFamily="18" charset="0"/>
+                      </a:rPr>
+                      <m:t>𝑚</m:t>
+                    </m:r>
+                    <m:r>
+                      <a:rPr lang="en-US" altLang="ja-JP" sz="2400" i="1">
+                        <a:latin typeface="Cambria Math" panose="02040503050406030204" pitchFamily="18" charset="0"/>
+                      </a:rPr>
+                      <m:t>/</m:t>
+                    </m:r>
+                    <m:r>
+                      <a:rPr lang="ja-JP" altLang="en-US" sz="2400" i="1">
+                        <a:latin typeface="Cambria Math" panose="02040503050406030204" pitchFamily="18" charset="0"/>
+                      </a:rPr>
+                      <m:t>秒</m:t>
+                    </m:r>
+                    <m:r>
+                      <a:rPr lang="en-US" altLang="ja-JP" sz="2400" b="0" i="1" smtClean="0">
+                        <a:latin typeface="Cambria Math" panose="02040503050406030204" pitchFamily="18" charset="0"/>
+                      </a:rPr>
+                      <m:t>=</m:t>
+                    </m:r>
+                    <m:r>
+                      <a:rPr lang="en-US" altLang="ja-JP" sz="2400" i="1">
+                        <a:latin typeface="Cambria Math" panose="02040503050406030204" pitchFamily="18" charset="0"/>
+                      </a:rPr>
+                      <m:t>(−9.8</m:t>
+                    </m:r>
+                    <m:r>
+                      <a:rPr lang="en-US" altLang="ja-JP" sz="2400" i="1">
+                        <a:latin typeface="Cambria Math" panose="02040503050406030204" pitchFamily="18" charset="0"/>
+                      </a:rPr>
+                      <m:t>𝑚</m:t>
+                    </m:r>
+                    <m:r>
+                      <a:rPr lang="en-US" altLang="ja-JP" sz="2400" i="1">
+                        <a:latin typeface="Cambria Math" panose="02040503050406030204" pitchFamily="18" charset="0"/>
+                      </a:rPr>
+                      <m:t>/</m:t>
+                    </m:r>
+                    <m:sSup>
+                      <m:sSupPr>
+                        <m:ctrlPr>
+                          <a:rPr lang="en-US" altLang="ja-JP" sz="2400" i="1">
+                            <a:latin typeface="Cambria Math" panose="02040503050406030204" pitchFamily="18" charset="0"/>
+                          </a:rPr>
+                        </m:ctrlPr>
+                      </m:sSupPr>
+                      <m:e>
+                        <m:r>
+                          <a:rPr lang="ja-JP" altLang="en-US" sz="2400" i="1">
+                            <a:latin typeface="Cambria Math" panose="02040503050406030204" pitchFamily="18" charset="0"/>
+                          </a:rPr>
+                          <m:t>秒</m:t>
+                        </m:r>
+                      </m:e>
+                      <m:sup>
+                        <m:r>
+                          <a:rPr lang="en-US" altLang="ja-JP" sz="2400" i="1">
+                            <a:latin typeface="Cambria Math" panose="02040503050406030204" pitchFamily="18" charset="0"/>
+                          </a:rPr>
+                          <m:t>2</m:t>
+                        </m:r>
+                      </m:sup>
+                    </m:sSup>
+                    <m:r>
+                      <a:rPr lang="en-US" altLang="ja-JP" sz="2400" i="1">
+                        <a:latin typeface="Cambria Math" panose="02040503050406030204" pitchFamily="18" charset="0"/>
+                      </a:rPr>
+                      <m:t>)</m:t>
+                    </m:r>
+                    <m:r>
+                      <a:rPr lang="en-US" altLang="ja-JP" sz="2400" i="1">
+                        <a:latin typeface="Cambria Math" panose="02040503050406030204" pitchFamily="18" charset="0"/>
+                      </a:rPr>
+                      <m:t>𝑡</m:t>
+                    </m:r>
+                  </m:oMath>
+                </a14:m>
+                <a:r>
+                  <a:rPr lang="en-US" altLang="ja-JP" sz="2400" b="0" dirty="0"/>
+                  <a:t> </a:t>
+                </a:r>
+              </a:p>
+              <a:p>
+                <a14:m>
+                  <m:oMath xmlns:m="http://schemas.openxmlformats.org/officeDocument/2006/math">
+                    <m:r>
+                      <a:rPr lang="en-US" altLang="ja-JP" sz="2400" i="1" smtClean="0">
+                        <a:latin typeface="Cambria Math" panose="02040503050406030204" pitchFamily="18" charset="0"/>
+                      </a:rPr>
+                      <m:t>𝑡</m:t>
+                    </m:r>
+                    <m:r>
+                      <a:rPr lang="en-US" altLang="ja-JP" sz="2400" b="0" i="1" smtClean="0">
+                        <a:latin typeface="Cambria Math" panose="02040503050406030204" pitchFamily="18" charset="0"/>
+                      </a:rPr>
+                      <m:t>=</m:t>
+                    </m:r>
+                    <m:f>
+                      <m:fPr>
+                        <m:ctrlPr>
+                          <a:rPr lang="en-US" altLang="ja-JP" sz="2400" b="0" i="1" smtClean="0">
+                            <a:latin typeface="Cambria Math" panose="02040503050406030204" pitchFamily="18" charset="0"/>
+                          </a:rPr>
+                        </m:ctrlPr>
+                      </m:fPr>
+                      <m:num>
+                        <m:rad>
+                          <m:radPr>
+                            <m:degHide m:val="on"/>
+                            <m:ctrlPr>
+                              <a:rPr lang="en-US" altLang="ja-JP" sz="2400" i="1">
+                                <a:latin typeface="Cambria Math" panose="02040503050406030204" pitchFamily="18" charset="0"/>
+                              </a:rPr>
+                            </m:ctrlPr>
+                          </m:radPr>
+                          <m:deg/>
+                          <m:e>
+                            <m:r>
+                              <a:rPr lang="en-US" altLang="ja-JP" sz="2400" i="1">
+                                <a:latin typeface="Cambria Math" panose="02040503050406030204" pitchFamily="18" charset="0"/>
+                              </a:rPr>
+                              <m:t>181.8</m:t>
+                            </m:r>
+                          </m:e>
+                        </m:rad>
+                        <m:r>
+                          <a:rPr lang="en-US" altLang="ja-JP" sz="2400" i="1">
+                            <a:latin typeface="Cambria Math" panose="02040503050406030204" pitchFamily="18" charset="0"/>
+                          </a:rPr>
+                          <m:t>−5</m:t>
+                        </m:r>
+                      </m:num>
+                      <m:den>
+                        <m:r>
+                          <a:rPr lang="en-US" altLang="ja-JP" sz="2400" b="0" i="1" smtClean="0">
+                            <a:latin typeface="Cambria Math" panose="02040503050406030204" pitchFamily="18" charset="0"/>
+                          </a:rPr>
+                          <m:t>−9.8</m:t>
+                        </m:r>
+                      </m:den>
+                    </m:f>
+                    <m:r>
+                      <a:rPr lang="ja-JP" altLang="en-US" sz="2400" i="1">
+                        <a:latin typeface="Cambria Math" panose="02040503050406030204" pitchFamily="18" charset="0"/>
+                      </a:rPr>
+                      <m:t>秒</m:t>
+                    </m:r>
+                  </m:oMath>
+                </a14:m>
+                <a:r>
+                  <a:rPr lang="en-US" altLang="ja-JP" sz="2400" b="0" dirty="0"/>
+                  <a:t> </a:t>
+                </a:r>
+              </a:p>
+              <a:p>
+                <a:endParaRPr lang="en-US" altLang="ja-JP" sz="2400" b="0" dirty="0"/>
+              </a:p>
+            </p:txBody>
+          </p:sp>
+        </mc:Choice>
+        <mc:Fallback>
+          <p:sp>
+            <p:nvSpPr>
+              <p:cNvPr id="6" name="テキスト ボックス 5">
+                <a:extLst>
+                  <a:ext uri="{FF2B5EF4-FFF2-40B4-BE49-F238E27FC236}">
+                    <a16:creationId xmlns:a16="http://schemas.microsoft.com/office/drawing/2014/main" id="{55830AD6-028B-4C4E-80BF-B70DFC1C3A46}"/>
+                  </a:ext>
+                </a:extLst>
+              </p:cNvPr>
+              <p:cNvSpPr txBox="1">
+                <a:spLocks noRot="1" noChangeAspect="1" noMove="1" noResize="1" noEditPoints="1" noAdjustHandles="1" noChangeArrowheads="1" noChangeShapeType="1" noTextEdit="1"/>
+              </p:cNvSpPr>
+              <p:nvPr/>
+            </p:nvSpPr>
+            <p:spPr>
+              <a:xfrm>
+                <a:off x="567542" y="1216429"/>
+                <a:ext cx="8462573" cy="5538632"/>
+              </a:xfrm>
+              <a:prstGeom prst="rect">
+                <a:avLst/>
+              </a:prstGeom>
+              <a:blipFill>
+                <a:blip r:embed="rId2"/>
+                <a:stretch>
+                  <a:fillRect l="-1081" t="-881" r="-216"/>
+                </a:stretch>
+              </a:blipFill>
+            </p:spPr>
+            <p:txBody>
+              <a:bodyPr/>
+              <a:lstStyle/>
+              <a:p>
+                <a:r>
+                  <a:rPr lang="ja-JP" altLang="en-US">
+                    <a:noFill/>
+                  </a:rPr>
+                  <a:t> </a:t>
+                </a:r>
+              </a:p>
+            </p:txBody>
+          </p:sp>
+        </mc:Fallback>
+      </mc:AlternateContent>
+    </p:spTree>
+    <p:extLst>
+      <p:ext uri="{BB962C8B-B14F-4D97-AF65-F5344CB8AC3E}">
+        <p14:creationId xmlns:p14="http://schemas.microsoft.com/office/powerpoint/2010/main" val="1117055215"/>
+      </p:ext>
+    </p:extLst>
+  </p:cSld>
+  <p:clrMapOvr>
+    <a:masterClrMapping/>
+  </p:clrMapOvr>
+</p:sld>
+</file>
+
 <file path=ppt/slides/slide3.xml><?xml version="1.0" encoding="utf-8"?>
 <p:sld xmlns:a="http://schemas.openxmlformats.org/drawingml/2006/main" xmlns:r="http://schemas.openxmlformats.org/officeDocument/2006/relationships" xmlns:p="http://schemas.openxmlformats.org/presentationml/2006/main">
   <p:cSld>
@@ -12727,6 +20131,753 @@
     <p:extLst>
       <p:ext uri="{BB962C8B-B14F-4D97-AF65-F5344CB8AC3E}">
         <p14:creationId xmlns:p14="http://schemas.microsoft.com/office/powerpoint/2010/main" val="4056493413"/>
+      </p:ext>
+    </p:extLst>
+  </p:cSld>
+  <p:clrMapOvr>
+    <a:masterClrMapping/>
+  </p:clrMapOvr>
+</p:sld>
+</file>
+
+<file path=ppt/slides/slide30.xml><?xml version="1.0" encoding="utf-8"?>
+<p:sld xmlns:a="http://schemas.openxmlformats.org/drawingml/2006/main" xmlns:r="http://schemas.openxmlformats.org/officeDocument/2006/relationships" xmlns:p="http://schemas.openxmlformats.org/presentationml/2006/main">
+  <p:cSld>
+    <p:spTree>
+      <p:nvGrpSpPr>
+        <p:cNvPr id="1" name=""/>
+        <p:cNvGrpSpPr/>
+        <p:nvPr/>
+      </p:nvGrpSpPr>
+      <p:grpSpPr>
+        <a:xfrm>
+          <a:off x="0" y="0"/>
+          <a:ext cx="0" cy="0"/>
+          <a:chOff x="0" y="0"/>
+          <a:chExt cx="0" cy="0"/>
+        </a:xfrm>
+      </p:grpSpPr>
+      <p:sp>
+        <p:nvSpPr>
+          <p:cNvPr id="4" name="テキスト ボックス 3">
+            <a:extLst>
+              <a:ext uri="{FF2B5EF4-FFF2-40B4-BE49-F238E27FC236}">
+                <a16:creationId xmlns:a16="http://schemas.microsoft.com/office/drawing/2014/main" id="{5A13BF46-B8C5-48AA-8308-C9ECFF431A18}"/>
+              </a:ext>
+            </a:extLst>
+          </p:cNvPr>
+          <p:cNvSpPr txBox="1"/>
+          <p:nvPr/>
+        </p:nvSpPr>
+        <p:spPr>
+          <a:xfrm>
+            <a:off x="567542" y="491954"/>
+            <a:ext cx="5461752" cy="584775"/>
+          </a:xfrm>
+          <a:prstGeom prst="rect">
+            <a:avLst/>
+          </a:prstGeom>
+          <a:noFill/>
+        </p:spPr>
+        <p:txBody>
+          <a:bodyPr wrap="none" rtlCol="0">
+            <a:spAutoFit/>
+          </a:bodyPr>
+          <a:lstStyle/>
+          <a:p>
+            <a:r>
+              <a:rPr kumimoji="1" lang="en-US" altLang="ja-JP" sz="3200" b="1" u="sng" dirty="0"/>
+              <a:t>2</a:t>
+            </a:r>
+            <a:r>
+              <a:rPr kumimoji="1" lang="ja-JP" altLang="en-US" sz="3200" b="1" u="sng" dirty="0"/>
+              <a:t>次元、３次元の運動 例題４</a:t>
+            </a:r>
+            <a:endParaRPr kumimoji="1" lang="en-US" altLang="ja-JP" sz="3200" b="1" u="sng" dirty="0"/>
+          </a:p>
+        </p:txBody>
+      </p:sp>
+      <mc:AlternateContent xmlns:mc="http://schemas.openxmlformats.org/markup-compatibility/2006">
+        <mc:Choice xmlns:a14="http://schemas.microsoft.com/office/drawing/2010/main" Requires="a14">
+          <p:sp>
+            <p:nvSpPr>
+              <p:cNvPr id="6" name="テキスト ボックス 5">
+                <a:extLst>
+                  <a:ext uri="{FF2B5EF4-FFF2-40B4-BE49-F238E27FC236}">
+                    <a16:creationId xmlns:a16="http://schemas.microsoft.com/office/drawing/2014/main" id="{55830AD6-028B-4C4E-80BF-B70DFC1C3A46}"/>
+                  </a:ext>
+                </a:extLst>
+              </p:cNvPr>
+              <p:cNvSpPr txBox="1"/>
+              <p:nvPr/>
+            </p:nvSpPr>
+            <p:spPr>
+              <a:xfrm>
+                <a:off x="567542" y="1216429"/>
+                <a:ext cx="8462573" cy="4375365"/>
+              </a:xfrm>
+              <a:prstGeom prst="rect">
+                <a:avLst/>
+              </a:prstGeom>
+              <a:noFill/>
+            </p:spPr>
+            <p:txBody>
+              <a:bodyPr wrap="none" rtlCol="0">
+                <a:spAutoFit/>
+              </a:bodyPr>
+              <a:lstStyle/>
+              <a:p>
+                <a:r>
+                  <a:rPr lang="ja-JP" altLang="en-US" sz="2400" dirty="0"/>
+                  <a:t>ゲーム中のキャラクターが</a:t>
+                </a:r>
+                <a:r>
+                  <a:rPr lang="en-US" altLang="ja-JP" sz="2400" dirty="0"/>
+                  <a:t>10m/</a:t>
+                </a:r>
+                <a:r>
+                  <a:rPr lang="ja-JP" altLang="en-US" sz="2400" dirty="0"/>
+                  <a:t>秒で移動しており、</a:t>
+                </a:r>
+                <a:endParaRPr lang="en-US" altLang="ja-JP" sz="2400" dirty="0"/>
+              </a:p>
+              <a:p>
+                <a:r>
+                  <a:rPr lang="ja-JP" altLang="en-US" sz="2400" dirty="0"/>
+                  <a:t>高さ</a:t>
+                </a:r>
+                <a:r>
+                  <a:rPr lang="en-US" altLang="ja-JP" sz="2400" dirty="0"/>
+                  <a:t>8m</a:t>
+                </a:r>
+                <a:r>
+                  <a:rPr lang="ja-JP" altLang="en-US" sz="2400" dirty="0"/>
+                  <a:t>の崖から</a:t>
+                </a:r>
+                <a14:m>
+                  <m:oMath xmlns:m="http://schemas.openxmlformats.org/officeDocument/2006/math">
+                    <m:r>
+                      <a:rPr lang="en-US" altLang="ja-JP" sz="2400" i="1" dirty="0" smtClean="0">
+                        <a:latin typeface="Cambria Math" panose="02040503050406030204" pitchFamily="18" charset="0"/>
+                      </a:rPr>
+                      <m:t>30°</m:t>
+                    </m:r>
+                  </m:oMath>
+                </a14:m>
+                <a:r>
+                  <a:rPr lang="ja-JP" altLang="en-US" sz="2400" dirty="0"/>
+                  <a:t>の角度でジャンプして飛び降りました。</a:t>
+                </a:r>
+                <a:endParaRPr lang="en-US" altLang="ja-JP" sz="2400" dirty="0"/>
+              </a:p>
+              <a:p>
+                <a:r>
+                  <a:rPr lang="ja-JP" altLang="en-US" sz="2400" dirty="0"/>
+                  <a:t>崖から着地地点までの水平距離は何</a:t>
+                </a:r>
+                <a:r>
+                  <a:rPr lang="en-US" altLang="ja-JP" sz="2400" dirty="0"/>
+                  <a:t>m</a:t>
+                </a:r>
+                <a:r>
+                  <a:rPr lang="ja-JP" altLang="en-US" sz="2400" dirty="0"/>
+                  <a:t>か求めなさい。</a:t>
+                </a:r>
+                <a:endParaRPr lang="en-US" altLang="ja-JP" sz="2400" dirty="0"/>
+              </a:p>
+              <a:p>
+                <a:endParaRPr lang="en-US" altLang="ja-JP" sz="2400" dirty="0"/>
+              </a:p>
+              <a:p>
+                <a:r>
+                  <a:rPr lang="ja-JP" altLang="en-US" sz="2400" b="1" dirty="0">
+                    <a:solidFill>
+                      <a:srgbClr val="FF0000"/>
+                    </a:solidFill>
+                  </a:rPr>
+                  <a:t>■解答</a:t>
+                </a:r>
+                <a:endParaRPr lang="en-US" altLang="ja-JP" sz="2400" b="1" dirty="0">
+                  <a:solidFill>
+                    <a:srgbClr val="FF0000"/>
+                  </a:solidFill>
+                </a:endParaRPr>
+              </a:p>
+              <a:p>
+                <a:r>
+                  <a:rPr lang="ja-JP" altLang="en-US" sz="2400" dirty="0"/>
+                  <a:t>最後に水平距離を求めます。</a:t>
+                </a:r>
+                <a:endParaRPr lang="en-US" altLang="ja-JP" sz="2400" dirty="0"/>
+              </a:p>
+              <a:p>
+                <a:endParaRPr lang="en-US" altLang="ja-JP" sz="2400" b="0" dirty="0"/>
+              </a:p>
+              <a:p>
+                <a14:m>
+                  <m:oMath xmlns:m="http://schemas.openxmlformats.org/officeDocument/2006/math">
+                    <m:r>
+                      <a:rPr lang="ja-JP" altLang="en-US" sz="2400" i="1" dirty="0" smtClean="0">
+                        <a:latin typeface="Cambria Math" panose="02040503050406030204" pitchFamily="18" charset="0"/>
+                      </a:rPr>
+                      <m:t>⊿</m:t>
+                    </m:r>
+                    <m:r>
+                      <a:rPr lang="en-US" altLang="ja-JP" sz="2400" b="0" i="1" dirty="0" smtClean="0">
+                        <a:latin typeface="Cambria Math" panose="02040503050406030204" pitchFamily="18" charset="0"/>
+                      </a:rPr>
+                      <m:t>𝑥</m:t>
+                    </m:r>
+                    <m:r>
+                      <a:rPr lang="en-US" altLang="ja-JP" sz="2400" b="0" i="1" smtClean="0">
+                        <a:latin typeface="Cambria Math" panose="02040503050406030204" pitchFamily="18" charset="0"/>
+                      </a:rPr>
+                      <m:t>=</m:t>
+                    </m:r>
+                    <m:sSub>
+                      <m:sSubPr>
+                        <m:ctrlPr>
+                          <a:rPr lang="en-US" altLang="ja-JP" sz="2400" b="0" i="1" smtClean="0">
+                            <a:latin typeface="Cambria Math" panose="02040503050406030204" pitchFamily="18" charset="0"/>
+                          </a:rPr>
+                        </m:ctrlPr>
+                      </m:sSubPr>
+                      <m:e>
+                        <m:r>
+                          <a:rPr lang="en-US" altLang="ja-JP" sz="2400" b="0" i="1" smtClean="0">
+                            <a:latin typeface="Cambria Math" panose="02040503050406030204" pitchFamily="18" charset="0"/>
+                          </a:rPr>
+                          <m:t>𝑣</m:t>
+                        </m:r>
+                      </m:e>
+                      <m:sub>
+                        <m:r>
+                          <a:rPr lang="en-US" altLang="ja-JP" sz="2400" b="0" i="1" smtClean="0">
+                            <a:latin typeface="Cambria Math" panose="02040503050406030204" pitchFamily="18" charset="0"/>
+                          </a:rPr>
+                          <m:t>𝑥</m:t>
+                        </m:r>
+                      </m:sub>
+                    </m:sSub>
+                    <m:r>
+                      <a:rPr lang="en-US" altLang="ja-JP" sz="2400" b="0" i="1" smtClean="0">
+                        <a:latin typeface="Cambria Math" panose="02040503050406030204" pitchFamily="18" charset="0"/>
+                      </a:rPr>
+                      <m:t>𝑡</m:t>
+                    </m:r>
+                  </m:oMath>
+                </a14:m>
+                <a:r>
+                  <a:rPr lang="en-US" altLang="ja-JP" sz="2400" b="0" dirty="0"/>
+                  <a:t> </a:t>
+                </a:r>
+              </a:p>
+              <a:p>
+                <a14:m>
+                  <m:oMath xmlns:m="http://schemas.openxmlformats.org/officeDocument/2006/math">
+                    <m:r>
+                      <a:rPr lang="ja-JP" altLang="en-US" sz="2400" i="1" dirty="0" smtClean="0">
+                        <a:latin typeface="Cambria Math" panose="02040503050406030204" pitchFamily="18" charset="0"/>
+                      </a:rPr>
+                      <m:t>⊿</m:t>
+                    </m:r>
+                    <m:r>
+                      <a:rPr lang="en-US" altLang="ja-JP" sz="2400" b="0" i="1" dirty="0" smtClean="0">
+                        <a:latin typeface="Cambria Math" panose="02040503050406030204" pitchFamily="18" charset="0"/>
+                      </a:rPr>
+                      <m:t>𝑥</m:t>
+                    </m:r>
+                    <m:r>
+                      <a:rPr lang="en-US" altLang="ja-JP" sz="2400" b="0" i="1" smtClean="0">
+                        <a:latin typeface="Cambria Math" panose="02040503050406030204" pitchFamily="18" charset="0"/>
+                      </a:rPr>
+                      <m:t>=</m:t>
+                    </m:r>
+                    <m:r>
+                      <a:rPr lang="en-US" altLang="ja-JP" sz="2400" b="0" i="1" smtClean="0">
+                        <a:latin typeface="Cambria Math" panose="02040503050406030204" pitchFamily="18" charset="0"/>
+                      </a:rPr>
+                      <m:t>8.6</m:t>
+                    </m:r>
+                    <m:r>
+                      <a:rPr lang="en-US" altLang="ja-JP" sz="2400" b="0" i="1" smtClean="0">
+                        <a:latin typeface="Cambria Math" panose="02040503050406030204" pitchFamily="18" charset="0"/>
+                      </a:rPr>
+                      <m:t>𝑚</m:t>
+                    </m:r>
+                    <m:r>
+                      <a:rPr lang="en-US" altLang="ja-JP" sz="2400" b="0" i="1" smtClean="0">
+                        <a:latin typeface="Cambria Math" panose="02040503050406030204" pitchFamily="18" charset="0"/>
+                      </a:rPr>
+                      <m:t>/</m:t>
+                    </m:r>
+                    <m:r>
+                      <a:rPr lang="ja-JP" altLang="en-US" sz="2400" i="1">
+                        <a:latin typeface="Cambria Math" panose="02040503050406030204" pitchFamily="18" charset="0"/>
+                      </a:rPr>
+                      <m:t>秒</m:t>
+                    </m:r>
+                    <m:r>
+                      <a:rPr lang="en-US" altLang="ja-JP" sz="2400" i="1" smtClean="0">
+                        <a:latin typeface="Cambria Math" panose="02040503050406030204" pitchFamily="18" charset="0"/>
+                      </a:rPr>
+                      <m:t>×</m:t>
+                    </m:r>
+                    <m:f>
+                      <m:fPr>
+                        <m:ctrlPr>
+                          <a:rPr lang="en-US" altLang="ja-JP" sz="2400" i="1">
+                            <a:latin typeface="Cambria Math" panose="02040503050406030204" pitchFamily="18" charset="0"/>
+                          </a:rPr>
+                        </m:ctrlPr>
+                      </m:fPr>
+                      <m:num>
+                        <m:rad>
+                          <m:radPr>
+                            <m:degHide m:val="on"/>
+                            <m:ctrlPr>
+                              <a:rPr lang="en-US" altLang="ja-JP" sz="2400" i="1">
+                                <a:latin typeface="Cambria Math" panose="02040503050406030204" pitchFamily="18" charset="0"/>
+                              </a:rPr>
+                            </m:ctrlPr>
+                          </m:radPr>
+                          <m:deg/>
+                          <m:e>
+                            <m:r>
+                              <a:rPr lang="en-US" altLang="ja-JP" sz="2400" i="1">
+                                <a:latin typeface="Cambria Math" panose="02040503050406030204" pitchFamily="18" charset="0"/>
+                              </a:rPr>
+                              <m:t>181.8</m:t>
+                            </m:r>
+                          </m:e>
+                        </m:rad>
+                        <m:r>
+                          <a:rPr lang="en-US" altLang="ja-JP" sz="2400" i="1">
+                            <a:latin typeface="Cambria Math" panose="02040503050406030204" pitchFamily="18" charset="0"/>
+                          </a:rPr>
+                          <m:t>−5</m:t>
+                        </m:r>
+                      </m:num>
+                      <m:den>
+                        <m:r>
+                          <a:rPr lang="en-US" altLang="ja-JP" sz="2400" i="1">
+                            <a:latin typeface="Cambria Math" panose="02040503050406030204" pitchFamily="18" charset="0"/>
+                          </a:rPr>
+                          <m:t>−9.8</m:t>
+                        </m:r>
+                      </m:den>
+                    </m:f>
+                    <m:r>
+                      <a:rPr lang="ja-JP" altLang="en-US" sz="2400" i="1">
+                        <a:latin typeface="Cambria Math" panose="02040503050406030204" pitchFamily="18" charset="0"/>
+                      </a:rPr>
+                      <m:t>秒</m:t>
+                    </m:r>
+                    <m:r>
+                      <a:rPr lang="en-US" altLang="ja-JP" sz="2400" b="0" i="1" smtClean="0">
+                        <a:latin typeface="Cambria Math" panose="02040503050406030204" pitchFamily="18" charset="0"/>
+                      </a:rPr>
+                      <m:t>=</m:t>
+                    </m:r>
+                    <m:f>
+                      <m:fPr>
+                        <m:ctrlPr>
+                          <a:rPr lang="en-US" altLang="ja-JP" sz="2400" i="1" smtClean="0">
+                            <a:solidFill>
+                              <a:srgbClr val="FF0000"/>
+                            </a:solidFill>
+                            <a:latin typeface="Cambria Math" panose="02040503050406030204" pitchFamily="18" charset="0"/>
+                          </a:rPr>
+                        </m:ctrlPr>
+                      </m:fPr>
+                      <m:num>
+                        <m:r>
+                          <a:rPr lang="en-US" altLang="ja-JP" sz="2400" b="0" i="1" smtClean="0">
+                            <a:solidFill>
+                              <a:srgbClr val="FF0000"/>
+                            </a:solidFill>
+                            <a:latin typeface="Cambria Math" panose="02040503050406030204" pitchFamily="18" charset="0"/>
+                          </a:rPr>
+                          <m:t>8.6(</m:t>
+                        </m:r>
+                        <m:rad>
+                          <m:radPr>
+                            <m:degHide m:val="on"/>
+                            <m:ctrlPr>
+                              <a:rPr lang="en-US" altLang="ja-JP" sz="2400" i="1">
+                                <a:solidFill>
+                                  <a:srgbClr val="FF0000"/>
+                                </a:solidFill>
+                                <a:latin typeface="Cambria Math" panose="02040503050406030204" pitchFamily="18" charset="0"/>
+                              </a:rPr>
+                            </m:ctrlPr>
+                          </m:radPr>
+                          <m:deg/>
+                          <m:e>
+                            <m:r>
+                              <a:rPr lang="en-US" altLang="ja-JP" sz="2400" i="1">
+                                <a:solidFill>
+                                  <a:srgbClr val="FF0000"/>
+                                </a:solidFill>
+                                <a:latin typeface="Cambria Math" panose="02040503050406030204" pitchFamily="18" charset="0"/>
+                              </a:rPr>
+                              <m:t>181.8</m:t>
+                            </m:r>
+                          </m:e>
+                        </m:rad>
+                        <m:r>
+                          <a:rPr lang="en-US" altLang="ja-JP" sz="2400" i="1">
+                            <a:solidFill>
+                              <a:srgbClr val="FF0000"/>
+                            </a:solidFill>
+                            <a:latin typeface="Cambria Math" panose="02040503050406030204" pitchFamily="18" charset="0"/>
+                          </a:rPr>
+                          <m:t>−5</m:t>
+                        </m:r>
+                        <m:r>
+                          <a:rPr lang="en-US" altLang="ja-JP" sz="2400" b="0" i="1" smtClean="0">
+                            <a:solidFill>
+                              <a:srgbClr val="FF0000"/>
+                            </a:solidFill>
+                            <a:latin typeface="Cambria Math" panose="02040503050406030204" pitchFamily="18" charset="0"/>
+                          </a:rPr>
+                          <m:t>)</m:t>
+                        </m:r>
+                      </m:num>
+                      <m:den>
+                        <m:r>
+                          <a:rPr lang="en-US" altLang="ja-JP" sz="2400" i="1">
+                            <a:solidFill>
+                              <a:srgbClr val="FF0000"/>
+                            </a:solidFill>
+                            <a:latin typeface="Cambria Math" panose="02040503050406030204" pitchFamily="18" charset="0"/>
+                          </a:rPr>
+                          <m:t>−9.8</m:t>
+                        </m:r>
+                      </m:den>
+                    </m:f>
+                    <m:r>
+                      <a:rPr lang="en-US" altLang="ja-JP" sz="2400" b="0" i="1" smtClean="0">
+                        <a:solidFill>
+                          <a:srgbClr val="FF0000"/>
+                        </a:solidFill>
+                        <a:latin typeface="Cambria Math" panose="02040503050406030204" pitchFamily="18" charset="0"/>
+                      </a:rPr>
+                      <m:t>𝑚</m:t>
+                    </m:r>
+                  </m:oMath>
+                </a14:m>
+                <a:r>
+                  <a:rPr lang="en-US" altLang="ja-JP" sz="2400" b="0" dirty="0">
+                    <a:solidFill>
+                      <a:srgbClr val="FF0000"/>
+                    </a:solidFill>
+                  </a:rPr>
+                  <a:t> </a:t>
+                </a:r>
+              </a:p>
+              <a:p>
+                <a:endParaRPr lang="en-US" altLang="ja-JP" sz="2400" dirty="0">
+                  <a:solidFill>
+                    <a:srgbClr val="FF0000"/>
+                  </a:solidFill>
+                </a:endParaRPr>
+              </a:p>
+              <a:p>
+                <a:r>
+                  <a:rPr lang="ja-JP" altLang="en-US" sz="2400" b="0" dirty="0"/>
+                  <a:t>だいたい</a:t>
+                </a:r>
+                <a:r>
+                  <a:rPr lang="en-US" altLang="ja-JP" sz="2400" b="0" dirty="0"/>
+                  <a:t>16.37m</a:t>
+                </a:r>
+                <a:r>
+                  <a:rPr lang="ja-JP" altLang="en-US" sz="2400" b="0" dirty="0"/>
+                  <a:t>くらいです</a:t>
+                </a:r>
+                <a:endParaRPr lang="en-US" altLang="ja-JP" sz="2400" b="0" dirty="0"/>
+              </a:p>
+            </p:txBody>
+          </p:sp>
+        </mc:Choice>
+        <mc:Fallback>
+          <p:sp>
+            <p:nvSpPr>
+              <p:cNvPr id="6" name="テキスト ボックス 5">
+                <a:extLst>
+                  <a:ext uri="{FF2B5EF4-FFF2-40B4-BE49-F238E27FC236}">
+                    <a16:creationId xmlns:a16="http://schemas.microsoft.com/office/drawing/2014/main" id="{55830AD6-028B-4C4E-80BF-B70DFC1C3A46}"/>
+                  </a:ext>
+                </a:extLst>
+              </p:cNvPr>
+              <p:cNvSpPr txBox="1">
+                <a:spLocks noRot="1" noChangeAspect="1" noMove="1" noResize="1" noEditPoints="1" noAdjustHandles="1" noChangeArrowheads="1" noChangeShapeType="1" noTextEdit="1"/>
+              </p:cNvSpPr>
+              <p:nvPr/>
+            </p:nvSpPr>
+            <p:spPr>
+              <a:xfrm>
+                <a:off x="567542" y="1216429"/>
+                <a:ext cx="8462573" cy="4375365"/>
+              </a:xfrm>
+              <a:prstGeom prst="rect">
+                <a:avLst/>
+              </a:prstGeom>
+              <a:blipFill>
+                <a:blip r:embed="rId2"/>
+                <a:stretch>
+                  <a:fillRect l="-1081" t="-1116" r="-216" b="-2371"/>
+                </a:stretch>
+              </a:blipFill>
+            </p:spPr>
+            <p:txBody>
+              <a:bodyPr/>
+              <a:lstStyle/>
+              <a:p>
+                <a:r>
+                  <a:rPr lang="ja-JP" altLang="en-US">
+                    <a:noFill/>
+                  </a:rPr>
+                  <a:t> </a:t>
+                </a:r>
+              </a:p>
+            </p:txBody>
+          </p:sp>
+        </mc:Fallback>
+      </mc:AlternateContent>
+    </p:spTree>
+    <p:extLst>
+      <p:ext uri="{BB962C8B-B14F-4D97-AF65-F5344CB8AC3E}">
+        <p14:creationId xmlns:p14="http://schemas.microsoft.com/office/powerpoint/2010/main" val="3152160522"/>
+      </p:ext>
+    </p:extLst>
+  </p:cSld>
+  <p:clrMapOvr>
+    <a:masterClrMapping/>
+  </p:clrMapOvr>
+</p:sld>
+</file>
+
+<file path=ppt/slides/slide31.xml><?xml version="1.0" encoding="utf-8"?>
+<p:sld xmlns:a="http://schemas.openxmlformats.org/drawingml/2006/main" xmlns:r="http://schemas.openxmlformats.org/officeDocument/2006/relationships" xmlns:p="http://schemas.openxmlformats.org/presentationml/2006/main">
+  <p:cSld>
+    <p:spTree>
+      <p:nvGrpSpPr>
+        <p:cNvPr id="1" name=""/>
+        <p:cNvGrpSpPr/>
+        <p:nvPr/>
+      </p:nvGrpSpPr>
+      <p:grpSpPr>
+        <a:xfrm>
+          <a:off x="0" y="0"/>
+          <a:ext cx="0" cy="0"/>
+          <a:chOff x="0" y="0"/>
+          <a:chExt cx="0" cy="0"/>
+        </a:xfrm>
+      </p:grpSpPr>
+      <p:sp>
+        <p:nvSpPr>
+          <p:cNvPr id="4" name="テキスト ボックス 3">
+            <a:extLst>
+              <a:ext uri="{FF2B5EF4-FFF2-40B4-BE49-F238E27FC236}">
+                <a16:creationId xmlns:a16="http://schemas.microsoft.com/office/drawing/2014/main" id="{5A13BF46-B8C5-48AA-8308-C9ECFF431A18}"/>
+              </a:ext>
+            </a:extLst>
+          </p:cNvPr>
+          <p:cNvSpPr txBox="1"/>
+          <p:nvPr/>
+        </p:nvSpPr>
+        <p:spPr>
+          <a:xfrm>
+            <a:off x="567542" y="491954"/>
+            <a:ext cx="5051383" cy="584775"/>
+          </a:xfrm>
+          <a:prstGeom prst="rect">
+            <a:avLst/>
+          </a:prstGeom>
+          <a:noFill/>
+        </p:spPr>
+        <p:txBody>
+          <a:bodyPr wrap="none" rtlCol="0">
+            <a:spAutoFit/>
+          </a:bodyPr>
+          <a:lstStyle/>
+          <a:p>
+            <a:r>
+              <a:rPr kumimoji="1" lang="en-US" altLang="ja-JP" sz="3200" b="1" u="sng" dirty="0"/>
+              <a:t>2</a:t>
+            </a:r>
+            <a:r>
+              <a:rPr kumimoji="1" lang="ja-JP" altLang="en-US" sz="3200" b="1" u="sng" dirty="0"/>
+              <a:t>次元、３次元の運動 補足</a:t>
+            </a:r>
+            <a:endParaRPr kumimoji="1" lang="en-US" altLang="ja-JP" sz="3200" b="1" u="sng" dirty="0"/>
+          </a:p>
+        </p:txBody>
+      </p:sp>
+      <p:sp>
+        <p:nvSpPr>
+          <p:cNvPr id="6" name="テキスト ボックス 5">
+            <a:extLst>
+              <a:ext uri="{FF2B5EF4-FFF2-40B4-BE49-F238E27FC236}">
+                <a16:creationId xmlns:a16="http://schemas.microsoft.com/office/drawing/2014/main" id="{55830AD6-028B-4C4E-80BF-B70DFC1C3A46}"/>
+              </a:ext>
+            </a:extLst>
+          </p:cNvPr>
+          <p:cNvSpPr txBox="1"/>
+          <p:nvPr/>
+        </p:nvSpPr>
+        <p:spPr>
+          <a:xfrm>
+            <a:off x="567542" y="1216429"/>
+            <a:ext cx="11575605" cy="2677656"/>
+          </a:xfrm>
+          <a:prstGeom prst="rect">
+            <a:avLst/>
+          </a:prstGeom>
+          <a:noFill/>
+        </p:spPr>
+        <p:txBody>
+          <a:bodyPr wrap="none" rtlCol="0">
+            <a:spAutoFit/>
+          </a:bodyPr>
+          <a:lstStyle/>
+          <a:p>
+            <a:r>
+              <a:rPr lang="ja-JP" altLang="en-US" sz="2400" dirty="0"/>
+              <a:t>これまでの例題は</a:t>
+            </a:r>
+            <a:r>
+              <a:rPr lang="en-US" altLang="ja-JP" sz="2400" dirty="0"/>
+              <a:t>2</a:t>
+            </a:r>
+            <a:r>
+              <a:rPr lang="ja-JP" altLang="en-US" sz="2400" dirty="0"/>
+              <a:t>次元でしたが、</a:t>
+            </a:r>
+            <a:endParaRPr lang="en-US" altLang="ja-JP" sz="2400" dirty="0"/>
+          </a:p>
+          <a:p>
+            <a:r>
+              <a:rPr lang="ja-JP" altLang="en-US" sz="2400" b="0" dirty="0"/>
+              <a:t>実はすでに</a:t>
+            </a:r>
+            <a:r>
+              <a:rPr lang="en-US" altLang="ja-JP" sz="2400" b="0" dirty="0"/>
+              <a:t>3</a:t>
+            </a:r>
+            <a:r>
+              <a:rPr lang="ja-JP" altLang="en-US" sz="2400" b="0" dirty="0"/>
+              <a:t>次元の計算もできています。</a:t>
+            </a:r>
+            <a:endParaRPr lang="en-US" altLang="ja-JP" sz="2400" b="0" dirty="0"/>
+          </a:p>
+          <a:p>
+            <a:endParaRPr lang="en-US" altLang="ja-JP" sz="2400" dirty="0"/>
+          </a:p>
+          <a:p>
+            <a:r>
+              <a:rPr lang="ja-JP" altLang="en-US" sz="2400" b="0" dirty="0"/>
+              <a:t>というのも、</a:t>
+            </a:r>
+            <a:endParaRPr lang="en-US" altLang="ja-JP" sz="2400" b="0" dirty="0"/>
+          </a:p>
+          <a:p>
+            <a:r>
+              <a:rPr lang="ja-JP" altLang="en-US" sz="2400" b="1" dirty="0">
+                <a:solidFill>
+                  <a:srgbClr val="FF0000"/>
+                </a:solidFill>
+              </a:rPr>
+              <a:t>物体の動きは基本的に水平と鉛直</a:t>
+            </a:r>
+            <a:r>
+              <a:rPr lang="ja-JP" altLang="en-US" sz="2400" dirty="0"/>
+              <a:t>となるので、</a:t>
+            </a:r>
+            <a:endParaRPr lang="en-US" altLang="ja-JP" sz="2400" dirty="0"/>
+          </a:p>
+          <a:p>
+            <a:r>
+              <a:rPr lang="ja-JP" altLang="en-US" sz="2400" b="0" dirty="0"/>
+              <a:t>あとは、それらが</a:t>
+            </a:r>
+            <a:r>
+              <a:rPr lang="en-US" altLang="ja-JP" sz="2400" b="1" dirty="0">
+                <a:solidFill>
+                  <a:srgbClr val="FF0000"/>
+                </a:solidFill>
+              </a:rPr>
+              <a:t>X</a:t>
+            </a:r>
+            <a:r>
+              <a:rPr lang="ja-JP" altLang="en-US" sz="2400" b="1" dirty="0">
+                <a:solidFill>
+                  <a:srgbClr val="FF0000"/>
+                </a:solidFill>
+              </a:rPr>
+              <a:t>軸、</a:t>
+            </a:r>
+            <a:r>
+              <a:rPr lang="en-US" altLang="ja-JP" sz="2400" b="1" dirty="0">
+                <a:solidFill>
+                  <a:srgbClr val="FF0000"/>
+                </a:solidFill>
+              </a:rPr>
+              <a:t>Y</a:t>
+            </a:r>
+            <a:r>
+              <a:rPr lang="ja-JP" altLang="en-US" sz="2400" b="1" dirty="0">
+                <a:solidFill>
+                  <a:srgbClr val="FF0000"/>
+                </a:solidFill>
+              </a:rPr>
+              <a:t>軸、</a:t>
+            </a:r>
+            <a:r>
+              <a:rPr lang="en-US" altLang="ja-JP" sz="2400" b="1" dirty="0">
+                <a:solidFill>
+                  <a:srgbClr val="FF0000"/>
+                </a:solidFill>
+              </a:rPr>
+              <a:t>Z</a:t>
+            </a:r>
+            <a:r>
+              <a:rPr lang="ja-JP" altLang="en-US" sz="2400" b="1" dirty="0">
+                <a:solidFill>
+                  <a:srgbClr val="FF0000"/>
+                </a:solidFill>
+              </a:rPr>
+              <a:t>軸のどれに当てはまるのか</a:t>
+            </a:r>
+            <a:r>
+              <a:rPr lang="ja-JP" altLang="en-US" sz="2400" b="0" dirty="0"/>
+              <a:t>というだけになります。</a:t>
+            </a:r>
+            <a:endParaRPr lang="en-US" altLang="ja-JP" sz="2400" b="0" dirty="0"/>
+          </a:p>
+          <a:p>
+            <a:r>
+              <a:rPr lang="ja-JP" altLang="en-US" sz="2400" dirty="0"/>
+              <a:t>物体の動きを</a:t>
+            </a:r>
+            <a:r>
+              <a:rPr lang="en-US" altLang="ja-JP" sz="2400" dirty="0"/>
+              <a:t>2</a:t>
+            </a:r>
+            <a:r>
+              <a:rPr lang="ja-JP" altLang="en-US" sz="2400" dirty="0"/>
+              <a:t>次元平面でとらえることが大事になります。</a:t>
+            </a:r>
+            <a:endParaRPr lang="en-US" altLang="ja-JP" sz="2400" b="0" dirty="0"/>
+          </a:p>
+        </p:txBody>
+      </p:sp>
+    </p:spTree>
+    <p:extLst>
+      <p:ext uri="{BB962C8B-B14F-4D97-AF65-F5344CB8AC3E}">
+        <p14:creationId xmlns:p14="http://schemas.microsoft.com/office/powerpoint/2010/main" val="1040516359"/>
       </p:ext>
     </p:extLst>
   </p:cSld>
@@ -14710,7 +22861,7 @@
         <p:spPr>
           <a:xfrm>
             <a:off x="567542" y="491954"/>
-            <a:ext cx="5051383" cy="584775"/>
+            <a:ext cx="5461752" cy="584775"/>
           </a:xfrm>
           <a:prstGeom prst="rect">
             <a:avLst/>
@@ -14729,14 +22880,14 @@
             </a:r>
             <a:r>
               <a:rPr kumimoji="1" lang="ja-JP" altLang="en-US" sz="3200" b="1" u="sng" dirty="0"/>
-              <a:t>次元、３次元の運動 例題</a:t>
+              <a:t>次元、３次元の運動 例題１</a:t>
             </a:r>
             <a:endParaRPr kumimoji="1" lang="en-US" altLang="ja-JP" sz="3200" b="1" u="sng" dirty="0"/>
           </a:p>
         </p:txBody>
       </p:sp>
-      <mc:AlternateContent xmlns:mc="http://schemas.openxmlformats.org/markup-compatibility/2006">
-        <mc:Choice xmlns:a14="http://schemas.microsoft.com/office/drawing/2010/main" Requires="a14">
+      <mc:AlternateContent xmlns:mc="http://schemas.openxmlformats.org/markup-compatibility/2006" xmlns:a14="http://schemas.microsoft.com/office/drawing/2010/main">
+        <mc:Choice Requires="a14">
           <p:sp>
             <p:nvSpPr>
               <p:cNvPr id="6" name="テキスト ボックス 5">
@@ -14861,7 +23012,7 @@
             </p:txBody>
           </p:sp>
         </mc:Choice>
-        <mc:Fallback>
+        <mc:Fallback xmlns="">
           <p:sp>
             <p:nvSpPr>
               <p:cNvPr id="6" name="テキスト ボックス 5">
@@ -15790,7 +23941,7 @@
         <p:spPr>
           <a:xfrm>
             <a:off x="567542" y="491954"/>
-            <a:ext cx="5051383" cy="584775"/>
+            <a:ext cx="5461752" cy="584775"/>
           </a:xfrm>
           <a:prstGeom prst="rect">
             <a:avLst/>
@@ -15809,14 +23960,14 @@
             </a:r>
             <a:r>
               <a:rPr kumimoji="1" lang="ja-JP" altLang="en-US" sz="3200" b="1" u="sng" dirty="0"/>
-              <a:t>次元、３次元の運動 例題</a:t>
+              <a:t>次元、３次元の運動 例題１</a:t>
             </a:r>
             <a:endParaRPr kumimoji="1" lang="en-US" altLang="ja-JP" sz="3200" b="1" u="sng" dirty="0"/>
           </a:p>
         </p:txBody>
       </p:sp>
-      <mc:AlternateContent xmlns:mc="http://schemas.openxmlformats.org/markup-compatibility/2006">
-        <mc:Choice xmlns:a14="http://schemas.microsoft.com/office/drawing/2010/main" Requires="a14">
+      <mc:AlternateContent xmlns:mc="http://schemas.openxmlformats.org/markup-compatibility/2006" xmlns:a14="http://schemas.microsoft.com/office/drawing/2010/main">
+        <mc:Choice Requires="a14">
           <p:sp>
             <p:nvSpPr>
               <p:cNvPr id="6" name="テキスト ボックス 5">
@@ -15855,13 +24006,7 @@
                       <a:rPr lang="en-US" altLang="ja-JP" sz="2400" i="1" dirty="0">
                         <a:latin typeface="Cambria Math" panose="02040503050406030204" pitchFamily="18" charset="0"/>
                       </a:rPr>
-                      <m:t>30</m:t>
-                    </m:r>
-                    <m:r>
-                      <a:rPr lang="en-US" altLang="ja-JP" sz="2400" i="1" dirty="0">
-                        <a:latin typeface="Cambria Math" panose="02040503050406030204" pitchFamily="18" charset="0"/>
-                      </a:rPr>
-                      <m:t>°</m:t>
+                      <m:t>30°</m:t>
                     </m:r>
                   </m:oMath>
                 </a14:m>
@@ -16265,13 +24410,7 @@
                       <a:rPr lang="en-US" altLang="ja-JP" sz="2400" b="0" i="1" dirty="0" smtClean="0">
                         <a:latin typeface="Cambria Math" panose="02040503050406030204" pitchFamily="18" charset="0"/>
                       </a:rPr>
-                      <m:t>30°</m:t>
-                    </m:r>
-                    <m:r>
-                      <a:rPr lang="en-US" altLang="ja-JP" sz="2400" b="0" i="1" dirty="0" smtClean="0">
-                        <a:latin typeface="Cambria Math" panose="02040503050406030204" pitchFamily="18" charset="0"/>
-                      </a:rPr>
-                      <m:t>=20</m:t>
+                      <m:t>30°=20</m:t>
                     </m:r>
                     <m:r>
                       <a:rPr lang="en-US" altLang="ja-JP" sz="2400" b="0" i="1" dirty="0" smtClean="0">
@@ -16371,13 +24510,7 @@
                       <a:rPr lang="en-US" altLang="ja-JP" sz="2400" b="0" i="1" dirty="0" smtClean="0">
                         <a:latin typeface="Cambria Math" panose="02040503050406030204" pitchFamily="18" charset="0"/>
                       </a:rPr>
-                      <m:t>, </m:t>
-                    </m:r>
-                    <m:r>
-                      <a:rPr lang="en-US" altLang="ja-JP" sz="2400" b="0" i="1" dirty="0" smtClean="0">
-                        <a:latin typeface="Cambria Math" panose="02040503050406030204" pitchFamily="18" charset="0"/>
-                      </a:rPr>
-                      <m:t>10</m:t>
+                      <m:t>, 10</m:t>
                     </m:r>
                     <m:r>
                       <a:rPr lang="en-US" altLang="ja-JP" sz="2400" b="0" i="1" dirty="0" smtClean="0">
@@ -16455,7 +24588,7 @@
             </p:txBody>
           </p:sp>
         </mc:Choice>
-        <mc:Fallback>
+        <mc:Fallback xmlns="">
           <p:sp>
             <p:nvSpPr>
               <p:cNvPr id="6" name="テキスト ボックス 5">
